--- a/docs/PharmaConnect_Defense_Presentation.pptx
+++ b/docs/PharmaConnect_Defense_Presentation.pptx
@@ -3216,7 +3216,7 @@
               </a:defRPr>
             </a:pPr>
             <a:r>
-              <a:t>مشروع مناقشة مقرر بنية وبرمجة أنظمة الخادم والعميل (Level 4)</a:t>
+              <a:t>منظومة خادم وعميل متقدمة (3-Tier Distributed Architecture)</a:t>
             </a:r>
           </a:p>
           <a:p>
@@ -3295,7 +3295,7 @@
               </a:defRPr>
             </a:pPr>
             <a:r>
-              <a:t>إشراف ومناقشة: لجنة التحكيم الأكاديمية الموقرة  |  سبتمبر 2026</a:t>
+              <a:t>عرض النظام والحلول المعمارية والتطبيقية  |  2026</a:t>
             </a:r>
           </a:p>
         </p:txBody>
@@ -3430,7 +3430,7 @@
               </a:defRPr>
             </a:pPr>
             <a:r>
-              <a:t>9. الخاتمة وبطاقة إجابات البرق أمام اللجنة (Defense QA)</a:t>
+              <a:t>9. الخاتمة والمعايير الهندسية المعتمدة (Technical Standards &amp; FAQ)</a:t>
             </a:r>
           </a:p>
         </p:txBody>
@@ -3767,7 +3767,7 @@
               </a:defRPr>
             </a:pPr>
             <a:r>
-              <a:t>بطاقة إجابات البرق الحاسمة (Pocket QA)</a:t>
+              <a:t>أهم المعايير والأسئلة التقنية الشائعة (Technical FAQ)</a:t>
             </a:r>
           </a:p>
           <a:p>
@@ -3783,7 +3783,7 @@
               </a:defRPr>
             </a:pPr>
             <a:r>
-              <a:t>• س: أين منعتم الـ Race Condition؟ -&gt; دالة createReservation بـ lockForUpdate داخل DB::transaction.</a:t>
+              <a:t>• س: أين معالجة الـ Race Condition؟ -&gt; دالة createReservation بـ lockForUpdate داخل DB::transaction.</a:t>
             </a:r>
           </a:p>
           <a:p>
@@ -3815,7 +3815,7 @@
               </a:defRPr>
             </a:pPr>
             <a:r>
-              <a:t>• س: كيف تحافظون على الأمان بدون Session بالموبايل؟ -&gt; توكنات مشفرة Bearer Token عبر Laravel Sanctum.</a:t>
+              <a:t>• س: كيف يعمل الأمان بدون Session بالموبايل؟ -&gt; توكنات مشفرة Bearer Token عبر Laravel Sanctum.</a:t>
             </a:r>
           </a:p>
           <a:p>
@@ -5472,7 +5472,7 @@
               </a:defRPr>
             </a:pPr>
             <a:r>
-              <a:t>مزايا التصميم المعياري أمام اللجنة</a:t>
+              <a:t>المزايا المعمارية والهندسية للتصميم</a:t>
             </a:r>
           </a:p>
           <a:p>
@@ -7751,7 +7751,7 @@
               </a:defRPr>
             </a:pPr>
             <a:r>
-              <a:t>8. سيناريو العرض العملي الحي أمام اللجنة (Live Demo Sequence)</a:t>
+              <a:t>8. سيناريو العرض التشغيلي المباشر (End-to-End System Demo)</a:t>
             </a:r>
           </a:p>
         </p:txBody>
@@ -7911,7 +7911,7 @@
               </a:defRPr>
             </a:pPr>
             <a:r>
-              <a:t>خطة الدقيقتين للعرض المشترك (متصفح الويب + هاتف العميل)</a:t>
+              <a:t>خطوات العرض التشغيلي المتزامن (بوابة الويب + تطبيق الهاتف)</a:t>
             </a:r>
           </a:p>
           <a:p>

--- a/docs/PharmaConnect_Defense_Presentation.pptx
+++ b/docs/PharmaConnect_Defense_Presentation.pptx
@@ -15,6 +15,10 @@
     <p:sldId id="263" r:id="rId14"/>
     <p:sldId id="264" r:id="rId15"/>
     <p:sldId id="265" r:id="rId16"/>
+    <p:sldId id="266" r:id="rId17"/>
+    <p:sldId id="267" r:id="rId18"/>
+    <p:sldId id="268" r:id="rId19"/>
+    <p:sldId id="269" r:id="rId20"/>
   </p:sldIdLst>
   <p:sldSz cx="12191695" cy="6858000" type="screen4x3"/>
   <p:notesSz cx="6858000" cy="9144000"/>
@@ -3279,7 +3283,7 @@
               </a:defRPr>
             </a:pPr>
             <a:r>
-              <a:t>التقنيات المستخدمة: Laravel 11 RESTful API  •  Flutter 3 Cross-Platform  •  Relational 3NF Database</a:t>
+              <a:t>التقنيات المستخدمة: Laravel 11 RESTful API  •  Flutter 3 Client  •  Relational 3NF DB  •  Pessimistic Locking</a:t>
             </a:r>
           </a:p>
           <a:p>
@@ -3327,7 +3331,7 @@
         <p:spPr>
           <a:xfrm>
             <a:off x="0" y="0"/>
-            <a:ext cx="12191695" cy="1097280"/>
+            <a:ext cx="12191695" cy="1051560"/>
           </a:xfrm>
           <a:prstGeom prst="rect">
             <a:avLst/>
@@ -3371,8 +3375,8 @@
         </p:nvSpPr>
         <p:spPr>
           <a:xfrm>
-            <a:off x="731520" y="109728"/>
-            <a:ext cx="10698480" cy="320040"/>
+            <a:off x="731520" y="91440"/>
+            <a:ext cx="10698480" cy="292608"/>
           </a:xfrm>
           <a:prstGeom prst="rect">
             <a:avLst/>
@@ -3386,7 +3390,7 @@
           <a:lstStyle/>
           <a:p>
             <a:pPr algn="r">
-              <a:defRPr sz="1300" b="1">
+              <a:defRPr sz="1200" b="1">
                 <a:solidFill>
                   <a:srgbClr val="10B981"/>
                 </a:solidFill>
@@ -3394,7 +3398,7 @@
               </a:defRPr>
             </a:pPr>
             <a:r>
-              <a:t>مشروع تخرج — نظام خادم وعميل (Level 4)</a:t>
+              <a:t>منظومة خادم وعميل موزعة — معمارية 3-Tier Distributed Architecture</a:t>
             </a:r>
           </a:p>
         </p:txBody>
@@ -3407,8 +3411,8 @@
         </p:nvSpPr>
         <p:spPr>
           <a:xfrm>
-            <a:off x="731520" y="411480"/>
-            <a:ext cx="10698480" cy="594360"/>
+            <a:off x="731520" y="384048"/>
+            <a:ext cx="10698480" cy="566928"/>
           </a:xfrm>
           <a:prstGeom prst="rect">
             <a:avLst/>
@@ -3422,7 +3426,7 @@
           <a:lstStyle/>
           <a:p>
             <a:pPr algn="r">
-              <a:defRPr sz="2200" b="1">
+              <a:defRPr sz="2100" b="1">
                 <a:solidFill>
                   <a:srgbClr val="F8FAFC"/>
                 </a:solidFill>
@@ -3430,7 +3434,7 @@
               </a:defRPr>
             </a:pPr>
             <a:r>
-              <a:t>9. الخاتمة والمعايير الهندسية المعتمدة (Technical Standards &amp; FAQ)</a:t>
+              <a:t>9. تطبيق الهاتف المحمول (Flutter &amp; Clean Architecture)</a:t>
             </a:r>
           </a:p>
         </p:txBody>
@@ -3443,8 +3447,8 @@
         </p:nvSpPr>
         <p:spPr>
           <a:xfrm>
-            <a:off x="0" y="1097280"/>
-            <a:ext cx="12191695" cy="54864"/>
+            <a:off x="0" y="1051560"/>
+            <a:ext cx="12191695" cy="45720"/>
           </a:xfrm>
           <a:prstGeom prst="rect">
             <a:avLst/>
@@ -3486,8 +3490,8 @@
         </p:nvSpPr>
         <p:spPr>
           <a:xfrm>
-            <a:off x="731520" y="6446520"/>
-            <a:ext cx="10698480" cy="320040"/>
+            <a:off x="731520" y="6473952"/>
+            <a:ext cx="10698480" cy="292608"/>
           </a:xfrm>
           <a:prstGeom prst="rect">
             <a:avLst/>
@@ -3501,7 +3505,7 @@
           <a:lstStyle/>
           <a:p>
             <a:pPr algn="ctr">
-              <a:defRPr sz="1100">
+              <a:defRPr sz="1050">
                 <a:solidFill>
                   <a:srgbClr val="64748B"/>
                 </a:solidFill>
@@ -3522,8 +3526,8 @@
         </p:nvSpPr>
         <p:spPr>
           <a:xfrm>
-            <a:off x="731520" y="1463040"/>
-            <a:ext cx="5120640" cy="4572000"/>
+            <a:off x="731520" y="1325880"/>
+            <a:ext cx="5212080" cy="4846320"/>
           </a:xfrm>
           <a:prstGeom prst="roundRect">
             <a:avLst/>
@@ -3567,8 +3571,8 @@
         </p:nvSpPr>
         <p:spPr>
           <a:xfrm>
-            <a:off x="914400" y="1600200"/>
-            <a:ext cx="4754879" cy="4297680"/>
+            <a:off x="914400" y="1463039"/>
+            <a:ext cx="4846320" cy="4572000"/>
           </a:xfrm>
           <a:prstGeom prst="rect">
             <a:avLst/>
@@ -3582,7 +3586,7 @@
           <a:lstStyle/>
           <a:p>
             <a:pPr algn="r">
-              <a:defRPr sz="1700" b="1">
+              <a:defRPr sz="1600" b="1">
                 <a:solidFill>
                   <a:srgbClr val="064E3B"/>
                 </a:solidFill>
@@ -3590,15 +3594,15 @@
               </a:defRPr>
             </a:pPr>
             <a:r>
-              <a:t>المنجزات والتوصيات المستقبلية</a:t>
+              <a:t>هيكلية Clean Architecture في Flutter</a:t>
             </a:r>
           </a:p>
           <a:p>
             <a:pPr algn="r">
               <a:spcBef>
-                <a:spcPts val="800"/>
+                <a:spcPts val="600"/>
               </a:spcBef>
-              <a:defRPr sz="1300">
+              <a:defRPr sz="1250">
                 <a:solidFill>
                   <a:srgbClr val="0F172A"/>
                 </a:solidFill>
@@ -3606,15 +3610,15 @@
               </a:defRPr>
             </a:pPr>
             <a:r>
-              <a:t>• منظومة متكاملة 3-Tier حقيقية وقابلة للنشر والإنتاج التجاري الفوري.</a:t>
+              <a:t>• طبقة core: إدارة ApiService بنمط Singleton، وخدمة الموقع، وإدارة الثيمات.</a:t>
             </a:r>
           </a:p>
           <a:p>
             <a:pPr algn="r">
               <a:spcBef>
-                <a:spcPts val="800"/>
+                <a:spcPts val="600"/>
               </a:spcBef>
-              <a:defRPr sz="1300">
+              <a:defRPr sz="1250">
                 <a:solidFill>
                   <a:srgbClr val="0F172A"/>
                 </a:solidFill>
@@ -3622,15 +3626,15 @@
               </a:defRPr>
             </a:pPr>
             <a:r>
-              <a:t>• استقلالية تامة عن الخدمات الخارجية المدفوعة (الخرائط والرسائل).</a:t>
+              <a:t>• طبقة data: نماذج البيانات المحكمة (ReservationModel) وتحويل JSON الآمن.</a:t>
             </a:r>
           </a:p>
           <a:p>
             <a:pPr algn="r">
               <a:spcBef>
-                <a:spcPts val="800"/>
+                <a:spcPts val="600"/>
               </a:spcBef>
-              <a:defRPr sz="1300">
+              <a:defRPr sz="1250">
                 <a:solidFill>
                   <a:srgbClr val="0F172A"/>
                 </a:solidFill>
@@ -3638,15 +3642,15 @@
               </a:defRPr>
             </a:pPr>
             <a:r>
-              <a:t>• توصيات التوسع المستقبلي:</a:t>
+              <a:t>• طبقة presentation: الشاشات والويدجتس الموجهة للمريض مع مؤقتات حية.</a:t>
             </a:r>
           </a:p>
           <a:p>
             <a:pPr algn="r">
               <a:spcBef>
-                <a:spcPts val="800"/>
+                <a:spcPts val="600"/>
               </a:spcBef>
-              <a:defRPr sz="1300">
+              <a:defRPr sz="1250">
                 <a:solidFill>
                   <a:srgbClr val="0F172A"/>
                 </a:solidFill>
@@ -3654,39 +3658,7 @@
               </a:defRPr>
             </a:pPr>
             <a:r>
-              <a:t>•   - دمج الدفع الإلكتروني عبر المحافظ الرقمية اليمنية (كاش، جوالي، فلوسك).</a:t>
-            </a:r>
-          </a:p>
-          <a:p>
-            <a:pPr algn="r">
-              <a:spcBef>
-                <a:spcPts val="800"/>
-              </a:spcBef>
-              <a:defRPr sz="1300">
-                <a:solidFill>
-                  <a:srgbClr val="0F172A"/>
-                </a:solidFill>
-                <a:latin typeface="Segoe UI"/>
-              </a:defRPr>
-            </a:pPr>
-            <a:r>
-              <a:t>•   - إدارة أساطيل توصيل الأدوية للمنازل (Medicine Delivery Fleet).</a:t>
-            </a:r>
-          </a:p>
-          <a:p>
-            <a:pPr algn="r">
-              <a:spcBef>
-                <a:spcPts val="800"/>
-              </a:spcBef>
-              <a:defRPr sz="1300">
-                <a:solidFill>
-                  <a:srgbClr val="0F172A"/>
-                </a:solidFill>
-                <a:latin typeface="Segoe UI"/>
-              </a:defRPr>
-            </a:pPr>
-            <a:r>
-              <a:t>•   - التنبؤ بنفاد الأدوية الحرجة باستخدام الذكاء الاصطناعي.</a:t>
+              <a:t>• خريطة المسار الذكية: تعتمد على مربعات CartoDB / OSM المجانية بدون رسوم.</a:t>
             </a:r>
           </a:p>
         </p:txBody>
@@ -3699,8 +3671,367 @@
         </p:nvSpPr>
         <p:spPr>
           <a:xfrm>
-            <a:off x="6217920" y="1463040"/>
-            <a:ext cx="5212080" cy="4572000"/>
+            <a:off x="6217920" y="1325880"/>
+            <a:ext cx="5212080" cy="4846320"/>
+          </a:xfrm>
+          <a:prstGeom prst="roundRect">
+            <a:avLst/>
+          </a:prstGeom>
+          <a:solidFill>
+            <a:srgbClr val="F0FDF4"/>
+          </a:solidFill>
+          <a:ln w="19050">
+            <a:solidFill>
+              <a:srgbClr val="86EFAC"/>
+            </a:solidFill>
+          </a:ln>
+        </p:spPr>
+        <p:style>
+          <a:lnRef idx="1">
+            <a:schemeClr val="accent1"/>
+          </a:lnRef>
+          <a:fillRef idx="3">
+            <a:schemeClr val="accent1"/>
+          </a:fillRef>
+          <a:effectRef idx="2">
+            <a:schemeClr val="accent1"/>
+          </a:effectRef>
+          <a:fontRef idx="minor">
+            <a:schemeClr val="lt1"/>
+          </a:fontRef>
+        </p:style>
+        <p:txBody>
+          <a:bodyPr rtlCol="0" anchor="ctr"/>
+          <a:lstStyle/>
+          <a:p>
+            <a:pPr algn="ctr"/>
+          </a:p>
+        </p:txBody>
+      </p:sp>
+      <p:sp>
+        <p:nvSpPr>
+          <p:cNvPr id="10" name="TextBox 9"/>
+          <p:cNvSpPr txBox="1"/>
+          <p:nvPr/>
+        </p:nvSpPr>
+        <p:spPr>
+          <a:xfrm>
+            <a:off x="6400800" y="1463039"/>
+            <a:ext cx="4846320" cy="4572000"/>
+          </a:xfrm>
+          <a:prstGeom prst="rect">
+            <a:avLst/>
+          </a:prstGeom>
+          <a:noFill/>
+        </p:spPr>
+        <p:txBody>
+          <a:bodyPr wrap="square">
+            <a:spAutoFit/>
+          </a:bodyPr>
+          <a:lstStyle/>
+          <a:p>
+            <a:pPr algn="r">
+              <a:defRPr sz="1600" b="1">
+                <a:solidFill>
+                  <a:srgbClr val="064E3B"/>
+                </a:solidFill>
+                <a:latin typeface="Segoe UI"/>
+              </a:defRPr>
+            </a:pPr>
+            <a:r>
+              <a:t>تذكرة الحجز والمزامنة اللحظية الحية</a:t>
+            </a:r>
+          </a:p>
+          <a:p>
+            <a:pPr algn="r">
+              <a:spcBef>
+                <a:spcPts val="600"/>
+              </a:spcBef>
+              <a:defRPr sz="1250">
+                <a:solidFill>
+                  <a:srgbClr val="0F172A"/>
+                </a:solidFill>
+                <a:latin typeface="Segoe UI"/>
+              </a:defRPr>
+            </a:pPr>
+            <a:r>
+              <a:t>• مؤقت عد تنازلي حي (30 دقيقة): يحسب الثواني التنازلية المتبقية لصلاحية الحجز.</a:t>
+            </a:r>
+          </a:p>
+          <a:p>
+            <a:pPr algn="r">
+              <a:spcBef>
+                <a:spcPts val="600"/>
+              </a:spcBef>
+              <a:defRPr sz="1250">
+                <a:solidFill>
+                  <a:srgbClr val="0F172A"/>
+                </a:solidFill>
+                <a:latin typeface="Segoe UI"/>
+              </a:defRPr>
+            </a:pPr>
+            <a:r>
+              <a:t>• رمز الحجز و QR Code: لعرضه على الصيدلي وتأكيد الاستلام بماسح الباركود.</a:t>
+            </a:r>
+          </a:p>
+          <a:p>
+            <a:pPr algn="r">
+              <a:spcBef>
+                <a:spcPts val="600"/>
+              </a:spcBef>
+              <a:defRPr sz="1250">
+                <a:solidFill>
+                  <a:srgbClr val="0F172A"/>
+                </a:solidFill>
+                <a:latin typeface="Segoe UI"/>
+              </a:defRPr>
+            </a:pPr>
+            <a:r>
+              <a:t>• المزامنة التلقائية اللحظية: فور ضغط الصيدلي 'تم التسليم'، تلتقط التذكرة الحالة فوراً.</a:t>
+            </a:r>
+          </a:p>
+          <a:p>
+            <a:pPr algn="r">
+              <a:spcBef>
+                <a:spcPts val="600"/>
+              </a:spcBef>
+              <a:defRPr sz="1250">
+                <a:solidFill>
+                  <a:srgbClr val="0F172A"/>
+                </a:solidFill>
+                <a:latin typeface="Segoe UI"/>
+              </a:defRPr>
+            </a:pPr>
+            <a:r>
+              <a:t>• مرونة الشبكة (Resilience): عمل التطبيق بسلاسة وتخزين مؤقت عند انقطاع الإنترنت.</a:t>
+            </a:r>
+          </a:p>
+        </p:txBody>
+      </p:sp>
+    </p:spTree>
+  </p:cSld>
+  <p:clrMapOvr>
+    <a:masterClrMapping/>
+  </p:clrMapOvr>
+</p:sld>
+</file>
+
+<file path=ppt/slides/slide11.xml><?xml version="1.0" encoding="utf-8"?>
+<p:sld xmlns:a="http://schemas.openxmlformats.org/drawingml/2006/main" xmlns:p="http://schemas.openxmlformats.org/presentationml/2006/main" xmlns:r="http://schemas.openxmlformats.org/officeDocument/2006/relationships">
+  <p:cSld>
+    <p:spTree>
+      <p:nvGrpSpPr>
+        <p:cNvPr id="1" name=""/>
+        <p:cNvGrpSpPr/>
+        <p:nvPr/>
+      </p:nvGrpSpPr>
+      <p:grpSpPr/>
+      <p:sp>
+        <p:nvSpPr>
+          <p:cNvPr id="2" name="Rectangle 1"/>
+          <p:cNvSpPr/>
+          <p:nvPr/>
+        </p:nvSpPr>
+        <p:spPr>
+          <a:xfrm>
+            <a:off x="0" y="0"/>
+            <a:ext cx="12191695" cy="1051560"/>
+          </a:xfrm>
+          <a:prstGeom prst="rect">
+            <a:avLst/>
+          </a:prstGeom>
+          <a:solidFill>
+            <a:srgbClr val="064E3B"/>
+          </a:solidFill>
+          <a:ln>
+            <a:solidFill>
+              <a:srgbClr val="064E3B"/>
+            </a:solidFill>
+          </a:ln>
+        </p:spPr>
+        <p:style>
+          <a:lnRef idx="1">
+            <a:schemeClr val="accent1"/>
+          </a:lnRef>
+          <a:fillRef idx="3">
+            <a:schemeClr val="accent1"/>
+          </a:fillRef>
+          <a:effectRef idx="2">
+            <a:schemeClr val="accent1"/>
+          </a:effectRef>
+          <a:fontRef idx="minor">
+            <a:schemeClr val="lt1"/>
+          </a:fontRef>
+        </p:style>
+        <p:txBody>
+          <a:bodyPr rtlCol="0" anchor="ctr"/>
+          <a:lstStyle/>
+          <a:p>
+            <a:pPr algn="ctr"/>
+          </a:p>
+        </p:txBody>
+      </p:sp>
+      <p:sp>
+        <p:nvSpPr>
+          <p:cNvPr id="3" name="TextBox 2"/>
+          <p:cNvSpPr txBox="1"/>
+          <p:nvPr/>
+        </p:nvSpPr>
+        <p:spPr>
+          <a:xfrm>
+            <a:off x="731520" y="91440"/>
+            <a:ext cx="10698480" cy="292608"/>
+          </a:xfrm>
+          <a:prstGeom prst="rect">
+            <a:avLst/>
+          </a:prstGeom>
+          <a:noFill/>
+        </p:spPr>
+        <p:txBody>
+          <a:bodyPr wrap="square">
+            <a:spAutoFit/>
+          </a:bodyPr>
+          <a:lstStyle/>
+          <a:p>
+            <a:pPr algn="r">
+              <a:defRPr sz="1200" b="1">
+                <a:solidFill>
+                  <a:srgbClr val="10B981"/>
+                </a:solidFill>
+                <a:latin typeface="Segoe UI"/>
+              </a:defRPr>
+            </a:pPr>
+            <a:r>
+              <a:t>منظومة خادم وعميل موزعة — معمارية 3-Tier Distributed Architecture</a:t>
+            </a:r>
+          </a:p>
+        </p:txBody>
+      </p:sp>
+      <p:sp>
+        <p:nvSpPr>
+          <p:cNvPr id="4" name="TextBox 3"/>
+          <p:cNvSpPr txBox="1"/>
+          <p:nvPr/>
+        </p:nvSpPr>
+        <p:spPr>
+          <a:xfrm>
+            <a:off x="731520" y="384048"/>
+            <a:ext cx="10698480" cy="566928"/>
+          </a:xfrm>
+          <a:prstGeom prst="rect">
+            <a:avLst/>
+          </a:prstGeom>
+          <a:noFill/>
+        </p:spPr>
+        <p:txBody>
+          <a:bodyPr wrap="square">
+            <a:spAutoFit/>
+          </a:bodyPr>
+          <a:lstStyle/>
+          <a:p>
+            <a:pPr algn="r">
+              <a:defRPr sz="2100" b="1">
+                <a:solidFill>
+                  <a:srgbClr val="F8FAFC"/>
+                </a:solidFill>
+                <a:latin typeface="Segoe UI"/>
+              </a:defRPr>
+            </a:pPr>
+            <a:r>
+              <a:t>10. بوابة الصيدلية والربط المحاسبي (Pharmacy Portal &amp; B2B)</a:t>
+            </a:r>
+          </a:p>
+        </p:txBody>
+      </p:sp>
+      <p:sp>
+        <p:nvSpPr>
+          <p:cNvPr id="5" name="Rectangle 4"/>
+          <p:cNvSpPr/>
+          <p:nvPr/>
+        </p:nvSpPr>
+        <p:spPr>
+          <a:xfrm>
+            <a:off x="0" y="1051560"/>
+            <a:ext cx="12191695" cy="45720"/>
+          </a:xfrm>
+          <a:prstGeom prst="rect">
+            <a:avLst/>
+          </a:prstGeom>
+          <a:solidFill>
+            <a:srgbClr val="10B981"/>
+          </a:solidFill>
+          <a:ln>
+            <a:noFill/>
+          </a:ln>
+        </p:spPr>
+        <p:style>
+          <a:lnRef idx="1">
+            <a:schemeClr val="accent1"/>
+          </a:lnRef>
+          <a:fillRef idx="3">
+            <a:schemeClr val="accent1"/>
+          </a:fillRef>
+          <a:effectRef idx="2">
+            <a:schemeClr val="accent1"/>
+          </a:effectRef>
+          <a:fontRef idx="minor">
+            <a:schemeClr val="lt1"/>
+          </a:fontRef>
+        </p:style>
+        <p:txBody>
+          <a:bodyPr rtlCol="0" anchor="ctr"/>
+          <a:lstStyle/>
+          <a:p>
+            <a:pPr algn="ctr"/>
+          </a:p>
+        </p:txBody>
+      </p:sp>
+      <p:sp>
+        <p:nvSpPr>
+          <p:cNvPr id="6" name="TextBox 5"/>
+          <p:cNvSpPr txBox="1"/>
+          <p:nvPr/>
+        </p:nvSpPr>
+        <p:spPr>
+          <a:xfrm>
+            <a:off x="731520" y="6473952"/>
+            <a:ext cx="10698480" cy="292608"/>
+          </a:xfrm>
+          <a:prstGeom prst="rect">
+            <a:avLst/>
+          </a:prstGeom>
+          <a:noFill/>
+        </p:spPr>
+        <p:txBody>
+          <a:bodyPr wrap="none">
+            <a:spAutoFit/>
+          </a:bodyPr>
+          <a:lstStyle/>
+          <a:p>
+            <a:pPr algn="ctr">
+              <a:defRPr sz="1050">
+                <a:solidFill>
+                  <a:srgbClr val="64748B"/>
+                </a:solidFill>
+                <a:latin typeface="Segoe UI"/>
+              </a:defRPr>
+            </a:pPr>
+            <a:r>
+              <a:t>PharmaConnect System  |  نظام تتبع وفرة الأدوية وإدارة المخزون متعدد الصيدليات  |  2026</a:t>
+            </a:r>
+          </a:p>
+        </p:txBody>
+      </p:sp>
+      <p:sp>
+        <p:nvSpPr>
+          <p:cNvPr id="7" name="Rounded Rectangle 6"/>
+          <p:cNvSpPr/>
+          <p:nvPr/>
+        </p:nvSpPr>
+        <p:spPr>
+          <a:xfrm>
+            <a:off x="731520" y="1325880"/>
+            <a:ext cx="5212080" cy="4846320"/>
           </a:xfrm>
           <a:prstGeom prst="roundRect">
             <a:avLst/>
@@ -3710,7 +4041,7 @@
           </a:solidFill>
           <a:ln w="19050">
             <a:solidFill>
-              <a:srgbClr val="FDE047"/>
+              <a:srgbClr val="E2E8F0"/>
             </a:solidFill>
           </a:ln>
         </p:spPr>
@@ -3738,14 +4069,14 @@
       </p:sp>
       <p:sp>
         <p:nvSpPr>
-          <p:cNvPr id="10" name="TextBox 9"/>
+          <p:cNvPr id="8" name="TextBox 7"/>
           <p:cNvSpPr txBox="1"/>
           <p:nvPr/>
         </p:nvSpPr>
         <p:spPr>
           <a:xfrm>
-            <a:off x="6400800" y="1600200"/>
-            <a:ext cx="4846320" cy="4297680"/>
+            <a:off x="914400" y="1463039"/>
+            <a:ext cx="4846320" cy="4572000"/>
           </a:xfrm>
           <a:prstGeom prst="rect">
             <a:avLst/>
@@ -3759,7 +4090,7 @@
           <a:lstStyle/>
           <a:p>
             <a:pPr algn="r">
-              <a:defRPr sz="1700" b="1">
+              <a:defRPr sz="1600" b="1">
                 <a:solidFill>
                   <a:srgbClr val="064E3B"/>
                 </a:solidFill>
@@ -3767,15 +4098,15 @@
               </a:defRPr>
             </a:pPr>
             <a:r>
-              <a:t>أهم المعايير والأسئلة التقنية الشائعة (Technical FAQ)</a:t>
+              <a:t>بوابة الويب للصيدليات (Web Portal)</a:t>
             </a:r>
           </a:p>
           <a:p>
             <a:pPr algn="r">
               <a:spcBef>
-                <a:spcPts val="800"/>
+                <a:spcPts val="600"/>
               </a:spcBef>
-              <a:defRPr sz="1300">
+              <a:defRPr sz="1250">
                 <a:solidFill>
                   <a:srgbClr val="0F172A"/>
                 </a:solidFill>
@@ -3783,15 +4114,15 @@
               </a:defRPr>
             </a:pPr>
             <a:r>
-              <a:t>• س: أين معالجة الـ Race Condition؟ -&gt; دالة createReservation بـ lockForUpdate داخل DB::transaction.</a:t>
+              <a:t>• لوحة تحكم خفيفة وسريعة: تفتح من أي جهاز أو متصفح كمبيوتر أو هاتف.</a:t>
             </a:r>
           </a:p>
           <a:p>
             <a:pPr algn="r">
               <a:spcBef>
-                <a:spcPts val="800"/>
+                <a:spcPts val="600"/>
               </a:spcBef>
-              <a:defRPr sz="1300">
+              <a:defRPr sz="1250">
                 <a:solidFill>
                   <a:srgbClr val="0F172A"/>
                 </a:solidFill>
@@ -3799,15 +4130,15 @@
               </a:defRPr>
             </a:pPr>
             <a:r>
-              <a:t>• س: أين خوارزمية المسافة الكروية؟ -&gt; دالة calculateHaversineDistance بنصف قطر الأرض 6371 كم.</a:t>
+              <a:t>• إدارة المخزون اللحظي: تعديل الأسعار والكميات وتنبيهات المخزون الحرج.</a:t>
             </a:r>
           </a:p>
           <a:p>
             <a:pPr algn="r">
               <a:spcBef>
-                <a:spcPts val="800"/>
+                <a:spcPts val="600"/>
               </a:spcBef>
-              <a:defRPr sz="1300">
+              <a:defRPr sz="1250">
                 <a:solidFill>
                   <a:srgbClr val="0F172A"/>
                 </a:solidFill>
@@ -3815,15 +4146,15 @@
               </a:defRPr>
             </a:pPr>
             <a:r>
-              <a:t>• س: كيف يعمل الأمان بدون Session بالموبايل؟ -&gt; توكنات مشفرة Bearer Token عبر Laravel Sanctum.</a:t>
+              <a:t>• شاشة الحجوزات الواردة: مزامنة حية بتحديث تلقائي كل 5 ثوانٍ دون تحديث يدوي.</a:t>
             </a:r>
           </a:p>
           <a:p>
             <a:pPr algn="r">
               <a:spcBef>
-                <a:spcPts val="800"/>
+                <a:spcPts val="600"/>
               </a:spcBef>
-              <a:defRPr sz="1300">
+              <a:defRPr sz="1250">
                 <a:solidFill>
                   <a:srgbClr val="0F172A"/>
                 </a:solidFill>
@@ -3831,7 +4162,2148 @@
               </a:defRPr>
             </a:pPr>
             <a:r>
-              <a:t>• س: ما فائدة الـ TTL؟ -&gt; 30 دقيقة توازن بين حق المريض في الوصول وحق الصيدلي في بيع الدواء.</a:t>
+              <a:t>• تأكيد التسليم والمحاسبة: بضغطة زر واحدة لإغلاق الحجز وتحويله لمكتمل.</a:t>
+            </a:r>
+          </a:p>
+        </p:txBody>
+      </p:sp>
+      <p:sp>
+        <p:nvSpPr>
+          <p:cNvPr id="9" name="Rounded Rectangle 8"/>
+          <p:cNvSpPr/>
+          <p:nvPr/>
+        </p:nvSpPr>
+        <p:spPr>
+          <a:xfrm>
+            <a:off x="6217920" y="1325880"/>
+            <a:ext cx="5212080" cy="4846320"/>
+          </a:xfrm>
+          <a:prstGeom prst="roundRect">
+            <a:avLst/>
+          </a:prstGeom>
+          <a:solidFill>
+            <a:srgbClr val="F0FDF4"/>
+          </a:solidFill>
+          <a:ln w="19050">
+            <a:solidFill>
+              <a:srgbClr val="86EFAC"/>
+            </a:solidFill>
+          </a:ln>
+        </p:spPr>
+        <p:style>
+          <a:lnRef idx="1">
+            <a:schemeClr val="accent1"/>
+          </a:lnRef>
+          <a:fillRef idx="3">
+            <a:schemeClr val="accent1"/>
+          </a:fillRef>
+          <a:effectRef idx="2">
+            <a:schemeClr val="accent1"/>
+          </a:effectRef>
+          <a:fontRef idx="minor">
+            <a:schemeClr val="lt1"/>
+          </a:fontRef>
+        </p:style>
+        <p:txBody>
+          <a:bodyPr rtlCol="0" anchor="ctr"/>
+          <a:lstStyle/>
+          <a:p>
+            <a:pPr algn="ctr"/>
+          </a:p>
+        </p:txBody>
+      </p:sp>
+      <p:sp>
+        <p:nvSpPr>
+          <p:cNvPr id="10" name="TextBox 9"/>
+          <p:cNvSpPr txBox="1"/>
+          <p:nvPr/>
+        </p:nvSpPr>
+        <p:spPr>
+          <a:xfrm>
+            <a:off x="6400800" y="1463039"/>
+            <a:ext cx="4846320" cy="4572000"/>
+          </a:xfrm>
+          <a:prstGeom prst="rect">
+            <a:avLst/>
+          </a:prstGeom>
+          <a:noFill/>
+        </p:spPr>
+        <p:txBody>
+          <a:bodyPr wrap="square">
+            <a:spAutoFit/>
+          </a:bodyPr>
+          <a:lstStyle/>
+          <a:p>
+            <a:pPr algn="r">
+              <a:defRPr sz="1600" b="1">
+                <a:solidFill>
+                  <a:srgbClr val="064E3B"/>
+                </a:solidFill>
+                <a:latin typeface="Segoe UI"/>
+              </a:defRPr>
+            </a:pPr>
+            <a:r>
+              <a:t>بوابة الربط المحاسبي (B2B Partner API)</a:t>
+            </a:r>
+          </a:p>
+          <a:p>
+            <a:pPr algn="r">
+              <a:spcBef>
+                <a:spcPts val="600"/>
+              </a:spcBef>
+              <a:defRPr sz="1250">
+                <a:solidFill>
+                  <a:srgbClr val="0F172A"/>
+                </a:solidFill>
+                <a:latin typeface="Segoe UI"/>
+              </a:defRPr>
+            </a:pPr>
+            <a:r>
+              <a:t>• التكامل مع الأنظمة القائمة: (يمن سوفت، الإبداع، المتكامل، وغيرها).</a:t>
+            </a:r>
+          </a:p>
+          <a:p>
+            <a:pPr algn="r">
+              <a:spcBef>
+                <a:spcPts val="600"/>
+              </a:spcBef>
+              <a:defRPr sz="1250">
+                <a:solidFill>
+                  <a:srgbClr val="0F172A"/>
+                </a:solidFill>
+                <a:latin typeface="Segoe UI"/>
+              </a:defRPr>
+            </a:pPr>
+            <a:r>
+              <a:t>• مزامنة المخزون: POST /api/v1/partner/inventory/sync لتحديث آلاف الأصناف دفعة واحدة.</a:t>
+            </a:r>
+          </a:p>
+          <a:p>
+            <a:pPr algn="r">
+              <a:spcBef>
+                <a:spcPts val="600"/>
+              </a:spcBef>
+              <a:defRPr sz="1250">
+                <a:solidFill>
+                  <a:srgbClr val="0F172A"/>
+                </a:solidFill>
+                <a:latin typeface="Segoe UI"/>
+              </a:defRPr>
+            </a:pPr>
+            <a:r>
+              <a:t>• تحديث الكاشير: POST /api/v1/partner/inventory/update-item لتعديل الكمية فور البيع.</a:t>
+            </a:r>
+          </a:p>
+          <a:p>
+            <a:pPr algn="r">
+              <a:spcBef>
+                <a:spcPts val="600"/>
+              </a:spcBef>
+              <a:defRPr sz="1250">
+                <a:solidFill>
+                  <a:srgbClr val="0F172A"/>
+                </a:solidFill>
+                <a:latin typeface="Segoe UI"/>
+              </a:defRPr>
+            </a:pPr>
+            <a:r>
+              <a:t>• صرف الحجز بماسح الباركود: POST /api/v1/partner/reservations/{id}/fulfill.</a:t>
+            </a:r>
+          </a:p>
+        </p:txBody>
+      </p:sp>
+    </p:spTree>
+  </p:cSld>
+  <p:clrMapOvr>
+    <a:masterClrMapping/>
+  </p:clrMapOvr>
+</p:sld>
+</file>
+
+<file path=ppt/slides/slide12.xml><?xml version="1.0" encoding="utf-8"?>
+<p:sld xmlns:a="http://schemas.openxmlformats.org/drawingml/2006/main" xmlns:p="http://schemas.openxmlformats.org/presentationml/2006/main" xmlns:r="http://schemas.openxmlformats.org/officeDocument/2006/relationships">
+  <p:cSld>
+    <p:spTree>
+      <p:nvGrpSpPr>
+        <p:cNvPr id="1" name=""/>
+        <p:cNvGrpSpPr/>
+        <p:nvPr/>
+      </p:nvGrpSpPr>
+      <p:grpSpPr/>
+      <p:sp>
+        <p:nvSpPr>
+          <p:cNvPr id="2" name="Rectangle 1"/>
+          <p:cNvSpPr/>
+          <p:nvPr/>
+        </p:nvSpPr>
+        <p:spPr>
+          <a:xfrm>
+            <a:off x="0" y="0"/>
+            <a:ext cx="12191695" cy="1051560"/>
+          </a:xfrm>
+          <a:prstGeom prst="rect">
+            <a:avLst/>
+          </a:prstGeom>
+          <a:solidFill>
+            <a:srgbClr val="064E3B"/>
+          </a:solidFill>
+          <a:ln>
+            <a:solidFill>
+              <a:srgbClr val="064E3B"/>
+            </a:solidFill>
+          </a:ln>
+        </p:spPr>
+        <p:style>
+          <a:lnRef idx="1">
+            <a:schemeClr val="accent1"/>
+          </a:lnRef>
+          <a:fillRef idx="3">
+            <a:schemeClr val="accent1"/>
+          </a:fillRef>
+          <a:effectRef idx="2">
+            <a:schemeClr val="accent1"/>
+          </a:effectRef>
+          <a:fontRef idx="minor">
+            <a:schemeClr val="lt1"/>
+          </a:fontRef>
+        </p:style>
+        <p:txBody>
+          <a:bodyPr rtlCol="0" anchor="ctr"/>
+          <a:lstStyle/>
+          <a:p>
+            <a:pPr algn="ctr"/>
+          </a:p>
+        </p:txBody>
+      </p:sp>
+      <p:sp>
+        <p:nvSpPr>
+          <p:cNvPr id="3" name="TextBox 2"/>
+          <p:cNvSpPr txBox="1"/>
+          <p:nvPr/>
+        </p:nvSpPr>
+        <p:spPr>
+          <a:xfrm>
+            <a:off x="731520" y="91440"/>
+            <a:ext cx="10698480" cy="292608"/>
+          </a:xfrm>
+          <a:prstGeom prst="rect">
+            <a:avLst/>
+          </a:prstGeom>
+          <a:noFill/>
+        </p:spPr>
+        <p:txBody>
+          <a:bodyPr wrap="square">
+            <a:spAutoFit/>
+          </a:bodyPr>
+          <a:lstStyle/>
+          <a:p>
+            <a:pPr algn="r">
+              <a:defRPr sz="1200" b="1">
+                <a:solidFill>
+                  <a:srgbClr val="10B981"/>
+                </a:solidFill>
+                <a:latin typeface="Segoe UI"/>
+              </a:defRPr>
+            </a:pPr>
+            <a:r>
+              <a:t>منظومة خادم وعميل موزعة — معمارية 3-Tier Distributed Architecture</a:t>
+            </a:r>
+          </a:p>
+        </p:txBody>
+      </p:sp>
+      <p:sp>
+        <p:nvSpPr>
+          <p:cNvPr id="4" name="TextBox 3"/>
+          <p:cNvSpPr txBox="1"/>
+          <p:nvPr/>
+        </p:nvSpPr>
+        <p:spPr>
+          <a:xfrm>
+            <a:off x="731520" y="384048"/>
+            <a:ext cx="10698480" cy="566928"/>
+          </a:xfrm>
+          <a:prstGeom prst="rect">
+            <a:avLst/>
+          </a:prstGeom>
+          <a:noFill/>
+        </p:spPr>
+        <p:txBody>
+          <a:bodyPr wrap="square">
+            <a:spAutoFit/>
+          </a:bodyPr>
+          <a:lstStyle/>
+          <a:p>
+            <a:pPr algn="r">
+              <a:defRPr sz="2100" b="1">
+                <a:solidFill>
+                  <a:srgbClr val="F8FAFC"/>
+                </a:solidFill>
+                <a:latin typeface="Segoe UI"/>
+              </a:defRPr>
+            </a:pPr>
+            <a:r>
+              <a:t>11. ضمان الجودة وخطوط التكامل المستمر (QA &amp; CI/CD)</a:t>
+            </a:r>
+          </a:p>
+        </p:txBody>
+      </p:sp>
+      <p:sp>
+        <p:nvSpPr>
+          <p:cNvPr id="5" name="Rectangle 4"/>
+          <p:cNvSpPr/>
+          <p:nvPr/>
+        </p:nvSpPr>
+        <p:spPr>
+          <a:xfrm>
+            <a:off x="0" y="1051560"/>
+            <a:ext cx="12191695" cy="45720"/>
+          </a:xfrm>
+          <a:prstGeom prst="rect">
+            <a:avLst/>
+          </a:prstGeom>
+          <a:solidFill>
+            <a:srgbClr val="10B981"/>
+          </a:solidFill>
+          <a:ln>
+            <a:noFill/>
+          </a:ln>
+        </p:spPr>
+        <p:style>
+          <a:lnRef idx="1">
+            <a:schemeClr val="accent1"/>
+          </a:lnRef>
+          <a:fillRef idx="3">
+            <a:schemeClr val="accent1"/>
+          </a:fillRef>
+          <a:effectRef idx="2">
+            <a:schemeClr val="accent1"/>
+          </a:effectRef>
+          <a:fontRef idx="minor">
+            <a:schemeClr val="lt1"/>
+          </a:fontRef>
+        </p:style>
+        <p:txBody>
+          <a:bodyPr rtlCol="0" anchor="ctr"/>
+          <a:lstStyle/>
+          <a:p>
+            <a:pPr algn="ctr"/>
+          </a:p>
+        </p:txBody>
+      </p:sp>
+      <p:sp>
+        <p:nvSpPr>
+          <p:cNvPr id="6" name="TextBox 5"/>
+          <p:cNvSpPr txBox="1"/>
+          <p:nvPr/>
+        </p:nvSpPr>
+        <p:spPr>
+          <a:xfrm>
+            <a:off x="731520" y="6473952"/>
+            <a:ext cx="10698480" cy="292608"/>
+          </a:xfrm>
+          <a:prstGeom prst="rect">
+            <a:avLst/>
+          </a:prstGeom>
+          <a:noFill/>
+        </p:spPr>
+        <p:txBody>
+          <a:bodyPr wrap="none">
+            <a:spAutoFit/>
+          </a:bodyPr>
+          <a:lstStyle/>
+          <a:p>
+            <a:pPr algn="ctr">
+              <a:defRPr sz="1050">
+                <a:solidFill>
+                  <a:srgbClr val="64748B"/>
+                </a:solidFill>
+                <a:latin typeface="Segoe UI"/>
+              </a:defRPr>
+            </a:pPr>
+            <a:r>
+              <a:t>PharmaConnect System  |  نظام تتبع وفرة الأدوية وإدارة المخزون متعدد الصيدليات  |  2026</a:t>
+            </a:r>
+          </a:p>
+        </p:txBody>
+      </p:sp>
+      <p:sp>
+        <p:nvSpPr>
+          <p:cNvPr id="7" name="Rounded Rectangle 6"/>
+          <p:cNvSpPr/>
+          <p:nvPr/>
+        </p:nvSpPr>
+        <p:spPr>
+          <a:xfrm>
+            <a:off x="731520" y="1325880"/>
+            <a:ext cx="5212080" cy="4846320"/>
+          </a:xfrm>
+          <a:prstGeom prst="roundRect">
+            <a:avLst/>
+          </a:prstGeom>
+          <a:solidFill>
+            <a:srgbClr val="FFFFFF"/>
+          </a:solidFill>
+          <a:ln w="19050">
+            <a:solidFill>
+              <a:srgbClr val="E2E8F0"/>
+            </a:solidFill>
+          </a:ln>
+        </p:spPr>
+        <p:style>
+          <a:lnRef idx="1">
+            <a:schemeClr val="accent1"/>
+          </a:lnRef>
+          <a:fillRef idx="3">
+            <a:schemeClr val="accent1"/>
+          </a:fillRef>
+          <a:effectRef idx="2">
+            <a:schemeClr val="accent1"/>
+          </a:effectRef>
+          <a:fontRef idx="minor">
+            <a:schemeClr val="lt1"/>
+          </a:fontRef>
+        </p:style>
+        <p:txBody>
+          <a:bodyPr rtlCol="0" anchor="ctr"/>
+          <a:lstStyle/>
+          <a:p>
+            <a:pPr algn="ctr"/>
+          </a:p>
+        </p:txBody>
+      </p:sp>
+      <p:sp>
+        <p:nvSpPr>
+          <p:cNvPr id="8" name="TextBox 7"/>
+          <p:cNvSpPr txBox="1"/>
+          <p:nvPr/>
+        </p:nvSpPr>
+        <p:spPr>
+          <a:xfrm>
+            <a:off x="914400" y="1463039"/>
+            <a:ext cx="4846320" cy="4572000"/>
+          </a:xfrm>
+          <a:prstGeom prst="rect">
+            <a:avLst/>
+          </a:prstGeom>
+          <a:noFill/>
+        </p:spPr>
+        <p:txBody>
+          <a:bodyPr wrap="square">
+            <a:spAutoFit/>
+          </a:bodyPr>
+          <a:lstStyle/>
+          <a:p>
+            <a:pPr algn="r">
+              <a:defRPr sz="1600" b="1">
+                <a:solidFill>
+                  <a:srgbClr val="064E3B"/>
+                </a:solidFill>
+                <a:latin typeface="Segoe UI"/>
+              </a:defRPr>
+            </a:pPr>
+            <a:r>
+              <a:t>منهجية الحلقات المغلقة (Looping Engineering)</a:t>
+            </a:r>
+          </a:p>
+          <a:p>
+            <a:pPr algn="r">
+              <a:spcBef>
+                <a:spcPts val="600"/>
+              </a:spcBef>
+              <a:defRPr sz="1250">
+                <a:solidFill>
+                  <a:srgbClr val="0F172A"/>
+                </a:solidFill>
+                <a:latin typeface="Segoe UI"/>
+              </a:defRPr>
+            </a:pPr>
+            <a:r>
+              <a:t>• دورة تطوير صارمة: تخطيط -&gt; تنفيذ معياري -&gt; اختبار آلي -&gt; تدقيق -&gt; توثيق فوري.</a:t>
+            </a:r>
+          </a:p>
+          <a:p>
+            <a:pPr algn="r">
+              <a:spcBef>
+                <a:spcPts val="600"/>
+              </a:spcBef>
+              <a:defRPr sz="1250">
+                <a:solidFill>
+                  <a:srgbClr val="0F172A"/>
+                </a:solidFill>
+                <a:latin typeface="Segoe UI"/>
+              </a:defRPr>
+            </a:pPr>
+            <a:r>
+              <a:t>• فحص التنسيق والجودة التلقائي:</a:t>
+            </a:r>
+          </a:p>
+          <a:p>
+            <a:pPr algn="r">
+              <a:spcBef>
+                <a:spcPts val="600"/>
+              </a:spcBef>
+              <a:defRPr sz="1250">
+                <a:solidFill>
+                  <a:srgbClr val="0F172A"/>
+                </a:solidFill>
+                <a:latin typeface="Segoe UI"/>
+              </a:defRPr>
+            </a:pPr>
+            <a:r>
+              <a:t>• كود PHP خاضع لأداة Laravel Pint بنسبة توافق 100%.</a:t>
+            </a:r>
+          </a:p>
+          <a:p>
+            <a:pPr algn="r">
+              <a:spcBef>
+                <a:spcPts val="600"/>
+              </a:spcBef>
+              <a:defRPr sz="1250">
+                <a:solidFill>
+                  <a:srgbClr val="0F172A"/>
+                </a:solidFill>
+                <a:latin typeface="Segoe UI"/>
+              </a:defRPr>
+            </a:pPr>
+            <a:r>
+              <a:t>• كود Dart خاضع لـ Flutter Analyze بصفر أخطاء وصفر تحذيرات.</a:t>
+            </a:r>
+          </a:p>
+          <a:p>
+            <a:pPr algn="r">
+              <a:spcBef>
+                <a:spcPts val="600"/>
+              </a:spcBef>
+              <a:defRPr sz="1250">
+                <a:solidFill>
+                  <a:srgbClr val="0F172A"/>
+                </a:solidFill>
+                <a:latin typeface="Segoe UI"/>
+              </a:defRPr>
+            </a:pPr>
+            <a:r>
+              <a:t>• توثيق علمي شامل: وفق معايير APA 7th Edition وسجل تغييرات كامل.</a:t>
+            </a:r>
+          </a:p>
+        </p:txBody>
+      </p:sp>
+      <p:sp>
+        <p:nvSpPr>
+          <p:cNvPr id="9" name="Rounded Rectangle 8"/>
+          <p:cNvSpPr/>
+          <p:nvPr/>
+        </p:nvSpPr>
+        <p:spPr>
+          <a:xfrm>
+            <a:off x="6217920" y="1325880"/>
+            <a:ext cx="5212080" cy="4846320"/>
+          </a:xfrm>
+          <a:prstGeom prst="roundRect">
+            <a:avLst/>
+          </a:prstGeom>
+          <a:solidFill>
+            <a:srgbClr val="F0FDF4"/>
+          </a:solidFill>
+          <a:ln w="19050">
+            <a:solidFill>
+              <a:srgbClr val="86EFAC"/>
+            </a:solidFill>
+          </a:ln>
+        </p:spPr>
+        <p:style>
+          <a:lnRef idx="1">
+            <a:schemeClr val="accent1"/>
+          </a:lnRef>
+          <a:fillRef idx="3">
+            <a:schemeClr val="accent1"/>
+          </a:fillRef>
+          <a:effectRef idx="2">
+            <a:schemeClr val="accent1"/>
+          </a:effectRef>
+          <a:fontRef idx="minor">
+            <a:schemeClr val="lt1"/>
+          </a:fontRef>
+        </p:style>
+        <p:txBody>
+          <a:bodyPr rtlCol="0" anchor="ctr"/>
+          <a:lstStyle/>
+          <a:p>
+            <a:pPr algn="ctr"/>
+          </a:p>
+        </p:txBody>
+      </p:sp>
+      <p:sp>
+        <p:nvSpPr>
+          <p:cNvPr id="10" name="TextBox 9"/>
+          <p:cNvSpPr txBox="1"/>
+          <p:nvPr/>
+        </p:nvSpPr>
+        <p:spPr>
+          <a:xfrm>
+            <a:off x="6400800" y="1463039"/>
+            <a:ext cx="4846320" cy="4572000"/>
+          </a:xfrm>
+          <a:prstGeom prst="rect">
+            <a:avLst/>
+          </a:prstGeom>
+          <a:noFill/>
+        </p:spPr>
+        <p:txBody>
+          <a:bodyPr wrap="square">
+            <a:spAutoFit/>
+          </a:bodyPr>
+          <a:lstStyle/>
+          <a:p>
+            <a:pPr algn="r">
+              <a:defRPr sz="1600" b="1">
+                <a:solidFill>
+                  <a:srgbClr val="064E3B"/>
+                </a:solidFill>
+                <a:latin typeface="Segoe UI"/>
+              </a:defRPr>
+            </a:pPr>
+            <a:r>
+              <a:t>خطوط أنابيب GitHub Actions المؤتمتة</a:t>
+            </a:r>
+          </a:p>
+          <a:p>
+            <a:pPr algn="r">
+              <a:spcBef>
+                <a:spcPts val="600"/>
+              </a:spcBef>
+              <a:defRPr sz="1250">
+                <a:solidFill>
+                  <a:srgbClr val="0F172A"/>
+                </a:solidFill>
+                <a:latin typeface="Segoe UI"/>
+              </a:defRPr>
+            </a:pPr>
+            <a:r>
+              <a:t>• 12 اختبار تكاملي ووظيفي (Feature Tests): تغطي قفل التزامن والبحث الجغرافي وعزل الجلسات.</a:t>
+            </a:r>
+          </a:p>
+          <a:p>
+            <a:pPr algn="r">
+              <a:spcBef>
+                <a:spcPts val="600"/>
+              </a:spcBef>
+              <a:defRPr sz="1250">
+                <a:solidFill>
+                  <a:srgbClr val="0F172A"/>
+                </a:solidFill>
+                <a:latin typeface="Segoe UI"/>
+              </a:defRPr>
+            </a:pPr>
+            <a:r>
+              <a:t>• اختبارات Flutter التلقائية: فحص نماذج البيانات وسير الواجهات بنجاح 100%.</a:t>
+            </a:r>
+          </a:p>
+          <a:p>
+            <a:pPr algn="r">
+              <a:spcBef>
+                <a:spcPts val="600"/>
+              </a:spcBef>
+              <a:defRPr sz="1250">
+                <a:solidFill>
+                  <a:srgbClr val="0F172A"/>
+                </a:solidFill>
+                <a:latin typeface="Segoe UI"/>
+              </a:defRPr>
+            </a:pPr>
+            <a:r>
+              <a:t>• حماية فرع main: منع دمج أي كود لا يجتاز كافة الاختبارات بنجاح تام.</a:t>
+            </a:r>
+          </a:p>
+          <a:p>
+            <a:pPr algn="r">
+              <a:spcBef>
+                <a:spcPts val="600"/>
+              </a:spcBef>
+              <a:defRPr sz="1250">
+                <a:solidFill>
+                  <a:srgbClr val="0F172A"/>
+                </a:solidFill>
+                <a:latin typeface="Segoe UI"/>
+              </a:defRPr>
+            </a:pPr>
+            <a:r>
+              <a:t>• جاهزية النشر السحابي الآلي: تشغيل النظام على بيئة سحابية حية.</a:t>
+            </a:r>
+          </a:p>
+        </p:txBody>
+      </p:sp>
+    </p:spTree>
+  </p:cSld>
+  <p:clrMapOvr>
+    <a:masterClrMapping/>
+  </p:clrMapOvr>
+</p:sld>
+</file>
+
+<file path=ppt/slides/slide13.xml><?xml version="1.0" encoding="utf-8"?>
+<p:sld xmlns:a="http://schemas.openxmlformats.org/drawingml/2006/main" xmlns:p="http://schemas.openxmlformats.org/presentationml/2006/main" xmlns:r="http://schemas.openxmlformats.org/officeDocument/2006/relationships">
+  <p:cSld>
+    <p:spTree>
+      <p:nvGrpSpPr>
+        <p:cNvPr id="1" name=""/>
+        <p:cNvGrpSpPr/>
+        <p:nvPr/>
+      </p:nvGrpSpPr>
+      <p:grpSpPr/>
+      <p:sp>
+        <p:nvSpPr>
+          <p:cNvPr id="2" name="Rectangle 1"/>
+          <p:cNvSpPr/>
+          <p:nvPr/>
+        </p:nvSpPr>
+        <p:spPr>
+          <a:xfrm>
+            <a:off x="0" y="0"/>
+            <a:ext cx="12191695" cy="1051560"/>
+          </a:xfrm>
+          <a:prstGeom prst="rect">
+            <a:avLst/>
+          </a:prstGeom>
+          <a:solidFill>
+            <a:srgbClr val="064E3B"/>
+          </a:solidFill>
+          <a:ln>
+            <a:solidFill>
+              <a:srgbClr val="064E3B"/>
+            </a:solidFill>
+          </a:ln>
+        </p:spPr>
+        <p:style>
+          <a:lnRef idx="1">
+            <a:schemeClr val="accent1"/>
+          </a:lnRef>
+          <a:fillRef idx="3">
+            <a:schemeClr val="accent1"/>
+          </a:fillRef>
+          <a:effectRef idx="2">
+            <a:schemeClr val="accent1"/>
+          </a:effectRef>
+          <a:fontRef idx="minor">
+            <a:schemeClr val="lt1"/>
+          </a:fontRef>
+        </p:style>
+        <p:txBody>
+          <a:bodyPr rtlCol="0" anchor="ctr"/>
+          <a:lstStyle/>
+          <a:p>
+            <a:pPr algn="ctr"/>
+          </a:p>
+        </p:txBody>
+      </p:sp>
+      <p:sp>
+        <p:nvSpPr>
+          <p:cNvPr id="3" name="TextBox 2"/>
+          <p:cNvSpPr txBox="1"/>
+          <p:nvPr/>
+        </p:nvSpPr>
+        <p:spPr>
+          <a:xfrm>
+            <a:off x="731520" y="91440"/>
+            <a:ext cx="10698480" cy="292608"/>
+          </a:xfrm>
+          <a:prstGeom prst="rect">
+            <a:avLst/>
+          </a:prstGeom>
+          <a:noFill/>
+        </p:spPr>
+        <p:txBody>
+          <a:bodyPr wrap="square">
+            <a:spAutoFit/>
+          </a:bodyPr>
+          <a:lstStyle/>
+          <a:p>
+            <a:pPr algn="r">
+              <a:defRPr sz="1200" b="1">
+                <a:solidFill>
+                  <a:srgbClr val="10B981"/>
+                </a:solidFill>
+                <a:latin typeface="Segoe UI"/>
+              </a:defRPr>
+            </a:pPr>
+            <a:r>
+              <a:t>منظومة خادم وعميل موزعة — معمارية 3-Tier Distributed Architecture</a:t>
+            </a:r>
+          </a:p>
+        </p:txBody>
+      </p:sp>
+      <p:sp>
+        <p:nvSpPr>
+          <p:cNvPr id="4" name="TextBox 3"/>
+          <p:cNvSpPr txBox="1"/>
+          <p:nvPr/>
+        </p:nvSpPr>
+        <p:spPr>
+          <a:xfrm>
+            <a:off x="731520" y="384048"/>
+            <a:ext cx="10698480" cy="566928"/>
+          </a:xfrm>
+          <a:prstGeom prst="rect">
+            <a:avLst/>
+          </a:prstGeom>
+          <a:noFill/>
+        </p:spPr>
+        <p:txBody>
+          <a:bodyPr wrap="square">
+            <a:spAutoFit/>
+          </a:bodyPr>
+          <a:lstStyle/>
+          <a:p>
+            <a:pPr algn="r">
+              <a:defRPr sz="2100" b="1">
+                <a:solidFill>
+                  <a:srgbClr val="F8FAFC"/>
+                </a:solidFill>
+                <a:latin typeface="Segoe UI"/>
+              </a:defRPr>
+            </a:pPr>
+            <a:r>
+              <a:t>12. سيناريو العرض التشغيلي المباشر (End-to-End System Demo)</a:t>
+            </a:r>
+          </a:p>
+        </p:txBody>
+      </p:sp>
+      <p:sp>
+        <p:nvSpPr>
+          <p:cNvPr id="5" name="Rectangle 4"/>
+          <p:cNvSpPr/>
+          <p:nvPr/>
+        </p:nvSpPr>
+        <p:spPr>
+          <a:xfrm>
+            <a:off x="0" y="1051560"/>
+            <a:ext cx="12191695" cy="45720"/>
+          </a:xfrm>
+          <a:prstGeom prst="rect">
+            <a:avLst/>
+          </a:prstGeom>
+          <a:solidFill>
+            <a:srgbClr val="10B981"/>
+          </a:solidFill>
+          <a:ln>
+            <a:noFill/>
+          </a:ln>
+        </p:spPr>
+        <p:style>
+          <a:lnRef idx="1">
+            <a:schemeClr val="accent1"/>
+          </a:lnRef>
+          <a:fillRef idx="3">
+            <a:schemeClr val="accent1"/>
+          </a:fillRef>
+          <a:effectRef idx="2">
+            <a:schemeClr val="accent1"/>
+          </a:effectRef>
+          <a:fontRef idx="minor">
+            <a:schemeClr val="lt1"/>
+          </a:fontRef>
+        </p:style>
+        <p:txBody>
+          <a:bodyPr rtlCol="0" anchor="ctr"/>
+          <a:lstStyle/>
+          <a:p>
+            <a:pPr algn="ctr"/>
+          </a:p>
+        </p:txBody>
+      </p:sp>
+      <p:sp>
+        <p:nvSpPr>
+          <p:cNvPr id="6" name="TextBox 5"/>
+          <p:cNvSpPr txBox="1"/>
+          <p:nvPr/>
+        </p:nvSpPr>
+        <p:spPr>
+          <a:xfrm>
+            <a:off x="731520" y="6473952"/>
+            <a:ext cx="10698480" cy="292608"/>
+          </a:xfrm>
+          <a:prstGeom prst="rect">
+            <a:avLst/>
+          </a:prstGeom>
+          <a:noFill/>
+        </p:spPr>
+        <p:txBody>
+          <a:bodyPr wrap="none">
+            <a:spAutoFit/>
+          </a:bodyPr>
+          <a:lstStyle/>
+          <a:p>
+            <a:pPr algn="ctr">
+              <a:defRPr sz="1050">
+                <a:solidFill>
+                  <a:srgbClr val="64748B"/>
+                </a:solidFill>
+                <a:latin typeface="Segoe UI"/>
+              </a:defRPr>
+            </a:pPr>
+            <a:r>
+              <a:t>PharmaConnect System  |  نظام تتبع وفرة الأدوية وإدارة المخزون متعدد الصيدليات  |  2026</a:t>
+            </a:r>
+          </a:p>
+        </p:txBody>
+      </p:sp>
+      <p:graphicFrame>
+        <p:nvGraphicFramePr>
+          <p:cNvPr id="7" name="Table 6"/>
+          <p:cNvGraphicFramePr>
+            <a:graphicFrameLocks noGrp="1"/>
+          </p:cNvGraphicFramePr>
+          <p:nvPr/>
+        </p:nvGraphicFramePr>
+        <p:xfrm>
+          <a:off x="731520" y="1325880"/>
+          <a:ext cx="10698480" cy="4846320"/>
+        </p:xfrm>
+        <a:graphic>
+          <a:graphicData uri="http://schemas.openxmlformats.org/drawingml/2006/table">
+            <a:tbl>
+              <a:tblPr firstRow="1" bandRow="1">
+                <a:tableStyleId>{5C22544A-7EE6-4342-B048-85BDC9FD1C3A}</a:tableStyleId>
+              </a:tblPr>
+              <a:tblGrid>
+                <a:gridCol w="914400"/>
+                <a:gridCol w="2560320"/>
+                <a:gridCol w="4114800"/>
+                <a:gridCol w="3108960"/>
+              </a:tblGrid>
+              <a:tr h="692331">
+                <a:tc>
+                  <a:txBody>
+                    <a:bodyPr/>
+                    <a:lstStyle/>
+                    <a:p>
+                      <a:pPr algn="r">
+                        <a:defRPr sz="1300" b="1">
+                          <a:solidFill>
+                            <a:srgbClr val="F8FAFC"/>
+                          </a:solidFill>
+                        </a:defRPr>
+                      </a:pPr>
+                      <a:r>
+                        <a:t>الخطوة</a:t>
+                      </a:r>
+                    </a:p>
+                  </a:txBody>
+                  <a:tcPr>
+                    <a:solidFill>
+                      <a:srgbClr val="064E3B"/>
+                    </a:solidFill>
+                  </a:tcPr>
+                </a:tc>
+                <a:tc>
+                  <a:txBody>
+                    <a:bodyPr/>
+                    <a:lstStyle/>
+                    <a:p>
+                      <a:pPr algn="r">
+                        <a:defRPr sz="1300" b="1">
+                          <a:solidFill>
+                            <a:srgbClr val="F8FAFC"/>
+                          </a:solidFill>
+                        </a:defRPr>
+                      </a:pPr>
+                      <a:r>
+                        <a:t>البيئة والمنصة</a:t>
+                      </a:r>
+                    </a:p>
+                  </a:txBody>
+                  <a:tcPr>
+                    <a:solidFill>
+                      <a:srgbClr val="064E3B"/>
+                    </a:solidFill>
+                  </a:tcPr>
+                </a:tc>
+                <a:tc>
+                  <a:txBody>
+                    <a:bodyPr/>
+                    <a:lstStyle/>
+                    <a:p>
+                      <a:pPr algn="r">
+                        <a:defRPr sz="1300" b="1">
+                          <a:solidFill>
+                            <a:srgbClr val="F8FAFC"/>
+                          </a:solidFill>
+                        </a:defRPr>
+                      </a:pPr>
+                      <a:r>
+                        <a:t>الإجراء المنفذ (Action)</a:t>
+                      </a:r>
+                    </a:p>
+                  </a:txBody>
+                  <a:tcPr>
+                    <a:solidFill>
+                      <a:srgbClr val="064E3B"/>
+                    </a:solidFill>
+                  </a:tcPr>
+                </a:tc>
+                <a:tc>
+                  <a:txBody>
+                    <a:bodyPr/>
+                    <a:lstStyle/>
+                    <a:p>
+                      <a:pPr algn="r">
+                        <a:defRPr sz="1300" b="1">
+                          <a:solidFill>
+                            <a:srgbClr val="F8FAFC"/>
+                          </a:solidFill>
+                        </a:defRPr>
+                      </a:pPr>
+                      <a:r>
+                        <a:t>النتيجة التقنية والهندسية</a:t>
+                      </a:r>
+                    </a:p>
+                  </a:txBody>
+                  <a:tcPr>
+                    <a:solidFill>
+                      <a:srgbClr val="064E3B"/>
+                    </a:solidFill>
+                  </a:tcPr>
+                </a:tc>
+              </a:tr>
+              <a:tr h="692331">
+                <a:tc>
+                  <a:txBody>
+                    <a:bodyPr/>
+                    <a:lstStyle/>
+                    <a:p>
+                      <a:pPr algn="r">
+                        <a:defRPr sz="1150">
+                          <a:solidFill>
+                            <a:srgbClr val="0F172A"/>
+                          </a:solidFill>
+                          <a:latin typeface="Segoe UI"/>
+                        </a:defRPr>
+                      </a:pPr>
+                      <a:r>
+                        <a:t>1</a:t>
+                      </a:r>
+                    </a:p>
+                  </a:txBody>
+                  <a:tcPr>
+                    <a:solidFill>
+                      <a:srgbClr val="FFFFFF"/>
+                    </a:solidFill>
+                  </a:tcPr>
+                </a:tc>
+                <a:tc>
+                  <a:txBody>
+                    <a:bodyPr/>
+                    <a:lstStyle/>
+                    <a:p>
+                      <a:pPr algn="r">
+                        <a:defRPr sz="1150">
+                          <a:solidFill>
+                            <a:srgbClr val="0F172A"/>
+                          </a:solidFill>
+                          <a:latin typeface="Segoe UI"/>
+                        </a:defRPr>
+                      </a:pPr>
+                      <a:r>
+                        <a:t>بوابة الويب (المتصفح)</a:t>
+                      </a:r>
+                    </a:p>
+                  </a:txBody>
+                  <a:tcPr>
+                    <a:solidFill>
+                      <a:srgbClr val="FFFFFF"/>
+                    </a:solidFill>
+                  </a:tcPr>
+                </a:tc>
+                <a:tc>
+                  <a:txBody>
+                    <a:bodyPr/>
+                    <a:lstStyle/>
+                    <a:p>
+                      <a:pPr algn="r">
+                        <a:defRPr sz="1150">
+                          <a:solidFill>
+                            <a:srgbClr val="0F172A"/>
+                          </a:solidFill>
+                          <a:latin typeface="Segoe UI"/>
+                        </a:defRPr>
+                      </a:pPr>
+                      <a:r>
+                        <a:t>الصيدلي يسجل دخوله ويعدل مخزون Norvasc إلى 10 وسعره 3800 ريال.</a:t>
+                      </a:r>
+                    </a:p>
+                  </a:txBody>
+                  <a:tcPr>
+                    <a:solidFill>
+                      <a:srgbClr val="FFFFFF"/>
+                    </a:solidFill>
+                  </a:tcPr>
+                </a:tc>
+                <a:tc>
+                  <a:txBody>
+                    <a:bodyPr/>
+                    <a:lstStyle/>
+                    <a:p>
+                      <a:pPr algn="r">
+                        <a:defRPr sz="1150">
+                          <a:solidFill>
+                            <a:srgbClr val="0F172A"/>
+                          </a:solidFill>
+                          <a:latin typeface="Segoe UI"/>
+                        </a:defRPr>
+                      </a:pPr>
+                      <a:r>
+                        <a:t>حفظ فوري بقاعدة البيانات مع رسالة نجاح.</a:t>
+                      </a:r>
+                    </a:p>
+                  </a:txBody>
+                  <a:tcPr>
+                    <a:solidFill>
+                      <a:srgbClr val="FFFFFF"/>
+                    </a:solidFill>
+                  </a:tcPr>
+                </a:tc>
+              </a:tr>
+              <a:tr h="692331">
+                <a:tc>
+                  <a:txBody>
+                    <a:bodyPr/>
+                    <a:lstStyle/>
+                    <a:p>
+                      <a:pPr algn="r">
+                        <a:defRPr sz="1150">
+                          <a:solidFill>
+                            <a:srgbClr val="0F172A"/>
+                          </a:solidFill>
+                          <a:latin typeface="Segoe UI"/>
+                        </a:defRPr>
+                      </a:pPr>
+                      <a:r>
+                        <a:t>2</a:t>
+                      </a:r>
+                    </a:p>
+                  </a:txBody>
+                  <a:tcPr>
+                    <a:solidFill>
+                      <a:srgbClr val="F1F5F9"/>
+                    </a:solidFill>
+                  </a:tcPr>
+                </a:tc>
+                <a:tc>
+                  <a:txBody>
+                    <a:bodyPr/>
+                    <a:lstStyle/>
+                    <a:p>
+                      <a:pPr algn="r">
+                        <a:defRPr sz="1150">
+                          <a:solidFill>
+                            <a:srgbClr val="0F172A"/>
+                          </a:solidFill>
+                          <a:latin typeface="Segoe UI"/>
+                        </a:defRPr>
+                      </a:pPr>
+                      <a:r>
+                        <a:t>تطبيق الهاتف (Flutter)</a:t>
+                      </a:r>
+                    </a:p>
+                  </a:txBody>
+                  <a:tcPr>
+                    <a:solidFill>
+                      <a:srgbClr val="F1F5F9"/>
+                    </a:solidFill>
+                  </a:tcPr>
+                </a:tc>
+                <a:tc>
+                  <a:txBody>
+                    <a:bodyPr/>
+                    <a:lstStyle/>
+                    <a:p>
+                      <a:pPr algn="r">
+                        <a:defRPr sz="1150">
+                          <a:solidFill>
+                            <a:srgbClr val="0F172A"/>
+                          </a:solidFill>
+                          <a:latin typeface="Segoe UI"/>
+                        </a:defRPr>
+                      </a:pPr>
+                      <a:r>
+                        <a:t>المريض يبحث عن دواء 'Norvasc' في التطبيق.</a:t>
+                      </a:r>
+                    </a:p>
+                  </a:txBody>
+                  <a:tcPr>
+                    <a:solidFill>
+                      <a:srgbClr val="F1F5F9"/>
+                    </a:solidFill>
+                  </a:tcPr>
+                </a:tc>
+                <a:tc>
+                  <a:txBody>
+                    <a:bodyPr/>
+                    <a:lstStyle/>
+                    <a:p>
+                      <a:pPr algn="r">
+                        <a:defRPr sz="1150">
+                          <a:solidFill>
+                            <a:srgbClr val="0F172A"/>
+                          </a:solidFill>
+                          <a:latin typeface="Segoe UI"/>
+                        </a:defRPr>
+                      </a:pPr>
+                      <a:r>
+                        <a:t>ظهور صيدلية الأمل بالسعر الجديد والمسافة بالأمتار.</a:t>
+                      </a:r>
+                    </a:p>
+                  </a:txBody>
+                  <a:tcPr>
+                    <a:solidFill>
+                      <a:srgbClr val="F1F5F9"/>
+                    </a:solidFill>
+                  </a:tcPr>
+                </a:tc>
+              </a:tr>
+              <a:tr h="692331">
+                <a:tc>
+                  <a:txBody>
+                    <a:bodyPr/>
+                    <a:lstStyle/>
+                    <a:p>
+                      <a:pPr algn="r">
+                        <a:defRPr sz="1150">
+                          <a:solidFill>
+                            <a:srgbClr val="0F172A"/>
+                          </a:solidFill>
+                          <a:latin typeface="Segoe UI"/>
+                        </a:defRPr>
+                      </a:pPr>
+                      <a:r>
+                        <a:t>3</a:t>
+                      </a:r>
+                    </a:p>
+                  </a:txBody>
+                  <a:tcPr>
+                    <a:solidFill>
+                      <a:srgbClr val="FFFFFF"/>
+                    </a:solidFill>
+                  </a:tcPr>
+                </a:tc>
+                <a:tc>
+                  <a:txBody>
+                    <a:bodyPr/>
+                    <a:lstStyle/>
+                    <a:p>
+                      <a:pPr algn="r">
+                        <a:defRPr sz="1150">
+                          <a:solidFill>
+                            <a:srgbClr val="0F172A"/>
+                          </a:solidFill>
+                          <a:latin typeface="Segoe UI"/>
+                        </a:defRPr>
+                      </a:pPr>
+                      <a:r>
+                        <a:t>تطبيق الهاتف</a:t>
+                      </a:r>
+                    </a:p>
+                  </a:txBody>
+                  <a:tcPr>
+                    <a:solidFill>
+                      <a:srgbClr val="FFFFFF"/>
+                    </a:solidFill>
+                  </a:tcPr>
+                </a:tc>
+                <a:tc>
+                  <a:txBody>
+                    <a:bodyPr/>
+                    <a:lstStyle/>
+                    <a:p>
+                      <a:pPr algn="r">
+                        <a:defRPr sz="1150">
+                          <a:solidFill>
+                            <a:srgbClr val="0F172A"/>
+                          </a:solidFill>
+                          <a:latin typeface="Segoe UI"/>
+                        </a:defRPr>
+                      </a:pPr>
+                      <a:r>
+                        <a:t>المريض يحدد حجز عبوة واحدة ويؤكد الحجز فورياً.</a:t>
+                      </a:r>
+                    </a:p>
+                  </a:txBody>
+                  <a:tcPr>
+                    <a:solidFill>
+                      <a:srgbClr val="FFFFFF"/>
+                    </a:solidFill>
+                  </a:tcPr>
+                </a:tc>
+                <a:tc>
+                  <a:txBody>
+                    <a:bodyPr/>
+                    <a:lstStyle/>
+                    <a:p>
+                      <a:pPr algn="r">
+                        <a:defRPr sz="1150">
+                          <a:solidFill>
+                            <a:srgbClr val="0F172A"/>
+                          </a:solidFill>
+                          <a:latin typeface="Segoe UI"/>
+                        </a:defRPr>
+                      </a:pPr>
+                      <a:r>
+                        <a:t>إصدار تذكرة بمؤقت 30 دقيقة وكود حجز فريد.</a:t>
+                      </a:r>
+                    </a:p>
+                  </a:txBody>
+                  <a:tcPr>
+                    <a:solidFill>
+                      <a:srgbClr val="FFFFFF"/>
+                    </a:solidFill>
+                  </a:tcPr>
+                </a:tc>
+              </a:tr>
+              <a:tr h="692331">
+                <a:tc>
+                  <a:txBody>
+                    <a:bodyPr/>
+                    <a:lstStyle/>
+                    <a:p>
+                      <a:pPr algn="r">
+                        <a:defRPr sz="1150">
+                          <a:solidFill>
+                            <a:srgbClr val="0F172A"/>
+                          </a:solidFill>
+                          <a:latin typeface="Segoe UI"/>
+                        </a:defRPr>
+                      </a:pPr>
+                      <a:r>
+                        <a:t>4</a:t>
+                      </a:r>
+                    </a:p>
+                  </a:txBody>
+                  <a:tcPr>
+                    <a:solidFill>
+                      <a:srgbClr val="F1F5F9"/>
+                    </a:solidFill>
+                  </a:tcPr>
+                </a:tc>
+                <a:tc>
+                  <a:txBody>
+                    <a:bodyPr/>
+                    <a:lstStyle/>
+                    <a:p>
+                      <a:pPr algn="r">
+                        <a:defRPr sz="1150">
+                          <a:solidFill>
+                            <a:srgbClr val="0F172A"/>
+                          </a:solidFill>
+                          <a:latin typeface="Segoe UI"/>
+                        </a:defRPr>
+                      </a:pPr>
+                      <a:r>
+                        <a:t>بوابة الويب</a:t>
+                      </a:r>
+                    </a:p>
+                  </a:txBody>
+                  <a:tcPr>
+                    <a:solidFill>
+                      <a:srgbClr val="F1F5F9"/>
+                    </a:solidFill>
+                  </a:tcPr>
+                </a:tc>
+                <a:tc>
+                  <a:txBody>
+                    <a:bodyPr/>
+                    <a:lstStyle/>
+                    <a:p>
+                      <a:pPr algn="r">
+                        <a:defRPr sz="1150">
+                          <a:solidFill>
+                            <a:srgbClr val="0F172A"/>
+                          </a:solidFill>
+                          <a:latin typeface="Segoe UI"/>
+                        </a:defRPr>
+                      </a:pPr>
+                      <a:r>
+                        <a:t>مراقبة شاشة الحجوزات الواردة بالويب.</a:t>
+                      </a:r>
+                    </a:p>
+                  </a:txBody>
+                  <a:tcPr>
+                    <a:solidFill>
+                      <a:srgbClr val="F1F5F9"/>
+                    </a:solidFill>
+                  </a:tcPr>
+                </a:tc>
+                <a:tc>
+                  <a:txBody>
+                    <a:bodyPr/>
+                    <a:lstStyle/>
+                    <a:p>
+                      <a:pPr algn="r">
+                        <a:defRPr sz="1150">
+                          <a:solidFill>
+                            <a:srgbClr val="0F172A"/>
+                          </a:solidFill>
+                          <a:latin typeface="Segoe UI"/>
+                        </a:defRPr>
+                      </a:pPr>
+                      <a:r>
+                        <a:t>ظهور الحجز آلياً وخصم المخزون من 10 إلى 9 علب.</a:t>
+                      </a:r>
+                    </a:p>
+                  </a:txBody>
+                  <a:tcPr>
+                    <a:solidFill>
+                      <a:srgbClr val="F1F5F9"/>
+                    </a:solidFill>
+                  </a:tcPr>
+                </a:tc>
+              </a:tr>
+              <a:tr h="692331">
+                <a:tc>
+                  <a:txBody>
+                    <a:bodyPr/>
+                    <a:lstStyle/>
+                    <a:p>
+                      <a:pPr algn="r">
+                        <a:defRPr sz="1150">
+                          <a:solidFill>
+                            <a:srgbClr val="0F172A"/>
+                          </a:solidFill>
+                          <a:latin typeface="Segoe UI"/>
+                        </a:defRPr>
+                      </a:pPr>
+                      <a:r>
+                        <a:t>5</a:t>
+                      </a:r>
+                    </a:p>
+                  </a:txBody>
+                  <a:tcPr>
+                    <a:solidFill>
+                      <a:srgbClr val="FFFFFF"/>
+                    </a:solidFill>
+                  </a:tcPr>
+                </a:tc>
+                <a:tc>
+                  <a:txBody>
+                    <a:bodyPr/>
+                    <a:lstStyle/>
+                    <a:p>
+                      <a:pPr algn="r">
+                        <a:defRPr sz="1150">
+                          <a:solidFill>
+                            <a:srgbClr val="0F172A"/>
+                          </a:solidFill>
+                          <a:latin typeface="Segoe UI"/>
+                        </a:defRPr>
+                      </a:pPr>
+                      <a:r>
+                        <a:t>بوابة الويب</a:t>
+                      </a:r>
+                    </a:p>
+                  </a:txBody>
+                  <a:tcPr>
+                    <a:solidFill>
+                      <a:srgbClr val="FFFFFF"/>
+                    </a:solidFill>
+                  </a:tcPr>
+                </a:tc>
+                <a:tc>
+                  <a:txBody>
+                    <a:bodyPr/>
+                    <a:lstStyle/>
+                    <a:p>
+                      <a:pPr algn="r">
+                        <a:defRPr sz="1150">
+                          <a:solidFill>
+                            <a:srgbClr val="0F172A"/>
+                          </a:solidFill>
+                          <a:latin typeface="Segoe UI"/>
+                        </a:defRPr>
+                      </a:pPr>
+                      <a:r>
+                        <a:t>الصيدلي يضغط زر 'تم التسليم والمحاسبة'.</a:t>
+                      </a:r>
+                    </a:p>
+                  </a:txBody>
+                  <a:tcPr>
+                    <a:solidFill>
+                      <a:srgbClr val="FFFFFF"/>
+                    </a:solidFill>
+                  </a:tcPr>
+                </a:tc>
+                <a:tc>
+                  <a:txBody>
+                    <a:bodyPr/>
+                    <a:lstStyle/>
+                    <a:p>
+                      <a:pPr algn="r">
+                        <a:defRPr sz="1150">
+                          <a:solidFill>
+                            <a:srgbClr val="0F172A"/>
+                          </a:solidFill>
+                          <a:latin typeface="Segoe UI"/>
+                        </a:defRPr>
+                      </a:pPr>
+                      <a:r>
+                        <a:t>تحديث حالة الحجز فوراً إلى completed.</a:t>
+                      </a:r>
+                    </a:p>
+                  </a:txBody>
+                  <a:tcPr>
+                    <a:solidFill>
+                      <a:srgbClr val="FFFFFF"/>
+                    </a:solidFill>
+                  </a:tcPr>
+                </a:tc>
+              </a:tr>
+              <a:tr h="692334">
+                <a:tc>
+                  <a:txBody>
+                    <a:bodyPr/>
+                    <a:lstStyle/>
+                    <a:p>
+                      <a:pPr algn="r">
+                        <a:defRPr sz="1150">
+                          <a:solidFill>
+                            <a:srgbClr val="0F172A"/>
+                          </a:solidFill>
+                          <a:latin typeface="Segoe UI"/>
+                        </a:defRPr>
+                      </a:pPr>
+                      <a:r>
+                        <a:t>6</a:t>
+                      </a:r>
+                    </a:p>
+                  </a:txBody>
+                  <a:tcPr>
+                    <a:solidFill>
+                      <a:srgbClr val="F1F5F9"/>
+                    </a:solidFill>
+                  </a:tcPr>
+                </a:tc>
+                <a:tc>
+                  <a:txBody>
+                    <a:bodyPr/>
+                    <a:lstStyle/>
+                    <a:p>
+                      <a:pPr algn="r">
+                        <a:defRPr sz="1150">
+                          <a:solidFill>
+                            <a:srgbClr val="0F172A"/>
+                          </a:solidFill>
+                          <a:latin typeface="Segoe UI"/>
+                        </a:defRPr>
+                      </a:pPr>
+                      <a:r>
+                        <a:t>تطبيق الهاتف</a:t>
+                      </a:r>
+                    </a:p>
+                  </a:txBody>
+                  <a:tcPr>
+                    <a:solidFill>
+                      <a:srgbClr val="F1F5F9"/>
+                    </a:solidFill>
+                  </a:tcPr>
+                </a:tc>
+                <a:tc>
+                  <a:txBody>
+                    <a:bodyPr/>
+                    <a:lstStyle/>
+                    <a:p>
+                      <a:pPr algn="r">
+                        <a:defRPr sz="1150">
+                          <a:solidFill>
+                            <a:srgbClr val="0F172A"/>
+                          </a:solidFill>
+                          <a:latin typeface="Segoe UI"/>
+                        </a:defRPr>
+                      </a:pPr>
+                      <a:r>
+                        <a:t>تذكرة المريض المفتوحة تلتقط التأكيد بالخلفية آلياً.</a:t>
+                      </a:r>
+                    </a:p>
+                  </a:txBody>
+                  <a:tcPr>
+                    <a:solidFill>
+                      <a:srgbClr val="F1F5F9"/>
+                    </a:solidFill>
+                  </a:tcPr>
+                </a:tc>
+                <a:tc>
+                  <a:txBody>
+                    <a:bodyPr/>
+                    <a:lstStyle/>
+                    <a:p>
+                      <a:pPr algn="r">
+                        <a:defRPr sz="1150">
+                          <a:solidFill>
+                            <a:srgbClr val="0F172A"/>
+                          </a:solidFill>
+                          <a:latin typeface="Segoe UI"/>
+                        </a:defRPr>
+                      </a:pPr>
+                      <a:r>
+                        <a:t>توقف المؤقت وظهور شارة النجاح الخضراء فوراً.</a:t>
+                      </a:r>
+                    </a:p>
+                  </a:txBody>
+                  <a:tcPr>
+                    <a:solidFill>
+                      <a:srgbClr val="F1F5F9"/>
+                    </a:solidFill>
+                  </a:tcPr>
+                </a:tc>
+              </a:tr>
+            </a:tbl>
+          </a:graphicData>
+        </a:graphic>
+      </p:graphicFrame>
+    </p:spTree>
+  </p:cSld>
+  <p:clrMapOvr>
+    <a:masterClrMapping/>
+  </p:clrMapOvr>
+</p:sld>
+</file>
+
+<file path=ppt/slides/slide14.xml><?xml version="1.0" encoding="utf-8"?>
+<p:sld xmlns:a="http://schemas.openxmlformats.org/drawingml/2006/main" xmlns:p="http://schemas.openxmlformats.org/presentationml/2006/main" xmlns:r="http://schemas.openxmlformats.org/officeDocument/2006/relationships">
+  <p:cSld>
+    <p:spTree>
+      <p:nvGrpSpPr>
+        <p:cNvPr id="1" name=""/>
+        <p:cNvGrpSpPr/>
+        <p:nvPr/>
+      </p:nvGrpSpPr>
+      <p:grpSpPr/>
+      <p:sp>
+        <p:nvSpPr>
+          <p:cNvPr id="2" name="Rectangle 1"/>
+          <p:cNvSpPr/>
+          <p:nvPr/>
+        </p:nvSpPr>
+        <p:spPr>
+          <a:xfrm>
+            <a:off x="0" y="0"/>
+            <a:ext cx="12191695" cy="1051560"/>
+          </a:xfrm>
+          <a:prstGeom prst="rect">
+            <a:avLst/>
+          </a:prstGeom>
+          <a:solidFill>
+            <a:srgbClr val="064E3B"/>
+          </a:solidFill>
+          <a:ln>
+            <a:solidFill>
+              <a:srgbClr val="064E3B"/>
+            </a:solidFill>
+          </a:ln>
+        </p:spPr>
+        <p:style>
+          <a:lnRef idx="1">
+            <a:schemeClr val="accent1"/>
+          </a:lnRef>
+          <a:fillRef idx="3">
+            <a:schemeClr val="accent1"/>
+          </a:fillRef>
+          <a:effectRef idx="2">
+            <a:schemeClr val="accent1"/>
+          </a:effectRef>
+          <a:fontRef idx="minor">
+            <a:schemeClr val="lt1"/>
+          </a:fontRef>
+        </p:style>
+        <p:txBody>
+          <a:bodyPr rtlCol="0" anchor="ctr"/>
+          <a:lstStyle/>
+          <a:p>
+            <a:pPr algn="ctr"/>
+          </a:p>
+        </p:txBody>
+      </p:sp>
+      <p:sp>
+        <p:nvSpPr>
+          <p:cNvPr id="3" name="TextBox 2"/>
+          <p:cNvSpPr txBox="1"/>
+          <p:nvPr/>
+        </p:nvSpPr>
+        <p:spPr>
+          <a:xfrm>
+            <a:off x="731520" y="91440"/>
+            <a:ext cx="10698480" cy="292608"/>
+          </a:xfrm>
+          <a:prstGeom prst="rect">
+            <a:avLst/>
+          </a:prstGeom>
+          <a:noFill/>
+        </p:spPr>
+        <p:txBody>
+          <a:bodyPr wrap="square">
+            <a:spAutoFit/>
+          </a:bodyPr>
+          <a:lstStyle/>
+          <a:p>
+            <a:pPr algn="r">
+              <a:defRPr sz="1200" b="1">
+                <a:solidFill>
+                  <a:srgbClr val="10B981"/>
+                </a:solidFill>
+                <a:latin typeface="Segoe UI"/>
+              </a:defRPr>
+            </a:pPr>
+            <a:r>
+              <a:t>منظومة خادم وعميل موزعة — معمارية 3-Tier Distributed Architecture</a:t>
+            </a:r>
+          </a:p>
+        </p:txBody>
+      </p:sp>
+      <p:sp>
+        <p:nvSpPr>
+          <p:cNvPr id="4" name="TextBox 3"/>
+          <p:cNvSpPr txBox="1"/>
+          <p:nvPr/>
+        </p:nvSpPr>
+        <p:spPr>
+          <a:xfrm>
+            <a:off x="731520" y="384048"/>
+            <a:ext cx="10698480" cy="566928"/>
+          </a:xfrm>
+          <a:prstGeom prst="rect">
+            <a:avLst/>
+          </a:prstGeom>
+          <a:noFill/>
+        </p:spPr>
+        <p:txBody>
+          <a:bodyPr wrap="square">
+            <a:spAutoFit/>
+          </a:bodyPr>
+          <a:lstStyle/>
+          <a:p>
+            <a:pPr algn="r">
+              <a:defRPr sz="2100" b="1">
+                <a:solidFill>
+                  <a:srgbClr val="F8FAFC"/>
+                </a:solidFill>
+                <a:latin typeface="Segoe UI"/>
+              </a:defRPr>
+            </a:pPr>
+            <a:r>
+              <a:t>13. الخاتمة وأهم المعايير والأسئلة التقنية (Technical FAQ)</a:t>
+            </a:r>
+          </a:p>
+        </p:txBody>
+      </p:sp>
+      <p:sp>
+        <p:nvSpPr>
+          <p:cNvPr id="5" name="Rectangle 4"/>
+          <p:cNvSpPr/>
+          <p:nvPr/>
+        </p:nvSpPr>
+        <p:spPr>
+          <a:xfrm>
+            <a:off x="0" y="1051560"/>
+            <a:ext cx="12191695" cy="45720"/>
+          </a:xfrm>
+          <a:prstGeom prst="rect">
+            <a:avLst/>
+          </a:prstGeom>
+          <a:solidFill>
+            <a:srgbClr val="10B981"/>
+          </a:solidFill>
+          <a:ln>
+            <a:noFill/>
+          </a:ln>
+        </p:spPr>
+        <p:style>
+          <a:lnRef idx="1">
+            <a:schemeClr val="accent1"/>
+          </a:lnRef>
+          <a:fillRef idx="3">
+            <a:schemeClr val="accent1"/>
+          </a:fillRef>
+          <a:effectRef idx="2">
+            <a:schemeClr val="accent1"/>
+          </a:effectRef>
+          <a:fontRef idx="minor">
+            <a:schemeClr val="lt1"/>
+          </a:fontRef>
+        </p:style>
+        <p:txBody>
+          <a:bodyPr rtlCol="0" anchor="ctr"/>
+          <a:lstStyle/>
+          <a:p>
+            <a:pPr algn="ctr"/>
+          </a:p>
+        </p:txBody>
+      </p:sp>
+      <p:sp>
+        <p:nvSpPr>
+          <p:cNvPr id="6" name="TextBox 5"/>
+          <p:cNvSpPr txBox="1"/>
+          <p:nvPr/>
+        </p:nvSpPr>
+        <p:spPr>
+          <a:xfrm>
+            <a:off x="731520" y="6473952"/>
+            <a:ext cx="10698480" cy="292608"/>
+          </a:xfrm>
+          <a:prstGeom prst="rect">
+            <a:avLst/>
+          </a:prstGeom>
+          <a:noFill/>
+        </p:spPr>
+        <p:txBody>
+          <a:bodyPr wrap="none">
+            <a:spAutoFit/>
+          </a:bodyPr>
+          <a:lstStyle/>
+          <a:p>
+            <a:pPr algn="ctr">
+              <a:defRPr sz="1050">
+                <a:solidFill>
+                  <a:srgbClr val="64748B"/>
+                </a:solidFill>
+                <a:latin typeface="Segoe UI"/>
+              </a:defRPr>
+            </a:pPr>
+            <a:r>
+              <a:t>PharmaConnect System  |  نظام تتبع وفرة الأدوية وإدارة المخزون متعدد الصيدليات  |  2026</a:t>
+            </a:r>
+          </a:p>
+        </p:txBody>
+      </p:sp>
+      <p:sp>
+        <p:nvSpPr>
+          <p:cNvPr id="7" name="Rounded Rectangle 6"/>
+          <p:cNvSpPr/>
+          <p:nvPr/>
+        </p:nvSpPr>
+        <p:spPr>
+          <a:xfrm>
+            <a:off x="731520" y="1325880"/>
+            <a:ext cx="5212080" cy="4846320"/>
+          </a:xfrm>
+          <a:prstGeom prst="roundRect">
+            <a:avLst/>
+          </a:prstGeom>
+          <a:solidFill>
+            <a:srgbClr val="F0FDF4"/>
+          </a:solidFill>
+          <a:ln w="19050">
+            <a:solidFill>
+              <a:srgbClr val="86EFAC"/>
+            </a:solidFill>
+          </a:ln>
+        </p:spPr>
+        <p:style>
+          <a:lnRef idx="1">
+            <a:schemeClr val="accent1"/>
+          </a:lnRef>
+          <a:fillRef idx="3">
+            <a:schemeClr val="accent1"/>
+          </a:fillRef>
+          <a:effectRef idx="2">
+            <a:schemeClr val="accent1"/>
+          </a:effectRef>
+          <a:fontRef idx="minor">
+            <a:schemeClr val="lt1"/>
+          </a:fontRef>
+        </p:style>
+        <p:txBody>
+          <a:bodyPr rtlCol="0" anchor="ctr"/>
+          <a:lstStyle/>
+          <a:p>
+            <a:pPr algn="ctr"/>
+          </a:p>
+        </p:txBody>
+      </p:sp>
+      <p:sp>
+        <p:nvSpPr>
+          <p:cNvPr id="8" name="TextBox 7"/>
+          <p:cNvSpPr txBox="1"/>
+          <p:nvPr/>
+        </p:nvSpPr>
+        <p:spPr>
+          <a:xfrm>
+            <a:off x="914400" y="1463039"/>
+            <a:ext cx="4846320" cy="4572000"/>
+          </a:xfrm>
+          <a:prstGeom prst="rect">
+            <a:avLst/>
+          </a:prstGeom>
+          <a:noFill/>
+        </p:spPr>
+        <p:txBody>
+          <a:bodyPr wrap="square">
+            <a:spAutoFit/>
+          </a:bodyPr>
+          <a:lstStyle/>
+          <a:p>
+            <a:pPr algn="r">
+              <a:defRPr sz="1600" b="1">
+                <a:solidFill>
+                  <a:srgbClr val="064E3B"/>
+                </a:solidFill>
+                <a:latin typeface="Segoe UI"/>
+              </a:defRPr>
+            </a:pPr>
+            <a:r>
+              <a:t>أهم المنجزات والتطلعات المستقبلية</a:t>
+            </a:r>
+          </a:p>
+          <a:p>
+            <a:pPr algn="r">
+              <a:spcBef>
+                <a:spcPts val="600"/>
+              </a:spcBef>
+              <a:defRPr sz="1250">
+                <a:solidFill>
+                  <a:srgbClr val="0F172A"/>
+                </a:solidFill>
+                <a:latin typeface="Segoe UI"/>
+              </a:defRPr>
+            </a:pPr>
+            <a:r>
+              <a:t>• منظومة متكاملة 3-Tier: جاهزة للتشغيل التجاري والربط الطبي.</a:t>
+            </a:r>
+          </a:p>
+          <a:p>
+            <a:pPr algn="r">
+              <a:spcBef>
+                <a:spcPts val="600"/>
+              </a:spcBef>
+              <a:defRPr sz="1250">
+                <a:solidFill>
+                  <a:srgbClr val="0F172A"/>
+                </a:solidFill>
+                <a:latin typeface="Segoe UI"/>
+              </a:defRPr>
+            </a:pPr>
+            <a:r>
+              <a:t>• استقلالية تامة: الاعتماد على تقنيات مجانية 100% للخرائط والبيانات.</a:t>
+            </a:r>
+          </a:p>
+          <a:p>
+            <a:pPr algn="r">
+              <a:spcBef>
+                <a:spcPts val="600"/>
+              </a:spcBef>
+              <a:defRPr sz="1250">
+                <a:solidFill>
+                  <a:srgbClr val="0F172A"/>
+                </a:solidFill>
+                <a:latin typeface="Segoe UI"/>
+              </a:defRPr>
+            </a:pPr>
+            <a:r>
+              <a:t>• آفاق التطوير القادمة:</a:t>
+            </a:r>
+          </a:p>
+          <a:p>
+            <a:pPr algn="r">
+              <a:spcBef>
+                <a:spcPts val="600"/>
+              </a:spcBef>
+              <a:defRPr sz="1250">
+                <a:solidFill>
+                  <a:srgbClr val="0F172A"/>
+                </a:solidFill>
+                <a:latin typeface="Segoe UI"/>
+              </a:defRPr>
+            </a:pPr>
+            <a:r>
+              <a:t>• دمج الدفع بالمحافظ الرقمية اليمنية (كاش، جوالي، فلوسك).</a:t>
+            </a:r>
+          </a:p>
+          <a:p>
+            <a:pPr algn="r">
+              <a:spcBef>
+                <a:spcPts val="600"/>
+              </a:spcBef>
+              <a:defRPr sz="1250">
+                <a:solidFill>
+                  <a:srgbClr val="0F172A"/>
+                </a:solidFill>
+                <a:latin typeface="Segoe UI"/>
+              </a:defRPr>
+            </a:pPr>
+            <a:r>
+              <a:t>• إدارة أساطيل توصيل الأدوية للمنازل.</a:t>
+            </a:r>
+          </a:p>
+          <a:p>
+            <a:pPr algn="r">
+              <a:spcBef>
+                <a:spcPts val="600"/>
+              </a:spcBef>
+              <a:defRPr sz="1250">
+                <a:solidFill>
+                  <a:srgbClr val="0F172A"/>
+                </a:solidFill>
+                <a:latin typeface="Segoe UI"/>
+              </a:defRPr>
+            </a:pPr>
+            <a:r>
+              <a:t>• التنبؤ بنفاد الأدوية الحرجة بالذكاء الاصطناعي.</a:t>
+            </a:r>
+          </a:p>
+        </p:txBody>
+      </p:sp>
+      <p:sp>
+        <p:nvSpPr>
+          <p:cNvPr id="9" name="Rounded Rectangle 8"/>
+          <p:cNvSpPr/>
+          <p:nvPr/>
+        </p:nvSpPr>
+        <p:spPr>
+          <a:xfrm>
+            <a:off x="6217920" y="1325880"/>
+            <a:ext cx="5212080" cy="4846320"/>
+          </a:xfrm>
+          <a:prstGeom prst="roundRect">
+            <a:avLst/>
+          </a:prstGeom>
+          <a:solidFill>
+            <a:srgbClr val="FFFFFF"/>
+          </a:solidFill>
+          <a:ln w="19050">
+            <a:solidFill>
+              <a:srgbClr val="E2E8F0"/>
+            </a:solidFill>
+          </a:ln>
+        </p:spPr>
+        <p:style>
+          <a:lnRef idx="1">
+            <a:schemeClr val="accent1"/>
+          </a:lnRef>
+          <a:fillRef idx="3">
+            <a:schemeClr val="accent1"/>
+          </a:fillRef>
+          <a:effectRef idx="2">
+            <a:schemeClr val="accent1"/>
+          </a:effectRef>
+          <a:fontRef idx="minor">
+            <a:schemeClr val="lt1"/>
+          </a:fontRef>
+        </p:style>
+        <p:txBody>
+          <a:bodyPr rtlCol="0" anchor="ctr"/>
+          <a:lstStyle/>
+          <a:p>
+            <a:pPr algn="ctr"/>
+          </a:p>
+        </p:txBody>
+      </p:sp>
+      <p:sp>
+        <p:nvSpPr>
+          <p:cNvPr id="10" name="TextBox 9"/>
+          <p:cNvSpPr txBox="1"/>
+          <p:nvPr/>
+        </p:nvSpPr>
+        <p:spPr>
+          <a:xfrm>
+            <a:off x="6400800" y="1463039"/>
+            <a:ext cx="4846320" cy="4572000"/>
+          </a:xfrm>
+          <a:prstGeom prst="rect">
+            <a:avLst/>
+          </a:prstGeom>
+          <a:noFill/>
+        </p:spPr>
+        <p:txBody>
+          <a:bodyPr wrap="square">
+            <a:spAutoFit/>
+          </a:bodyPr>
+          <a:lstStyle/>
+          <a:p>
+            <a:pPr algn="r">
+              <a:defRPr sz="1600" b="1">
+                <a:solidFill>
+                  <a:srgbClr val="064E3B"/>
+                </a:solidFill>
+                <a:latin typeface="Segoe UI"/>
+              </a:defRPr>
+            </a:pPr>
+            <a:r>
+              <a:t>أهم الأسئلة التقنية الشائعة (Technical FAQ)</a:t>
+            </a:r>
+          </a:p>
+          <a:p>
+            <a:pPr algn="r">
+              <a:spcBef>
+                <a:spcPts val="600"/>
+              </a:spcBef>
+              <a:defRPr sz="1250">
+                <a:solidFill>
+                  <a:srgbClr val="0F172A"/>
+                </a:solidFill>
+                <a:latin typeface="Segoe UI"/>
+              </a:defRPr>
+            </a:pPr>
+            <a:r>
+              <a:t>• س: أين معالجة الـ Race Condition؟</a:t>
+            </a:r>
+            <a:br/>
+            <a:r>
+              <a:t>ج: بدالة createReservation عبر lockForUpdate() داخل DB::transaction().</a:t>
+            </a:r>
+          </a:p>
+          <a:p>
+            <a:pPr algn="r">
+              <a:spcBef>
+                <a:spcPts val="600"/>
+              </a:spcBef>
+              <a:defRPr sz="1250">
+                <a:solidFill>
+                  <a:srgbClr val="0F172A"/>
+                </a:solidFill>
+                <a:latin typeface="Segoe UI"/>
+              </a:defRPr>
+            </a:pPr>
+            <a:r>
+              <a:t>• س: أين خوارزمية المسافة الكروية؟</a:t>
+            </a:r>
+            <a:br/>
+            <a:r>
+              <a:t>ج: بدالة calculateHaversineDistance() بنصف قطر الأرض 6371 كم.</a:t>
+            </a:r>
+          </a:p>
+          <a:p>
+            <a:pPr algn="r">
+              <a:spcBef>
+                <a:spcPts val="600"/>
+              </a:spcBef>
+              <a:defRPr sz="1250">
+                <a:solidFill>
+                  <a:srgbClr val="0F172A"/>
+                </a:solidFill>
+                <a:latin typeface="Segoe UI"/>
+              </a:defRPr>
+            </a:pPr>
+            <a:r>
+              <a:t>• س: كيف يعمل الأمان بدون Session بالموبايل؟</a:t>
+            </a:r>
+            <a:br/>
+            <a:r>
+              <a:t>ج: عبر Bearer Token مشفر من حزمة Laravel Sanctum.</a:t>
+            </a:r>
+          </a:p>
+          <a:p>
+            <a:pPr algn="r">
+              <a:spcBef>
+                <a:spcPts val="600"/>
+              </a:spcBef>
+              <a:defRPr sz="1250">
+                <a:solidFill>
+                  <a:srgbClr val="0F172A"/>
+                </a:solidFill>
+                <a:latin typeface="Segoe UI"/>
+              </a:defRPr>
+            </a:pPr>
+            <a:r>
+              <a:t>• س: كيف يتكامل النظام مع برامج المحاسبة القائمة؟</a:t>
+            </a:r>
+            <a:br/>
+            <a:r>
+              <a:t>ج: عبر Partner B2B RESTful API لمزامنة المخزون وصرف الحجوزات آلياً.</a:t>
             </a:r>
           </a:p>
         </p:txBody>
@@ -3863,7 +6335,7 @@
         <p:spPr>
           <a:xfrm>
             <a:off x="0" y="0"/>
-            <a:ext cx="12191695" cy="1097280"/>
+            <a:ext cx="12191695" cy="1051560"/>
           </a:xfrm>
           <a:prstGeom prst="rect">
             <a:avLst/>
@@ -3907,8 +6379,8 @@
         </p:nvSpPr>
         <p:spPr>
           <a:xfrm>
-            <a:off x="731520" y="109728"/>
-            <a:ext cx="10698480" cy="320040"/>
+            <a:off x="731520" y="91440"/>
+            <a:ext cx="10698480" cy="292608"/>
           </a:xfrm>
           <a:prstGeom prst="rect">
             <a:avLst/>
@@ -3922,7 +6394,7 @@
           <a:lstStyle/>
           <a:p>
             <a:pPr algn="r">
-              <a:defRPr sz="1300" b="1">
+              <a:defRPr sz="1200" b="1">
                 <a:solidFill>
                   <a:srgbClr val="10B981"/>
                 </a:solidFill>
@@ -3930,7 +6402,7 @@
               </a:defRPr>
             </a:pPr>
             <a:r>
-              <a:t>مشروع تخرج — نظام خادم وعميل (Level 4)</a:t>
+              <a:t>منظومة خادم وعميل موزعة — معمارية 3-Tier Distributed Architecture</a:t>
             </a:r>
           </a:p>
         </p:txBody>
@@ -3943,8 +6415,8 @@
         </p:nvSpPr>
         <p:spPr>
           <a:xfrm>
-            <a:off x="731520" y="411480"/>
-            <a:ext cx="10698480" cy="594360"/>
+            <a:off x="731520" y="384048"/>
+            <a:ext cx="10698480" cy="566928"/>
           </a:xfrm>
           <a:prstGeom prst="rect">
             <a:avLst/>
@@ -3958,7 +6430,7 @@
           <a:lstStyle/>
           <a:p>
             <a:pPr algn="r">
-              <a:defRPr sz="2200" b="1">
+              <a:defRPr sz="2100" b="1">
                 <a:solidFill>
                   <a:srgbClr val="F8FAFC"/>
                 </a:solidFill>
@@ -3979,8 +6451,8 @@
         </p:nvSpPr>
         <p:spPr>
           <a:xfrm>
-            <a:off x="0" y="1097280"/>
-            <a:ext cx="12191695" cy="54864"/>
+            <a:off x="0" y="1051560"/>
+            <a:ext cx="12191695" cy="45720"/>
           </a:xfrm>
           <a:prstGeom prst="rect">
             <a:avLst/>
@@ -4022,8 +6494,8 @@
         </p:nvSpPr>
         <p:spPr>
           <a:xfrm>
-            <a:off x="731520" y="6446520"/>
-            <a:ext cx="10698480" cy="320040"/>
+            <a:off x="731520" y="6473952"/>
+            <a:ext cx="10698480" cy="292608"/>
           </a:xfrm>
           <a:prstGeom prst="rect">
             <a:avLst/>
@@ -4037,7 +6509,7 @@
           <a:lstStyle/>
           <a:p>
             <a:pPr algn="ctr">
-              <a:defRPr sz="1100">
+              <a:defRPr sz="1050">
                 <a:solidFill>
                   <a:srgbClr val="64748B"/>
                 </a:solidFill>
@@ -4058,14 +6530,14 @@
         </p:nvSpPr>
         <p:spPr>
           <a:xfrm>
-            <a:off x="731520" y="1463040"/>
-            <a:ext cx="5120640" cy="4572000"/>
+            <a:off x="731520" y="1325880"/>
+            <a:ext cx="5212080" cy="4846320"/>
           </a:xfrm>
           <a:prstGeom prst="roundRect">
             <a:avLst/>
           </a:prstGeom>
           <a:solidFill>
-            <a:srgbClr val="FFFFFF"/>
+            <a:srgbClr val="FEF2F2"/>
           </a:solidFill>
           <a:ln w="19050">
             <a:solidFill>
@@ -4103,8 +6575,8 @@
         </p:nvSpPr>
         <p:spPr>
           <a:xfrm>
-            <a:off x="914400" y="1600200"/>
-            <a:ext cx="4754879" cy="4297680"/>
+            <a:off x="914400" y="1463039"/>
+            <a:ext cx="4846320" cy="4572000"/>
           </a:xfrm>
           <a:prstGeom prst="rect">
             <a:avLst/>
@@ -4118,9 +6590,9 @@
           <a:lstStyle/>
           <a:p>
             <a:pPr algn="r">
-              <a:defRPr sz="1700" b="1">
-                <a:solidFill>
-                  <a:srgbClr val="DC2626"/>
+              <a:defRPr sz="1600" b="1">
+                <a:solidFill>
+                  <a:srgbClr val="EF4444"/>
                 </a:solidFill>
                 <a:latin typeface="Segoe UI"/>
               </a:defRPr>
@@ -4132,9 +6604,9 @@
           <a:p>
             <a:pPr algn="r">
               <a:spcBef>
-                <a:spcPts val="800"/>
+                <a:spcPts val="600"/>
               </a:spcBef>
-              <a:defRPr sz="1300">
+              <a:defRPr sz="1250">
                 <a:solidFill>
                   <a:srgbClr val="0F172A"/>
                 </a:solidFill>
@@ -4142,15 +6614,15 @@
               </a:defRPr>
             </a:pPr>
             <a:r>
-              <a:t>• البحث العشوائي المتعب: هدر من 45 إلى 120 دقيقة سيراً على الأقدام للبحث عن دواء حرج.</a:t>
+              <a:t>• البحث العشوائي المتعب: هدر من 45 إلى 120 دقيقة سيراً على الأقدام للبحث عن دواء حرج بين الصيدليات.</a:t>
             </a:r>
           </a:p>
           <a:p>
             <a:pPr algn="r">
               <a:spcBef>
-                <a:spcPts val="800"/>
+                <a:spcPts val="600"/>
               </a:spcBef>
-              <a:defRPr sz="1300">
+              <a:defRPr sz="1250">
                 <a:solidFill>
                   <a:srgbClr val="0F172A"/>
                 </a:solidFill>
@@ -4158,15 +6630,15 @@
               </a:defRPr>
             </a:pPr>
             <a:r>
-              <a:t>• عزلة الأنظمة الصيدلانية: كل صيدلية تعمل كجزيرة منعزلة بقاعدة بيانات محلية مغلقة.</a:t>
+              <a:t>• عزلة الأنظمة الصيدلانية: كل صيدلية تعمل كجزيرة منعزلة بقاعدة بيانات محلية مغلقة دون ربط مركزي.</a:t>
             </a:r>
           </a:p>
           <a:p>
             <a:pPr algn="r">
               <a:spcBef>
-                <a:spcPts val="800"/>
+                <a:spcPts val="600"/>
               </a:spcBef>
-              <a:defRPr sz="1300">
+              <a:defRPr sz="1250">
                 <a:solidFill>
                   <a:srgbClr val="0F172A"/>
                 </a:solidFill>
@@ -4174,15 +6646,15 @@
               </a:defRPr>
             </a:pPr>
             <a:r>
-              <a:t>• ظاهرة الاتصال الكاذب: التأكيد شفهياً بالهاتف ثم بيع الدواء لعميل آخر قبل وصول المريض.</a:t>
+              <a:t>• ظاهرة الاتصال الكاذب: التأكيد شفهياً بالهاتف ثم بيع الدواء لعميل آخر قبل وصول المريض الفعلي.</a:t>
             </a:r>
           </a:p>
           <a:p>
             <a:pPr algn="r">
               <a:spcBef>
-                <a:spcPts val="800"/>
+                <a:spcPts val="600"/>
               </a:spcBef>
-              <a:defRPr sz="1300">
+              <a:defRPr sz="1250">
                 <a:solidFill>
                   <a:srgbClr val="0F172A"/>
                 </a:solidFill>
@@ -4190,7 +6662,7 @@
               </a:defRPr>
             </a:pPr>
             <a:r>
-              <a:t>• انعدام الشفافية في الأسعار: تباين أسعار الأدوية لنفس الصنف بين صيدليات الحي الواحد.</a:t>
+              <a:t>• انعدام الشفافية في الأسعار: تباين حاد في أسعار نفس الصنف الدوائي بين صيدليات الحي الواحد.</a:t>
             </a:r>
           </a:p>
         </p:txBody>
@@ -4203,18 +6675,18 @@
         </p:nvSpPr>
         <p:spPr>
           <a:xfrm>
-            <a:off x="6217920" y="1463040"/>
-            <a:ext cx="5212080" cy="4572000"/>
+            <a:off x="6217920" y="1325880"/>
+            <a:ext cx="5212080" cy="4846320"/>
           </a:xfrm>
           <a:prstGeom prst="roundRect">
             <a:avLst/>
           </a:prstGeom>
           <a:solidFill>
-            <a:srgbClr val="FFFFFF"/>
+            <a:srgbClr val="F0FDF4"/>
           </a:solidFill>
           <a:ln w="19050">
             <a:solidFill>
-              <a:srgbClr val="A7F3D0"/>
+              <a:srgbClr val="86EFAC"/>
             </a:solidFill>
           </a:ln>
         </p:spPr>
@@ -4248,8 +6720,8 @@
         </p:nvSpPr>
         <p:spPr>
           <a:xfrm>
-            <a:off x="6400800" y="1600200"/>
-            <a:ext cx="4846320" cy="4297680"/>
+            <a:off x="6400800" y="1463039"/>
+            <a:ext cx="4846320" cy="4572000"/>
           </a:xfrm>
           <a:prstGeom prst="rect">
             <a:avLst/>
@@ -4263,7 +6735,7 @@
           <a:lstStyle/>
           <a:p>
             <a:pPr algn="r">
-              <a:defRPr sz="1700" b="1">
+              <a:defRPr sz="1600" b="1">
                 <a:solidFill>
                   <a:srgbClr val="064E3B"/>
                 </a:solidFill>
@@ -4271,15 +6743,15 @@
               </a:defRPr>
             </a:pPr>
             <a:r>
-              <a:t>أهداف وحلول PharmaConnect الهندسية</a:t>
+              <a:t>حلول PharmaConnect الهندسية المبتكرة</a:t>
             </a:r>
           </a:p>
           <a:p>
             <a:pPr algn="r">
               <a:spcBef>
-                <a:spcPts val="800"/>
+                <a:spcPts val="600"/>
               </a:spcBef>
-              <a:defRPr sz="1300">
+              <a:defRPr sz="1250">
                 <a:solidFill>
                   <a:srgbClr val="0F172A"/>
                 </a:solidFill>
@@ -4287,15 +6759,15 @@
               </a:defRPr>
             </a:pPr>
             <a:r>
-              <a:t>• استعلام لحظي كروي: معرفة أماكن توفر الدواء فورياً بالاسم العلمي أو التجاري مع المسافة بالأمتار.</a:t>
+              <a:t>• استعلام جغرافي كروي فوري: استكشاف الصيدليات المتوفر لديها الدواء فورياً مع المسافة المحددة بالأمتار.</a:t>
             </a:r>
           </a:p>
           <a:p>
             <a:pPr algn="r">
               <a:spcBef>
-                <a:spcPts val="800"/>
+                <a:spcPts val="600"/>
               </a:spcBef>
-              <a:defRPr sz="1300">
+              <a:defRPr sz="1250">
                 <a:solidFill>
                   <a:srgbClr val="0F172A"/>
                 </a:solidFill>
@@ -4303,15 +6775,15 @@
               </a:defRPr>
             </a:pPr>
             <a:r>
-              <a:t>• حجز مؤقت عادل (30 دقيقة TTL): يضمن وصول المريض للدواء دون تعطيل الصيدلي في حال تخلفه.</a:t>
+              <a:t>• حجز مؤقت عادل (30 دقيقة TTL): ضمان حق المريض بالوصول وحق الصيدلي في تصريف الدواء دون تجميده.</a:t>
             </a:r>
           </a:p>
           <a:p>
             <a:pPr algn="r">
               <a:spcBef>
-                <a:spcPts val="800"/>
+                <a:spcPts val="600"/>
               </a:spcBef>
-              <a:defRPr sz="1300">
+              <a:defRPr sz="1250">
                 <a:solidFill>
                   <a:srgbClr val="0F172A"/>
                 </a:solidFill>
@@ -4319,15 +6791,15 @@
               </a:defRPr>
             </a:pPr>
             <a:r>
-              <a:t>• حماية المخزون من التنافس (Zero Race-Conditions): قفل تشاؤمي صارم يمنع البيع المزدوج.</a:t>
+              <a:t>• حماية المخزون بنسبة 0% أخطاء: منع الـ Race Condition بالقفل التشاؤمي الحصري على مستوى الصف.</a:t>
             </a:r>
           </a:p>
           <a:p>
             <a:pPr algn="r">
               <a:spcBef>
-                <a:spcPts val="800"/>
+                <a:spcPts val="600"/>
               </a:spcBef>
-              <a:defRPr sz="1300">
+              <a:defRPr sz="1250">
                 <a:solidFill>
                   <a:srgbClr val="0F172A"/>
                 </a:solidFill>
@@ -4335,7 +6807,7 @@
               </a:defRPr>
             </a:pPr>
             <a:r>
-              <a:t>• مرونة العمل ومراعاة بيئة اليمن: دعم كامل للعمل حتى عند ضعف وتذبذب شبكة الإنترنت.</a:t>
+              <a:t>• مرونة عالية وتكامل محاسبي: تطبيق هاتف سريع وبوابة ويب متجاوبة مع واجهات B2B لربط برامج الكاشير.</a:t>
             </a:r>
           </a:p>
         </p:txBody>
@@ -4367,7 +6839,7 @@
         <p:spPr>
           <a:xfrm>
             <a:off x="0" y="0"/>
-            <a:ext cx="12191695" cy="1097280"/>
+            <a:ext cx="12191695" cy="1051560"/>
           </a:xfrm>
           <a:prstGeom prst="rect">
             <a:avLst/>
@@ -4411,8 +6883,8 @@
         </p:nvSpPr>
         <p:spPr>
           <a:xfrm>
-            <a:off x="731520" y="109728"/>
-            <a:ext cx="10698480" cy="320040"/>
+            <a:off x="731520" y="91440"/>
+            <a:ext cx="10698480" cy="292608"/>
           </a:xfrm>
           <a:prstGeom prst="rect">
             <a:avLst/>
@@ -4426,7 +6898,7 @@
           <a:lstStyle/>
           <a:p>
             <a:pPr algn="r">
-              <a:defRPr sz="1300" b="1">
+              <a:defRPr sz="1200" b="1">
                 <a:solidFill>
                   <a:srgbClr val="10B981"/>
                 </a:solidFill>
@@ -4434,7 +6906,7 @@
               </a:defRPr>
             </a:pPr>
             <a:r>
-              <a:t>مشروع تخرج — نظام خادم وعميل (Level 4)</a:t>
+              <a:t>منظومة خادم وعميل موزعة — معمارية 3-Tier Distributed Architecture</a:t>
             </a:r>
           </a:p>
         </p:txBody>
@@ -4447,8 +6919,8 @@
         </p:nvSpPr>
         <p:spPr>
           <a:xfrm>
-            <a:off x="731520" y="411480"/>
-            <a:ext cx="10698480" cy="594360"/>
+            <a:off x="731520" y="384048"/>
+            <a:ext cx="10698480" cy="566928"/>
           </a:xfrm>
           <a:prstGeom prst="rect">
             <a:avLst/>
@@ -4462,7 +6934,7 @@
           <a:lstStyle/>
           <a:p>
             <a:pPr algn="r">
-              <a:defRPr sz="2200" b="1">
+              <a:defRPr sz="2100" b="1">
                 <a:solidFill>
                   <a:srgbClr val="F8FAFC"/>
                 </a:solidFill>
@@ -4470,7 +6942,7 @@
               </a:defRPr>
             </a:pPr>
             <a:r>
-              <a:t>2. المعمارية الموزعة ثلاثية الطبقات (3-Tier Distributed Architecture)</a:t>
+              <a:t>2. المعمارية الموزعة ثلاثية الطبقات (3-Tier Architecture)</a:t>
             </a:r>
           </a:p>
         </p:txBody>
@@ -4483,8 +6955,8 @@
         </p:nvSpPr>
         <p:spPr>
           <a:xfrm>
-            <a:off x="0" y="1097280"/>
-            <a:ext cx="12191695" cy="54864"/>
+            <a:off x="0" y="1051560"/>
+            <a:ext cx="12191695" cy="45720"/>
           </a:xfrm>
           <a:prstGeom prst="rect">
             <a:avLst/>
@@ -4526,8 +6998,8 @@
         </p:nvSpPr>
         <p:spPr>
           <a:xfrm>
-            <a:off x="731520" y="6446520"/>
-            <a:ext cx="10698480" cy="320040"/>
+            <a:off x="731520" y="6473952"/>
+            <a:ext cx="10698480" cy="292608"/>
           </a:xfrm>
           <a:prstGeom prst="rect">
             <a:avLst/>
@@ -4541,7 +7013,7 @@
           <a:lstStyle/>
           <a:p>
             <a:pPr algn="ctr">
-              <a:defRPr sz="1100">
+              <a:defRPr sz="1050">
                 <a:solidFill>
                   <a:srgbClr val="64748B"/>
                 </a:solidFill>
@@ -4562,8 +7034,8 @@
         </p:nvSpPr>
         <p:spPr>
           <a:xfrm>
-            <a:off x="731520" y="1463040"/>
-            <a:ext cx="3291840" cy="4572000"/>
+            <a:off x="731520" y="1325880"/>
+            <a:ext cx="3383280" cy="4846320"/>
           </a:xfrm>
           <a:prstGeom prst="roundRect">
             <a:avLst/>
@@ -4607,8 +7079,8 @@
         </p:nvSpPr>
         <p:spPr>
           <a:xfrm>
-            <a:off x="914400" y="1600200"/>
-            <a:ext cx="2926080" cy="4297680"/>
+            <a:off x="914400" y="1463039"/>
+            <a:ext cx="3017520" cy="4572000"/>
           </a:xfrm>
           <a:prstGeom prst="rect">
             <a:avLst/>
@@ -4622,23 +7094,23 @@
           <a:lstStyle/>
           <a:p>
             <a:pPr algn="r">
-              <a:defRPr sz="1700" b="1">
-                <a:solidFill>
-                  <a:srgbClr val="0D9488"/>
-                </a:solidFill>
-                <a:latin typeface="Segoe UI"/>
-              </a:defRPr>
-            </a:pPr>
-            <a:r>
-              <a:t>1. Presentation Tier (العرض)</a:t>
+              <a:defRPr sz="1600" b="1">
+                <a:solidFill>
+                  <a:srgbClr val="064E3B"/>
+                </a:solidFill>
+                <a:latin typeface="Segoe UI"/>
+              </a:defRPr>
+            </a:pPr>
+            <a:r>
+              <a:t>1. Presentation Tier</a:t>
             </a:r>
           </a:p>
           <a:p>
             <a:pPr algn="r">
               <a:spcBef>
-                <a:spcPts val="800"/>
+                <a:spcPts val="600"/>
               </a:spcBef>
-              <a:defRPr sz="1300">
+              <a:defRPr sz="1250">
                 <a:solidFill>
                   <a:srgbClr val="0F172A"/>
                 </a:solidFill>
@@ -4646,15 +7118,15 @@
               </a:defRPr>
             </a:pPr>
             <a:r>
-              <a:t>• تطبيق المريض (Flutter): واجهة لحظية للبحث والحجز.</a:t>
+              <a:t>• عميل الهاتف (Flutter): للمرضى للبحث والحجز اللحظي.</a:t>
             </a:r>
           </a:p>
           <a:p>
             <a:pPr algn="r">
               <a:spcBef>
-                <a:spcPts val="800"/>
+                <a:spcPts val="600"/>
               </a:spcBef>
-              <a:defRPr sz="1300">
+              <a:defRPr sz="1250">
                 <a:solidFill>
                   <a:srgbClr val="0F172A"/>
                 </a:solidFill>
@@ -4662,15 +7134,15 @@
               </a:defRPr>
             </a:pPr>
             <a:r>
-              <a:t>• بوابة الصيدلية (Web Portal): تعديل المخزون والأسعار.</a:t>
+              <a:t>• بوابة الويب (Blade): للصيدليات لإدارة المخزون والحجوزات.</a:t>
             </a:r>
           </a:p>
           <a:p>
             <a:pPr algn="r">
               <a:spcBef>
-                <a:spcPts val="800"/>
+                <a:spcPts val="600"/>
               </a:spcBef>
-              <a:defRPr sz="1300">
+              <a:defRPr sz="1250">
                 <a:solidFill>
                   <a:srgbClr val="0F172A"/>
                 </a:solidFill>
@@ -4678,15 +7150,15 @@
               </a:defRPr>
             </a:pPr>
             <a:r>
-              <a:t>• أنظمة الصيدليات (B2B): كاشير ونقاط البيع POS.</a:t>
+              <a:t>• أنظمة الكاشير (B2B): ربط نقاط البيع المحاسبية.</a:t>
             </a:r>
           </a:p>
           <a:p>
             <a:pPr algn="r">
               <a:spcBef>
-                <a:spcPts val="800"/>
+                <a:spcPts val="600"/>
               </a:spcBef>
-              <a:defRPr sz="1300">
+              <a:defRPr sz="1250">
                 <a:solidFill>
                   <a:srgbClr val="0F172A"/>
                 </a:solidFill>
@@ -4694,7 +7166,7 @@
               </a:defRPr>
             </a:pPr>
             <a:r>
-              <a:t>• قنوات اتصال خفيفة: JSON Over HTTPS (Port 443).</a:t>
+              <a:t>• تخاطب موحد: Stateless RESTful JSON عبر HTTPS.</a:t>
             </a:r>
           </a:p>
         </p:txBody>
@@ -4707,18 +7179,18 @@
         </p:nvSpPr>
         <p:spPr>
           <a:xfrm>
-            <a:off x="4389120" y="1463040"/>
-            <a:ext cx="3657600" cy="4572000"/>
+            <a:off x="4389120" y="1325880"/>
+            <a:ext cx="3383280" cy="4846320"/>
           </a:xfrm>
           <a:prstGeom prst="roundRect">
             <a:avLst/>
           </a:prstGeom>
           <a:solidFill>
-            <a:srgbClr val="D1FAE5"/>
+            <a:srgbClr val="F0FDF4"/>
           </a:solidFill>
           <a:ln w="19050">
             <a:solidFill>
-              <a:srgbClr val="10B981"/>
+              <a:srgbClr val="86EFAC"/>
             </a:solidFill>
           </a:ln>
         </p:spPr>
@@ -4752,8 +7224,8 @@
         </p:nvSpPr>
         <p:spPr>
           <a:xfrm>
-            <a:off x="4572000" y="1600200"/>
-            <a:ext cx="3291840" cy="4297680"/>
+            <a:off x="4572000" y="1463039"/>
+            <a:ext cx="3017520" cy="4572000"/>
           </a:xfrm>
           <a:prstGeom prst="rect">
             <a:avLst/>
@@ -4767,7 +7239,7 @@
           <a:lstStyle/>
           <a:p>
             <a:pPr algn="r">
-              <a:defRPr sz="1700" b="1">
+              <a:defRPr sz="1600" b="1">
                 <a:solidFill>
                   <a:srgbClr val="064E3B"/>
                 </a:solidFill>
@@ -4775,15 +7247,15 @@
               </a:defRPr>
             </a:pPr>
             <a:r>
-              <a:t>2. Application Tier (المنطق)</a:t>
+              <a:t>2. Logic Tier (Laravel)</a:t>
             </a:r>
           </a:p>
           <a:p>
             <a:pPr algn="r">
               <a:spcBef>
-                <a:spcPts val="800"/>
+                <a:spcPts val="600"/>
               </a:spcBef>
-              <a:defRPr sz="1300">
+              <a:defRPr sz="1250">
                 <a:solidFill>
                   <a:srgbClr val="0F172A"/>
                 </a:solidFill>
@@ -4791,15 +7263,15 @@
               </a:defRPr>
             </a:pPr>
             <a:r>
-              <a:t>• بوابة الواجهات: RESTful API Gateway (Laravel 11).</a:t>
+              <a:t>• بوابة الـ API المركزية: توجيه المسارات وفحص الصلاحيات.</a:t>
             </a:r>
           </a:p>
           <a:p>
             <a:pPr algn="r">
               <a:spcBef>
-                <a:spcPts val="800"/>
+                <a:spcPts val="600"/>
               </a:spcBef>
-              <a:defRPr sz="1300">
+              <a:defRPr sz="1250">
                 <a:solidFill>
                   <a:srgbClr val="0F172A"/>
                 </a:solidFill>
@@ -4807,15 +7279,15 @@
               </a:defRPr>
             </a:pPr>
             <a:r>
-              <a:t>• الأمان والمصادقة: توكنات مشفرة بـ Laravel Sanctum.</a:t>
+              <a:t>• المصادقة والأمان: Sanctum Stateless Bearer Tokens.</a:t>
             </a:r>
           </a:p>
           <a:p>
             <a:pPr algn="r">
               <a:spcBef>
-                <a:spcPts val="800"/>
+                <a:spcPts val="600"/>
               </a:spcBef>
-              <a:defRPr sz="1300">
+              <a:defRPr sz="1250">
                 <a:solidFill>
                   <a:srgbClr val="0F172A"/>
                 </a:solidFill>
@@ -4823,15 +7295,15 @@
               </a:defRPr>
             </a:pPr>
             <a:r>
-              <a:t>• محركات الخدمات: GeoSearchService و ReservationService.</a:t>
+              <a:t>• الخدمات الأساسية: GeoSearchService و ReservationService.</a:t>
             </a:r>
           </a:p>
           <a:p>
             <a:pPr algn="r">
               <a:spcBef>
-                <a:spcPts val="800"/>
+                <a:spcPts val="600"/>
               </a:spcBef>
-              <a:defRPr sz="1300">
+              <a:defRPr sz="1250">
                 <a:solidFill>
                   <a:srgbClr val="0F172A"/>
                 </a:solidFill>
@@ -4839,7 +7311,7 @@
               </a:defRPr>
             </a:pPr>
             <a:r>
-              <a:t>• نمط المستودعات: Repository Pattern لعزل الاستعلامات.</a:t>
+              <a:t>• نمط Repository: عزل قواعد الأعمال عن طبقة البيانات.</a:t>
             </a:r>
           </a:p>
         </p:txBody>
@@ -4852,8 +7324,8 @@
         </p:nvSpPr>
         <p:spPr>
           <a:xfrm>
-            <a:off x="8412480" y="1463040"/>
-            <a:ext cx="3108960" cy="4572000"/>
+            <a:off x="8046720" y="1325880"/>
+            <a:ext cx="3383280" cy="4846320"/>
           </a:xfrm>
           <a:prstGeom prst="roundRect">
             <a:avLst/>
@@ -4897,8 +7369,8 @@
         </p:nvSpPr>
         <p:spPr>
           <a:xfrm>
-            <a:off x="8595359" y="1600200"/>
-            <a:ext cx="2743200" cy="4297680"/>
+            <a:off x="8229600" y="1463039"/>
+            <a:ext cx="3017520" cy="4572000"/>
           </a:xfrm>
           <a:prstGeom prst="rect">
             <a:avLst/>
@@ -4912,23 +7384,23 @@
           <a:lstStyle/>
           <a:p>
             <a:pPr algn="r">
-              <a:defRPr sz="1700" b="1">
-                <a:solidFill>
-                  <a:srgbClr val="0F172A"/>
-                </a:solidFill>
-                <a:latin typeface="Segoe UI"/>
-              </a:defRPr>
-            </a:pPr>
-            <a:r>
-              <a:t>3. Data Tier (البيانات)</a:t>
+              <a:defRPr sz="1600" b="1">
+                <a:solidFill>
+                  <a:srgbClr val="064E3B"/>
+                </a:solidFill>
+                <a:latin typeface="Segoe UI"/>
+              </a:defRPr>
+            </a:pPr>
+            <a:r>
+              <a:t>3. Data Tier (Relational DB)</a:t>
             </a:r>
           </a:p>
           <a:p>
             <a:pPr algn="r">
               <a:spcBef>
-                <a:spcPts val="800"/>
+                <a:spcPts val="600"/>
               </a:spcBef>
-              <a:defRPr sz="1300">
+              <a:defRPr sz="1250">
                 <a:solidFill>
                   <a:srgbClr val="0F172A"/>
                 </a:solidFill>
@@ -4936,15 +7408,15 @@
               </a:defRPr>
             </a:pPr>
             <a:r>
-              <a:t>• قاعدة بيانات علائقية 3NF.</a:t>
+              <a:t>• قاعدة بيانات 3NF: القضاء على تكرار البيانات وضمان سلامتها.</a:t>
             </a:r>
           </a:p>
           <a:p>
             <a:pPr algn="r">
               <a:spcBef>
-                <a:spcPts val="800"/>
+                <a:spcPts val="600"/>
               </a:spcBef>
-              <a:defRPr sz="1300">
+              <a:defRPr sz="1250">
                 <a:solidFill>
                   <a:srgbClr val="0F172A"/>
                 </a:solidFill>
@@ -4952,15 +7424,15 @@
               </a:defRPr>
             </a:pPr>
             <a:r>
-              <a:t>• محرك المعاملات الذرية ACID.</a:t>
+              <a:t>• المعاملات الذرية: ACID Transactions مع DB::transaction.</a:t>
             </a:r>
           </a:p>
           <a:p>
             <a:pPr algn="r">
               <a:spcBef>
-                <a:spcPts val="800"/>
+                <a:spcPts val="600"/>
               </a:spcBef>
-              <a:defRPr sz="1300">
+              <a:defRPr sz="1250">
                 <a:solidFill>
                   <a:srgbClr val="0F172A"/>
                 </a:solidFill>
@@ -4968,15 +7440,15 @@
               </a:defRPr>
             </a:pPr>
             <a:r>
-              <a:t>• قفل الصفوف: lockForUpdate.</a:t>
+              <a:t>• قفل الصفوف التشاؤمي: InnoDB Row-Level Locking.</a:t>
             </a:r>
           </a:p>
           <a:p>
             <a:pPr algn="r">
               <a:spcBef>
-                <a:spcPts val="800"/>
+                <a:spcPts val="600"/>
               </a:spcBef>
-              <a:defRPr sz="1300">
+              <a:defRPr sz="1250">
                 <a:solidFill>
                   <a:srgbClr val="0F172A"/>
                 </a:solidFill>
@@ -4984,7 +7456,7 @@
               </a:defRPr>
             </a:pPr>
             <a:r>
-              <a:t>• تكامل مرجعي بالمفاتيح الأجنبية.</a:t>
+              <a:t>• التكامل المرجعي: Foreign Keys مع Cascade &amp; Restrict.</a:t>
             </a:r>
           </a:p>
         </p:txBody>
@@ -5016,7 +7488,7 @@
         <p:spPr>
           <a:xfrm>
             <a:off x="0" y="0"/>
-            <a:ext cx="12191695" cy="1097280"/>
+            <a:ext cx="12191695" cy="1051560"/>
           </a:xfrm>
           <a:prstGeom prst="rect">
             <a:avLst/>
@@ -5060,8 +7532,8 @@
         </p:nvSpPr>
         <p:spPr>
           <a:xfrm>
-            <a:off x="731520" y="109728"/>
-            <a:ext cx="10698480" cy="320040"/>
+            <a:off x="731520" y="91440"/>
+            <a:ext cx="10698480" cy="292608"/>
           </a:xfrm>
           <a:prstGeom prst="rect">
             <a:avLst/>
@@ -5075,7 +7547,7 @@
           <a:lstStyle/>
           <a:p>
             <a:pPr algn="r">
-              <a:defRPr sz="1300" b="1">
+              <a:defRPr sz="1200" b="1">
                 <a:solidFill>
                   <a:srgbClr val="10B981"/>
                 </a:solidFill>
@@ -5083,7 +7555,7 @@
               </a:defRPr>
             </a:pPr>
             <a:r>
-              <a:t>مشروع تخرج — نظام خادم وعميل (Level 4)</a:t>
+              <a:t>منظومة خادم وعميل موزعة — معمارية 3-Tier Distributed Architecture</a:t>
             </a:r>
           </a:p>
         </p:txBody>
@@ -5096,8 +7568,8 @@
         </p:nvSpPr>
         <p:spPr>
           <a:xfrm>
-            <a:off x="731520" y="411480"/>
-            <a:ext cx="10698480" cy="594360"/>
+            <a:off x="731520" y="384048"/>
+            <a:ext cx="10698480" cy="566928"/>
           </a:xfrm>
           <a:prstGeom prst="rect">
             <a:avLst/>
@@ -5111,7 +7583,7 @@
           <a:lstStyle/>
           <a:p>
             <a:pPr algn="r">
-              <a:defRPr sz="2200" b="1">
+              <a:defRPr sz="2100" b="1">
                 <a:solidFill>
                   <a:srgbClr val="F8FAFC"/>
                 </a:solidFill>
@@ -5132,8 +7604,8 @@
         </p:nvSpPr>
         <p:spPr>
           <a:xfrm>
-            <a:off x="0" y="1097280"/>
-            <a:ext cx="12191695" cy="54864"/>
+            <a:off x="0" y="1051560"/>
+            <a:ext cx="12191695" cy="45720"/>
           </a:xfrm>
           <a:prstGeom prst="rect">
             <a:avLst/>
@@ -5175,8 +7647,8 @@
         </p:nvSpPr>
         <p:spPr>
           <a:xfrm>
-            <a:off x="731520" y="6446520"/>
-            <a:ext cx="10698480" cy="320040"/>
+            <a:off x="731520" y="6473952"/>
+            <a:ext cx="10698480" cy="292608"/>
           </a:xfrm>
           <a:prstGeom prst="rect">
             <a:avLst/>
@@ -5190,7 +7662,7 @@
           <a:lstStyle/>
           <a:p>
             <a:pPr algn="ctr">
-              <a:defRPr sz="1100">
+              <a:defRPr sz="1050">
                 <a:solidFill>
                   <a:srgbClr val="64748B"/>
                 </a:solidFill>
@@ -5211,8 +7683,8 @@
         </p:nvSpPr>
         <p:spPr>
           <a:xfrm>
-            <a:off x="731520" y="1463040"/>
-            <a:ext cx="5120640" cy="4572000"/>
+            <a:off x="731520" y="1325880"/>
+            <a:ext cx="5212080" cy="4846320"/>
           </a:xfrm>
           <a:prstGeom prst="roundRect">
             <a:avLst/>
@@ -5256,8 +7728,8 @@
         </p:nvSpPr>
         <p:spPr>
           <a:xfrm>
-            <a:off x="914400" y="1600200"/>
-            <a:ext cx="4754879" cy="4297680"/>
+            <a:off x="914400" y="1463039"/>
+            <a:ext cx="4846320" cy="4572000"/>
           </a:xfrm>
           <a:prstGeom prst="rect">
             <a:avLst/>
@@ -5271,7 +7743,7 @@
           <a:lstStyle/>
           <a:p>
             <a:pPr algn="r">
-              <a:defRPr sz="1700" b="1">
+              <a:defRPr sz="1600" b="1">
                 <a:solidFill>
                   <a:srgbClr val="064E3B"/>
                 </a:solidFill>
@@ -5279,15 +7751,15 @@
               </a:defRPr>
             </a:pPr>
             <a:r>
-              <a:t>هيكلية الجداول السبعة المترابطة</a:t>
+              <a:t>الجداول الـ 7 الرئيسية في النظام</a:t>
             </a:r>
           </a:p>
           <a:p>
             <a:pPr algn="r">
               <a:spcBef>
-                <a:spcPts val="800"/>
+                <a:spcPts val="600"/>
               </a:spcBef>
-              <a:defRPr sz="1300">
+              <a:defRPr sz="1250">
                 <a:solidFill>
                   <a:srgbClr val="0F172A"/>
                 </a:solidFill>
@@ -5295,15 +7767,15 @@
               </a:defRPr>
             </a:pPr>
             <a:r>
-              <a:t>• users: هويات المرضى ومدراء الصيدليات والمشرفين مع RBAC.</a:t>
+              <a:t>• users: إدارة هويات المرضى والصيادلة والمشرفين بالصلاحيات (RBAC).</a:t>
             </a:r>
           </a:p>
           <a:p>
             <a:pPr algn="r">
               <a:spcBef>
-                <a:spcPts val="800"/>
+                <a:spcPts val="600"/>
               </a:spcBef>
-              <a:defRPr sz="1300">
+              <a:defRPr sz="1250">
                 <a:solidFill>
                   <a:srgbClr val="0F172A"/>
                 </a:solidFill>
@@ -5311,15 +7783,15 @@
               </a:defRPr>
             </a:pPr>
             <a:r>
-              <a:t>• pharmacies: بيانات الصيدلية، الهاتف، والإحداثيات الجغرافية (lat, lng).</a:t>
+              <a:t>• pharmacies: بيانات الصيدليات، الهواتف، والإحداثيات (lat, lng).</a:t>
             </a:r>
           </a:p>
           <a:p>
             <a:pPr algn="r">
               <a:spcBef>
-                <a:spcPts val="800"/>
+                <a:spcPts val="600"/>
               </a:spcBef>
-              <a:defRPr sz="1300">
+              <a:defRPr sz="1250">
                 <a:solidFill>
                   <a:srgbClr val="0F172A"/>
                 </a:solidFill>
@@ -5327,15 +7799,15 @@
               </a:defRPr>
             </a:pPr>
             <a:r>
-              <a:t>• medicines: الكتالوج القومي الموحد (الاسم التجاري والعلمي، العيار، الشركة).</a:t>
+              <a:t>• medicines: الفهرس القومي الموحد (الاسم العلمي، التجاري، العيار).</a:t>
             </a:r>
           </a:p>
           <a:p>
             <a:pPr algn="r">
               <a:spcBef>
-                <a:spcPts val="800"/>
+                <a:spcPts val="600"/>
               </a:spcBef>
-              <a:defRPr sz="1300">
+              <a:defRPr sz="1250">
                 <a:solidFill>
                   <a:srgbClr val="0F172A"/>
                 </a:solidFill>
@@ -5343,15 +7815,15 @@
               </a:defRPr>
             </a:pPr>
             <a:r>
-              <a:t>• pharmacy_medicines: الوسيط المتعدد للربط (المخزون والسعر الفعلي).</a:t>
+              <a:t>• pharmacy_medicines: جدول الربط وإدارة المخزون الفعلي والسعر.</a:t>
             </a:r>
           </a:p>
           <a:p>
             <a:pPr algn="r">
               <a:spcBef>
-                <a:spcPts val="800"/>
+                <a:spcPts val="600"/>
               </a:spcBef>
-              <a:defRPr sz="1300">
+              <a:defRPr sz="1250">
                 <a:solidFill>
                   <a:srgbClr val="0F172A"/>
                 </a:solidFill>
@@ -5359,15 +7831,15 @@
               </a:defRPr>
             </a:pPr>
             <a:r>
-              <a:t>• reservations: تذاكر الحجز ومؤقت الـ TTL وكود الحجز الفريد.</a:t>
+              <a:t>• reservations: تذاكر الحجز والمهلة الزمنية TTL وكود الاستلام.</a:t>
             </a:r>
           </a:p>
           <a:p>
             <a:pPr algn="r">
               <a:spcBef>
-                <a:spcPts val="800"/>
+                <a:spcPts val="600"/>
               </a:spcBef>
-              <a:defRPr sz="1300">
+              <a:defRPr sz="1250">
                 <a:solidFill>
                   <a:srgbClr val="0F172A"/>
                 </a:solidFill>
@@ -5375,15 +7847,15 @@
               </a:defRPr>
             </a:pPr>
             <a:r>
-              <a:t>• reservation_items: تفاصيل أصناف الحجز المحسوبة لحظياً.</a:t>
+              <a:t>• reservation_items: تفاصيل الأصناف المحجوزة والكميات والأسعار.</a:t>
             </a:r>
           </a:p>
           <a:p>
             <a:pPr algn="r">
               <a:spcBef>
-                <a:spcPts val="800"/>
+                <a:spcPts val="600"/>
               </a:spcBef>
-              <a:defRPr sz="1300">
+              <a:defRPr sz="1250">
                 <a:solidFill>
                   <a:srgbClr val="0F172A"/>
                 </a:solidFill>
@@ -5391,7 +7863,7 @@
               </a:defRPr>
             </a:pPr>
             <a:r>
-              <a:t>• personal_access_tokens: توكنات المصادقة المشفرة (Sanctum).</a:t>
+              <a:t>• personal_access_tokens: جلسات توكنات Sanctum المشفرة.</a:t>
             </a:r>
           </a:p>
         </p:txBody>
@@ -5404,18 +7876,18 @@
         </p:nvSpPr>
         <p:spPr>
           <a:xfrm>
-            <a:off x="6217920" y="1463040"/>
-            <a:ext cx="5212080" cy="4572000"/>
+            <a:off x="6217920" y="1325880"/>
+            <a:ext cx="5212080" cy="4846320"/>
           </a:xfrm>
           <a:prstGeom prst="roundRect">
             <a:avLst/>
           </a:prstGeom>
           <a:solidFill>
-            <a:srgbClr val="FFFFFF"/>
+            <a:srgbClr val="F0FDF4"/>
           </a:solidFill>
           <a:ln w="19050">
             <a:solidFill>
-              <a:srgbClr val="0D9488"/>
+              <a:srgbClr val="86EFAC"/>
             </a:solidFill>
           </a:ln>
         </p:spPr>
@@ -5449,8 +7921,8 @@
         </p:nvSpPr>
         <p:spPr>
           <a:xfrm>
-            <a:off x="6400800" y="1600200"/>
-            <a:ext cx="4846320" cy="4297680"/>
+            <a:off x="6400800" y="1463039"/>
+            <a:ext cx="4846320" cy="4572000"/>
           </a:xfrm>
           <a:prstGeom prst="rect">
             <a:avLst/>
@@ -5464,23 +7936,23 @@
           <a:lstStyle/>
           <a:p>
             <a:pPr algn="r">
-              <a:defRPr sz="1700" b="1">
-                <a:solidFill>
-                  <a:srgbClr val="0D9488"/>
-                </a:solidFill>
-                <a:latin typeface="Segoe UI"/>
-              </a:defRPr>
-            </a:pPr>
-            <a:r>
-              <a:t>المزايا المعمارية والهندسية للتصميم</a:t>
+              <a:defRPr sz="1600" b="1">
+                <a:solidFill>
+                  <a:srgbClr val="064E3B"/>
+                </a:solidFill>
+                <a:latin typeface="Segoe UI"/>
+              </a:defRPr>
+            </a:pPr>
+            <a:r>
+              <a:t>المزايا المعمارية والهندسية للنموذج</a:t>
             </a:r>
           </a:p>
           <a:p>
             <a:pPr algn="r">
               <a:spcBef>
-                <a:spcPts val="800"/>
+                <a:spcPts val="600"/>
               </a:spcBef>
-              <a:defRPr sz="1300">
+              <a:defRPr sz="1250">
                 <a:solidFill>
                   <a:srgbClr val="0F172A"/>
                 </a:solidFill>
@@ -5488,15 +7960,15 @@
               </a:defRPr>
             </a:pPr>
             <a:r>
-              <a:t>• انعدام التكرار التام (Zero Redundancy): اسم الدواء ومواصفاته تسجل مرة واحدة فقط.</a:t>
+              <a:t>• انعدام التكرار (Zero Redundancy): تسجيل الدواء مرة واحدة وربط المخزونات به.</a:t>
             </a:r>
           </a:p>
           <a:p>
             <a:pPr algn="r">
               <a:spcBef>
-                <a:spcPts val="800"/>
+                <a:spcPts val="600"/>
               </a:spcBef>
-              <a:defRPr sz="1300">
+              <a:defRPr sz="1250">
                 <a:solidFill>
                   <a:srgbClr val="0F172A"/>
                 </a:solidFill>
@@ -5504,15 +7976,15 @@
               </a:defRPr>
             </a:pPr>
             <a:r>
-              <a:t>• مرونة التسعير المستقل: كل صيدلية تحدد سعرها وكميتها بشكل منفصل تماماً.</a:t>
+              <a:t>• استقلالية التسعير: حرية كاملة لكل صيدلية بتحديد كمياتها وأسعارها الخاصة.</a:t>
             </a:r>
           </a:p>
           <a:p>
             <a:pPr algn="r">
               <a:spcBef>
-                <a:spcPts val="800"/>
+                <a:spcPts val="600"/>
               </a:spcBef>
-              <a:defRPr sz="1300">
+              <a:defRPr sz="1250">
                 <a:solidFill>
                   <a:srgbClr val="0F172A"/>
                 </a:solidFill>
@@ -5520,15 +7992,15 @@
               </a:defRPr>
             </a:pPr>
             <a:r>
-              <a:t>• دورة حياة الحجز الخماسية الصارمة: pending -&gt; confirmed -&gt; completed / cancelled / expired.</a:t>
+              <a:t>• دورة حياة الحجز الخماسية: pending -&gt; confirmed -&gt; completed / cancelled / expired.</a:t>
             </a:r>
           </a:p>
           <a:p>
             <a:pPr algn="r">
               <a:spcBef>
-                <a:spcPts val="800"/>
+                <a:spcPts val="600"/>
               </a:spcBef>
-              <a:defRPr sz="1300">
+              <a:defRPr sz="1250">
                 <a:solidFill>
                   <a:srgbClr val="0F172A"/>
                 </a:solidFill>
@@ -5536,7 +8008,23 @@
               </a:defRPr>
             </a:pPr>
             <a:r>
-              <a:t>• حماية التكامل المرجعي: قيود المفاتيح الأجنبية تمنع وجود حجز لصيدلية غير مسجلة.</a:t>
+              <a:t>• التكامل المرجعي الصارم: منع الحجوزات الوهمية وضمان سلامة السجلات المالية.</a:t>
+            </a:r>
+          </a:p>
+          <a:p>
+            <a:pPr algn="r">
+              <a:spcBef>
+                <a:spcPts val="600"/>
+              </a:spcBef>
+              <a:defRPr sz="1250">
+                <a:solidFill>
+                  <a:srgbClr val="0F172A"/>
+                </a:solidFill>
+                <a:latin typeface="Segoe UI"/>
+              </a:defRPr>
+            </a:pPr>
+            <a:r>
+              <a:t>• جاهزية التوسع: استيعاب ملايين الأدوية ومئات الصيدليات بكفاءة.</a:t>
             </a:r>
           </a:p>
         </p:txBody>
@@ -5568,7 +8056,7 @@
         <p:spPr>
           <a:xfrm>
             <a:off x="0" y="0"/>
-            <a:ext cx="12191695" cy="1097280"/>
+            <a:ext cx="12191695" cy="1051560"/>
           </a:xfrm>
           <a:prstGeom prst="rect">
             <a:avLst/>
@@ -5612,8 +8100,8 @@
         </p:nvSpPr>
         <p:spPr>
           <a:xfrm>
-            <a:off x="731520" y="109728"/>
-            <a:ext cx="10698480" cy="320040"/>
+            <a:off x="731520" y="91440"/>
+            <a:ext cx="10698480" cy="292608"/>
           </a:xfrm>
           <a:prstGeom prst="rect">
             <a:avLst/>
@@ -5627,7 +8115,7 @@
           <a:lstStyle/>
           <a:p>
             <a:pPr algn="r">
-              <a:defRPr sz="1300" b="1">
+              <a:defRPr sz="1200" b="1">
                 <a:solidFill>
                   <a:srgbClr val="10B981"/>
                 </a:solidFill>
@@ -5635,7 +8123,7 @@
               </a:defRPr>
             </a:pPr>
             <a:r>
-              <a:t>مشروع تخرج — نظام خادم وعميل (Level 4)</a:t>
+              <a:t>منظومة خادم وعميل موزعة — معمارية 3-Tier Distributed Architecture</a:t>
             </a:r>
           </a:p>
         </p:txBody>
@@ -5648,8 +8136,8 @@
         </p:nvSpPr>
         <p:spPr>
           <a:xfrm>
-            <a:off x="731520" y="411480"/>
-            <a:ext cx="10698480" cy="594360"/>
+            <a:off x="731520" y="384048"/>
+            <a:ext cx="10698480" cy="566928"/>
           </a:xfrm>
           <a:prstGeom prst="rect">
             <a:avLst/>
@@ -5663,7 +8151,7 @@
           <a:lstStyle/>
           <a:p>
             <a:pPr algn="r">
-              <a:defRPr sz="2200" b="1">
+              <a:defRPr sz="2100" b="1">
                 <a:solidFill>
                   <a:srgbClr val="F8FAFC"/>
                 </a:solidFill>
@@ -5671,7 +8159,7 @@
               </a:defRPr>
             </a:pPr>
             <a:r>
-              <a:t>4. حل معضلة التزامن والرياضيات الكروية (Concurrency &amp; Haversine)</a:t>
+              <a:t>4. كود التخاطب والمصادقة بالتوكنات (Client-Server Auth &amp; Bearer Tokens)</a:t>
             </a:r>
           </a:p>
         </p:txBody>
@@ -5684,8 +8172,8 @@
         </p:nvSpPr>
         <p:spPr>
           <a:xfrm>
-            <a:off x="0" y="1097280"/>
-            <a:ext cx="12191695" cy="54864"/>
+            <a:off x="0" y="1051560"/>
+            <a:ext cx="12191695" cy="45720"/>
           </a:xfrm>
           <a:prstGeom prst="rect">
             <a:avLst/>
@@ -5727,8 +8215,8 @@
         </p:nvSpPr>
         <p:spPr>
           <a:xfrm>
-            <a:off x="731520" y="6446520"/>
-            <a:ext cx="10698480" cy="320040"/>
+            <a:off x="731520" y="6473952"/>
+            <a:ext cx="10698480" cy="292608"/>
           </a:xfrm>
           <a:prstGeom prst="rect">
             <a:avLst/>
@@ -5742,7 +8230,7 @@
           <a:lstStyle/>
           <a:p>
             <a:pPr algn="ctr">
-              <a:defRPr sz="1100">
+              <a:defRPr sz="1050">
                 <a:solidFill>
                   <a:srgbClr val="64748B"/>
                 </a:solidFill>
@@ -5763,14 +8251,14 @@
         </p:nvSpPr>
         <p:spPr>
           <a:xfrm>
-            <a:off x="731520" y="1463040"/>
-            <a:ext cx="5120640" cy="4572000"/>
+            <a:off x="731520" y="1325880"/>
+            <a:ext cx="5212080" cy="4846320"/>
           </a:xfrm>
           <a:prstGeom prst="roundRect">
             <a:avLst/>
           </a:prstGeom>
           <a:solidFill>
-            <a:srgbClr val="FFFFFF"/>
+            <a:srgbClr val="0F172A"/>
           </a:solidFill>
           <a:ln w="19050">
             <a:solidFill>
@@ -5808,8 +8296,8 @@
         </p:nvSpPr>
         <p:spPr>
           <a:xfrm>
-            <a:off x="914400" y="1600200"/>
-            <a:ext cx="4754879" cy="4297680"/>
+            <a:off x="914400" y="1417320"/>
+            <a:ext cx="4846320" cy="365760"/>
           </a:xfrm>
           <a:prstGeom prst="rect">
             <a:avLst/>
@@ -5823,103 +8311,368 @@
           <a:lstStyle/>
           <a:p>
             <a:pPr algn="r">
-              <a:defRPr sz="1700" b="1">
-                <a:solidFill>
-                  <a:srgbClr val="064E3B"/>
-                </a:solidFill>
-                <a:latin typeface="Segoe UI"/>
-              </a:defRPr>
-            </a:pPr>
-            <a:r>
-              <a:t>حل الـ Race Condition بالقفل التشاؤمي</a:t>
-            </a:r>
-          </a:p>
-          <a:p>
-            <a:pPr algn="r">
-              <a:spcBef>
-                <a:spcPts val="800"/>
-              </a:spcBef>
-              <a:defRPr sz="1300">
-                <a:solidFill>
-                  <a:srgbClr val="0F172A"/>
-                </a:solidFill>
-                <a:latin typeface="Segoe UI"/>
-              </a:defRPr>
-            </a:pPr>
-            <a:r>
-              <a:t>• المشكلة: ضغط مريضين لحجز آخر علبة في نفس الجزء من الثانية.</a:t>
-            </a:r>
-          </a:p>
-          <a:p>
-            <a:pPr algn="r">
-              <a:spcBef>
-                <a:spcPts val="800"/>
-              </a:spcBef>
-              <a:defRPr sz="1300">
-                <a:solidFill>
-                  <a:srgbClr val="0F172A"/>
-                </a:solidFill>
-                <a:latin typeface="Segoe UI"/>
-              </a:defRPr>
-            </a:pPr>
-            <a:r>
-              <a:t>• الحل: تطبيق lockForUpdate داخل معاملة ذرية DB::transaction.</a:t>
-            </a:r>
-          </a:p>
-          <a:p>
-            <a:pPr algn="r">
-              <a:spcBef>
-                <a:spcPts val="800"/>
-              </a:spcBef>
-              <a:defRPr sz="1300">
-                <a:solidFill>
-                  <a:srgbClr val="0F172A"/>
-                </a:solidFill>
-                <a:latin typeface="Segoe UI"/>
-              </a:defRPr>
-            </a:pPr>
-            <a:r>
-              <a:t>• الآلية: محرك InnoDB يقفل الصف فورياً؛ يدخل الطلب الأول ويخصم الكمية، والطلب الثاني يُرفض فورياً بـ 422.</a:t>
-            </a:r>
-          </a:p>
-          <a:p>
-            <a:pPr algn="r">
-              <a:spcBef>
-                <a:spcPts val="800"/>
-              </a:spcBef>
-              <a:defRPr sz="1300">
-                <a:solidFill>
-                  <a:srgbClr val="0F172A"/>
-                </a:solidFill>
-                <a:latin typeface="Segoe UI"/>
-              </a:defRPr>
-            </a:pPr>
-            <a:r>
-              <a:t>• النتيجة: منع البيع المزدوج بنسبة 0% أخطاء وحماية مصداقية الصيدلية.</a:t>
-            </a:r>
-          </a:p>
-        </p:txBody>
-      </p:sp>
-      <p:sp>
-        <p:nvSpPr>
-          <p:cNvPr id="9" name="Rounded Rectangle 8"/>
+              <a:defRPr sz="1300" b="1">
+                <a:solidFill>
+                  <a:srgbClr val="10B981"/>
+                </a:solidFill>
+                <a:latin typeface="Segoe UI"/>
+              </a:defRPr>
+            </a:pPr>
+            <a:r>
+              <a:t>العميل: إرسال الطلب والتوكن المشفر  [Flutter / Dart]</a:t>
+            </a:r>
+          </a:p>
+        </p:txBody>
+      </p:sp>
+      <p:sp>
+        <p:nvSpPr>
+          <p:cNvPr id="9" name="TextBox 8"/>
+          <p:cNvSpPr txBox="1"/>
+          <p:nvPr/>
+        </p:nvSpPr>
+        <p:spPr>
+          <a:xfrm>
+            <a:off x="914400" y="1801368"/>
+            <a:ext cx="4846320" cy="4251959"/>
+          </a:xfrm>
+          <a:prstGeom prst="rect">
+            <a:avLst/>
+          </a:prstGeom>
+          <a:noFill/>
+        </p:spPr>
+        <p:txBody>
+          <a:bodyPr wrap="square">
+            <a:spAutoFit/>
+          </a:bodyPr>
+          <a:lstStyle/>
+          <a:p>
+            <a:pPr algn="l">
+              <a:defRPr sz="1000">
+                <a:solidFill>
+                  <a:srgbClr val="94A3B8"/>
+                </a:solidFill>
+                <a:latin typeface="Consolas"/>
+              </a:defRPr>
+            </a:pPr>
+            <a:r>
+              <a:t>// frontend/lib/core/network/api_service.dart</a:t>
+            </a:r>
+          </a:p>
+          <a:p>
+            <a:pPr algn="l">
+              <a:defRPr sz="1000">
+                <a:solidFill>
+                  <a:srgbClr val="38BDF8"/>
+                </a:solidFill>
+                <a:latin typeface="Consolas"/>
+              </a:defRPr>
+            </a:pPr>
+            <a:r>
+              <a:t>Map&lt;String, String&gt; get _headers =&gt; {</a:t>
+            </a:r>
+          </a:p>
+          <a:p>
+            <a:pPr algn="l">
+              <a:defRPr sz="1000">
+                <a:solidFill>
+                  <a:srgbClr val="38BDF8"/>
+                </a:solidFill>
+                <a:latin typeface="Consolas"/>
+              </a:defRPr>
+            </a:pPr>
+            <a:r>
+              <a:t>  'Content-Type': 'application/json',</a:t>
+            </a:r>
+          </a:p>
+          <a:p>
+            <a:pPr algn="l">
+              <a:defRPr sz="1000">
+                <a:solidFill>
+                  <a:srgbClr val="38BDF8"/>
+                </a:solidFill>
+                <a:latin typeface="Consolas"/>
+              </a:defRPr>
+            </a:pPr>
+            <a:r>
+              <a:t>  'Accept': 'application/json',</a:t>
+            </a:r>
+          </a:p>
+          <a:p>
+            <a:pPr algn="l">
+              <a:defRPr sz="1000">
+                <a:solidFill>
+                  <a:srgbClr val="F472B6"/>
+                </a:solidFill>
+                <a:latin typeface="Consolas"/>
+              </a:defRPr>
+            </a:pPr>
+            <a:r>
+              <a:t>  if (_authToken != null)</a:t>
+            </a:r>
+          </a:p>
+          <a:p>
+            <a:pPr algn="l">
+              <a:defRPr sz="1000">
+                <a:solidFill>
+                  <a:srgbClr val="38BDF8"/>
+                </a:solidFill>
+                <a:latin typeface="Consolas"/>
+              </a:defRPr>
+            </a:pPr>
+            <a:r>
+              <a:t>    'Authorization': 'Bearer $_authToken',</a:t>
+            </a:r>
+          </a:p>
+          <a:p>
+            <a:pPr algn="l">
+              <a:defRPr sz="1000">
+                <a:solidFill>
+                  <a:srgbClr val="38BDF8"/>
+                </a:solidFill>
+                <a:latin typeface="Consolas"/>
+              </a:defRPr>
+            </a:pPr>
+            <a:r>
+              <a:t>};</a:t>
+            </a:r>
+          </a:p>
+          <a:p>
+            <a:pPr algn="l">
+              <a:defRPr sz="1000">
+                <a:solidFill>
+                  <a:srgbClr val="38BDF8"/>
+                </a:solidFill>
+                <a:latin typeface="Consolas"/>
+              </a:defRPr>
+            </a:pPr>
+          </a:p>
+          <a:p>
+            <a:pPr algn="l">
+              <a:defRPr sz="1000">
+                <a:solidFill>
+                  <a:srgbClr val="F472B6"/>
+                </a:solidFill>
+                <a:latin typeface="Consolas"/>
+              </a:defRPr>
+            </a:pPr>
+            <a:r>
+              <a:t>Future&lt;AuthResult&gt; login(String email, String pwd) async {</a:t>
+            </a:r>
+          </a:p>
+          <a:p>
+            <a:pPr algn="l">
+              <a:defRPr sz="1000">
+                <a:solidFill>
+                  <a:srgbClr val="38BDF8"/>
+                </a:solidFill>
+                <a:latin typeface="Consolas"/>
+              </a:defRPr>
+            </a:pPr>
+            <a:r>
+              <a:t>  final uri = Uri.parse('$baseUrl/auth/login');</a:t>
+            </a:r>
+          </a:p>
+          <a:p>
+            <a:pPr algn="l">
+              <a:defRPr sz="1000">
+                <a:solidFill>
+                  <a:srgbClr val="F472B6"/>
+                </a:solidFill>
+                <a:latin typeface="Consolas"/>
+              </a:defRPr>
+            </a:pPr>
+            <a:r>
+              <a:t>  final res = await http.post(</a:t>
+            </a:r>
+          </a:p>
+          <a:p>
+            <a:pPr algn="l">
+              <a:defRPr sz="1000">
+                <a:solidFill>
+                  <a:srgbClr val="38BDF8"/>
+                </a:solidFill>
+                <a:latin typeface="Consolas"/>
+              </a:defRPr>
+            </a:pPr>
+            <a:r>
+              <a:t>    uri,</a:t>
+            </a:r>
+          </a:p>
+          <a:p>
+            <a:pPr algn="l">
+              <a:defRPr sz="1000">
+                <a:solidFill>
+                  <a:srgbClr val="38BDF8"/>
+                </a:solidFill>
+                <a:latin typeface="Consolas"/>
+              </a:defRPr>
+            </a:pPr>
+            <a:r>
+              <a:t>    headers: _headers,</a:t>
+            </a:r>
+          </a:p>
+          <a:p>
+            <a:pPr algn="l">
+              <a:defRPr sz="1000">
+                <a:solidFill>
+                  <a:srgbClr val="38BDF8"/>
+                </a:solidFill>
+                <a:latin typeface="Consolas"/>
+              </a:defRPr>
+            </a:pPr>
+            <a:r>
+              <a:t>    body: json.encode({'email': email, 'password': pwd}),</a:t>
+            </a:r>
+          </a:p>
+          <a:p>
+            <a:pPr algn="l">
+              <a:defRPr sz="1000">
+                <a:solidFill>
+                  <a:srgbClr val="38BDF8"/>
+                </a:solidFill>
+                <a:latin typeface="Consolas"/>
+              </a:defRPr>
+            </a:pPr>
+            <a:r>
+              <a:t>  ).timeout(Duration(seconds: 5));</a:t>
+            </a:r>
+          </a:p>
+          <a:p>
+            <a:pPr algn="l">
+              <a:defRPr sz="1000">
+                <a:solidFill>
+                  <a:srgbClr val="38BDF8"/>
+                </a:solidFill>
+                <a:latin typeface="Consolas"/>
+              </a:defRPr>
+            </a:pPr>
+          </a:p>
+          <a:p>
+            <a:pPr algn="l">
+              <a:defRPr sz="1000">
+                <a:solidFill>
+                  <a:srgbClr val="F472B6"/>
+                </a:solidFill>
+                <a:latin typeface="Consolas"/>
+              </a:defRPr>
+            </a:pPr>
+            <a:r>
+              <a:t>  if (res.statusCode == 200) {</a:t>
+            </a:r>
+          </a:p>
+          <a:p>
+            <a:pPr algn="l">
+              <a:defRPr sz="1000">
+                <a:solidFill>
+                  <a:srgbClr val="38BDF8"/>
+                </a:solidFill>
+                <a:latin typeface="Consolas"/>
+              </a:defRPr>
+            </a:pPr>
+            <a:r>
+              <a:t>    final body = json.decode(utf8.decode(res.bodyBytes));</a:t>
+            </a:r>
+          </a:p>
+          <a:p>
+            <a:pPr algn="l">
+              <a:defRPr sz="1000">
+                <a:solidFill>
+                  <a:srgbClr val="38BDF8"/>
+                </a:solidFill>
+                <a:latin typeface="Consolas"/>
+              </a:defRPr>
+            </a:pPr>
+            <a:r>
+              <a:t>    _authToken = body['data']['token'];</a:t>
+            </a:r>
+          </a:p>
+          <a:p>
+            <a:pPr algn="l">
+              <a:defRPr sz="1000">
+                <a:solidFill>
+                  <a:srgbClr val="38BDF8"/>
+                </a:solidFill>
+                <a:latin typeface="Consolas"/>
+              </a:defRPr>
+            </a:pPr>
+            <a:r>
+              <a:t>    _currentUser = UserModel.fromJson(body['data']['user']);</a:t>
+            </a:r>
+          </a:p>
+          <a:p>
+            <a:pPr algn="l">
+              <a:defRPr sz="1000">
+                <a:solidFill>
+                  <a:srgbClr val="38BDF8"/>
+                </a:solidFill>
+                <a:latin typeface="Consolas"/>
+              </a:defRPr>
+            </a:pPr>
+            <a:r>
+              <a:t>    notifyListeners();</a:t>
+            </a:r>
+          </a:p>
+          <a:p>
+            <a:pPr algn="l">
+              <a:defRPr sz="1000">
+                <a:solidFill>
+                  <a:srgbClr val="F472B6"/>
+                </a:solidFill>
+                <a:latin typeface="Consolas"/>
+              </a:defRPr>
+            </a:pPr>
+            <a:r>
+              <a:t>    return AuthResult(success: true, user: _currentUser);</a:t>
+            </a:r>
+          </a:p>
+          <a:p>
+            <a:pPr algn="l">
+              <a:defRPr sz="1000">
+                <a:solidFill>
+                  <a:srgbClr val="38BDF8"/>
+                </a:solidFill>
+                <a:latin typeface="Consolas"/>
+              </a:defRPr>
+            </a:pPr>
+            <a:r>
+              <a:t>  }</a:t>
+            </a:r>
+          </a:p>
+          <a:p>
+            <a:pPr algn="l">
+              <a:defRPr sz="1000">
+                <a:solidFill>
+                  <a:srgbClr val="38BDF8"/>
+                </a:solidFill>
+                <a:latin typeface="Consolas"/>
+              </a:defRPr>
+            </a:pPr>
+            <a:r>
+              <a:t>}</a:t>
+            </a:r>
+          </a:p>
+        </p:txBody>
+      </p:sp>
+      <p:sp>
+        <p:nvSpPr>
+          <p:cNvPr id="10" name="Rounded Rectangle 9"/>
           <p:cNvSpPr/>
           <p:nvPr/>
         </p:nvSpPr>
         <p:spPr>
           <a:xfrm>
-            <a:off x="6217920" y="1463040"/>
-            <a:ext cx="5212080" cy="4572000"/>
+            <a:off x="6217920" y="1325880"/>
+            <a:ext cx="5212080" cy="4846320"/>
           </a:xfrm>
           <a:prstGeom prst="roundRect">
             <a:avLst/>
           </a:prstGeom>
           <a:solidFill>
-            <a:srgbClr val="D1FAE5"/>
+            <a:srgbClr val="0F172A"/>
           </a:solidFill>
           <a:ln w="19050">
             <a:solidFill>
-              <a:srgbClr val="10B981"/>
+              <a:srgbClr val="0D9488"/>
             </a:solidFill>
           </a:ln>
         </p:spPr>
@@ -5947,14 +8700,14 @@
       </p:sp>
       <p:sp>
         <p:nvSpPr>
-          <p:cNvPr id="10" name="TextBox 9"/>
+          <p:cNvPr id="11" name="TextBox 10"/>
           <p:cNvSpPr txBox="1"/>
           <p:nvPr/>
         </p:nvSpPr>
         <p:spPr>
           <a:xfrm>
-            <a:off x="6400800" y="1600200"/>
-            <a:ext cx="4846320" cy="4297680"/>
+            <a:off x="6400800" y="1417320"/>
+            <a:ext cx="4846320" cy="365760"/>
           </a:xfrm>
           <a:prstGeom prst="rect">
             <a:avLst/>
@@ -5968,79 +8721,321 @@
           <a:lstStyle/>
           <a:p>
             <a:pPr algn="r">
-              <a:defRPr sz="1700" b="1">
-                <a:solidFill>
-                  <a:srgbClr val="064E3B"/>
-                </a:solidFill>
-                <a:latin typeface="Segoe UI"/>
-              </a:defRPr>
-            </a:pPr>
-            <a:r>
-              <a:t>خوارزمية هافرسين الكروية (Haversine)</a:t>
-            </a:r>
-          </a:p>
-          <a:p>
-            <a:pPr algn="r">
-              <a:spcBef>
-                <a:spcPts val="800"/>
-              </a:spcBef>
-              <a:defRPr sz="1300">
-                <a:solidFill>
-                  <a:srgbClr val="0F172A"/>
-                </a:solidFill>
-                <a:latin typeface="Segoe UI"/>
-              </a:defRPr>
-            </a:pPr>
-            <a:r>
-              <a:t>• المشكلة: المسافة الإقليدية تفترض تسطح الأرض وتعطي أخطاءً فادحة.</a:t>
-            </a:r>
-          </a:p>
-          <a:p>
-            <a:pPr algn="r">
-              <a:spcBef>
-                <a:spcPts val="800"/>
-              </a:spcBef>
-              <a:defRPr sz="1300">
-                <a:solidFill>
-                  <a:srgbClr val="0F172A"/>
-                </a:solidFill>
-                <a:latin typeface="Segoe UI"/>
-              </a:defRPr>
-            </a:pPr>
-            <a:r>
-              <a:t>• الحل: تطبيق صيغة هافرسين الدقيقة مع نصف قطر الأرض R = 6371 كم.</a:t>
-            </a:r>
-          </a:p>
-          <a:p>
-            <a:pPr algn="r">
-              <a:spcBef>
-                <a:spcPts val="800"/>
-              </a:spcBef>
-              <a:defRPr sz="1300">
-                <a:solidFill>
-                  <a:srgbClr val="0F172A"/>
-                </a:solidFill>
-                <a:latin typeface="Segoe UI"/>
-              </a:defRPr>
-            </a:pPr>
-            <a:r>
-              <a:t>• الآلية: حساب الإزاحة الكروية وترتيب الصيدليات من الأقرب لحظياً.</a:t>
-            </a:r>
-          </a:p>
-          <a:p>
-            <a:pPr algn="r">
-              <a:spcBef>
-                <a:spcPts val="800"/>
-              </a:spcBef>
-              <a:defRPr sz="1300">
-                <a:solidFill>
-                  <a:srgbClr val="0F172A"/>
-                </a:solidFill>
-                <a:latin typeface="Segoe UI"/>
-              </a:defRPr>
-            </a:pPr>
-            <a:r>
-              <a:t>• الاستقلالية: تعمل خوارزمياً داخل الخادم دون الحاجة لأي مفاتيح خارجية مدفوعة.</a:t>
+              <a:defRPr sz="1300" b="1">
+                <a:solidFill>
+                  <a:srgbClr val="10B981"/>
+                </a:solidFill>
+                <a:latin typeface="Segoe UI"/>
+              </a:defRPr>
+            </a:pPr>
+            <a:r>
+              <a:t>الخادم: توجيه المسار والتحقق والرد  [Laravel / PHP]</a:t>
+            </a:r>
+          </a:p>
+        </p:txBody>
+      </p:sp>
+      <p:sp>
+        <p:nvSpPr>
+          <p:cNvPr id="12" name="TextBox 11"/>
+          <p:cNvSpPr txBox="1"/>
+          <p:nvPr/>
+        </p:nvSpPr>
+        <p:spPr>
+          <a:xfrm>
+            <a:off x="6400800" y="1801368"/>
+            <a:ext cx="4846320" cy="4251959"/>
+          </a:xfrm>
+          <a:prstGeom prst="rect">
+            <a:avLst/>
+          </a:prstGeom>
+          <a:noFill/>
+        </p:spPr>
+        <p:txBody>
+          <a:bodyPr wrap="square">
+            <a:spAutoFit/>
+          </a:bodyPr>
+          <a:lstStyle/>
+          <a:p>
+            <a:pPr algn="l">
+              <a:defRPr sz="1000">
+                <a:solidFill>
+                  <a:srgbClr val="94A3B8"/>
+                </a:solidFill>
+                <a:latin typeface="Consolas"/>
+              </a:defRPr>
+            </a:pPr>
+            <a:r>
+              <a:t>// backend/routes/api.php</a:t>
+            </a:r>
+          </a:p>
+          <a:p>
+            <a:pPr algn="l">
+              <a:defRPr sz="1000">
+                <a:solidFill>
+                  <a:srgbClr val="F472B6"/>
+                </a:solidFill>
+                <a:latin typeface="Consolas"/>
+              </a:defRPr>
+            </a:pPr>
+            <a:r>
+              <a:t>Route::prefix('v1')-&gt;group(function () {</a:t>
+            </a:r>
+          </a:p>
+          <a:p>
+            <a:pPr algn="l">
+              <a:defRPr sz="1000">
+                <a:solidFill>
+                  <a:srgbClr val="38BDF8"/>
+                </a:solidFill>
+                <a:latin typeface="Consolas"/>
+              </a:defRPr>
+            </a:pPr>
+            <a:r>
+              <a:t>    Route::post('/auth/login', [AuthController::class, 'login']);</a:t>
+            </a:r>
+          </a:p>
+          <a:p>
+            <a:pPr algn="l">
+              <a:defRPr sz="1000">
+                <a:solidFill>
+                  <a:srgbClr val="F472B6"/>
+                </a:solidFill>
+                <a:latin typeface="Consolas"/>
+              </a:defRPr>
+            </a:pPr>
+            <a:r>
+              <a:t>    Route::middleware('auth:sanctum')-&gt;group(function () {</a:t>
+            </a:r>
+          </a:p>
+          <a:p>
+            <a:pPr algn="l">
+              <a:defRPr sz="1000">
+                <a:solidFill>
+                  <a:srgbClr val="38BDF8"/>
+                </a:solidFill>
+                <a:latin typeface="Consolas"/>
+              </a:defRPr>
+            </a:pPr>
+            <a:r>
+              <a:t>        Route::get('/auth/profile', [AuthController::class, 'profile']);</a:t>
+            </a:r>
+          </a:p>
+          <a:p>
+            <a:pPr algn="l">
+              <a:defRPr sz="1000">
+                <a:solidFill>
+                  <a:srgbClr val="38BDF8"/>
+                </a:solidFill>
+                <a:latin typeface="Consolas"/>
+              </a:defRPr>
+            </a:pPr>
+            <a:r>
+              <a:t>        Route::post('/auth/logout', [AuthController::class, 'logout']);</a:t>
+            </a:r>
+          </a:p>
+          <a:p>
+            <a:pPr algn="l">
+              <a:defRPr sz="1000">
+                <a:solidFill>
+                  <a:srgbClr val="38BDF8"/>
+                </a:solidFill>
+                <a:latin typeface="Consolas"/>
+              </a:defRPr>
+            </a:pPr>
+            <a:r>
+              <a:t>    });</a:t>
+            </a:r>
+          </a:p>
+          <a:p>
+            <a:pPr algn="l">
+              <a:defRPr sz="1000">
+                <a:solidFill>
+                  <a:srgbClr val="38BDF8"/>
+                </a:solidFill>
+                <a:latin typeface="Consolas"/>
+              </a:defRPr>
+            </a:pPr>
+            <a:r>
+              <a:t>});</a:t>
+            </a:r>
+          </a:p>
+          <a:p>
+            <a:pPr algn="l">
+              <a:defRPr sz="1000">
+                <a:solidFill>
+                  <a:srgbClr val="38BDF8"/>
+                </a:solidFill>
+                <a:latin typeface="Consolas"/>
+              </a:defRPr>
+            </a:pPr>
+          </a:p>
+          <a:p>
+            <a:pPr algn="l">
+              <a:defRPr sz="1000">
+                <a:solidFill>
+                  <a:srgbClr val="94A3B8"/>
+                </a:solidFill>
+                <a:latin typeface="Consolas"/>
+              </a:defRPr>
+            </a:pPr>
+            <a:r>
+              <a:t>// backend/app/Http/Controllers/Api/V1/AuthController.php</a:t>
+            </a:r>
+          </a:p>
+          <a:p>
+            <a:pPr algn="l">
+              <a:defRPr sz="1000">
+                <a:solidFill>
+                  <a:srgbClr val="F472B6"/>
+                </a:solidFill>
+                <a:latin typeface="Consolas"/>
+              </a:defRPr>
+            </a:pPr>
+            <a:r>
+              <a:t>public function login(Request $request): JsonResponse {</a:t>
+            </a:r>
+          </a:p>
+          <a:p>
+            <a:pPr algn="l">
+              <a:defRPr sz="1000">
+                <a:solidFill>
+                  <a:srgbClr val="38BDF8"/>
+                </a:solidFill>
+                <a:latin typeface="Consolas"/>
+              </a:defRPr>
+            </a:pPr>
+            <a:r>
+              <a:t>    $data = $request-&gt;validate([</a:t>
+            </a:r>
+          </a:p>
+          <a:p>
+            <a:pPr algn="l">
+              <a:defRPr sz="1000">
+                <a:solidFill>
+                  <a:srgbClr val="38BDF8"/>
+                </a:solidFill>
+                <a:latin typeface="Consolas"/>
+              </a:defRPr>
+            </a:pPr>
+            <a:r>
+              <a:t>        'email' =&gt; 'required|email',</a:t>
+            </a:r>
+          </a:p>
+          <a:p>
+            <a:pPr algn="l">
+              <a:defRPr sz="1000">
+                <a:solidFill>
+                  <a:srgbClr val="38BDF8"/>
+                </a:solidFill>
+                <a:latin typeface="Consolas"/>
+              </a:defRPr>
+            </a:pPr>
+            <a:r>
+              <a:t>        'password' =&gt; 'required|string'</a:t>
+            </a:r>
+          </a:p>
+          <a:p>
+            <a:pPr algn="l">
+              <a:defRPr sz="1000">
+                <a:solidFill>
+                  <a:srgbClr val="38BDF8"/>
+                </a:solidFill>
+                <a:latin typeface="Consolas"/>
+              </a:defRPr>
+            </a:pPr>
+            <a:r>
+              <a:t>    ]);</a:t>
+            </a:r>
+          </a:p>
+          <a:p>
+            <a:pPr algn="l">
+              <a:defRPr sz="1000">
+                <a:solidFill>
+                  <a:srgbClr val="38BDF8"/>
+                </a:solidFill>
+                <a:latin typeface="Consolas"/>
+              </a:defRPr>
+            </a:pPr>
+            <a:r>
+              <a:t>    $user = User::where('email', $data['email'])-&gt;first();</a:t>
+            </a:r>
+          </a:p>
+          <a:p>
+            <a:pPr algn="l">
+              <a:defRPr sz="1000">
+                <a:solidFill>
+                  <a:srgbClr val="F472B6"/>
+                </a:solidFill>
+                <a:latin typeface="Consolas"/>
+              </a:defRPr>
+            </a:pPr>
+            <a:r>
+              <a:t>    if (!$user || !Hash::check($data['password'], $user-&gt;password)) {</a:t>
+            </a:r>
+          </a:p>
+          <a:p>
+            <a:pPr algn="l">
+              <a:defRPr sz="1000">
+                <a:solidFill>
+                  <a:srgbClr val="F472B6"/>
+                </a:solidFill>
+                <a:latin typeface="Consolas"/>
+              </a:defRPr>
+            </a:pPr>
+            <a:r>
+              <a:t>        return response()-&gt;json(['message' =&gt; 'بيانات الدخول غير صحيحة'], 422);</a:t>
+            </a:r>
+          </a:p>
+          <a:p>
+            <a:pPr algn="l">
+              <a:defRPr sz="1000">
+                <a:solidFill>
+                  <a:srgbClr val="38BDF8"/>
+                </a:solidFill>
+                <a:latin typeface="Consolas"/>
+              </a:defRPr>
+            </a:pPr>
+            <a:r>
+              <a:t>    }</a:t>
+            </a:r>
+          </a:p>
+          <a:p>
+            <a:pPr algn="l">
+              <a:defRPr sz="1000">
+                <a:solidFill>
+                  <a:srgbClr val="38BDF8"/>
+                </a:solidFill>
+                <a:latin typeface="Consolas"/>
+              </a:defRPr>
+            </a:pPr>
+            <a:r>
+              <a:t>    $token = $user-&gt;createToken('mobile_app')-&gt;plainTextToken;</a:t>
+            </a:r>
+          </a:p>
+          <a:p>
+            <a:pPr algn="l">
+              <a:defRPr sz="1000">
+                <a:solidFill>
+                  <a:srgbClr val="F472B6"/>
+                </a:solidFill>
+                <a:latin typeface="Consolas"/>
+              </a:defRPr>
+            </a:pPr>
+            <a:r>
+              <a:t>    return response()-&gt;json(['data' =&gt; ['token' =&gt; $token, 'user' =&gt; $user]]);</a:t>
+            </a:r>
+          </a:p>
+          <a:p>
+            <a:pPr algn="l">
+              <a:defRPr sz="1000">
+                <a:solidFill>
+                  <a:srgbClr val="38BDF8"/>
+                </a:solidFill>
+                <a:latin typeface="Consolas"/>
+              </a:defRPr>
+            </a:pPr>
+            <a:r>
+              <a:t>}</a:t>
             </a:r>
           </a:p>
         </p:txBody>
@@ -6072,7 +9067,7 @@
         <p:spPr>
           <a:xfrm>
             <a:off x="0" y="0"/>
-            <a:ext cx="12191695" cy="1097280"/>
+            <a:ext cx="12191695" cy="1051560"/>
           </a:xfrm>
           <a:prstGeom prst="rect">
             <a:avLst/>
@@ -6116,8 +9111,8 @@
         </p:nvSpPr>
         <p:spPr>
           <a:xfrm>
-            <a:off x="731520" y="109728"/>
-            <a:ext cx="10698480" cy="320040"/>
+            <a:off x="731520" y="91440"/>
+            <a:ext cx="10698480" cy="292608"/>
           </a:xfrm>
           <a:prstGeom prst="rect">
             <a:avLst/>
@@ -6131,7 +9126,7 @@
           <a:lstStyle/>
           <a:p>
             <a:pPr algn="r">
-              <a:defRPr sz="1300" b="1">
+              <a:defRPr sz="1200" b="1">
                 <a:solidFill>
                   <a:srgbClr val="10B981"/>
                 </a:solidFill>
@@ -6139,7 +9134,7 @@
               </a:defRPr>
             </a:pPr>
             <a:r>
-              <a:t>مشروع تخرج — نظام خادم وعميل (Level 4)</a:t>
+              <a:t>منظومة خادم وعميل موزعة — معمارية 3-Tier Distributed Architecture</a:t>
             </a:r>
           </a:p>
         </p:txBody>
@@ -6152,8 +9147,8 @@
         </p:nvSpPr>
         <p:spPr>
           <a:xfrm>
-            <a:off x="731520" y="411480"/>
-            <a:ext cx="10698480" cy="594360"/>
+            <a:off x="731520" y="384048"/>
+            <a:ext cx="10698480" cy="566928"/>
           </a:xfrm>
           <a:prstGeom prst="rect">
             <a:avLst/>
@@ -6167,7 +9162,7 @@
           <a:lstStyle/>
           <a:p>
             <a:pPr algn="r">
-              <a:defRPr sz="2200" b="1">
+              <a:defRPr sz="2100" b="1">
                 <a:solidFill>
                   <a:srgbClr val="F8FAFC"/>
                 </a:solidFill>
@@ -6175,7 +9170,7 @@
               </a:defRPr>
             </a:pPr>
             <a:r>
-              <a:t>5. تطبيق الهاتف المحمول (Flutter &amp; Clean Architecture)</a:t>
+              <a:t>5. كود الحجز الذري ومنع الـ Race Condition (Atomic Concurrency Locking)</a:t>
             </a:r>
           </a:p>
         </p:txBody>
@@ -6188,8 +9183,8 @@
         </p:nvSpPr>
         <p:spPr>
           <a:xfrm>
-            <a:off x="0" y="1097280"/>
-            <a:ext cx="12191695" cy="54864"/>
+            <a:off x="0" y="1051560"/>
+            <a:ext cx="12191695" cy="45720"/>
           </a:xfrm>
           <a:prstGeom prst="rect">
             <a:avLst/>
@@ -6231,8 +9226,8 @@
         </p:nvSpPr>
         <p:spPr>
           <a:xfrm>
-            <a:off x="731520" y="6446520"/>
-            <a:ext cx="10698480" cy="320040"/>
+            <a:off x="731520" y="6473952"/>
+            <a:ext cx="10698480" cy="292608"/>
           </a:xfrm>
           <a:prstGeom prst="rect">
             <a:avLst/>
@@ -6246,7 +9241,7 @@
           <a:lstStyle/>
           <a:p>
             <a:pPr algn="ctr">
-              <a:defRPr sz="1100">
+              <a:defRPr sz="1050">
                 <a:solidFill>
                   <a:srgbClr val="64748B"/>
                 </a:solidFill>
@@ -6267,191 +9262,14 @@
         </p:nvSpPr>
         <p:spPr>
           <a:xfrm>
-            <a:off x="731520" y="1463040"/>
-            <a:ext cx="5120640" cy="4572000"/>
+            <a:off x="731520" y="1325880"/>
+            <a:ext cx="5212080" cy="4846320"/>
           </a:xfrm>
           <a:prstGeom prst="roundRect">
             <a:avLst/>
           </a:prstGeom>
           <a:solidFill>
-            <a:srgbClr val="FFFFFF"/>
-          </a:solidFill>
-          <a:ln w="19050">
-            <a:solidFill>
-              <a:srgbClr val="E2E8F0"/>
-            </a:solidFill>
-          </a:ln>
-        </p:spPr>
-        <p:style>
-          <a:lnRef idx="1">
-            <a:schemeClr val="accent1"/>
-          </a:lnRef>
-          <a:fillRef idx="3">
-            <a:schemeClr val="accent1"/>
-          </a:fillRef>
-          <a:effectRef idx="2">
-            <a:schemeClr val="accent1"/>
-          </a:effectRef>
-          <a:fontRef idx="minor">
-            <a:schemeClr val="lt1"/>
-          </a:fontRef>
-        </p:style>
-        <p:txBody>
-          <a:bodyPr rtlCol="0" anchor="ctr"/>
-          <a:lstStyle/>
-          <a:p>
-            <a:pPr algn="ctr"/>
-          </a:p>
-        </p:txBody>
-      </p:sp>
-      <p:sp>
-        <p:nvSpPr>
-          <p:cNvPr id="8" name="TextBox 7"/>
-          <p:cNvSpPr txBox="1"/>
-          <p:nvPr/>
-        </p:nvSpPr>
-        <p:spPr>
-          <a:xfrm>
-            <a:off x="914400" y="1600200"/>
-            <a:ext cx="4754879" cy="4297680"/>
-          </a:xfrm>
-          <a:prstGeom prst="rect">
-            <a:avLst/>
-          </a:prstGeom>
-          <a:noFill/>
-        </p:spPr>
-        <p:txBody>
-          <a:bodyPr wrap="square">
-            <a:spAutoFit/>
-          </a:bodyPr>
-          <a:lstStyle/>
-          <a:p>
-            <a:pPr algn="r">
-              <a:defRPr sz="1700" b="1">
-                <a:solidFill>
-                  <a:srgbClr val="064E3B"/>
-                </a:solidFill>
-                <a:latin typeface="Segoe UI"/>
-              </a:defRPr>
-            </a:pPr>
-            <a:r>
-              <a:t>المعمارية النظيفة وتجربة المريض</a:t>
-            </a:r>
-          </a:p>
-          <a:p>
-            <a:pPr algn="r">
-              <a:spcBef>
-                <a:spcPts val="800"/>
-              </a:spcBef>
-              <a:defRPr sz="1300">
-                <a:solidFill>
-                  <a:srgbClr val="0F172A"/>
-                </a:solidFill>
-                <a:latin typeface="Segoe UI"/>
-              </a:defRPr>
-            </a:pPr>
-            <a:r>
-              <a:t>• فصل الطبقات الثلاث (Clean Architecture):</a:t>
-            </a:r>
-          </a:p>
-          <a:p>
-            <a:pPr algn="r">
-              <a:spcBef>
-                <a:spcPts val="800"/>
-              </a:spcBef>
-              <a:defRPr sz="1300">
-                <a:solidFill>
-                  <a:srgbClr val="0F172A"/>
-                </a:solidFill>
-                <a:latin typeface="Segoe UI"/>
-              </a:defRPr>
-            </a:pPr>
-            <a:r>
-              <a:t>•   - core: خدمات الشبكة ApiService وتحديد الموقع والثيمات.</a:t>
-            </a:r>
-          </a:p>
-          <a:p>
-            <a:pPr algn="r">
-              <a:spcBef>
-                <a:spcPts val="800"/>
-              </a:spcBef>
-              <a:defRPr sz="1300">
-                <a:solidFill>
-                  <a:srgbClr val="0F172A"/>
-                </a:solidFill>
-                <a:latin typeface="Segoe UI"/>
-              </a:defRPr>
-            </a:pPr>
-            <a:r>
-              <a:t>•   - data: نماذج البيانات المحكمة وتحويل الـ JSON الآمن.</a:t>
-            </a:r>
-          </a:p>
-          <a:p>
-            <a:pPr algn="r">
-              <a:spcBef>
-                <a:spcPts val="800"/>
-              </a:spcBef>
-              <a:defRPr sz="1300">
-                <a:solidFill>
-                  <a:srgbClr val="0F172A"/>
-                </a:solidFill>
-                <a:latin typeface="Segoe UI"/>
-              </a:defRPr>
-            </a:pPr>
-            <a:r>
-              <a:t>•   - presentation: الشاشات التفاعلية والويدجتس المستقلة.</a:t>
-            </a:r>
-          </a:p>
-          <a:p>
-            <a:pPr algn="r">
-              <a:spcBef>
-                <a:spcPts val="800"/>
-              </a:spcBef>
-              <a:defRPr sz="1300">
-                <a:solidFill>
-                  <a:srgbClr val="0F172A"/>
-                </a:solidFill>
-                <a:latin typeface="Segoe UI"/>
-              </a:defRPr>
-            </a:pPr>
-            <a:r>
-              <a:t>• التصميم الطبي المعتمد: الأخضر الزمردي (#059669) والأبيض الطبي.</a:t>
-            </a:r>
-          </a:p>
-          <a:p>
-            <a:pPr algn="r">
-              <a:spcBef>
-                <a:spcPts val="800"/>
-              </a:spcBef>
-              <a:defRPr sz="1300">
-                <a:solidFill>
-                  <a:srgbClr val="0F172A"/>
-                </a:solidFill>
-                <a:latin typeface="Segoe UI"/>
-              </a:defRPr>
-            </a:pPr>
-            <a:r>
-              <a:t>• خريطة المسار الذكية: تعتمد على مربعات OpenStreetMap / CartoDB المجانية.</a:t>
-            </a:r>
-          </a:p>
-        </p:txBody>
-      </p:sp>
-      <p:sp>
-        <p:nvSpPr>
-          <p:cNvPr id="9" name="Rounded Rectangle 8"/>
-          <p:cNvSpPr/>
-          <p:nvPr/>
-        </p:nvSpPr>
-        <p:spPr>
-          <a:xfrm>
-            <a:off x="6217920" y="1463040"/>
-            <a:ext cx="5212080" cy="4572000"/>
-          </a:xfrm>
-          <a:prstGeom prst="roundRect">
-            <a:avLst/>
-          </a:prstGeom>
-          <a:solidFill>
-            <a:srgbClr val="FFFFFF"/>
+            <a:srgbClr val="0F172A"/>
           </a:solidFill>
           <a:ln w="19050">
             <a:solidFill>
@@ -6483,14 +9301,14 @@
       </p:sp>
       <p:sp>
         <p:nvSpPr>
-          <p:cNvPr id="10" name="TextBox 9"/>
+          <p:cNvPr id="8" name="TextBox 7"/>
           <p:cNvSpPr txBox="1"/>
           <p:nvPr/>
         </p:nvSpPr>
         <p:spPr>
           <a:xfrm>
-            <a:off x="6400800" y="1600200"/>
-            <a:ext cx="4846320" cy="4297680"/>
+            <a:off x="914400" y="1417320"/>
+            <a:ext cx="4846320" cy="365760"/>
           </a:xfrm>
           <a:prstGeom prst="rect">
             <a:avLst/>
@@ -6504,79 +9322,819 @@
           <a:lstStyle/>
           <a:p>
             <a:pPr algn="r">
-              <a:defRPr sz="1700" b="1">
-                <a:solidFill>
-                  <a:srgbClr val="0D9488"/>
-                </a:solidFill>
-                <a:latin typeface="Segoe UI"/>
-              </a:defRPr>
-            </a:pPr>
-            <a:r>
-              <a:t>تذكرة الحجز الذكية والمزامنة الحية</a:t>
-            </a:r>
-          </a:p>
+              <a:defRPr sz="1300" b="1">
+                <a:solidFill>
+                  <a:srgbClr val="10B981"/>
+                </a:solidFill>
+                <a:latin typeface="Segoe UI"/>
+              </a:defRPr>
+            </a:pPr>
+            <a:r>
+              <a:t>العميل: طلب إنشاء حجز مؤقت (TTL)  [Flutter / Dart]</a:t>
+            </a:r>
+          </a:p>
+        </p:txBody>
+      </p:sp>
+      <p:sp>
+        <p:nvSpPr>
+          <p:cNvPr id="9" name="TextBox 8"/>
+          <p:cNvSpPr txBox="1"/>
+          <p:nvPr/>
+        </p:nvSpPr>
+        <p:spPr>
+          <a:xfrm>
+            <a:off x="914400" y="1801368"/>
+            <a:ext cx="4846320" cy="4251959"/>
+          </a:xfrm>
+          <a:prstGeom prst="rect">
+            <a:avLst/>
+          </a:prstGeom>
+          <a:noFill/>
+        </p:spPr>
+        <p:txBody>
+          <a:bodyPr wrap="square">
+            <a:spAutoFit/>
+          </a:bodyPr>
+          <a:lstStyle/>
+          <a:p>
+            <a:pPr algn="l">
+              <a:defRPr sz="1000">
+                <a:solidFill>
+                  <a:srgbClr val="94A3B8"/>
+                </a:solidFill>
+                <a:latin typeface="Consolas"/>
+              </a:defRPr>
+            </a:pPr>
+            <a:r>
+              <a:t>// frontend/lib/core/network/api_service.dart</a:t>
+            </a:r>
+          </a:p>
+          <a:p>
+            <a:pPr algn="l">
+              <a:defRPr sz="1000">
+                <a:solidFill>
+                  <a:srgbClr val="38BDF8"/>
+                </a:solidFill>
+                <a:latin typeface="Consolas"/>
+              </a:defRPr>
+            </a:pPr>
+            <a:r>
+              <a:t>Future&lt;ReservationModel&gt; createReservation({</a:t>
+            </a:r>
+          </a:p>
+          <a:p>
+            <a:pPr algn="l">
+              <a:defRPr sz="1000">
+                <a:solidFill>
+                  <a:srgbClr val="38BDF8"/>
+                </a:solidFill>
+                <a:latin typeface="Consolas"/>
+              </a:defRPr>
+            </a:pPr>
+            <a:r>
+              <a:t>  required int stockId,</a:t>
+            </a:r>
+          </a:p>
+          <a:p>
+            <a:pPr algn="l">
+              <a:defRPr sz="1000">
+                <a:solidFill>
+                  <a:srgbClr val="38BDF8"/>
+                </a:solidFill>
+                <a:latin typeface="Consolas"/>
+              </a:defRPr>
+            </a:pPr>
+            <a:r>
+              <a:t>  int quantity = 1,</a:t>
+            </a:r>
+          </a:p>
+          <a:p>
+            <a:pPr algn="l">
+              <a:defRPr sz="1000">
+                <a:solidFill>
+                  <a:srgbClr val="38BDF8"/>
+                </a:solidFill>
+                <a:latin typeface="Consolas"/>
+              </a:defRPr>
+            </a:pPr>
+            <a:r>
+              <a:t>  int ttlMinutes = 30,</a:t>
+            </a:r>
+          </a:p>
+          <a:p>
+            <a:pPr algn="l">
+              <a:defRPr sz="1000">
+                <a:solidFill>
+                  <a:srgbClr val="F472B6"/>
+                </a:solidFill>
+                <a:latin typeface="Consolas"/>
+              </a:defRPr>
+            </a:pPr>
+            <a:r>
+              <a:t>}) async {</a:t>
+            </a:r>
+          </a:p>
+          <a:p>
+            <a:pPr algn="l">
+              <a:defRPr sz="1000">
+                <a:solidFill>
+                  <a:srgbClr val="38BDF8"/>
+                </a:solidFill>
+                <a:latin typeface="Consolas"/>
+              </a:defRPr>
+            </a:pPr>
+            <a:r>
+              <a:t>  final uri = Uri.parse('$baseUrl/reservations');</a:t>
+            </a:r>
+          </a:p>
+          <a:p>
+            <a:pPr algn="l">
+              <a:defRPr sz="1000">
+                <a:solidFill>
+                  <a:srgbClr val="F472B6"/>
+                </a:solidFill>
+                <a:latin typeface="Consolas"/>
+              </a:defRPr>
+            </a:pPr>
+            <a:r>
+              <a:t>  final res = await http.post(</a:t>
+            </a:r>
+          </a:p>
+          <a:p>
+            <a:pPr algn="l">
+              <a:defRPr sz="1000">
+                <a:solidFill>
+                  <a:srgbClr val="38BDF8"/>
+                </a:solidFill>
+                <a:latin typeface="Consolas"/>
+              </a:defRPr>
+            </a:pPr>
+            <a:r>
+              <a:t>    uri,</a:t>
+            </a:r>
+          </a:p>
+          <a:p>
+            <a:pPr algn="l">
+              <a:defRPr sz="1000">
+                <a:solidFill>
+                  <a:srgbClr val="38BDF8"/>
+                </a:solidFill>
+                <a:latin typeface="Consolas"/>
+              </a:defRPr>
+            </a:pPr>
+            <a:r>
+              <a:t>    headers: _headers,</a:t>
+            </a:r>
+          </a:p>
+          <a:p>
+            <a:pPr algn="l">
+              <a:defRPr sz="1000">
+                <a:solidFill>
+                  <a:srgbClr val="38BDF8"/>
+                </a:solidFill>
+                <a:latin typeface="Consolas"/>
+              </a:defRPr>
+            </a:pPr>
+            <a:r>
+              <a:t>    body: json.encode({</a:t>
+            </a:r>
+          </a:p>
+          <a:p>
+            <a:pPr algn="l">
+              <a:defRPr sz="1000">
+                <a:solidFill>
+                  <a:srgbClr val="38BDF8"/>
+                </a:solidFill>
+                <a:latin typeface="Consolas"/>
+              </a:defRPr>
+            </a:pPr>
+            <a:r>
+              <a:t>      'pharmacy_medicine_id': stockId,</a:t>
+            </a:r>
+          </a:p>
+          <a:p>
+            <a:pPr algn="l">
+              <a:defRPr sz="1000">
+                <a:solidFill>
+                  <a:srgbClr val="38BDF8"/>
+                </a:solidFill>
+                <a:latin typeface="Consolas"/>
+              </a:defRPr>
+            </a:pPr>
+            <a:r>
+              <a:t>      'quantity': quantity,</a:t>
+            </a:r>
+          </a:p>
+          <a:p>
+            <a:pPr algn="l">
+              <a:defRPr sz="1000">
+                <a:solidFill>
+                  <a:srgbClr val="38BDF8"/>
+                </a:solidFill>
+                <a:latin typeface="Consolas"/>
+              </a:defRPr>
+            </a:pPr>
+            <a:r>
+              <a:t>      'ttl_minutes': ttlMinutes,</a:t>
+            </a:r>
+          </a:p>
+          <a:p>
+            <a:pPr algn="l">
+              <a:defRPr sz="1000">
+                <a:solidFill>
+                  <a:srgbClr val="38BDF8"/>
+                </a:solidFill>
+                <a:latin typeface="Consolas"/>
+              </a:defRPr>
+            </a:pPr>
+            <a:r>
+              <a:t>    }),</a:t>
+            </a:r>
+          </a:p>
+          <a:p>
+            <a:pPr algn="l">
+              <a:defRPr sz="1000">
+                <a:solidFill>
+                  <a:srgbClr val="38BDF8"/>
+                </a:solidFill>
+                <a:latin typeface="Consolas"/>
+              </a:defRPr>
+            </a:pPr>
+            <a:r>
+              <a:t>  ).timeout(Duration(seconds: 15));</a:t>
+            </a:r>
+          </a:p>
+          <a:p>
+            <a:pPr algn="l">
+              <a:defRPr sz="1000">
+                <a:solidFill>
+                  <a:srgbClr val="38BDF8"/>
+                </a:solidFill>
+                <a:latin typeface="Consolas"/>
+              </a:defRPr>
+            </a:pPr>
+          </a:p>
+          <a:p>
+            <a:pPr algn="l">
+              <a:defRPr sz="1000">
+                <a:solidFill>
+                  <a:srgbClr val="F472B6"/>
+                </a:solidFill>
+                <a:latin typeface="Consolas"/>
+              </a:defRPr>
+            </a:pPr>
+            <a:r>
+              <a:t>  if (res.statusCode == 200 || res.statusCode == 201) {</a:t>
+            </a:r>
+          </a:p>
+          <a:p>
+            <a:pPr algn="l">
+              <a:defRPr sz="1000">
+                <a:solidFill>
+                  <a:srgbClr val="38BDF8"/>
+                </a:solidFill>
+                <a:latin typeface="Consolas"/>
+              </a:defRPr>
+            </a:pPr>
+            <a:r>
+              <a:t>    final body = json.decode(res.body);</a:t>
+            </a:r>
+          </a:p>
+          <a:p>
+            <a:pPr algn="l">
+              <a:defRPr sz="1000">
+                <a:solidFill>
+                  <a:srgbClr val="38BDF8"/>
+                </a:solidFill>
+                <a:latin typeface="Consolas"/>
+              </a:defRPr>
+            </a:pPr>
+            <a:r>
+              <a:t>    final created = ReservationModel.fromJson(body['data']);</a:t>
+            </a:r>
+          </a:p>
+          <a:p>
+            <a:pPr algn="l">
+              <a:defRPr sz="1000">
+                <a:solidFill>
+                  <a:srgbClr val="38BDF8"/>
+                </a:solidFill>
+                <a:latin typeface="Consolas"/>
+              </a:defRPr>
+            </a:pPr>
+            <a:r>
+              <a:t>    _cachedReservations.insert(0, created);</a:t>
+            </a:r>
+          </a:p>
+          <a:p>
+            <a:pPr algn="l">
+              <a:defRPr sz="1000">
+                <a:solidFill>
+                  <a:srgbClr val="38BDF8"/>
+                </a:solidFill>
+                <a:latin typeface="Consolas"/>
+              </a:defRPr>
+            </a:pPr>
+            <a:r>
+              <a:t>    notifyListeners();</a:t>
+            </a:r>
+          </a:p>
+          <a:p>
+            <a:pPr algn="l">
+              <a:defRPr sz="1000">
+                <a:solidFill>
+                  <a:srgbClr val="F472B6"/>
+                </a:solidFill>
+                <a:latin typeface="Consolas"/>
+              </a:defRPr>
+            </a:pPr>
+            <a:r>
+              <a:t>    return created;</a:t>
+            </a:r>
+          </a:p>
+          <a:p>
+            <a:pPr algn="l">
+              <a:defRPr sz="1000">
+                <a:solidFill>
+                  <a:srgbClr val="38BDF8"/>
+                </a:solidFill>
+                <a:latin typeface="Consolas"/>
+              </a:defRPr>
+            </a:pPr>
+            <a:r>
+              <a:t>  }</a:t>
+            </a:r>
+          </a:p>
+          <a:p>
+            <a:pPr algn="l">
+              <a:defRPr sz="1000">
+                <a:solidFill>
+                  <a:srgbClr val="38BDF8"/>
+                </a:solidFill>
+                <a:latin typeface="Consolas"/>
+              </a:defRPr>
+            </a:pPr>
+            <a:r>
+              <a:t>  throw Exception('تعذر إتمام الحجز');</a:t>
+            </a:r>
+          </a:p>
+          <a:p>
+            <a:pPr algn="l">
+              <a:defRPr sz="1000">
+                <a:solidFill>
+                  <a:srgbClr val="38BDF8"/>
+                </a:solidFill>
+                <a:latin typeface="Consolas"/>
+              </a:defRPr>
+            </a:pPr>
+            <a:r>
+              <a:t>}</a:t>
+            </a:r>
+          </a:p>
+        </p:txBody>
+      </p:sp>
+      <p:sp>
+        <p:nvSpPr>
+          <p:cNvPr id="10" name="Rounded Rectangle 9"/>
+          <p:cNvSpPr/>
+          <p:nvPr/>
+        </p:nvSpPr>
+        <p:spPr>
+          <a:xfrm>
+            <a:off x="6217920" y="1325880"/>
+            <a:ext cx="5212080" cy="4846320"/>
+          </a:xfrm>
+          <a:prstGeom prst="roundRect">
+            <a:avLst/>
+          </a:prstGeom>
+          <a:solidFill>
+            <a:srgbClr val="0F172A"/>
+          </a:solidFill>
+          <a:ln w="19050">
+            <a:solidFill>
+              <a:srgbClr val="0D9488"/>
+            </a:solidFill>
+          </a:ln>
+        </p:spPr>
+        <p:style>
+          <a:lnRef idx="1">
+            <a:schemeClr val="accent1"/>
+          </a:lnRef>
+          <a:fillRef idx="3">
+            <a:schemeClr val="accent1"/>
+          </a:fillRef>
+          <a:effectRef idx="2">
+            <a:schemeClr val="accent1"/>
+          </a:effectRef>
+          <a:fontRef idx="minor">
+            <a:schemeClr val="lt1"/>
+          </a:fontRef>
+        </p:style>
+        <p:txBody>
+          <a:bodyPr rtlCol="0" anchor="ctr"/>
+          <a:lstStyle/>
+          <a:p>
+            <a:pPr algn="ctr"/>
+          </a:p>
+        </p:txBody>
+      </p:sp>
+      <p:sp>
+        <p:nvSpPr>
+          <p:cNvPr id="11" name="TextBox 10"/>
+          <p:cNvSpPr txBox="1"/>
+          <p:nvPr/>
+        </p:nvSpPr>
+        <p:spPr>
+          <a:xfrm>
+            <a:off x="6400800" y="1417320"/>
+            <a:ext cx="4846320" cy="365760"/>
+          </a:xfrm>
+          <a:prstGeom prst="rect">
+            <a:avLst/>
+          </a:prstGeom>
+          <a:noFill/>
+        </p:spPr>
+        <p:txBody>
+          <a:bodyPr wrap="square">
+            <a:spAutoFit/>
+          </a:bodyPr>
+          <a:lstStyle/>
           <a:p>
             <a:pPr algn="r">
-              <a:spcBef>
-                <a:spcPts val="800"/>
-              </a:spcBef>
-              <a:defRPr sz="1300">
-                <a:solidFill>
-                  <a:srgbClr val="0F172A"/>
-                </a:solidFill>
-                <a:latin typeface="Segoe UI"/>
-              </a:defRPr>
-            </a:pPr>
-            <a:r>
-              <a:t>• مؤقت عد تنازلي حي (30 دقيقة): مبرمج لإنعاش الشاشة بالثواني.</a:t>
-            </a:r>
-          </a:p>
-          <a:p>
-            <a:pPr algn="r">
-              <a:spcBef>
-                <a:spcPts val="800"/>
-              </a:spcBef>
-              <a:defRPr sz="1300">
-                <a:solidFill>
-                  <a:srgbClr val="0F172A"/>
-                </a:solidFill>
-                <a:latin typeface="Segoe UI"/>
-              </a:defRPr>
-            </a:pPr>
-            <a:r>
-              <a:t>• رمز الحجز السريع و QR Code: لتأكيد الاستلام بماسح الباركود.</a:t>
-            </a:r>
-          </a:p>
-          <a:p>
-            <a:pPr algn="r">
-              <a:spcBef>
-                <a:spcPts val="800"/>
-              </a:spcBef>
-              <a:defRPr sz="1300">
-                <a:solidFill>
-                  <a:srgbClr val="0F172A"/>
-                </a:solidFill>
-                <a:latin typeface="Segoe UI"/>
-              </a:defRPr>
-            </a:pPr>
-            <a:r>
-              <a:t>• المزامنة اللحظية مع الصيدلي: فور ضغط الصيدلي 'تم التسليم'، تلتقط الشاشة التأكيد وتتحول لشارة النجاح الخضراء فوراً.</a:t>
-            </a:r>
-          </a:p>
-          <a:p>
-            <a:pPr algn="r">
-              <a:spcBef>
-                <a:spcPts val="800"/>
-              </a:spcBef>
-              <a:defRPr sz="1300">
-                <a:solidFill>
-                  <a:srgbClr val="0F172A"/>
-                </a:solidFill>
-                <a:latin typeface="Segoe UI"/>
-              </a:defRPr>
-            </a:pPr>
-            <a:r>
-              <a:t>• مرونة الشبكة (Resilience): عمل التطبيق بسلاسة وعدم انهياره حتى مع تذبذب الاتصال.</a:t>
+              <a:defRPr sz="1300" b="1">
+                <a:solidFill>
+                  <a:srgbClr val="10B981"/>
+                </a:solidFill>
+                <a:latin typeface="Segoe UI"/>
+              </a:defRPr>
+            </a:pPr>
+            <a:r>
+              <a:t>الخادم: المعاملة الذرية وقفل lockForUpdate  [Laravel / PHP]</a:t>
+            </a:r>
+          </a:p>
+        </p:txBody>
+      </p:sp>
+      <p:sp>
+        <p:nvSpPr>
+          <p:cNvPr id="12" name="TextBox 11"/>
+          <p:cNvSpPr txBox="1"/>
+          <p:nvPr/>
+        </p:nvSpPr>
+        <p:spPr>
+          <a:xfrm>
+            <a:off x="6400800" y="1801368"/>
+            <a:ext cx="4846320" cy="4251959"/>
+          </a:xfrm>
+          <a:prstGeom prst="rect">
+            <a:avLst/>
+          </a:prstGeom>
+          <a:noFill/>
+        </p:spPr>
+        <p:txBody>
+          <a:bodyPr wrap="square">
+            <a:spAutoFit/>
+          </a:bodyPr>
+          <a:lstStyle/>
+          <a:p>
+            <a:pPr algn="l">
+              <a:defRPr sz="1000">
+                <a:solidFill>
+                  <a:srgbClr val="94A3B8"/>
+                </a:solidFill>
+                <a:latin typeface="Consolas"/>
+              </a:defRPr>
+            </a:pPr>
+            <a:r>
+              <a:t>// backend/app/Services/ReservationService.php</a:t>
+            </a:r>
+          </a:p>
+          <a:p>
+            <a:pPr algn="l">
+              <a:defRPr sz="1000">
+                <a:solidFill>
+                  <a:srgbClr val="F472B6"/>
+                </a:solidFill>
+                <a:latin typeface="Consolas"/>
+              </a:defRPr>
+            </a:pPr>
+            <a:r>
+              <a:t>public function createReservation(int $userId, int $stockId, int $qty): Reservation {</a:t>
+            </a:r>
+          </a:p>
+          <a:p>
+            <a:pPr algn="l">
+              <a:defRPr sz="1000">
+                <a:solidFill>
+                  <a:srgbClr val="F472B6"/>
+                </a:solidFill>
+                <a:latin typeface="Consolas"/>
+              </a:defRPr>
+            </a:pPr>
+            <a:r>
+              <a:t>    return DB::transaction(function () use ($userId, $stockId, $qty) {</a:t>
+            </a:r>
+          </a:p>
+          <a:p>
+            <a:pPr algn="l">
+              <a:defRPr sz="1000">
+                <a:solidFill>
+                  <a:srgbClr val="94A3B8"/>
+                </a:solidFill>
+                <a:latin typeface="Consolas"/>
+              </a:defRPr>
+            </a:pPr>
+            <a:r>
+              <a:t>        // 1. قفل الصف تشاؤمياً لمنع المعاملات المتزامنة</a:t>
+            </a:r>
+          </a:p>
+          <a:p>
+            <a:pPr algn="l">
+              <a:defRPr sz="1000">
+                <a:solidFill>
+                  <a:srgbClr val="38BDF8"/>
+                </a:solidFill>
+                <a:latin typeface="Consolas"/>
+              </a:defRPr>
+            </a:pPr>
+            <a:r>
+              <a:t>        $stock = PharmacyMedicine::where('id', $stockId)</a:t>
+            </a:r>
+          </a:p>
+          <a:p>
+            <a:pPr algn="l">
+              <a:defRPr sz="1000">
+                <a:solidFill>
+                  <a:srgbClr val="38BDF8"/>
+                </a:solidFill>
+                <a:latin typeface="Consolas"/>
+              </a:defRPr>
+            </a:pPr>
+            <a:r>
+              <a:t>            -&gt;lockForUpdate()</a:t>
+            </a:r>
+          </a:p>
+          <a:p>
+            <a:pPr algn="l">
+              <a:defRPr sz="1000">
+                <a:solidFill>
+                  <a:srgbClr val="38BDF8"/>
+                </a:solidFill>
+                <a:latin typeface="Consolas"/>
+              </a:defRPr>
+            </a:pPr>
+            <a:r>
+              <a:t>            -&gt;firstOrFail();</a:t>
+            </a:r>
+          </a:p>
+          <a:p>
+            <a:pPr algn="l">
+              <a:defRPr sz="1000">
+                <a:solidFill>
+                  <a:srgbClr val="38BDF8"/>
+                </a:solidFill>
+                <a:latin typeface="Consolas"/>
+              </a:defRPr>
+            </a:pPr>
+          </a:p>
+          <a:p>
+            <a:pPr algn="l">
+              <a:defRPr sz="1000">
+                <a:solidFill>
+                  <a:srgbClr val="94A3B8"/>
+                </a:solidFill>
+                <a:latin typeface="Consolas"/>
+              </a:defRPr>
+            </a:pPr>
+            <a:r>
+              <a:t>        // 2. التحقق الذري من الرصيد الفعلي</a:t>
+            </a:r>
+          </a:p>
+          <a:p>
+            <a:pPr algn="l">
+              <a:defRPr sz="1000">
+                <a:solidFill>
+                  <a:srgbClr val="F472B6"/>
+                </a:solidFill>
+                <a:latin typeface="Consolas"/>
+              </a:defRPr>
+            </a:pPr>
+            <a:r>
+              <a:t>        if ($stock-&gt;available_quantity &lt; $qty) {</a:t>
+            </a:r>
+          </a:p>
+          <a:p>
+            <a:pPr algn="l">
+              <a:defRPr sz="1000">
+                <a:solidFill>
+                  <a:srgbClr val="38BDF8"/>
+                </a:solidFill>
+                <a:latin typeface="Consolas"/>
+              </a:defRPr>
+            </a:pPr>
+            <a:r>
+              <a:t>            throw new Exception('عذراً، الكمية غير متوفرة حالياً');</a:t>
+            </a:r>
+          </a:p>
+          <a:p>
+            <a:pPr algn="l">
+              <a:defRPr sz="1000">
+                <a:solidFill>
+                  <a:srgbClr val="38BDF8"/>
+                </a:solidFill>
+                <a:latin typeface="Consolas"/>
+              </a:defRPr>
+            </a:pPr>
+            <a:r>
+              <a:t>        }</a:t>
+            </a:r>
+          </a:p>
+          <a:p>
+            <a:pPr algn="l">
+              <a:defRPr sz="1000">
+                <a:solidFill>
+                  <a:srgbClr val="38BDF8"/>
+                </a:solidFill>
+                <a:latin typeface="Consolas"/>
+              </a:defRPr>
+            </a:pPr>
+          </a:p>
+          <a:p>
+            <a:pPr algn="l">
+              <a:defRPr sz="1000">
+                <a:solidFill>
+                  <a:srgbClr val="94A3B8"/>
+                </a:solidFill>
+                <a:latin typeface="Consolas"/>
+              </a:defRPr>
+            </a:pPr>
+            <a:r>
+              <a:t>        // 3. الخصم الآمن وتحديث الحالة</a:t>
+            </a:r>
+          </a:p>
+          <a:p>
+            <a:pPr algn="l">
+              <a:defRPr sz="1000">
+                <a:solidFill>
+                  <a:srgbClr val="38BDF8"/>
+                </a:solidFill>
+                <a:latin typeface="Consolas"/>
+              </a:defRPr>
+            </a:pPr>
+            <a:r>
+              <a:t>        $stock-&gt;decrement('available_quantity', $qty);</a:t>
+            </a:r>
+          </a:p>
+          <a:p>
+            <a:pPr algn="l">
+              <a:defRPr sz="1000">
+                <a:solidFill>
+                  <a:srgbClr val="F472B6"/>
+                </a:solidFill>
+                <a:latin typeface="Consolas"/>
+              </a:defRPr>
+            </a:pPr>
+            <a:r>
+              <a:t>        if ($stock-&gt;available_quantity === 0) {</a:t>
+            </a:r>
+          </a:p>
+          <a:p>
+            <a:pPr algn="l">
+              <a:defRPr sz="1000">
+                <a:solidFill>
+                  <a:srgbClr val="38BDF8"/>
+                </a:solidFill>
+                <a:latin typeface="Consolas"/>
+              </a:defRPr>
+            </a:pPr>
+            <a:r>
+              <a:t>            $stock-&gt;update(['status' =&gt; 'out_of_stock']);</a:t>
+            </a:r>
+          </a:p>
+          <a:p>
+            <a:pPr algn="l">
+              <a:defRPr sz="1000">
+                <a:solidFill>
+                  <a:srgbClr val="38BDF8"/>
+                </a:solidFill>
+                <a:latin typeface="Consolas"/>
+              </a:defRPr>
+            </a:pPr>
+            <a:r>
+              <a:t>        }</a:t>
+            </a:r>
+          </a:p>
+          <a:p>
+            <a:pPr algn="l">
+              <a:defRPr sz="1000">
+                <a:solidFill>
+                  <a:srgbClr val="38BDF8"/>
+                </a:solidFill>
+                <a:latin typeface="Consolas"/>
+              </a:defRPr>
+            </a:pPr>
+          </a:p>
+          <a:p>
+            <a:pPr algn="l">
+              <a:defRPr sz="1000">
+                <a:solidFill>
+                  <a:srgbClr val="94A3B8"/>
+                </a:solidFill>
+                <a:latin typeface="Consolas"/>
+              </a:defRPr>
+            </a:pPr>
+            <a:r>
+              <a:t>        // 4. إنشاء الحجز وتحديد انتهاء الصلاحية 30 دقيقة</a:t>
+            </a:r>
+          </a:p>
+          <a:p>
+            <a:pPr algn="l">
+              <a:defRPr sz="1000">
+                <a:solidFill>
+                  <a:srgbClr val="F472B6"/>
+                </a:solidFill>
+                <a:latin typeface="Consolas"/>
+              </a:defRPr>
+            </a:pPr>
+            <a:r>
+              <a:t>        return Reservation::create([</a:t>
+            </a:r>
+          </a:p>
+          <a:p>
+            <a:pPr algn="l">
+              <a:defRPr sz="1000">
+                <a:solidFill>
+                  <a:srgbClr val="38BDF8"/>
+                </a:solidFill>
+                <a:latin typeface="Consolas"/>
+              </a:defRPr>
+            </a:pPr>
+            <a:r>
+              <a:t>            'user_id' =&gt; $userId, 'pharmacy_id' =&gt; $stock-&gt;pharmacy_id,</a:t>
+            </a:r>
+          </a:p>
+          <a:p>
+            <a:pPr algn="l">
+              <a:defRPr sz="1000">
+                <a:solidFill>
+                  <a:srgbClr val="38BDF8"/>
+                </a:solidFill>
+                <a:latin typeface="Consolas"/>
+              </a:defRPr>
+            </a:pPr>
+            <a:r>
+              <a:t>            'reservation_code' =&gt; 'RES-'.strtoupper(Str::random(6)),</a:t>
+            </a:r>
+          </a:p>
+          <a:p>
+            <a:pPr algn="l">
+              <a:defRPr sz="1000">
+                <a:solidFill>
+                  <a:srgbClr val="38BDF8"/>
+                </a:solidFill>
+                <a:latin typeface="Consolas"/>
+              </a:defRPr>
+            </a:pPr>
+            <a:r>
+              <a:t>            'status' =&gt; 'pending', 'expires_at' =&gt; now()-&gt;addMinutes(30)</a:t>
+            </a:r>
+          </a:p>
+          <a:p>
+            <a:pPr algn="l">
+              <a:defRPr sz="1000">
+                <a:solidFill>
+                  <a:srgbClr val="38BDF8"/>
+                </a:solidFill>
+                <a:latin typeface="Consolas"/>
+              </a:defRPr>
+            </a:pPr>
+            <a:r>
+              <a:t>        ]);</a:t>
+            </a:r>
+          </a:p>
+          <a:p>
+            <a:pPr algn="l">
+              <a:defRPr sz="1000">
+                <a:solidFill>
+                  <a:srgbClr val="38BDF8"/>
+                </a:solidFill>
+                <a:latin typeface="Consolas"/>
+              </a:defRPr>
+            </a:pPr>
+            <a:r>
+              <a:t>    });</a:t>
+            </a:r>
+          </a:p>
+          <a:p>
+            <a:pPr algn="l">
+              <a:defRPr sz="1000">
+                <a:solidFill>
+                  <a:srgbClr val="38BDF8"/>
+                </a:solidFill>
+                <a:latin typeface="Consolas"/>
+              </a:defRPr>
+            </a:pPr>
+            <a:r>
+              <a:t>}</a:t>
             </a:r>
           </a:p>
         </p:txBody>
@@ -6608,7 +10166,7 @@
         <p:spPr>
           <a:xfrm>
             <a:off x="0" y="0"/>
-            <a:ext cx="12191695" cy="1097280"/>
+            <a:ext cx="12191695" cy="1051560"/>
           </a:xfrm>
           <a:prstGeom prst="rect">
             <a:avLst/>
@@ -6652,8 +10210,8 @@
         </p:nvSpPr>
         <p:spPr>
           <a:xfrm>
-            <a:off x="731520" y="109728"/>
-            <a:ext cx="10698480" cy="320040"/>
+            <a:off x="731520" y="91440"/>
+            <a:ext cx="10698480" cy="292608"/>
           </a:xfrm>
           <a:prstGeom prst="rect">
             <a:avLst/>
@@ -6667,7 +10225,7 @@
           <a:lstStyle/>
           <a:p>
             <a:pPr algn="r">
-              <a:defRPr sz="1300" b="1">
+              <a:defRPr sz="1200" b="1">
                 <a:solidFill>
                   <a:srgbClr val="10B981"/>
                 </a:solidFill>
@@ -6675,7 +10233,7 @@
               </a:defRPr>
             </a:pPr>
             <a:r>
-              <a:t>مشروع تخرج — نظام خادم وعميل (Level 4)</a:t>
+              <a:t>منظومة خادم وعميل موزعة — معمارية 3-Tier Distributed Architecture</a:t>
             </a:r>
           </a:p>
         </p:txBody>
@@ -6688,8 +10246,8 @@
         </p:nvSpPr>
         <p:spPr>
           <a:xfrm>
-            <a:off x="731520" y="411480"/>
-            <a:ext cx="10698480" cy="594360"/>
+            <a:off x="731520" y="384048"/>
+            <a:ext cx="10698480" cy="566928"/>
           </a:xfrm>
           <a:prstGeom prst="rect">
             <a:avLst/>
@@ -6703,7 +10261,7 @@
           <a:lstStyle/>
           <a:p>
             <a:pPr algn="r">
-              <a:defRPr sz="2200" b="1">
+              <a:defRPr sz="2100" b="1">
                 <a:solidFill>
                   <a:srgbClr val="F8FAFC"/>
                 </a:solidFill>
@@ -6711,7 +10269,7 @@
               </a:defRPr>
             </a:pPr>
             <a:r>
-              <a:t>6. بوابة الصيدلية والربط المحاسبي (Pharmacy Portal &amp; B2B)</a:t>
+              <a:t>6. كود الاستعلام الجغرافي الكروي (Spherical GeoSearch &amp; Haversine)</a:t>
             </a:r>
           </a:p>
         </p:txBody>
@@ -6724,8 +10282,8 @@
         </p:nvSpPr>
         <p:spPr>
           <a:xfrm>
-            <a:off x="0" y="1097280"/>
-            <a:ext cx="12191695" cy="54864"/>
+            <a:off x="0" y="1051560"/>
+            <a:ext cx="12191695" cy="45720"/>
           </a:xfrm>
           <a:prstGeom prst="rect">
             <a:avLst/>
@@ -6767,8 +10325,8 @@
         </p:nvSpPr>
         <p:spPr>
           <a:xfrm>
-            <a:off x="731520" y="6446520"/>
-            <a:ext cx="10698480" cy="320040"/>
+            <a:off x="731520" y="6473952"/>
+            <a:ext cx="10698480" cy="292608"/>
           </a:xfrm>
           <a:prstGeom prst="rect">
             <a:avLst/>
@@ -6782,7 +10340,7 @@
           <a:lstStyle/>
           <a:p>
             <a:pPr algn="ctr">
-              <a:defRPr sz="1100">
+              <a:defRPr sz="1050">
                 <a:solidFill>
                   <a:srgbClr val="64748B"/>
                 </a:solidFill>
@@ -6803,18 +10361,18 @@
         </p:nvSpPr>
         <p:spPr>
           <a:xfrm>
-            <a:off x="731520" y="1463040"/>
-            <a:ext cx="5120640" cy="4572000"/>
+            <a:off x="731520" y="1325880"/>
+            <a:ext cx="5212080" cy="4846320"/>
           </a:xfrm>
           <a:prstGeom prst="roundRect">
             <a:avLst/>
           </a:prstGeom>
           <a:solidFill>
-            <a:srgbClr val="FFFFFF"/>
+            <a:srgbClr val="0F172A"/>
           </a:solidFill>
           <a:ln w="19050">
             <a:solidFill>
-              <a:srgbClr val="E2E8F0"/>
+              <a:srgbClr val="0D9488"/>
             </a:solidFill>
           </a:ln>
         </p:spPr>
@@ -6848,8 +10406,8 @@
         </p:nvSpPr>
         <p:spPr>
           <a:xfrm>
-            <a:off x="914400" y="1600200"/>
-            <a:ext cx="4754879" cy="4297680"/>
+            <a:off x="914400" y="1417320"/>
+            <a:ext cx="4846320" cy="365760"/>
           </a:xfrm>
           <a:prstGeom prst="rect">
             <a:avLst/>
@@ -6863,119 +10421,296 @@
           <a:lstStyle/>
           <a:p>
             <a:pPr algn="r">
-              <a:defRPr sz="1700" b="1">
-                <a:solidFill>
-                  <a:srgbClr val="064E3B"/>
-                </a:solidFill>
-                <a:latin typeface="Segoe UI"/>
-              </a:defRPr>
-            </a:pPr>
-            <a:r>
-              <a:t>بوابة الويب للصيدليات (Web Portal)</a:t>
-            </a:r>
-          </a:p>
-          <a:p>
-            <a:pPr algn="r">
-              <a:spcBef>
-                <a:spcPts val="800"/>
-              </a:spcBef>
-              <a:defRPr sz="1300">
-                <a:solidFill>
-                  <a:srgbClr val="0F172A"/>
-                </a:solidFill>
-                <a:latin typeface="Segoe UI"/>
-              </a:defRPr>
-            </a:pPr>
-            <a:r>
-              <a:t>• لوحة خفيفة وسريعة تعمل من متصفح أي كمبيوتر أو هاتف.</a:t>
-            </a:r>
-          </a:p>
-          <a:p>
-            <a:pPr algn="r">
-              <a:spcBef>
-                <a:spcPts val="800"/>
-              </a:spcBef>
-              <a:defRPr sz="1300">
-                <a:solidFill>
-                  <a:srgbClr val="0F172A"/>
-                </a:solidFill>
-                <a:latin typeface="Segoe UI"/>
-              </a:defRPr>
-            </a:pPr>
-            <a:r>
-              <a:t>• إدارة المخزون اللحظي: تحديث الأسعار وتنبيهات المخزون الحرج.</a:t>
-            </a:r>
-          </a:p>
-          <a:p>
-            <a:pPr algn="r">
-              <a:spcBef>
-                <a:spcPts val="800"/>
-              </a:spcBef>
-              <a:defRPr sz="1300">
-                <a:solidFill>
-                  <a:srgbClr val="0F172A"/>
-                </a:solidFill>
-                <a:latin typeface="Segoe UI"/>
-              </a:defRPr>
-            </a:pPr>
-            <a:r>
-              <a:t>• شاشة الحجوزات الواردة: مزامنة حية (Auto-Refresh كل 5 ثوانٍ).</a:t>
-            </a:r>
-          </a:p>
-          <a:p>
-            <a:pPr algn="r">
-              <a:spcBef>
-                <a:spcPts val="800"/>
-              </a:spcBef>
-              <a:defRPr sz="1300">
-                <a:solidFill>
-                  <a:srgbClr val="0F172A"/>
-                </a:solidFill>
-                <a:latin typeface="Segoe UI"/>
-              </a:defRPr>
-            </a:pPr>
-            <a:r>
-              <a:t>• تأكيد تسليم الدواء بضغطة زر واحدة وإغلاق المعاملة بنجاح.</a:t>
-            </a:r>
-          </a:p>
-          <a:p>
-            <a:pPr algn="r">
-              <a:spcBef>
-                <a:spcPts val="800"/>
-              </a:spcBef>
-              <a:defRPr sz="1300">
-                <a:solidFill>
-                  <a:srgbClr val="0F172A"/>
-                </a:solidFill>
-                <a:latin typeface="Segoe UI"/>
-              </a:defRPr>
-            </a:pPr>
-            <a:r>
-              <a:t>• أمان الجلسات وحماية الـ CSRF ومكافحة التزوير.</a:t>
-            </a:r>
-          </a:p>
-        </p:txBody>
-      </p:sp>
-      <p:sp>
-        <p:nvSpPr>
-          <p:cNvPr id="9" name="Rounded Rectangle 8"/>
+              <a:defRPr sz="1300" b="1">
+                <a:solidFill>
+                  <a:srgbClr val="10B981"/>
+                </a:solidFill>
+                <a:latin typeface="Segoe UI"/>
+              </a:defRPr>
+            </a:pPr>
+            <a:r>
+              <a:t>العميل: إرسال إحداثيات GPS ونصف القطر  [Flutter / Dart]</a:t>
+            </a:r>
+          </a:p>
+        </p:txBody>
+      </p:sp>
+      <p:sp>
+        <p:nvSpPr>
+          <p:cNvPr id="9" name="TextBox 8"/>
+          <p:cNvSpPr txBox="1"/>
+          <p:nvPr/>
+        </p:nvSpPr>
+        <p:spPr>
+          <a:xfrm>
+            <a:off x="914400" y="1801368"/>
+            <a:ext cx="4846320" cy="4251959"/>
+          </a:xfrm>
+          <a:prstGeom prst="rect">
+            <a:avLst/>
+          </a:prstGeom>
+          <a:noFill/>
+        </p:spPr>
+        <p:txBody>
+          <a:bodyPr wrap="square">
+            <a:spAutoFit/>
+          </a:bodyPr>
+          <a:lstStyle/>
+          <a:p>
+            <a:pPr algn="l">
+              <a:defRPr sz="1000">
+                <a:solidFill>
+                  <a:srgbClr val="94A3B8"/>
+                </a:solidFill>
+                <a:latin typeface="Consolas"/>
+              </a:defRPr>
+            </a:pPr>
+            <a:r>
+              <a:t>// frontend/lib/core/network/api_service.dart</a:t>
+            </a:r>
+          </a:p>
+          <a:p>
+            <a:pPr algn="l">
+              <a:defRPr sz="1000">
+                <a:solidFill>
+                  <a:srgbClr val="38BDF8"/>
+                </a:solidFill>
+                <a:latin typeface="Consolas"/>
+              </a:defRPr>
+            </a:pPr>
+            <a:r>
+              <a:t>Future&lt;List&lt;MedicineSearchItem&gt;&gt; searchMedicines({</a:t>
+            </a:r>
+          </a:p>
+          <a:p>
+            <a:pPr algn="l">
+              <a:defRPr sz="1000">
+                <a:solidFill>
+                  <a:srgbClr val="38BDF8"/>
+                </a:solidFill>
+                <a:latin typeface="Consolas"/>
+              </a:defRPr>
+            </a:pPr>
+            <a:r>
+              <a:t>  String? query, double? latitude, double? longitude, double radiusKm = 20.0,</a:t>
+            </a:r>
+          </a:p>
+          <a:p>
+            <a:pPr algn="l">
+              <a:defRPr sz="1000">
+                <a:solidFill>
+                  <a:srgbClr val="F472B6"/>
+                </a:solidFill>
+                <a:latin typeface="Consolas"/>
+              </a:defRPr>
+            </a:pPr>
+            <a:r>
+              <a:t>}) async {</a:t>
+            </a:r>
+          </a:p>
+          <a:p>
+            <a:pPr algn="l">
+              <a:defRPr sz="1000">
+                <a:solidFill>
+                  <a:srgbClr val="38BDF8"/>
+                </a:solidFill>
+                <a:latin typeface="Consolas"/>
+              </a:defRPr>
+            </a:pPr>
+            <a:r>
+              <a:t>  final queryParams = &lt;String, String&gt;{</a:t>
+            </a:r>
+          </a:p>
+          <a:p>
+            <a:pPr algn="l">
+              <a:defRPr sz="1000">
+                <a:solidFill>
+                  <a:srgbClr val="F472B6"/>
+                </a:solidFill>
+                <a:latin typeface="Consolas"/>
+              </a:defRPr>
+            </a:pPr>
+            <a:r>
+              <a:t>    if (query != null) 'q': query,</a:t>
+            </a:r>
+          </a:p>
+          <a:p>
+            <a:pPr algn="l">
+              <a:defRPr sz="1000">
+                <a:solidFill>
+                  <a:srgbClr val="F472B6"/>
+                </a:solidFill>
+                <a:latin typeface="Consolas"/>
+              </a:defRPr>
+            </a:pPr>
+            <a:r>
+              <a:t>    if (latitude != null) 'lat': latitude.toString(),</a:t>
+            </a:r>
+          </a:p>
+          <a:p>
+            <a:pPr algn="l">
+              <a:defRPr sz="1000">
+                <a:solidFill>
+                  <a:srgbClr val="F472B6"/>
+                </a:solidFill>
+                <a:latin typeface="Consolas"/>
+              </a:defRPr>
+            </a:pPr>
+            <a:r>
+              <a:t>    if (longitude != null) 'lng': longitude.toString(),</a:t>
+            </a:r>
+          </a:p>
+          <a:p>
+            <a:pPr algn="l">
+              <a:defRPr sz="1000">
+                <a:solidFill>
+                  <a:srgbClr val="38BDF8"/>
+                </a:solidFill>
+                <a:latin typeface="Consolas"/>
+              </a:defRPr>
+            </a:pPr>
+            <a:r>
+              <a:t>    'radius': radiusKm.toString(),</a:t>
+            </a:r>
+          </a:p>
+          <a:p>
+            <a:pPr algn="l">
+              <a:defRPr sz="1000">
+                <a:solidFill>
+                  <a:srgbClr val="38BDF8"/>
+                </a:solidFill>
+                <a:latin typeface="Consolas"/>
+              </a:defRPr>
+            </a:pPr>
+            <a:r>
+              <a:t>  };</a:t>
+            </a:r>
+          </a:p>
+          <a:p>
+            <a:pPr algn="l">
+              <a:defRPr sz="1000">
+                <a:solidFill>
+                  <a:srgbClr val="38BDF8"/>
+                </a:solidFill>
+                <a:latin typeface="Consolas"/>
+              </a:defRPr>
+            </a:pPr>
+            <a:r>
+              <a:t>  final uri = Uri.parse('$baseUrl/medicines/search')</a:t>
+            </a:r>
+          </a:p>
+          <a:p>
+            <a:pPr algn="l">
+              <a:defRPr sz="1000">
+                <a:solidFill>
+                  <a:srgbClr val="38BDF8"/>
+                </a:solidFill>
+                <a:latin typeface="Consolas"/>
+              </a:defRPr>
+            </a:pPr>
+            <a:r>
+              <a:t>      .replace(queryParameters: queryParams);</a:t>
+            </a:r>
+          </a:p>
+          <a:p>
+            <a:pPr algn="l">
+              <a:defRPr sz="1000">
+                <a:solidFill>
+                  <a:srgbClr val="F472B6"/>
+                </a:solidFill>
+                <a:latin typeface="Consolas"/>
+              </a:defRPr>
+            </a:pPr>
+            <a:r>
+              <a:t>  final res = await http.get(uri, headers: _headers);</a:t>
+            </a:r>
+          </a:p>
+          <a:p>
+            <a:pPr algn="l">
+              <a:defRPr sz="1000">
+                <a:solidFill>
+                  <a:srgbClr val="38BDF8"/>
+                </a:solidFill>
+                <a:latin typeface="Consolas"/>
+              </a:defRPr>
+            </a:pPr>
+            <a:r>
+              <a:t>  final body = json.decode(utf8.decode(res.bodyBytes));</a:t>
+            </a:r>
+          </a:p>
+          <a:p>
+            <a:pPr algn="l">
+              <a:defRPr sz="1000">
+                <a:solidFill>
+                  <a:srgbClr val="F472B6"/>
+                </a:solidFill>
+                <a:latin typeface="Consolas"/>
+              </a:defRPr>
+            </a:pPr>
+            <a:r>
+              <a:t>  return (body['data'] as List)</a:t>
+            </a:r>
+          </a:p>
+          <a:p>
+            <a:pPr algn="l">
+              <a:defRPr sz="1000">
+                <a:solidFill>
+                  <a:srgbClr val="38BDF8"/>
+                </a:solidFill>
+                <a:latin typeface="Consolas"/>
+              </a:defRPr>
+            </a:pPr>
+            <a:r>
+              <a:t>      .map((item) =&gt; MedicineSearchItem.fromJson(item))</a:t>
+            </a:r>
+          </a:p>
+          <a:p>
+            <a:pPr algn="l">
+              <a:defRPr sz="1000">
+                <a:solidFill>
+                  <a:srgbClr val="38BDF8"/>
+                </a:solidFill>
+                <a:latin typeface="Consolas"/>
+              </a:defRPr>
+            </a:pPr>
+            <a:r>
+              <a:t>      .toList();</a:t>
+            </a:r>
+          </a:p>
+          <a:p>
+            <a:pPr algn="l">
+              <a:defRPr sz="1000">
+                <a:solidFill>
+                  <a:srgbClr val="38BDF8"/>
+                </a:solidFill>
+                <a:latin typeface="Consolas"/>
+              </a:defRPr>
+            </a:pPr>
+            <a:r>
+              <a:t>}</a:t>
+            </a:r>
+          </a:p>
+        </p:txBody>
+      </p:sp>
+      <p:sp>
+        <p:nvSpPr>
+          <p:cNvPr id="10" name="Rounded Rectangle 9"/>
           <p:cNvSpPr/>
           <p:nvPr/>
         </p:nvSpPr>
         <p:spPr>
           <a:xfrm>
-            <a:off x="6217920" y="1463040"/>
-            <a:ext cx="5212080" cy="4572000"/>
+            <a:off x="6217920" y="1325880"/>
+            <a:ext cx="5212080" cy="4846320"/>
           </a:xfrm>
           <a:prstGeom prst="roundRect">
             <a:avLst/>
           </a:prstGeom>
           <a:solidFill>
-            <a:srgbClr val="D1FAE5"/>
+            <a:srgbClr val="0F172A"/>
           </a:solidFill>
           <a:ln w="19050">
             <a:solidFill>
-              <a:srgbClr val="10B981"/>
+              <a:srgbClr val="0D9488"/>
             </a:solidFill>
           </a:ln>
         </p:spPr>
@@ -7003,14 +10738,14 @@
       </p:sp>
       <p:sp>
         <p:nvSpPr>
-          <p:cNvPr id="10" name="TextBox 9"/>
+          <p:cNvPr id="11" name="TextBox 10"/>
           <p:cNvSpPr txBox="1"/>
           <p:nvPr/>
         </p:nvSpPr>
         <p:spPr>
           <a:xfrm>
-            <a:off x="6400800" y="1600200"/>
-            <a:ext cx="4846320" cy="4297680"/>
+            <a:off x="6400800" y="1417320"/>
+            <a:ext cx="4846320" cy="365760"/>
           </a:xfrm>
           <a:prstGeom prst="rect">
             <a:avLst/>
@@ -7024,79 +10759,243 @@
           <a:lstStyle/>
           <a:p>
             <a:pPr algn="r">
-              <a:defRPr sz="1700" b="1">
-                <a:solidFill>
-                  <a:srgbClr val="064E3B"/>
-                </a:solidFill>
-                <a:latin typeface="Segoe UI"/>
-              </a:defRPr>
-            </a:pPr>
-            <a:r>
-              <a:t>بوابة الربط المحاسبي (B2B Partner API)</a:t>
-            </a:r>
-          </a:p>
-          <a:p>
-            <a:pPr algn="r">
-              <a:spcBef>
-                <a:spcPts val="800"/>
-              </a:spcBef>
-              <a:defRPr sz="1300">
-                <a:solidFill>
-                  <a:srgbClr val="0F172A"/>
-                </a:solidFill>
-                <a:latin typeface="Segoe UI"/>
-              </a:defRPr>
-            </a:pPr>
-            <a:r>
-              <a:t>• التكامل مع الأنظمة القائمة (يمن سوفت، الإبداع، المتكامل).</a:t>
-            </a:r>
-          </a:p>
-          <a:p>
-            <a:pPr algn="r">
-              <a:spcBef>
-                <a:spcPts val="800"/>
-              </a:spcBef>
-              <a:defRPr sz="1300">
-                <a:solidFill>
-                  <a:srgbClr val="0F172A"/>
-                </a:solidFill>
-                <a:latin typeface="Segoe UI"/>
-              </a:defRPr>
-            </a:pPr>
-            <a:r>
-              <a:t>• واجهة مزامنة المخزون: POST /api/v1/partner/inventory/sync لتحديث آلاف الأصناف دفعة واحدة.</a:t>
-            </a:r>
-          </a:p>
-          <a:p>
-            <a:pPr algn="r">
-              <a:spcBef>
-                <a:spcPts val="800"/>
-              </a:spcBef>
-              <a:defRPr sz="1300">
-                <a:solidFill>
-                  <a:srgbClr val="0F172A"/>
-                </a:solidFill>
-                <a:latin typeface="Segoe UI"/>
-              </a:defRPr>
-            </a:pPr>
-            <a:r>
-              <a:t>• واجهة تحديث الكاشير: POST /api/v1/partner/inventory/update-item لتعديل رصيد صنف واحد فور بيعه محلياً.</a:t>
-            </a:r>
-          </a:p>
-          <a:p>
-            <a:pPr algn="r">
-              <a:spcBef>
-                <a:spcPts val="800"/>
-              </a:spcBef>
-              <a:defRPr sz="1300">
-                <a:solidFill>
-                  <a:srgbClr val="0F172A"/>
-                </a:solidFill>
-                <a:latin typeface="Segoe UI"/>
-              </a:defRPr>
-            </a:pPr>
-            <a:r>
-              <a:t>• واجهة صرف الحجز: POST /api/v1/partner/reservations/{id}/fulfill عبر قارئ الباركود.</a:t>
+              <a:defRPr sz="1300" b="1">
+                <a:solidFill>
+                  <a:srgbClr val="10B981"/>
+                </a:solidFill>
+                <a:latin typeface="Segoe UI"/>
+              </a:defRPr>
+            </a:pPr>
+            <a:r>
+              <a:t>الخادم: تطبيق معادلة هافرسين وفرز الأقرب  [Laravel / PHP]</a:t>
+            </a:r>
+          </a:p>
+        </p:txBody>
+      </p:sp>
+      <p:sp>
+        <p:nvSpPr>
+          <p:cNvPr id="12" name="TextBox 11"/>
+          <p:cNvSpPr txBox="1"/>
+          <p:nvPr/>
+        </p:nvSpPr>
+        <p:spPr>
+          <a:xfrm>
+            <a:off x="6400800" y="1801368"/>
+            <a:ext cx="4846320" cy="4251959"/>
+          </a:xfrm>
+          <a:prstGeom prst="rect">
+            <a:avLst/>
+          </a:prstGeom>
+          <a:noFill/>
+        </p:spPr>
+        <p:txBody>
+          <a:bodyPr wrap="square">
+            <a:spAutoFit/>
+          </a:bodyPr>
+          <a:lstStyle/>
+          <a:p>
+            <a:pPr algn="l">
+              <a:defRPr sz="1000">
+                <a:solidFill>
+                  <a:srgbClr val="94A3B8"/>
+                </a:solidFill>
+                <a:latin typeface="Consolas"/>
+              </a:defRPr>
+            </a:pPr>
+            <a:r>
+              <a:t>// backend/app/Repositories/Eloquent/EloquentMedicineRepository.php</a:t>
+            </a:r>
+          </a:p>
+          <a:p>
+            <a:pPr algn="l">
+              <a:defRPr sz="1000">
+                <a:solidFill>
+                  <a:srgbClr val="F472B6"/>
+                </a:solidFill>
+                <a:latin typeface="Consolas"/>
+              </a:defRPr>
+            </a:pPr>
+            <a:r>
+              <a:t>private function calculateHaversineDistance(float $lat1, float $lon1, float $lat2, float $lon2): float {</a:t>
+            </a:r>
+          </a:p>
+          <a:p>
+            <a:pPr algn="l">
+              <a:defRPr sz="1000">
+                <a:solidFill>
+                  <a:srgbClr val="38BDF8"/>
+                </a:solidFill>
+                <a:latin typeface="Consolas"/>
+              </a:defRPr>
+            </a:pPr>
+            <a:r>
+              <a:t>    $earthRadiusKm = 6371.0; // نصف قطر الأرض الكروي</a:t>
+            </a:r>
+          </a:p>
+          <a:p>
+            <a:pPr algn="l">
+              <a:defRPr sz="1000">
+                <a:solidFill>
+                  <a:srgbClr val="38BDF8"/>
+                </a:solidFill>
+                <a:latin typeface="Consolas"/>
+              </a:defRPr>
+            </a:pPr>
+            <a:r>
+              <a:t>    $dLat = deg2rad($lat2 - $lat1);</a:t>
+            </a:r>
+          </a:p>
+          <a:p>
+            <a:pPr algn="l">
+              <a:defRPr sz="1000">
+                <a:solidFill>
+                  <a:srgbClr val="38BDF8"/>
+                </a:solidFill>
+                <a:latin typeface="Consolas"/>
+              </a:defRPr>
+            </a:pPr>
+            <a:r>
+              <a:t>    $dLon = deg2rad($lon2 - $lon1);</a:t>
+            </a:r>
+          </a:p>
+          <a:p>
+            <a:pPr algn="l">
+              <a:defRPr sz="1000">
+                <a:solidFill>
+                  <a:srgbClr val="38BDF8"/>
+                </a:solidFill>
+                <a:latin typeface="Consolas"/>
+              </a:defRPr>
+            </a:pPr>
+            <a:r>
+              <a:t>    $a = sin($dLat / 2) * sin($dLat / 2) +</a:t>
+            </a:r>
+          </a:p>
+          <a:p>
+            <a:pPr algn="l">
+              <a:defRPr sz="1000">
+                <a:solidFill>
+                  <a:srgbClr val="38BDF8"/>
+                </a:solidFill>
+                <a:latin typeface="Consolas"/>
+              </a:defRPr>
+            </a:pPr>
+            <a:r>
+              <a:t>         cos(deg2rad($lat1)) * cos(deg2rad($lat2)) *</a:t>
+            </a:r>
+          </a:p>
+          <a:p>
+            <a:pPr algn="l">
+              <a:defRPr sz="1000">
+                <a:solidFill>
+                  <a:srgbClr val="38BDF8"/>
+                </a:solidFill>
+                <a:latin typeface="Consolas"/>
+              </a:defRPr>
+            </a:pPr>
+            <a:r>
+              <a:t>         sin($dLon / 2) * sin($dLon / 2);</a:t>
+            </a:r>
+          </a:p>
+          <a:p>
+            <a:pPr algn="l">
+              <a:defRPr sz="1000">
+                <a:solidFill>
+                  <a:srgbClr val="38BDF8"/>
+                </a:solidFill>
+                <a:latin typeface="Consolas"/>
+              </a:defRPr>
+            </a:pPr>
+            <a:r>
+              <a:t>    $c = 2 * atan2(sqrt($a), sqrt(1 - $a));</a:t>
+            </a:r>
+          </a:p>
+          <a:p>
+            <a:pPr algn="l">
+              <a:defRPr sz="1000">
+                <a:solidFill>
+                  <a:srgbClr val="F472B6"/>
+                </a:solidFill>
+                <a:latin typeface="Consolas"/>
+              </a:defRPr>
+            </a:pPr>
+            <a:r>
+              <a:t>    return $earthRadiusKm * $c; // المسافة بالكيلومتر</a:t>
+            </a:r>
+          </a:p>
+          <a:p>
+            <a:pPr algn="l">
+              <a:defRPr sz="1000">
+                <a:solidFill>
+                  <a:srgbClr val="38BDF8"/>
+                </a:solidFill>
+                <a:latin typeface="Consolas"/>
+              </a:defRPr>
+            </a:pPr>
+            <a:r>
+              <a:t>}</a:t>
+            </a:r>
+          </a:p>
+          <a:p>
+            <a:pPr algn="l">
+              <a:defRPr sz="1000">
+                <a:solidFill>
+                  <a:srgbClr val="38BDF8"/>
+                </a:solidFill>
+                <a:latin typeface="Consolas"/>
+              </a:defRPr>
+            </a:pPr>
+          </a:p>
+          <a:p>
+            <a:pPr algn="l">
+              <a:defRPr sz="1000">
+                <a:solidFill>
+                  <a:srgbClr val="94A3B8"/>
+                </a:solidFill>
+                <a:latin typeface="Consolas"/>
+              </a:defRPr>
+            </a:pPr>
+            <a:r>
+              <a:t>// تصفية الصيدليات وترتيبها من الأقرب إلى الأبعد</a:t>
+            </a:r>
+          </a:p>
+          <a:p>
+            <a:pPr algn="l">
+              <a:defRPr sz="1000">
+                <a:solidFill>
+                  <a:srgbClr val="F472B6"/>
+                </a:solidFill>
+                <a:latin typeface="Consolas"/>
+              </a:defRPr>
+            </a:pPr>
+            <a:r>
+              <a:t>return $collection-&gt;filter(function ($item) use ($radiusKm) {</a:t>
+            </a:r>
+          </a:p>
+          <a:p>
+            <a:pPr algn="l">
+              <a:defRPr sz="1000">
+                <a:solidFill>
+                  <a:srgbClr val="F472B6"/>
+                </a:solidFill>
+                <a:latin typeface="Consolas"/>
+              </a:defRPr>
+            </a:pPr>
+            <a:r>
+              <a:t>    return $item-&gt;distance_km &lt;= $radiusKm;</a:t>
+            </a:r>
+          </a:p>
+          <a:p>
+            <a:pPr algn="l">
+              <a:defRPr sz="1000">
+                <a:solidFill>
+                  <a:srgbClr val="38BDF8"/>
+                </a:solidFill>
+                <a:latin typeface="Consolas"/>
+              </a:defRPr>
+            </a:pPr>
+            <a:r>
+              <a:t>})-&gt;sortBy('distance_km')-&gt;values();</a:t>
             </a:r>
           </a:p>
         </p:txBody>
@@ -7128,7 +11027,7 @@
         <p:spPr>
           <a:xfrm>
             <a:off x="0" y="0"/>
-            <a:ext cx="12191695" cy="1097280"/>
+            <a:ext cx="12191695" cy="1051560"/>
           </a:xfrm>
           <a:prstGeom prst="rect">
             <a:avLst/>
@@ -7172,8 +11071,8 @@
         </p:nvSpPr>
         <p:spPr>
           <a:xfrm>
-            <a:off x="731520" y="109728"/>
-            <a:ext cx="10698480" cy="320040"/>
+            <a:off x="731520" y="91440"/>
+            <a:ext cx="10698480" cy="292608"/>
           </a:xfrm>
           <a:prstGeom prst="rect">
             <a:avLst/>
@@ -7187,7 +11086,7 @@
           <a:lstStyle/>
           <a:p>
             <a:pPr algn="r">
-              <a:defRPr sz="1300" b="1">
+              <a:defRPr sz="1200" b="1">
                 <a:solidFill>
                   <a:srgbClr val="10B981"/>
                 </a:solidFill>
@@ -7195,7 +11094,7 @@
               </a:defRPr>
             </a:pPr>
             <a:r>
-              <a:t>مشروع تخرج — نظام خادم وعميل (Level 4)</a:t>
+              <a:t>منظومة خادم وعميل موزعة — معمارية 3-Tier Distributed Architecture</a:t>
             </a:r>
           </a:p>
         </p:txBody>
@@ -7208,8 +11107,8 @@
         </p:nvSpPr>
         <p:spPr>
           <a:xfrm>
-            <a:off x="731520" y="411480"/>
-            <a:ext cx="10698480" cy="594360"/>
+            <a:off x="731520" y="384048"/>
+            <a:ext cx="10698480" cy="566928"/>
           </a:xfrm>
           <a:prstGeom prst="rect">
             <a:avLst/>
@@ -7223,7 +11122,7 @@
           <a:lstStyle/>
           <a:p>
             <a:pPr algn="r">
-              <a:defRPr sz="2200" b="1">
+              <a:defRPr sz="2100" b="1">
                 <a:solidFill>
                   <a:srgbClr val="F8FAFC"/>
                 </a:solidFill>
@@ -7231,7 +11130,7 @@
               </a:defRPr>
             </a:pPr>
             <a:r>
-              <a:t>7. ضمان الجودة وخطوط التكامل المستمر (QA &amp; CI/CD)</a:t>
+              <a:t>7. كود المزامنة اللحظية الحية (Real-Time State Polling &amp; Live Feed)</a:t>
             </a:r>
           </a:p>
         </p:txBody>
@@ -7244,8 +11143,8 @@
         </p:nvSpPr>
         <p:spPr>
           <a:xfrm>
-            <a:off x="0" y="1097280"/>
-            <a:ext cx="12191695" cy="54864"/>
+            <a:off x="0" y="1051560"/>
+            <a:ext cx="12191695" cy="45720"/>
           </a:xfrm>
           <a:prstGeom prst="rect">
             <a:avLst/>
@@ -7287,8 +11186,8 @@
         </p:nvSpPr>
         <p:spPr>
           <a:xfrm>
-            <a:off x="731520" y="6446520"/>
-            <a:ext cx="10698480" cy="320040"/>
+            <a:off x="731520" y="6473952"/>
+            <a:ext cx="10698480" cy="292608"/>
           </a:xfrm>
           <a:prstGeom prst="rect">
             <a:avLst/>
@@ -7302,7 +11201,7 @@
           <a:lstStyle/>
           <a:p>
             <a:pPr algn="ctr">
-              <a:defRPr sz="1100">
+              <a:defRPr sz="1050">
                 <a:solidFill>
                   <a:srgbClr val="64748B"/>
                 </a:solidFill>
@@ -7323,175 +11222,14 @@
         </p:nvSpPr>
         <p:spPr>
           <a:xfrm>
-            <a:off x="731520" y="1463040"/>
-            <a:ext cx="5120640" cy="4572000"/>
+            <a:off x="731520" y="1325880"/>
+            <a:ext cx="5212080" cy="4846320"/>
           </a:xfrm>
           <a:prstGeom prst="roundRect">
             <a:avLst/>
           </a:prstGeom>
           <a:solidFill>
-            <a:srgbClr val="FFFFFF"/>
-          </a:solidFill>
-          <a:ln w="19050">
-            <a:solidFill>
-              <a:srgbClr val="E2E8F0"/>
-            </a:solidFill>
-          </a:ln>
-        </p:spPr>
-        <p:style>
-          <a:lnRef idx="1">
-            <a:schemeClr val="accent1"/>
-          </a:lnRef>
-          <a:fillRef idx="3">
-            <a:schemeClr val="accent1"/>
-          </a:fillRef>
-          <a:effectRef idx="2">
-            <a:schemeClr val="accent1"/>
-          </a:effectRef>
-          <a:fontRef idx="minor">
-            <a:schemeClr val="lt1"/>
-          </a:fontRef>
-        </p:style>
-        <p:txBody>
-          <a:bodyPr rtlCol="0" anchor="ctr"/>
-          <a:lstStyle/>
-          <a:p>
-            <a:pPr algn="ctr"/>
-          </a:p>
-        </p:txBody>
-      </p:sp>
-      <p:sp>
-        <p:nvSpPr>
-          <p:cNvPr id="8" name="TextBox 7"/>
-          <p:cNvSpPr txBox="1"/>
-          <p:nvPr/>
-        </p:nvSpPr>
-        <p:spPr>
-          <a:xfrm>
-            <a:off x="914400" y="1600200"/>
-            <a:ext cx="4754879" cy="4297680"/>
-          </a:xfrm>
-          <a:prstGeom prst="rect">
-            <a:avLst/>
-          </a:prstGeom>
-          <a:noFill/>
-        </p:spPr>
-        <p:txBody>
-          <a:bodyPr wrap="square">
-            <a:spAutoFit/>
-          </a:bodyPr>
-          <a:lstStyle/>
-          <a:p>
-            <a:pPr algn="r">
-              <a:defRPr sz="1700" b="1">
-                <a:solidFill>
-                  <a:srgbClr val="064E3B"/>
-                </a:solidFill>
-                <a:latin typeface="Segoe UI"/>
-              </a:defRPr>
-            </a:pPr>
-            <a:r>
-              <a:t>منهجية الحلقات المغلقة (Looping Engineering)</a:t>
-            </a:r>
-          </a:p>
-          <a:p>
-            <a:pPr algn="r">
-              <a:spcBef>
-                <a:spcPts val="800"/>
-              </a:spcBef>
-              <a:defRPr sz="1300">
-                <a:solidFill>
-                  <a:srgbClr val="0F172A"/>
-                </a:solidFill>
-                <a:latin typeface="Segoe UI"/>
-              </a:defRPr>
-            </a:pPr>
-            <a:r>
-              <a:t>• دورة تطوير صارمة: تخطيط -&gt; تنفيذ معياري -&gt; اختبار آلي -&gt; تدقيق -&gt; توثيق فوري في CHANGELOG.md.</a:t>
-            </a:r>
-          </a:p>
-          <a:p>
-            <a:pPr algn="r">
-              <a:spcBef>
-                <a:spcPts val="800"/>
-              </a:spcBef>
-              <a:defRPr sz="1300">
-                <a:solidFill>
-                  <a:srgbClr val="0F172A"/>
-                </a:solidFill>
-                <a:latin typeface="Segoe UI"/>
-              </a:defRPr>
-            </a:pPr>
-            <a:r>
-              <a:t>• فحص التنسيق والجودة التلقائي:</a:t>
-            </a:r>
-          </a:p>
-          <a:p>
-            <a:pPr algn="r">
-              <a:spcBef>
-                <a:spcPts val="800"/>
-              </a:spcBef>
-              <a:defRPr sz="1300">
-                <a:solidFill>
-                  <a:srgbClr val="0F172A"/>
-                </a:solidFill>
-                <a:latin typeface="Segoe UI"/>
-              </a:defRPr>
-            </a:pPr>
-            <a:r>
-              <a:t>•   - كود PHP خاضع لأداة Laravel Pint بنسبة توافق 100%.</a:t>
-            </a:r>
-          </a:p>
-          <a:p>
-            <a:pPr algn="r">
-              <a:spcBef>
-                <a:spcPts val="800"/>
-              </a:spcBef>
-              <a:defRPr sz="1300">
-                <a:solidFill>
-                  <a:srgbClr val="0F172A"/>
-                </a:solidFill>
-                <a:latin typeface="Segoe UI"/>
-              </a:defRPr>
-            </a:pPr>
-            <a:r>
-              <a:t>•   - كود Dart خاضع لـ Flutter Analyze بصفر أخطاء وصفر تحذيرات.</a:t>
-            </a:r>
-          </a:p>
-          <a:p>
-            <a:pPr algn="r">
-              <a:spcBef>
-                <a:spcPts val="800"/>
-              </a:spcBef>
-              <a:defRPr sz="1300">
-                <a:solidFill>
-                  <a:srgbClr val="0F172A"/>
-                </a:solidFill>
-                <a:latin typeface="Segoe UI"/>
-              </a:defRPr>
-            </a:pPr>
-            <a:r>
-              <a:t>• توثيق احترافي شامل وفق معايير APA 7th Edition.</a:t>
-            </a:r>
-          </a:p>
-        </p:txBody>
-      </p:sp>
-      <p:sp>
-        <p:nvSpPr>
-          <p:cNvPr id="9" name="Rounded Rectangle 8"/>
-          <p:cNvSpPr/>
-          <p:nvPr/>
-        </p:nvSpPr>
-        <p:spPr>
-          <a:xfrm>
-            <a:off x="6217920" y="1463040"/>
-            <a:ext cx="5212080" cy="4572000"/>
-          </a:xfrm>
-          <a:prstGeom prst="roundRect">
-            <a:avLst/>
-          </a:prstGeom>
-          <a:solidFill>
-            <a:srgbClr val="FFFFFF"/>
+            <a:srgbClr val="0F172A"/>
           </a:solidFill>
           <a:ln w="19050">
             <a:solidFill>
@@ -7523,14 +11261,14 @@
       </p:sp>
       <p:sp>
         <p:nvSpPr>
-          <p:cNvPr id="10" name="TextBox 9"/>
+          <p:cNvPr id="8" name="TextBox 7"/>
           <p:cNvSpPr txBox="1"/>
           <p:nvPr/>
         </p:nvSpPr>
         <p:spPr>
           <a:xfrm>
-            <a:off x="6400800" y="1600200"/>
-            <a:ext cx="4846320" cy="4297680"/>
+            <a:off x="914400" y="1417320"/>
+            <a:ext cx="4846320" cy="365760"/>
           </a:xfrm>
           <a:prstGeom prst="rect">
             <a:avLst/>
@@ -7544,79 +11282,659 @@
           <a:lstStyle/>
           <a:p>
             <a:pPr algn="r">
-              <a:defRPr sz="1700" b="1">
-                <a:solidFill>
-                  <a:srgbClr val="0D9488"/>
-                </a:solidFill>
-                <a:latin typeface="Segoe UI"/>
-              </a:defRPr>
-            </a:pPr>
-            <a:r>
-              <a:t>أتمتة الاختبارات والنشر على GitHub Actions</a:t>
-            </a:r>
-          </a:p>
+              <a:defRPr sz="1300" b="1">
+                <a:solidFill>
+                  <a:srgbClr val="10B981"/>
+                </a:solidFill>
+                <a:latin typeface="Segoe UI"/>
+              </a:defRPr>
+            </a:pPr>
+            <a:r>
+              <a:t>العميل: دورة الاستعلام ومطابقة الحجز  [Flutter / Dart]</a:t>
+            </a:r>
+          </a:p>
+        </p:txBody>
+      </p:sp>
+      <p:sp>
+        <p:nvSpPr>
+          <p:cNvPr id="9" name="TextBox 8"/>
+          <p:cNvSpPr txBox="1"/>
+          <p:nvPr/>
+        </p:nvSpPr>
+        <p:spPr>
+          <a:xfrm>
+            <a:off x="914400" y="1801368"/>
+            <a:ext cx="4846320" cy="4251959"/>
+          </a:xfrm>
+          <a:prstGeom prst="rect">
+            <a:avLst/>
+          </a:prstGeom>
+          <a:noFill/>
+        </p:spPr>
+        <p:txBody>
+          <a:bodyPr wrap="square">
+            <a:spAutoFit/>
+          </a:bodyPr>
+          <a:lstStyle/>
+          <a:p>
+            <a:pPr algn="l">
+              <a:defRPr sz="1000">
+                <a:solidFill>
+                  <a:srgbClr val="94A3B8"/>
+                </a:solidFill>
+                <a:latin typeface="Consolas"/>
+              </a:defRPr>
+            </a:pPr>
+            <a:r>
+              <a:t>// frontend/lib/presentation/screens/reservation_pass_screen.dart</a:t>
+            </a:r>
+          </a:p>
+          <a:p>
+            <a:pPr algn="l">
+              <a:defRPr sz="1000">
+                <a:solidFill>
+                  <a:srgbClr val="38BDF8"/>
+                </a:solidFill>
+                <a:latin typeface="Consolas"/>
+              </a:defRPr>
+            </a:pPr>
+            <a:r>
+              <a:t>void _startStatusPolling() {</a:t>
+            </a:r>
+          </a:p>
+          <a:p>
+            <a:pPr algn="l">
+              <a:defRPr sz="1000">
+                <a:solidFill>
+                  <a:srgbClr val="F472B6"/>
+                </a:solidFill>
+                <a:latin typeface="Consolas"/>
+              </a:defRPr>
+            </a:pPr>
+            <a:r>
+              <a:t>  _pollTimer = Timer.periodic(const Duration(seconds: 2), (t) async {</a:t>
+            </a:r>
+          </a:p>
+          <a:p>
+            <a:pPr algn="l">
+              <a:defRPr sz="1000">
+                <a:solidFill>
+                  <a:srgbClr val="F472B6"/>
+                </a:solidFill>
+                <a:latin typeface="Consolas"/>
+              </a:defRPr>
+            </a:pPr>
+            <a:r>
+              <a:t>    final fresh = await ApiService()</a:t>
+            </a:r>
+          </a:p>
+          <a:p>
+            <a:pPr algn="l">
+              <a:defRPr sz="1000">
+                <a:solidFill>
+                  <a:srgbClr val="38BDF8"/>
+                </a:solidFill>
+                <a:latin typeface="Consolas"/>
+              </a:defRPr>
+            </a:pPr>
+            <a:r>
+              <a:t>        .getReservationDetails(_reservation.reservationCode);</a:t>
+            </a:r>
+          </a:p>
+          <a:p>
+            <a:pPr algn="l">
+              <a:defRPr sz="1000">
+                <a:solidFill>
+                  <a:srgbClr val="38BDF8"/>
+                </a:solidFill>
+                <a:latin typeface="Consolas"/>
+              </a:defRPr>
+            </a:pPr>
+          </a:p>
+          <a:p>
+            <a:pPr algn="l">
+              <a:defRPr sz="1000">
+                <a:solidFill>
+                  <a:srgbClr val="F472B6"/>
+                </a:solidFill>
+                <a:latin typeface="Consolas"/>
+              </a:defRPr>
+            </a:pPr>
+            <a:r>
+              <a:t>    if (fresh != null &amp;&amp; mounted) {</a:t>
+            </a:r>
+          </a:p>
+          <a:p>
+            <a:pPr algn="l">
+              <a:defRPr sz="1000">
+                <a:solidFill>
+                  <a:srgbClr val="38BDF8"/>
+                </a:solidFill>
+                <a:latin typeface="Consolas"/>
+              </a:defRPr>
+            </a:pPr>
+            <a:r>
+              <a:t>      final becameCompleted = (_reservation.status != 'completed') </a:t>
+            </a:r>
+          </a:p>
+          <a:p>
+            <a:pPr algn="l">
+              <a:defRPr sz="1000">
+                <a:solidFill>
+                  <a:srgbClr val="38BDF8"/>
+                </a:solidFill>
+                <a:latin typeface="Consolas"/>
+              </a:defRPr>
+            </a:pPr>
+            <a:r>
+              <a:t>          &amp;&amp; (fresh.status == 'completed');</a:t>
+            </a:r>
+          </a:p>
+          <a:p>
+            <a:pPr algn="l">
+              <a:defRPr sz="1000">
+                <a:solidFill>
+                  <a:srgbClr val="38BDF8"/>
+                </a:solidFill>
+                <a:latin typeface="Consolas"/>
+              </a:defRPr>
+            </a:pPr>
+            <a:r>
+              <a:t>      setState(() {</a:t>
+            </a:r>
+          </a:p>
+          <a:p>
+            <a:pPr algn="l">
+              <a:defRPr sz="1000">
+                <a:solidFill>
+                  <a:srgbClr val="38BDF8"/>
+                </a:solidFill>
+                <a:latin typeface="Consolas"/>
+              </a:defRPr>
+            </a:pPr>
+            <a:r>
+              <a:t>        _reservation = fresh;</a:t>
+            </a:r>
+          </a:p>
+          <a:p>
+            <a:pPr algn="l">
+              <a:defRPr sz="1000">
+                <a:solidFill>
+                  <a:srgbClr val="38BDF8"/>
+                </a:solidFill>
+                <a:latin typeface="Consolas"/>
+              </a:defRPr>
+            </a:pPr>
+            <a:r>
+              <a:t>        _remainingSeconds = fresh.currentRemainingSeconds;</a:t>
+            </a:r>
+          </a:p>
+          <a:p>
+            <a:pPr algn="l">
+              <a:defRPr sz="1000">
+                <a:solidFill>
+                  <a:srgbClr val="38BDF8"/>
+                </a:solidFill>
+                <a:latin typeface="Consolas"/>
+              </a:defRPr>
+            </a:pPr>
+            <a:r>
+              <a:t>      });</a:t>
+            </a:r>
+          </a:p>
+          <a:p>
+            <a:pPr algn="l">
+              <a:defRPr sz="1000">
+                <a:solidFill>
+                  <a:srgbClr val="F472B6"/>
+                </a:solidFill>
+                <a:latin typeface="Consolas"/>
+              </a:defRPr>
+            </a:pPr>
+            <a:r>
+              <a:t>      if (becameCompleted) {</a:t>
+            </a:r>
+          </a:p>
+          <a:p>
+            <a:pPr algn="l">
+              <a:defRPr sz="1000">
+                <a:solidFill>
+                  <a:srgbClr val="38BDF8"/>
+                </a:solidFill>
+                <a:latin typeface="Consolas"/>
+              </a:defRPr>
+            </a:pPr>
+            <a:r>
+              <a:t>        t.cancel(); // إيقاف المؤقت</a:t>
+            </a:r>
+          </a:p>
+          <a:p>
+            <a:pPr algn="l">
+              <a:defRPr sz="1000">
+                <a:solidFill>
+                  <a:srgbClr val="38BDF8"/>
+                </a:solidFill>
+                <a:latin typeface="Consolas"/>
+              </a:defRPr>
+            </a:pPr>
+            <a:r>
+              <a:t>        HapticFeedback.heavyImpact();</a:t>
+            </a:r>
+          </a:p>
+          <a:p>
+            <a:pPr algn="l">
+              <a:defRPr sz="1000">
+                <a:solidFill>
+                  <a:srgbClr val="38BDF8"/>
+                </a:solidFill>
+                <a:latin typeface="Consolas"/>
+              </a:defRPr>
+            </a:pPr>
+            <a:r>
+              <a:t>        _showSuccessBadge(); // شارة الاستلام الخضراء</a:t>
+            </a:r>
+          </a:p>
+          <a:p>
+            <a:pPr algn="l">
+              <a:defRPr sz="1000">
+                <a:solidFill>
+                  <a:srgbClr val="38BDF8"/>
+                </a:solidFill>
+                <a:latin typeface="Consolas"/>
+              </a:defRPr>
+            </a:pPr>
+            <a:r>
+              <a:t>      }</a:t>
+            </a:r>
+          </a:p>
+          <a:p>
+            <a:pPr algn="l">
+              <a:defRPr sz="1000">
+                <a:solidFill>
+                  <a:srgbClr val="38BDF8"/>
+                </a:solidFill>
+                <a:latin typeface="Consolas"/>
+              </a:defRPr>
+            </a:pPr>
+            <a:r>
+              <a:t>    }</a:t>
+            </a:r>
+          </a:p>
+          <a:p>
+            <a:pPr algn="l">
+              <a:defRPr sz="1000">
+                <a:solidFill>
+                  <a:srgbClr val="38BDF8"/>
+                </a:solidFill>
+                <a:latin typeface="Consolas"/>
+              </a:defRPr>
+            </a:pPr>
+            <a:r>
+              <a:t>  });</a:t>
+            </a:r>
+          </a:p>
+          <a:p>
+            <a:pPr algn="l">
+              <a:defRPr sz="1000">
+                <a:solidFill>
+                  <a:srgbClr val="38BDF8"/>
+                </a:solidFill>
+                <a:latin typeface="Consolas"/>
+              </a:defRPr>
+            </a:pPr>
+            <a:r>
+              <a:t>}</a:t>
+            </a:r>
+          </a:p>
+        </p:txBody>
+      </p:sp>
+      <p:sp>
+        <p:nvSpPr>
+          <p:cNvPr id="10" name="Rounded Rectangle 9"/>
+          <p:cNvSpPr/>
+          <p:nvPr/>
+        </p:nvSpPr>
+        <p:spPr>
+          <a:xfrm>
+            <a:off x="6217920" y="1325880"/>
+            <a:ext cx="5212080" cy="4846320"/>
+          </a:xfrm>
+          <a:prstGeom prst="roundRect">
+            <a:avLst/>
+          </a:prstGeom>
+          <a:solidFill>
+            <a:srgbClr val="0F172A"/>
+          </a:solidFill>
+          <a:ln w="19050">
+            <a:solidFill>
+              <a:srgbClr val="0D9488"/>
+            </a:solidFill>
+          </a:ln>
+        </p:spPr>
+        <p:style>
+          <a:lnRef idx="1">
+            <a:schemeClr val="accent1"/>
+          </a:lnRef>
+          <a:fillRef idx="3">
+            <a:schemeClr val="accent1"/>
+          </a:fillRef>
+          <a:effectRef idx="2">
+            <a:schemeClr val="accent1"/>
+          </a:effectRef>
+          <a:fontRef idx="minor">
+            <a:schemeClr val="lt1"/>
+          </a:fontRef>
+        </p:style>
+        <p:txBody>
+          <a:bodyPr rtlCol="0" anchor="ctr"/>
+          <a:lstStyle/>
+          <a:p>
+            <a:pPr algn="ctr"/>
+          </a:p>
+        </p:txBody>
+      </p:sp>
+      <p:sp>
+        <p:nvSpPr>
+          <p:cNvPr id="11" name="TextBox 10"/>
+          <p:cNvSpPr txBox="1"/>
+          <p:nvPr/>
+        </p:nvSpPr>
+        <p:spPr>
+          <a:xfrm>
+            <a:off x="6400800" y="1417320"/>
+            <a:ext cx="4846320" cy="365760"/>
+          </a:xfrm>
+          <a:prstGeom prst="rect">
+            <a:avLst/>
+          </a:prstGeom>
+          <a:noFill/>
+        </p:spPr>
+        <p:txBody>
+          <a:bodyPr wrap="square">
+            <a:spAutoFit/>
+          </a:bodyPr>
+          <a:lstStyle/>
           <a:p>
             <a:pPr algn="r">
-              <a:spcBef>
-                <a:spcPts val="800"/>
-              </a:spcBef>
-              <a:defRPr sz="1300">
-                <a:solidFill>
-                  <a:srgbClr val="0F172A"/>
-                </a:solidFill>
-                <a:latin typeface="Segoe UI"/>
-              </a:defRPr>
-            </a:pPr>
-            <a:r>
-              <a:t>• 12 اختبار تكاملي ووظيفي مؤتمت في الباك إند تغطي قفل التزامن والبحث وعزل الحسابات.</a:t>
-            </a:r>
-          </a:p>
-          <a:p>
-            <a:pPr algn="r">
-              <a:spcBef>
-                <a:spcPts val="800"/>
-              </a:spcBef>
-              <a:defRPr sz="1300">
-                <a:solidFill>
-                  <a:srgbClr val="0F172A"/>
-                </a:solidFill>
-                <a:latin typeface="Segoe UI"/>
-              </a:defRPr>
-            </a:pPr>
-            <a:r>
-              <a:t>• اختبارات النماذج والواجهات في Flutter بنسبة نجاح 100%.</a:t>
-            </a:r>
-          </a:p>
-          <a:p>
-            <a:pPr algn="r">
-              <a:spcBef>
-                <a:spcPts val="800"/>
-              </a:spcBef>
-              <a:defRPr sz="1300">
-                <a:solidFill>
-                  <a:srgbClr val="0F172A"/>
-                </a:solidFill>
-                <a:latin typeface="Segoe UI"/>
-              </a:defRPr>
-            </a:pPr>
-            <a:r>
-              <a:t>• حماية فرع main: منع دمج أي كود لا يجتاز كافة الاختبارات بنجاح.</a:t>
-            </a:r>
-          </a:p>
-          <a:p>
-            <a:pPr algn="r">
-              <a:spcBef>
-                <a:spcPts val="800"/>
-              </a:spcBef>
-              <a:defRPr sz="1300">
-                <a:solidFill>
-                  <a:srgbClr val="0F172A"/>
-                </a:solidFill>
-                <a:latin typeface="Segoe UI"/>
-              </a:defRPr>
-            </a:pPr>
-            <a:r>
-              <a:t>• نشر سحابي آلي إلى منصة Render بمجرد اكتمال الفحص التلقائي.</a:t>
+              <a:defRPr sz="1300" b="1">
+                <a:solidFill>
+                  <a:srgbClr val="10B981"/>
+                </a:solidFill>
+                <a:latin typeface="Segoe UI"/>
+              </a:defRPr>
+            </a:pPr>
+            <a:r>
+              <a:t>بوابة الويب: التحديث التلقائي اللحظي للجدول  [Blade / JavaScript]</a:t>
+            </a:r>
+          </a:p>
+        </p:txBody>
+      </p:sp>
+      <p:sp>
+        <p:nvSpPr>
+          <p:cNvPr id="12" name="TextBox 11"/>
+          <p:cNvSpPr txBox="1"/>
+          <p:nvPr/>
+        </p:nvSpPr>
+        <p:spPr>
+          <a:xfrm>
+            <a:off x="6400800" y="1801368"/>
+            <a:ext cx="4846320" cy="4251959"/>
+          </a:xfrm>
+          <a:prstGeom prst="rect">
+            <a:avLst/>
+          </a:prstGeom>
+          <a:noFill/>
+        </p:spPr>
+        <p:txBody>
+          <a:bodyPr wrap="square">
+            <a:spAutoFit/>
+          </a:bodyPr>
+          <a:lstStyle/>
+          <a:p>
+            <a:pPr algn="l">
+              <a:defRPr sz="1000">
+                <a:solidFill>
+                  <a:srgbClr val="94A3B8"/>
+                </a:solidFill>
+                <a:latin typeface="Consolas"/>
+              </a:defRPr>
+            </a:pPr>
+            <a:r>
+              <a:t>// backend/resources/views/pharmacy/reservations.blade.php</a:t>
+            </a:r>
+          </a:p>
+          <a:p>
+            <a:pPr algn="l">
+              <a:defRPr sz="1000">
+                <a:solidFill>
+                  <a:srgbClr val="F472B6"/>
+                </a:solidFill>
+                <a:latin typeface="Consolas"/>
+              </a:defRPr>
+            </a:pPr>
+            <a:r>
+              <a:t>async function fetchLatestReservations() {</a:t>
+            </a:r>
+          </a:p>
+          <a:p>
+            <a:pPr algn="l">
+              <a:defRPr sz="1000">
+                <a:solidFill>
+                  <a:srgbClr val="F472B6"/>
+                </a:solidFill>
+                <a:latin typeface="Consolas"/>
+              </a:defRPr>
+            </a:pPr>
+            <a:r>
+              <a:t>    try {</a:t>
+            </a:r>
+          </a:p>
+          <a:p>
+            <a:pPr algn="l">
+              <a:defRPr sz="1000">
+                <a:solidFill>
+                  <a:srgbClr val="F472B6"/>
+                </a:solidFill>
+                <a:latin typeface="Consolas"/>
+              </a:defRPr>
+            </a:pPr>
+            <a:r>
+              <a:t>        const res = await fetch('/pharmacy/reservations/live-feed');</a:t>
+            </a:r>
+          </a:p>
+          <a:p>
+            <a:pPr algn="l">
+              <a:defRPr sz="1000">
+                <a:solidFill>
+                  <a:srgbClr val="F472B6"/>
+                </a:solidFill>
+                <a:latin typeface="Consolas"/>
+              </a:defRPr>
+            </a:pPr>
+            <a:r>
+              <a:t>        if (res.ok) {</a:t>
+            </a:r>
+          </a:p>
+          <a:p>
+            <a:pPr algn="l">
+              <a:defRPr sz="1000">
+                <a:solidFill>
+                  <a:srgbClr val="F472B6"/>
+                </a:solidFill>
+                <a:latin typeface="Consolas"/>
+              </a:defRPr>
+            </a:pPr>
+            <a:r>
+              <a:t>            const htmlText = await res.text();</a:t>
+            </a:r>
+          </a:p>
+          <a:p>
+            <a:pPr algn="l">
+              <a:defRPr sz="1000">
+                <a:solidFill>
+                  <a:srgbClr val="38BDF8"/>
+                </a:solidFill>
+                <a:latin typeface="Consolas"/>
+              </a:defRPr>
+            </a:pPr>
+            <a:r>
+              <a:t>            const parser = new DOMParser();</a:t>
+            </a:r>
+          </a:p>
+          <a:p>
+            <a:pPr algn="l">
+              <a:defRPr sz="1000">
+                <a:solidFill>
+                  <a:srgbClr val="38BDF8"/>
+                </a:solidFill>
+                <a:latin typeface="Consolas"/>
+              </a:defRPr>
+            </a:pPr>
+            <a:r>
+              <a:t>            const doc = parser.parseFromString(htmlText, 'text/html');</a:t>
+            </a:r>
+          </a:p>
+          <a:p>
+            <a:pPr algn="l">
+              <a:defRPr sz="1000">
+                <a:solidFill>
+                  <a:srgbClr val="38BDF8"/>
+                </a:solidFill>
+                <a:latin typeface="Consolas"/>
+              </a:defRPr>
+            </a:pPr>
+            <a:r>
+              <a:t>            const newWrap = doc.getElementById('reservations-table-wrapper');</a:t>
+            </a:r>
+          </a:p>
+          <a:p>
+            <a:pPr algn="l">
+              <a:defRPr sz="1000">
+                <a:solidFill>
+                  <a:srgbClr val="38BDF8"/>
+                </a:solidFill>
+                <a:latin typeface="Consolas"/>
+              </a:defRPr>
+            </a:pPr>
+            <a:r>
+              <a:t>            const currWrap = document.getElementById('reservations-table-wrapper');</a:t>
+            </a:r>
+          </a:p>
+          <a:p>
+            <a:pPr algn="l">
+              <a:defRPr sz="1000">
+                <a:solidFill>
+                  <a:srgbClr val="F472B6"/>
+                </a:solidFill>
+                <a:latin typeface="Consolas"/>
+              </a:defRPr>
+            </a:pPr>
+            <a:r>
+              <a:t>            if (newWrap &amp;&amp; currWrap &amp;&amp; currWrap.innerHTML !== newWrap.innerHTML) {</a:t>
+            </a:r>
+          </a:p>
+          <a:p>
+            <a:pPr algn="l">
+              <a:defRPr sz="1000">
+                <a:solidFill>
+                  <a:srgbClr val="38BDF8"/>
+                </a:solidFill>
+                <a:latin typeface="Consolas"/>
+              </a:defRPr>
+            </a:pPr>
+            <a:r>
+              <a:t>                currWrap.innerHTML = newWrap.innerHTML; // تحديث الجدول آلياً</a:t>
+            </a:r>
+          </a:p>
+          <a:p>
+            <a:pPr algn="l">
+              <a:defRPr sz="1000">
+                <a:solidFill>
+                  <a:srgbClr val="38BDF8"/>
+                </a:solidFill>
+                <a:latin typeface="Consolas"/>
+              </a:defRPr>
+            </a:pPr>
+            <a:r>
+              <a:t>            }</a:t>
+            </a:r>
+          </a:p>
+          <a:p>
+            <a:pPr algn="l">
+              <a:defRPr sz="1000">
+                <a:solidFill>
+                  <a:srgbClr val="38BDF8"/>
+                </a:solidFill>
+                <a:latin typeface="Consolas"/>
+              </a:defRPr>
+            </a:pPr>
+            <a:r>
+              <a:t>        }</a:t>
+            </a:r>
+          </a:p>
+          <a:p>
+            <a:pPr algn="l">
+              <a:defRPr sz="1000">
+                <a:solidFill>
+                  <a:srgbClr val="F472B6"/>
+                </a:solidFill>
+                <a:latin typeface="Consolas"/>
+              </a:defRPr>
+            </a:pPr>
+            <a:r>
+              <a:t>    } catch (err) {</a:t>
+            </a:r>
+          </a:p>
+          <a:p>
+            <a:pPr algn="l">
+              <a:defRPr sz="1000">
+                <a:solidFill>
+                  <a:srgbClr val="38BDF8"/>
+                </a:solidFill>
+                <a:latin typeface="Consolas"/>
+              </a:defRPr>
+            </a:pPr>
+            <a:r>
+              <a:t>        console.warn('Auto-sync check failed:', err);</a:t>
+            </a:r>
+          </a:p>
+          <a:p>
+            <a:pPr algn="l">
+              <a:defRPr sz="1000">
+                <a:solidFill>
+                  <a:srgbClr val="38BDF8"/>
+                </a:solidFill>
+                <a:latin typeface="Consolas"/>
+              </a:defRPr>
+            </a:pPr>
+            <a:r>
+              <a:t>    }</a:t>
+            </a:r>
+          </a:p>
+          <a:p>
+            <a:pPr algn="l">
+              <a:defRPr sz="1000">
+                <a:solidFill>
+                  <a:srgbClr val="38BDF8"/>
+                </a:solidFill>
+                <a:latin typeface="Consolas"/>
+              </a:defRPr>
+            </a:pPr>
+            <a:r>
+              <a:t>}</a:t>
+            </a:r>
+          </a:p>
+          <a:p>
+            <a:pPr algn="l">
+              <a:defRPr sz="1000">
+                <a:solidFill>
+                  <a:srgbClr val="38BDF8"/>
+                </a:solidFill>
+                <a:latin typeface="Consolas"/>
+              </a:defRPr>
+            </a:pPr>
+            <a:r>
+              <a:t>setInterval(fetchLatestReservations, 5000); // كل 5 ثوانٍ</a:t>
             </a:r>
           </a:p>
         </p:txBody>
@@ -7648,7 +11966,7 @@
         <p:spPr>
           <a:xfrm>
             <a:off x="0" y="0"/>
-            <a:ext cx="12191695" cy="1097280"/>
+            <a:ext cx="12191695" cy="1051560"/>
           </a:xfrm>
           <a:prstGeom prst="rect">
             <a:avLst/>
@@ -7692,8 +12010,8 @@
         </p:nvSpPr>
         <p:spPr>
           <a:xfrm>
-            <a:off x="731520" y="109728"/>
-            <a:ext cx="10698480" cy="320040"/>
+            <a:off x="731520" y="91440"/>
+            <a:ext cx="10698480" cy="292608"/>
           </a:xfrm>
           <a:prstGeom prst="rect">
             <a:avLst/>
@@ -7707,7 +12025,7 @@
           <a:lstStyle/>
           <a:p>
             <a:pPr algn="r">
-              <a:defRPr sz="1300" b="1">
+              <a:defRPr sz="1200" b="1">
                 <a:solidFill>
                   <a:srgbClr val="10B981"/>
                 </a:solidFill>
@@ -7715,7 +12033,7 @@
               </a:defRPr>
             </a:pPr>
             <a:r>
-              <a:t>مشروع تخرج — نظام خادم وعميل (Level 4)</a:t>
+              <a:t>منظومة خادم وعميل موزعة — معمارية 3-Tier Distributed Architecture</a:t>
             </a:r>
           </a:p>
         </p:txBody>
@@ -7728,8 +12046,8 @@
         </p:nvSpPr>
         <p:spPr>
           <a:xfrm>
-            <a:off x="731520" y="411480"/>
-            <a:ext cx="10698480" cy="594360"/>
+            <a:off x="731520" y="384048"/>
+            <a:ext cx="10698480" cy="566928"/>
           </a:xfrm>
           <a:prstGeom prst="rect">
             <a:avLst/>
@@ -7743,7 +12061,7 @@
           <a:lstStyle/>
           <a:p>
             <a:pPr algn="r">
-              <a:defRPr sz="2200" b="1">
+              <a:defRPr sz="2100" b="1">
                 <a:solidFill>
                   <a:srgbClr val="F8FAFC"/>
                 </a:solidFill>
@@ -7751,7 +12069,7 @@
               </a:defRPr>
             </a:pPr>
             <a:r>
-              <a:t>8. سيناريو العرض التشغيلي المباشر (End-to-End System Demo)</a:t>
+              <a:t>8. كود بوابة الربط المحاسبي (B2B Partner ERP Integration API)</a:t>
             </a:r>
           </a:p>
         </p:txBody>
@@ -7764,8 +12082,8 @@
         </p:nvSpPr>
         <p:spPr>
           <a:xfrm>
-            <a:off x="0" y="1097280"/>
-            <a:ext cx="12191695" cy="54864"/>
+            <a:off x="0" y="1051560"/>
+            <a:ext cx="12191695" cy="45720"/>
           </a:xfrm>
           <a:prstGeom prst="rect">
             <a:avLst/>
@@ -7807,8 +12125,8 @@
         </p:nvSpPr>
         <p:spPr>
           <a:xfrm>
-            <a:off x="731520" y="6446520"/>
-            <a:ext cx="10698480" cy="320040"/>
+            <a:off x="731520" y="6473952"/>
+            <a:ext cx="10698480" cy="292608"/>
           </a:xfrm>
           <a:prstGeom prst="rect">
             <a:avLst/>
@@ -7822,7 +12140,7 @@
           <a:lstStyle/>
           <a:p>
             <a:pPr algn="ctr">
-              <a:defRPr sz="1100">
+              <a:defRPr sz="1050">
                 <a:solidFill>
                   <a:srgbClr val="64748B"/>
                 </a:solidFill>
@@ -7843,18 +12161,18 @@
         </p:nvSpPr>
         <p:spPr>
           <a:xfrm>
-            <a:off x="731520" y="1463040"/>
-            <a:ext cx="10698480" cy="4572000"/>
+            <a:off x="731520" y="1325880"/>
+            <a:ext cx="5212080" cy="4846320"/>
           </a:xfrm>
           <a:prstGeom prst="roundRect">
             <a:avLst/>
           </a:prstGeom>
           <a:solidFill>
-            <a:srgbClr val="D1FAE5"/>
+            <a:srgbClr val="0F172A"/>
           </a:solidFill>
           <a:ln w="19050">
             <a:solidFill>
-              <a:srgbClr val="10B981"/>
+              <a:srgbClr val="0D9488"/>
             </a:solidFill>
           </a:ln>
         </p:spPr>
@@ -7888,8 +12206,8 @@
         </p:nvSpPr>
         <p:spPr>
           <a:xfrm>
-            <a:off x="914400" y="1600200"/>
-            <a:ext cx="10332719" cy="4297680"/>
+            <a:off x="914400" y="1417320"/>
+            <a:ext cx="4846320" cy="365760"/>
           </a:xfrm>
           <a:prstGeom prst="rect">
             <a:avLst/>
@@ -7903,111 +12221,708 @@
           <a:lstStyle/>
           <a:p>
             <a:pPr algn="r">
-              <a:defRPr sz="1700" b="1">
-                <a:solidFill>
-                  <a:srgbClr val="064E3B"/>
-                </a:solidFill>
-                <a:latin typeface="Segoe UI"/>
-              </a:defRPr>
-            </a:pPr>
-            <a:r>
-              <a:t>خطوات العرض التشغيلي المتزامن (بوابة الويب + تطبيق الهاتف)</a:t>
-            </a:r>
-          </a:p>
+              <a:defRPr sz="1300" b="1">
+                <a:solidFill>
+                  <a:srgbClr val="10B981"/>
+                </a:solidFill>
+                <a:latin typeface="Segoe UI"/>
+              </a:defRPr>
+            </a:pPr>
+            <a:r>
+              <a:t>الطلب: حمولة JSON من نظام الكاشير  [REST JSON Payload]</a:t>
+            </a:r>
+          </a:p>
+        </p:txBody>
+      </p:sp>
+      <p:sp>
+        <p:nvSpPr>
+          <p:cNvPr id="9" name="TextBox 8"/>
+          <p:cNvSpPr txBox="1"/>
+          <p:nvPr/>
+        </p:nvSpPr>
+        <p:spPr>
+          <a:xfrm>
+            <a:off x="914400" y="1801368"/>
+            <a:ext cx="4846320" cy="4251959"/>
+          </a:xfrm>
+          <a:prstGeom prst="rect">
+            <a:avLst/>
+          </a:prstGeom>
+          <a:noFill/>
+        </p:spPr>
+        <p:txBody>
+          <a:bodyPr wrap="square">
+            <a:spAutoFit/>
+          </a:bodyPr>
+          <a:lstStyle/>
+          <a:p>
+            <a:pPr algn="l">
+              <a:defRPr sz="1000">
+                <a:solidFill>
+                  <a:srgbClr val="94A3B8"/>
+                </a:solidFill>
+                <a:latin typeface="Consolas"/>
+              </a:defRPr>
+            </a:pPr>
+            <a:r>
+              <a:t>// HTTP POST /api/v1/partner/inventory/sync</a:t>
+            </a:r>
+          </a:p>
+          <a:p>
+            <a:pPr algn="l">
+              <a:defRPr sz="1000">
+                <a:solidFill>
+                  <a:srgbClr val="94A3B8"/>
+                </a:solidFill>
+                <a:latin typeface="Consolas"/>
+              </a:defRPr>
+            </a:pPr>
+            <a:r>
+              <a:t>// Headers: X-Pharmacy-Id: 1 | Content-Type: application/json</a:t>
+            </a:r>
+          </a:p>
+          <a:p>
+            <a:pPr algn="l">
+              <a:defRPr sz="1000">
+                <a:solidFill>
+                  <a:srgbClr val="38BDF8"/>
+                </a:solidFill>
+                <a:latin typeface="Consolas"/>
+              </a:defRPr>
+            </a:pPr>
+            <a:r>
+              <a:t>{</a:t>
+            </a:r>
+          </a:p>
+          <a:p>
+            <a:pPr algn="l">
+              <a:defRPr sz="1000">
+                <a:solidFill>
+                  <a:srgbClr val="38BDF8"/>
+                </a:solidFill>
+                <a:latin typeface="Consolas"/>
+              </a:defRPr>
+            </a:pPr>
+            <a:r>
+              <a:t>  "items": [</a:t>
+            </a:r>
+          </a:p>
+          <a:p>
+            <a:pPr algn="l">
+              <a:defRPr sz="1000">
+                <a:solidFill>
+                  <a:srgbClr val="38BDF8"/>
+                </a:solidFill>
+                <a:latin typeface="Consolas"/>
+              </a:defRPr>
+            </a:pPr>
+            <a:r>
+              <a:t>    {</a:t>
+            </a:r>
+          </a:p>
+          <a:p>
+            <a:pPr algn="l">
+              <a:defRPr sz="1000">
+                <a:solidFill>
+                  <a:srgbClr val="38BDF8"/>
+                </a:solidFill>
+                <a:latin typeface="Consolas"/>
+              </a:defRPr>
+            </a:pPr>
+            <a:r>
+              <a:t>      "barcode": "6291100123456",</a:t>
+            </a:r>
+          </a:p>
+          <a:p>
+            <a:pPr algn="l">
+              <a:defRPr sz="1000">
+                <a:solidFill>
+                  <a:srgbClr val="38BDF8"/>
+                </a:solidFill>
+                <a:latin typeface="Consolas"/>
+              </a:defRPr>
+            </a:pPr>
+            <a:r>
+              <a:t>      "quantity": 25,</a:t>
+            </a:r>
+          </a:p>
+          <a:p>
+            <a:pPr algn="l">
+              <a:defRPr sz="1000">
+                <a:solidFill>
+                  <a:srgbClr val="38BDF8"/>
+                </a:solidFill>
+                <a:latin typeface="Consolas"/>
+              </a:defRPr>
+            </a:pPr>
+            <a:r>
+              <a:t>      "price": 1200.00</a:t>
+            </a:r>
+          </a:p>
+          <a:p>
+            <a:pPr algn="l">
+              <a:defRPr sz="1000">
+                <a:solidFill>
+                  <a:srgbClr val="38BDF8"/>
+                </a:solidFill>
+                <a:latin typeface="Consolas"/>
+              </a:defRPr>
+            </a:pPr>
+            <a:r>
+              <a:t>    },</a:t>
+            </a:r>
+          </a:p>
+          <a:p>
+            <a:pPr algn="l">
+              <a:defRPr sz="1000">
+                <a:solidFill>
+                  <a:srgbClr val="38BDF8"/>
+                </a:solidFill>
+                <a:latin typeface="Consolas"/>
+              </a:defRPr>
+            </a:pPr>
+            <a:r>
+              <a:t>    {</a:t>
+            </a:r>
+          </a:p>
+          <a:p>
+            <a:pPr algn="l">
+              <a:defRPr sz="1000">
+                <a:solidFill>
+                  <a:srgbClr val="38BDF8"/>
+                </a:solidFill>
+                <a:latin typeface="Consolas"/>
+              </a:defRPr>
+            </a:pPr>
+            <a:r>
+              <a:t>      "barcode": "6291100987654",</a:t>
+            </a:r>
+          </a:p>
+          <a:p>
+            <a:pPr algn="l">
+              <a:defRPr sz="1000">
+                <a:solidFill>
+                  <a:srgbClr val="38BDF8"/>
+                </a:solidFill>
+                <a:latin typeface="Consolas"/>
+              </a:defRPr>
+            </a:pPr>
+            <a:r>
+              <a:t>      "quantity": 10,</a:t>
+            </a:r>
+          </a:p>
+          <a:p>
+            <a:pPr algn="l">
+              <a:defRPr sz="1000">
+                <a:solidFill>
+                  <a:srgbClr val="38BDF8"/>
+                </a:solidFill>
+                <a:latin typeface="Consolas"/>
+              </a:defRPr>
+            </a:pPr>
+            <a:r>
+              <a:t>      "price": 3500.00</a:t>
+            </a:r>
+          </a:p>
+          <a:p>
+            <a:pPr algn="l">
+              <a:defRPr sz="1000">
+                <a:solidFill>
+                  <a:srgbClr val="38BDF8"/>
+                </a:solidFill>
+                <a:latin typeface="Consolas"/>
+              </a:defRPr>
+            </a:pPr>
+            <a:r>
+              <a:t>    }</a:t>
+            </a:r>
+          </a:p>
+          <a:p>
+            <a:pPr algn="l">
+              <a:defRPr sz="1000">
+                <a:solidFill>
+                  <a:srgbClr val="38BDF8"/>
+                </a:solidFill>
+                <a:latin typeface="Consolas"/>
+              </a:defRPr>
+            </a:pPr>
+            <a:r>
+              <a:t>  ]</a:t>
+            </a:r>
+          </a:p>
+          <a:p>
+            <a:pPr algn="l">
+              <a:defRPr sz="1000">
+                <a:solidFill>
+                  <a:srgbClr val="38BDF8"/>
+                </a:solidFill>
+                <a:latin typeface="Consolas"/>
+              </a:defRPr>
+            </a:pPr>
+            <a:r>
+              <a:t>}</a:t>
+            </a:r>
+          </a:p>
+          <a:p>
+            <a:pPr algn="l">
+              <a:defRPr sz="1000">
+                <a:solidFill>
+                  <a:srgbClr val="38BDF8"/>
+                </a:solidFill>
+                <a:latin typeface="Consolas"/>
+              </a:defRPr>
+            </a:pPr>
+          </a:p>
+          <a:p>
+            <a:pPr algn="l">
+              <a:defRPr sz="1000">
+                <a:solidFill>
+                  <a:srgbClr val="94A3B8"/>
+                </a:solidFill>
+                <a:latin typeface="Consolas"/>
+              </a:defRPr>
+            </a:pPr>
+            <a:r>
+              <a:t>// الاستجابة الفورية:</a:t>
+            </a:r>
+          </a:p>
+          <a:p>
+            <a:pPr algn="l">
+              <a:defRPr sz="1000">
+                <a:solidFill>
+                  <a:srgbClr val="38BDF8"/>
+                </a:solidFill>
+                <a:latin typeface="Consolas"/>
+              </a:defRPr>
+            </a:pPr>
+            <a:r>
+              <a:t>{</a:t>
+            </a:r>
+          </a:p>
+          <a:p>
+            <a:pPr algn="l">
+              <a:defRPr sz="1000">
+                <a:solidFill>
+                  <a:srgbClr val="38BDF8"/>
+                </a:solidFill>
+                <a:latin typeface="Consolas"/>
+              </a:defRPr>
+            </a:pPr>
+            <a:r>
+              <a:t>  "success": true,</a:t>
+            </a:r>
+          </a:p>
+          <a:p>
+            <a:pPr algn="l">
+              <a:defRPr sz="1000">
+                <a:solidFill>
+                  <a:srgbClr val="38BDF8"/>
+                </a:solidFill>
+                <a:latin typeface="Consolas"/>
+              </a:defRPr>
+            </a:pPr>
+            <a:r>
+              <a:t>  "message": "تمت مزامنة المخزون بنجاح",</a:t>
+            </a:r>
+          </a:p>
+          <a:p>
+            <a:pPr algn="l">
+              <a:defRPr sz="1000">
+                <a:solidFill>
+                  <a:srgbClr val="38BDF8"/>
+                </a:solidFill>
+                <a:latin typeface="Consolas"/>
+              </a:defRPr>
+            </a:pPr>
+            <a:r>
+              <a:t>  "updated_count": 2</a:t>
+            </a:r>
+          </a:p>
+          <a:p>
+            <a:pPr algn="l">
+              <a:defRPr sz="1000">
+                <a:solidFill>
+                  <a:srgbClr val="38BDF8"/>
+                </a:solidFill>
+                <a:latin typeface="Consolas"/>
+              </a:defRPr>
+            </a:pPr>
+            <a:r>
+              <a:t>}</a:t>
+            </a:r>
+          </a:p>
+        </p:txBody>
+      </p:sp>
+      <p:sp>
+        <p:nvSpPr>
+          <p:cNvPr id="10" name="Rounded Rectangle 9"/>
+          <p:cNvSpPr/>
+          <p:nvPr/>
+        </p:nvSpPr>
+        <p:spPr>
+          <a:xfrm>
+            <a:off x="6217920" y="1325880"/>
+            <a:ext cx="5212080" cy="4846320"/>
+          </a:xfrm>
+          <a:prstGeom prst="roundRect">
+            <a:avLst/>
+          </a:prstGeom>
+          <a:solidFill>
+            <a:srgbClr val="0F172A"/>
+          </a:solidFill>
+          <a:ln w="19050">
+            <a:solidFill>
+              <a:srgbClr val="0D9488"/>
+            </a:solidFill>
+          </a:ln>
+        </p:spPr>
+        <p:style>
+          <a:lnRef idx="1">
+            <a:schemeClr val="accent1"/>
+          </a:lnRef>
+          <a:fillRef idx="3">
+            <a:schemeClr val="accent1"/>
+          </a:fillRef>
+          <a:effectRef idx="2">
+            <a:schemeClr val="accent1"/>
+          </a:effectRef>
+          <a:fontRef idx="minor">
+            <a:schemeClr val="lt1"/>
+          </a:fontRef>
+        </p:style>
+        <p:txBody>
+          <a:bodyPr rtlCol="0" anchor="ctr"/>
+          <a:lstStyle/>
+          <a:p>
+            <a:pPr algn="ctr"/>
+          </a:p>
+        </p:txBody>
+      </p:sp>
+      <p:sp>
+        <p:nvSpPr>
+          <p:cNvPr id="11" name="TextBox 10"/>
+          <p:cNvSpPr txBox="1"/>
+          <p:nvPr/>
+        </p:nvSpPr>
+        <p:spPr>
+          <a:xfrm>
+            <a:off x="6400800" y="1417320"/>
+            <a:ext cx="4846320" cy="365760"/>
+          </a:xfrm>
+          <a:prstGeom prst="rect">
+            <a:avLst/>
+          </a:prstGeom>
+          <a:noFill/>
+        </p:spPr>
+        <p:txBody>
+          <a:bodyPr wrap="square">
+            <a:spAutoFit/>
+          </a:bodyPr>
+          <a:lstStyle/>
           <a:p>
             <a:pPr algn="r">
-              <a:spcBef>
-                <a:spcPts val="800"/>
-              </a:spcBef>
-              <a:defRPr sz="1300">
-                <a:solidFill>
-                  <a:srgbClr val="0F172A"/>
-                </a:solidFill>
-                <a:latin typeface="Segoe UI"/>
-              </a:defRPr>
-            </a:pPr>
-            <a:r>
-              <a:t>• 1. التعديل بالويب: الصيدلي يسجل دخوله ويعدل مخزون دواء Norvasc إلى 10 علب وسعره إلى 3800 ريال.</a:t>
-            </a:r>
-          </a:p>
-          <a:p>
-            <a:pPr algn="r">
-              <a:spcBef>
-                <a:spcPts val="800"/>
-              </a:spcBef>
-              <a:defRPr sz="1300">
-                <a:solidFill>
-                  <a:srgbClr val="0F172A"/>
-                </a:solidFill>
-                <a:latin typeface="Segoe UI"/>
-              </a:defRPr>
-            </a:pPr>
-            <a:r>
-              <a:t>• 2. البحث بالهاتف: المريض يبحث عن Norvasc فتظهر صيدلية الأمل بالسعر الجديد والمسافة الدقيقة.</a:t>
-            </a:r>
-          </a:p>
-          <a:p>
-            <a:pPr algn="r">
-              <a:spcBef>
-                <a:spcPts val="800"/>
-              </a:spcBef>
-              <a:defRPr sz="1300">
-                <a:solidFill>
-                  <a:srgbClr val="0F172A"/>
-                </a:solidFill>
-                <a:latin typeface="Segoe UI"/>
-              </a:defRPr>
-            </a:pPr>
-            <a:r>
-              <a:t>• 3. الحجز اللحظي: المريض يحجز عبوة واحدة؛ فتصدر تذكرة بمؤقت 30 دقيقة وكود حجز فريد.</a:t>
-            </a:r>
-          </a:p>
-          <a:p>
-            <a:pPr algn="r">
-              <a:spcBef>
-                <a:spcPts val="800"/>
-              </a:spcBef>
-              <a:defRPr sz="1300">
-                <a:solidFill>
-                  <a:srgbClr val="0F172A"/>
-                </a:solidFill>
-                <a:latin typeface="Segoe UI"/>
-              </a:defRPr>
-            </a:pPr>
-            <a:r>
-              <a:t>• 4. الخصم التلقائي: شاشة الصيدلي بالويب تحدث جدولها آلياً وينخفض المخزون فورياً من 10 إلى 9 علب.</a:t>
-            </a:r>
-          </a:p>
-          <a:p>
-            <a:pPr algn="r">
-              <a:spcBef>
-                <a:spcPts val="800"/>
-              </a:spcBef>
-              <a:defRPr sz="1300">
-                <a:solidFill>
-                  <a:srgbClr val="0F172A"/>
-                </a:solidFill>
-                <a:latin typeface="Segoe UI"/>
-              </a:defRPr>
-            </a:pPr>
-            <a:r>
-              <a:t>• 5. تأكيد الاستلام: الصيدلي يضغط 'تم التسليم والمحاسبة' فتتحول الحالة فوراً إلى completed.</a:t>
-            </a:r>
-          </a:p>
-          <a:p>
-            <a:pPr algn="r">
-              <a:spcBef>
-                <a:spcPts val="800"/>
-              </a:spcBef>
-              <a:defRPr sz="1300">
-                <a:solidFill>
-                  <a:srgbClr val="0F172A"/>
-                </a:solidFill>
-                <a:latin typeface="Segoe UI"/>
-              </a:defRPr>
-            </a:pPr>
-            <a:r>
-              <a:t>• 6. المزامنة اللحظية بالهاتف: شاشة التذكرة لدى المريض تستشعر التأكيد فوراً وتظهر شارة النجاح الخضراء.</a:t>
+              <a:defRPr sz="1300" b="1">
+                <a:solidFill>
+                  <a:srgbClr val="10B981"/>
+                </a:solidFill>
+                <a:latin typeface="Segoe UI"/>
+              </a:defRPr>
+            </a:pPr>
+            <a:r>
+              <a:t>الخادم: معالجة المزامنة الجماعية للمخزون  [Laravel / PHP]</a:t>
+            </a:r>
+          </a:p>
+        </p:txBody>
+      </p:sp>
+      <p:sp>
+        <p:nvSpPr>
+          <p:cNvPr id="12" name="TextBox 11"/>
+          <p:cNvSpPr txBox="1"/>
+          <p:nvPr/>
+        </p:nvSpPr>
+        <p:spPr>
+          <a:xfrm>
+            <a:off x="6400800" y="1801368"/>
+            <a:ext cx="4846320" cy="4251959"/>
+          </a:xfrm>
+          <a:prstGeom prst="rect">
+            <a:avLst/>
+          </a:prstGeom>
+          <a:noFill/>
+        </p:spPr>
+        <p:txBody>
+          <a:bodyPr wrap="square">
+            <a:spAutoFit/>
+          </a:bodyPr>
+          <a:lstStyle/>
+          <a:p>
+            <a:pPr algn="l">
+              <a:defRPr sz="1000">
+                <a:solidFill>
+                  <a:srgbClr val="94A3B8"/>
+                </a:solidFill>
+                <a:latin typeface="Consolas"/>
+              </a:defRPr>
+            </a:pPr>
+            <a:r>
+              <a:t>// backend/app/Http/Controllers/Api/V1/PartnerIntegrationApiController.php</a:t>
+            </a:r>
+          </a:p>
+          <a:p>
+            <a:pPr algn="l">
+              <a:defRPr sz="1000">
+                <a:solidFill>
+                  <a:srgbClr val="F472B6"/>
+                </a:solidFill>
+                <a:latin typeface="Consolas"/>
+              </a:defRPr>
+            </a:pPr>
+            <a:r>
+              <a:t>public function syncInventory(Request $request): JsonResponse {</a:t>
+            </a:r>
+          </a:p>
+          <a:p>
+            <a:pPr algn="l">
+              <a:defRPr sz="1000">
+                <a:solidFill>
+                  <a:srgbClr val="38BDF8"/>
+                </a:solidFill>
+                <a:latin typeface="Consolas"/>
+              </a:defRPr>
+            </a:pPr>
+            <a:r>
+              <a:t>    $pharmacy = $this-&gt;resolvePharmacy($request);</a:t>
+            </a:r>
+          </a:p>
+          <a:p>
+            <a:pPr algn="l">
+              <a:defRPr sz="1000">
+                <a:solidFill>
+                  <a:srgbClr val="38BDF8"/>
+                </a:solidFill>
+                <a:latin typeface="Consolas"/>
+              </a:defRPr>
+            </a:pPr>
+            <a:r>
+              <a:t>    $validated = $request-&gt;validate([</a:t>
+            </a:r>
+          </a:p>
+          <a:p>
+            <a:pPr algn="l">
+              <a:defRPr sz="1000">
+                <a:solidFill>
+                  <a:srgbClr val="38BDF8"/>
+                </a:solidFill>
+                <a:latin typeface="Consolas"/>
+              </a:defRPr>
+            </a:pPr>
+            <a:r>
+              <a:t>        'items' =&gt; 'required|array|min:1',</a:t>
+            </a:r>
+          </a:p>
+          <a:p>
+            <a:pPr algn="l">
+              <a:defRPr sz="1000">
+                <a:solidFill>
+                  <a:srgbClr val="38BDF8"/>
+                </a:solidFill>
+                <a:latin typeface="Consolas"/>
+              </a:defRPr>
+            </a:pPr>
+            <a:r>
+              <a:t>        'items.*.barcode' =&gt; 'nullable|string',</a:t>
+            </a:r>
+          </a:p>
+          <a:p>
+            <a:pPr algn="l">
+              <a:defRPr sz="1000">
+                <a:solidFill>
+                  <a:srgbClr val="38BDF8"/>
+                </a:solidFill>
+                <a:latin typeface="Consolas"/>
+              </a:defRPr>
+            </a:pPr>
+            <a:r>
+              <a:t>        'items.*.quantity' =&gt; 'required|integer|min:0',</a:t>
+            </a:r>
+          </a:p>
+          <a:p>
+            <a:pPr algn="l">
+              <a:defRPr sz="1000">
+                <a:solidFill>
+                  <a:srgbClr val="38BDF8"/>
+                </a:solidFill>
+                <a:latin typeface="Consolas"/>
+              </a:defRPr>
+            </a:pPr>
+            <a:r>
+              <a:t>        'items.*.price' =&gt; 'required|numeric|min:0',</a:t>
+            </a:r>
+          </a:p>
+          <a:p>
+            <a:pPr algn="l">
+              <a:defRPr sz="1000">
+                <a:solidFill>
+                  <a:srgbClr val="38BDF8"/>
+                </a:solidFill>
+                <a:latin typeface="Consolas"/>
+              </a:defRPr>
+            </a:pPr>
+            <a:r>
+              <a:t>    ]);</a:t>
+            </a:r>
+          </a:p>
+          <a:p>
+            <a:pPr algn="l">
+              <a:defRPr sz="1000">
+                <a:solidFill>
+                  <a:srgbClr val="38BDF8"/>
+                </a:solidFill>
+                <a:latin typeface="Consolas"/>
+              </a:defRPr>
+            </a:pPr>
+          </a:p>
+          <a:p>
+            <a:pPr algn="l">
+              <a:defRPr sz="1000">
+                <a:solidFill>
+                  <a:srgbClr val="38BDF8"/>
+                </a:solidFill>
+                <a:latin typeface="Consolas"/>
+              </a:defRPr>
+            </a:pPr>
+            <a:r>
+              <a:t>    foreach ($validated['items'] as $itemData) {</a:t>
+            </a:r>
+          </a:p>
+          <a:p>
+            <a:pPr algn="l">
+              <a:defRPr sz="1000">
+                <a:solidFill>
+                  <a:srgbClr val="38BDF8"/>
+                </a:solidFill>
+                <a:latin typeface="Consolas"/>
+              </a:defRPr>
+            </a:pPr>
+            <a:r>
+              <a:t>        $medicine = Medicine::where('barcode', $itemData['barcode'])-&gt;first();</a:t>
+            </a:r>
+          </a:p>
+          <a:p>
+            <a:pPr algn="l">
+              <a:defRPr sz="1000">
+                <a:solidFill>
+                  <a:srgbClr val="F472B6"/>
+                </a:solidFill>
+                <a:latin typeface="Consolas"/>
+              </a:defRPr>
+            </a:pPr>
+            <a:r>
+              <a:t>        if ($medicine) {</a:t>
+            </a:r>
+          </a:p>
+          <a:p>
+            <a:pPr algn="l">
+              <a:defRPr sz="1000">
+                <a:solidFill>
+                  <a:srgbClr val="38BDF8"/>
+                </a:solidFill>
+                <a:latin typeface="Consolas"/>
+              </a:defRPr>
+            </a:pPr>
+            <a:r>
+              <a:t>            PharmacyMedicine::updateOrCreate(</a:t>
+            </a:r>
+          </a:p>
+          <a:p>
+            <a:pPr algn="l">
+              <a:defRPr sz="1000">
+                <a:solidFill>
+                  <a:srgbClr val="38BDF8"/>
+                </a:solidFill>
+                <a:latin typeface="Consolas"/>
+              </a:defRPr>
+            </a:pPr>
+            <a:r>
+              <a:t>                ['pharmacy_id' =&gt; $pharmacy-&gt;id, 'medicine_id' =&gt; $medicine-&gt;id],</a:t>
+            </a:r>
+          </a:p>
+          <a:p>
+            <a:pPr algn="l">
+              <a:defRPr sz="1000">
+                <a:solidFill>
+                  <a:srgbClr val="38BDF8"/>
+                </a:solidFill>
+                <a:latin typeface="Consolas"/>
+              </a:defRPr>
+            </a:pPr>
+            <a:r>
+              <a:t>                ['available_quantity' =&gt; $itemData['quantity'], 'price' =&gt; $itemData['price']]</a:t>
+            </a:r>
+          </a:p>
+          <a:p>
+            <a:pPr algn="l">
+              <a:defRPr sz="1000">
+                <a:solidFill>
+                  <a:srgbClr val="38BDF8"/>
+                </a:solidFill>
+                <a:latin typeface="Consolas"/>
+              </a:defRPr>
+            </a:pPr>
+            <a:r>
+              <a:t>            );</a:t>
+            </a:r>
+          </a:p>
+          <a:p>
+            <a:pPr algn="l">
+              <a:defRPr sz="1000">
+                <a:solidFill>
+                  <a:srgbClr val="38BDF8"/>
+                </a:solidFill>
+                <a:latin typeface="Consolas"/>
+              </a:defRPr>
+            </a:pPr>
+            <a:r>
+              <a:t>        }</a:t>
+            </a:r>
+          </a:p>
+          <a:p>
+            <a:pPr algn="l">
+              <a:defRPr sz="1000">
+                <a:solidFill>
+                  <a:srgbClr val="38BDF8"/>
+                </a:solidFill>
+                <a:latin typeface="Consolas"/>
+              </a:defRPr>
+            </a:pPr>
+            <a:r>
+              <a:t>    }</a:t>
+            </a:r>
+          </a:p>
+          <a:p>
+            <a:pPr algn="l">
+              <a:defRPr sz="1000">
+                <a:solidFill>
+                  <a:srgbClr val="F472B6"/>
+                </a:solidFill>
+                <a:latin typeface="Consolas"/>
+              </a:defRPr>
+            </a:pPr>
+            <a:r>
+              <a:t>    return response()-&gt;json(['success' =&gt; true, 'message' =&gt; 'تمت المزامنة بنجاح']);</a:t>
+            </a:r>
+          </a:p>
+          <a:p>
+            <a:pPr algn="l">
+              <a:defRPr sz="1000">
+                <a:solidFill>
+                  <a:srgbClr val="38BDF8"/>
+                </a:solidFill>
+                <a:latin typeface="Consolas"/>
+              </a:defRPr>
+            </a:pPr>
+            <a:r>
+              <a:t>}</a:t>
             </a:r>
           </a:p>
         </p:txBody>

--- a/docs/PharmaConnect_Defense_Presentation.pptx
+++ b/docs/PharmaConnect_Defense_Presentation.pptx
@@ -8159,7 +8159,7 @@
               </a:defRPr>
             </a:pPr>
             <a:r>
-              <a:t>4. كود التخاطب والمصادقة بالتوكنات (Client-Server Auth &amp; Bearer Tokens)</a:t>
+              <a:t>4. كود التخاطب والمصادقة بالتوكنات (REST Auth &amp; Bearer Tokens)</a:t>
             </a:r>
           </a:p>
         </p:txBody>
@@ -8332,8 +8332,8 @@
         </p:nvSpPr>
         <p:spPr>
           <a:xfrm>
-            <a:off x="914400" y="1801368"/>
-            <a:ext cx="4846320" cy="4251959"/>
+            <a:off x="914400" y="1783080"/>
+            <a:ext cx="4846320" cy="4279392"/>
           </a:xfrm>
           <a:prstGeom prst="rect">
             <a:avLst/>
@@ -8347,7 +8347,7 @@
           <a:lstStyle/>
           <a:p>
             <a:pPr algn="l">
-              <a:defRPr sz="1000">
+              <a:defRPr sz="919">
                 <a:solidFill>
                   <a:srgbClr val="94A3B8"/>
                 </a:solidFill>
@@ -8360,7 +8360,20 @@
           </a:p>
           <a:p>
             <a:pPr algn="l">
-              <a:defRPr sz="1000">
+              <a:defRPr sz="919">
+                <a:solidFill>
+                  <a:srgbClr val="94A3B8"/>
+                </a:solidFill>
+                <a:latin typeface="Consolas"/>
+              </a:defRPr>
+            </a:pPr>
+            <a:r>
+              <a:t>// 1. تجهيز ترويسات الطلب بنمط RESTful وحقن التوكن المشفر</a:t>
+            </a:r>
+          </a:p>
+          <a:p>
+            <a:pPr algn="l">
+              <a:defRPr sz="919">
                 <a:solidFill>
                   <a:srgbClr val="38BDF8"/>
                 </a:solidFill>
@@ -8373,7 +8386,7 @@
           </a:p>
           <a:p>
             <a:pPr algn="l">
-              <a:defRPr sz="1000">
+              <a:defRPr sz="919">
                 <a:solidFill>
                   <a:srgbClr val="38BDF8"/>
                 </a:solidFill>
@@ -8386,7 +8399,7 @@
           </a:p>
           <a:p>
             <a:pPr algn="l">
-              <a:defRPr sz="1000">
+              <a:defRPr sz="919">
                 <a:solidFill>
                   <a:srgbClr val="38BDF8"/>
                 </a:solidFill>
@@ -8399,7 +8412,7 @@
           </a:p>
           <a:p>
             <a:pPr algn="l">
-              <a:defRPr sz="1000">
+              <a:defRPr sz="919">
                 <a:solidFill>
                   <a:srgbClr val="F472B6"/>
                 </a:solidFill>
@@ -8412,20 +8425,20 @@
           </a:p>
           <a:p>
             <a:pPr algn="l">
-              <a:defRPr sz="1000">
-                <a:solidFill>
-                  <a:srgbClr val="38BDF8"/>
-                </a:solidFill>
-                <a:latin typeface="Consolas"/>
-              </a:defRPr>
-            </a:pPr>
-            <a:r>
-              <a:t>    'Authorization': 'Bearer $_authToken',</a:t>
-            </a:r>
-          </a:p>
-          <a:p>
-            <a:pPr algn="l">
-              <a:defRPr sz="1000">
+              <a:defRPr sz="919">
+                <a:solidFill>
+                  <a:srgbClr val="38BDF8"/>
+                </a:solidFill>
+                <a:latin typeface="Consolas"/>
+              </a:defRPr>
+            </a:pPr>
+            <a:r>
+              <a:t>    'Authorization': 'Bearer $_authToken', // توكن مصادقة العميل</a:t>
+            </a:r>
+          </a:p>
+          <a:p>
+            <a:pPr algn="l">
+              <a:defRPr sz="919">
                 <a:solidFill>
                   <a:srgbClr val="38BDF8"/>
                 </a:solidFill>
@@ -8438,17 +8451,30 @@
           </a:p>
           <a:p>
             <a:pPr algn="l">
-              <a:defRPr sz="1000">
-                <a:solidFill>
-                  <a:srgbClr val="38BDF8"/>
-                </a:solidFill>
-                <a:latin typeface="Consolas"/>
-              </a:defRPr>
-            </a:pPr>
-          </a:p>
-          <a:p>
-            <a:pPr algn="l">
-              <a:defRPr sz="1000">
+              <a:defRPr sz="919">
+                <a:solidFill>
+                  <a:srgbClr val="38BDF8"/>
+                </a:solidFill>
+                <a:latin typeface="Consolas"/>
+              </a:defRPr>
+            </a:pPr>
+          </a:p>
+          <a:p>
+            <a:pPr algn="l">
+              <a:defRPr sz="919">
+                <a:solidFill>
+                  <a:srgbClr val="94A3B8"/>
+                </a:solidFill>
+                <a:latin typeface="Consolas"/>
+              </a:defRPr>
+            </a:pPr>
+            <a:r>
+              <a:t>// 2. دالة تسجيل الدخول وإرسال بيانات الاعتماد للخادم المركزي</a:t>
+            </a:r>
+          </a:p>
+          <a:p>
+            <a:pPr algn="l">
+              <a:defRPr sz="919">
                 <a:solidFill>
                   <a:srgbClr val="F472B6"/>
                 </a:solidFill>
@@ -8461,7 +8487,7 @@
           </a:p>
           <a:p>
             <a:pPr algn="l">
-              <a:defRPr sz="1000">
+              <a:defRPr sz="919">
                 <a:solidFill>
                   <a:srgbClr val="38BDF8"/>
                 </a:solidFill>
@@ -8474,7 +8500,7 @@
           </a:p>
           <a:p>
             <a:pPr algn="l">
-              <a:defRPr sz="1000">
+              <a:defRPr sz="919">
                 <a:solidFill>
                   <a:srgbClr val="F472B6"/>
                 </a:solidFill>
@@ -8487,7 +8513,7 @@
           </a:p>
           <a:p>
             <a:pPr algn="l">
-              <a:defRPr sz="1000">
+              <a:defRPr sz="919">
                 <a:solidFill>
                   <a:srgbClr val="38BDF8"/>
                 </a:solidFill>
@@ -8500,7 +8526,7 @@
           </a:p>
           <a:p>
             <a:pPr algn="l">
-              <a:defRPr sz="1000">
+              <a:defRPr sz="919">
                 <a:solidFill>
                   <a:srgbClr val="38BDF8"/>
                 </a:solidFill>
@@ -8513,43 +8539,43 @@
           </a:p>
           <a:p>
             <a:pPr algn="l">
-              <a:defRPr sz="1000">
-                <a:solidFill>
-                  <a:srgbClr val="38BDF8"/>
-                </a:solidFill>
-                <a:latin typeface="Consolas"/>
-              </a:defRPr>
-            </a:pPr>
-            <a:r>
-              <a:t>    body: json.encode({'email': email, 'password': pwd}),</a:t>
-            </a:r>
-          </a:p>
-          <a:p>
-            <a:pPr algn="l">
-              <a:defRPr sz="1000">
-                <a:solidFill>
-                  <a:srgbClr val="38BDF8"/>
-                </a:solidFill>
-                <a:latin typeface="Consolas"/>
-              </a:defRPr>
-            </a:pPr>
-            <a:r>
-              <a:t>  ).timeout(Duration(seconds: 5));</a:t>
-            </a:r>
-          </a:p>
-          <a:p>
-            <a:pPr algn="l">
-              <a:defRPr sz="1000">
-                <a:solidFill>
-                  <a:srgbClr val="38BDF8"/>
-                </a:solidFill>
-                <a:latin typeface="Consolas"/>
-              </a:defRPr>
-            </a:pPr>
-          </a:p>
-          <a:p>
-            <a:pPr algn="l">
-              <a:defRPr sz="1000">
+              <a:defRPr sz="919">
+                <a:solidFill>
+                  <a:srgbClr val="38BDF8"/>
+                </a:solidFill>
+                <a:latin typeface="Consolas"/>
+              </a:defRPr>
+            </a:pPr>
+            <a:r>
+              <a:t>    body: json.encode({'email': email, 'password': pwd}), // تشفير JSON</a:t>
+            </a:r>
+          </a:p>
+          <a:p>
+            <a:pPr algn="l">
+              <a:defRPr sz="919">
+                <a:solidFill>
+                  <a:srgbClr val="38BDF8"/>
+                </a:solidFill>
+                <a:latin typeface="Consolas"/>
+              </a:defRPr>
+            </a:pPr>
+            <a:r>
+              <a:t>  ).timeout(Duration(seconds: 5)); // مهلة حماية من بطء الشبكة</a:t>
+            </a:r>
+          </a:p>
+          <a:p>
+            <a:pPr algn="l">
+              <a:defRPr sz="919">
+                <a:solidFill>
+                  <a:srgbClr val="38BDF8"/>
+                </a:solidFill>
+                <a:latin typeface="Consolas"/>
+              </a:defRPr>
+            </a:pPr>
+          </a:p>
+          <a:p>
+            <a:pPr algn="l">
+              <a:defRPr sz="919">
                 <a:solidFill>
                   <a:srgbClr val="F472B6"/>
                 </a:solidFill>
@@ -8562,7 +8588,7 @@
           </a:p>
           <a:p>
             <a:pPr algn="l">
-              <a:defRPr sz="1000">
+              <a:defRPr sz="919">
                 <a:solidFill>
                   <a:srgbClr val="38BDF8"/>
                 </a:solidFill>
@@ -8575,20 +8601,20 @@
           </a:p>
           <a:p>
             <a:pPr algn="l">
-              <a:defRPr sz="1000">
-                <a:solidFill>
-                  <a:srgbClr val="38BDF8"/>
-                </a:solidFill>
-                <a:latin typeface="Consolas"/>
-              </a:defRPr>
-            </a:pPr>
-            <a:r>
-              <a:t>    _authToken = body['data']['token'];</a:t>
-            </a:r>
-          </a:p>
-          <a:p>
-            <a:pPr algn="l">
-              <a:defRPr sz="1000">
+              <a:defRPr sz="919">
+                <a:solidFill>
+                  <a:srgbClr val="38BDF8"/>
+                </a:solidFill>
+                <a:latin typeface="Consolas"/>
+              </a:defRPr>
+            </a:pPr>
+            <a:r>
+              <a:t>    _authToken = body['data']['token']; // حفظ التوكن محلياً</a:t>
+            </a:r>
+          </a:p>
+          <a:p>
+            <a:pPr algn="l">
+              <a:defRPr sz="919">
                 <a:solidFill>
                   <a:srgbClr val="38BDF8"/>
                 </a:solidFill>
@@ -8601,20 +8627,20 @@
           </a:p>
           <a:p>
             <a:pPr algn="l">
-              <a:defRPr sz="1000">
-                <a:solidFill>
-                  <a:srgbClr val="38BDF8"/>
-                </a:solidFill>
-                <a:latin typeface="Consolas"/>
-              </a:defRPr>
-            </a:pPr>
-            <a:r>
-              <a:t>    notifyListeners();</a:t>
-            </a:r>
-          </a:p>
-          <a:p>
-            <a:pPr algn="l">
-              <a:defRPr sz="1000">
+              <a:defRPr sz="919">
+                <a:solidFill>
+                  <a:srgbClr val="38BDF8"/>
+                </a:solidFill>
+                <a:latin typeface="Consolas"/>
+              </a:defRPr>
+            </a:pPr>
+            <a:r>
+              <a:t>    notifyListeners(); // تحديث واجهات التطبيق فورياً</a:t>
+            </a:r>
+          </a:p>
+          <a:p>
+            <a:pPr algn="l">
+              <a:defRPr sz="919">
                 <a:solidFill>
                   <a:srgbClr val="F472B6"/>
                 </a:solidFill>
@@ -8627,7 +8653,7 @@
           </a:p>
           <a:p>
             <a:pPr algn="l">
-              <a:defRPr sz="1000">
+              <a:defRPr sz="919">
                 <a:solidFill>
                   <a:srgbClr val="38BDF8"/>
                 </a:solidFill>
@@ -8640,7 +8666,7 @@
           </a:p>
           <a:p>
             <a:pPr algn="l">
-              <a:defRPr sz="1000">
+              <a:defRPr sz="919">
                 <a:solidFill>
                   <a:srgbClr val="38BDF8"/>
                 </a:solidFill>
@@ -8742,8 +8768,8 @@
         </p:nvSpPr>
         <p:spPr>
           <a:xfrm>
-            <a:off x="6400800" y="1801368"/>
-            <a:ext cx="4846320" cy="4251959"/>
+            <a:off x="6400800" y="1783080"/>
+            <a:ext cx="4846320" cy="4279392"/>
           </a:xfrm>
           <a:prstGeom prst="rect">
             <a:avLst/>
@@ -8757,7 +8783,7 @@
           <a:lstStyle/>
           <a:p>
             <a:pPr algn="l">
-              <a:defRPr sz="1000">
+              <a:defRPr sz="919">
                 <a:solidFill>
                   <a:srgbClr val="94A3B8"/>
                 </a:solidFill>
@@ -8770,7 +8796,20 @@
           </a:p>
           <a:p>
             <a:pPr algn="l">
-              <a:defRPr sz="1000">
+              <a:defRPr sz="919">
+                <a:solidFill>
+                  <a:srgbClr val="94A3B8"/>
+                </a:solidFill>
+                <a:latin typeface="Consolas"/>
+              </a:defRPr>
+            </a:pPr>
+            <a:r>
+              <a:t>// 1. مسارات الـ API المحمية بواسطة وسيط Laravel Sanctum</a:t>
+            </a:r>
+          </a:p>
+          <a:p>
+            <a:pPr algn="l">
+              <a:defRPr sz="919">
                 <a:solidFill>
                   <a:srgbClr val="F472B6"/>
                 </a:solidFill>
@@ -8783,20 +8822,20 @@
           </a:p>
           <a:p>
             <a:pPr algn="l">
-              <a:defRPr sz="1000">
-                <a:solidFill>
-                  <a:srgbClr val="38BDF8"/>
-                </a:solidFill>
-                <a:latin typeface="Consolas"/>
-              </a:defRPr>
-            </a:pPr>
-            <a:r>
-              <a:t>    Route::post('/auth/login', [AuthController::class, 'login']);</a:t>
-            </a:r>
-          </a:p>
-          <a:p>
-            <a:pPr algn="l">
-              <a:defRPr sz="1000">
+              <a:defRPr sz="919">
+                <a:solidFill>
+                  <a:srgbClr val="38BDF8"/>
+                </a:solidFill>
+                <a:latin typeface="Consolas"/>
+              </a:defRPr>
+            </a:pPr>
+            <a:r>
+              <a:t>    Route::post('/auth/login', [AuthController::class, 'login']); // دخول عام</a:t>
+            </a:r>
+          </a:p>
+          <a:p>
+            <a:pPr algn="l">
+              <a:defRPr sz="919">
                 <a:solidFill>
                   <a:srgbClr val="F472B6"/>
                 </a:solidFill>
@@ -8804,12 +8843,12 @@
               </a:defRPr>
             </a:pPr>
             <a:r>
-              <a:t>    Route::middleware('auth:sanctum')-&gt;group(function () {</a:t>
-            </a:r>
-          </a:p>
-          <a:p>
-            <a:pPr algn="l">
-              <a:defRPr sz="1000">
+              <a:t>    Route::middleware('auth:sanctum')-&gt;group(function () { // مسارات مؤمنة</a:t>
+            </a:r>
+          </a:p>
+          <a:p>
+            <a:pPr algn="l">
+              <a:defRPr sz="919">
                 <a:solidFill>
                   <a:srgbClr val="38BDF8"/>
                 </a:solidFill>
@@ -8822,7 +8861,7 @@
           </a:p>
           <a:p>
             <a:pPr algn="l">
-              <a:defRPr sz="1000">
+              <a:defRPr sz="919">
                 <a:solidFill>
                   <a:srgbClr val="38BDF8"/>
                 </a:solidFill>
@@ -8835,7 +8874,7 @@
           </a:p>
           <a:p>
             <a:pPr algn="l">
-              <a:defRPr sz="1000">
+              <a:defRPr sz="919">
                 <a:solidFill>
                   <a:srgbClr val="38BDF8"/>
                 </a:solidFill>
@@ -8848,7 +8887,7 @@
           </a:p>
           <a:p>
             <a:pPr algn="l">
-              <a:defRPr sz="1000">
+              <a:defRPr sz="919">
                 <a:solidFill>
                   <a:srgbClr val="38BDF8"/>
                 </a:solidFill>
@@ -8861,17 +8900,17 @@
           </a:p>
           <a:p>
             <a:pPr algn="l">
-              <a:defRPr sz="1000">
-                <a:solidFill>
-                  <a:srgbClr val="38BDF8"/>
-                </a:solidFill>
-                <a:latin typeface="Consolas"/>
-              </a:defRPr>
-            </a:pPr>
-          </a:p>
-          <a:p>
-            <a:pPr algn="l">
-              <a:defRPr sz="1000">
+              <a:defRPr sz="919">
+                <a:solidFill>
+                  <a:srgbClr val="38BDF8"/>
+                </a:solidFill>
+                <a:latin typeface="Consolas"/>
+              </a:defRPr>
+            </a:pPr>
+          </a:p>
+          <a:p>
+            <a:pPr algn="l">
+              <a:defRPr sz="919">
                 <a:solidFill>
                   <a:srgbClr val="94A3B8"/>
                 </a:solidFill>
@@ -8884,7 +8923,20 @@
           </a:p>
           <a:p>
             <a:pPr algn="l">
-              <a:defRPr sz="1000">
+              <a:defRPr sz="919">
+                <a:solidFill>
+                  <a:srgbClr val="94A3B8"/>
+                </a:solidFill>
+                <a:latin typeface="Consolas"/>
+              </a:defRPr>
+            </a:pPr>
+            <a:r>
+              <a:t>// 2. التحقق من صحة المدخلات وإصدار توكن Bearer عديم الحالة</a:t>
+            </a:r>
+          </a:p>
+          <a:p>
+            <a:pPr algn="l">
+              <a:defRPr sz="919">
                 <a:solidFill>
                   <a:srgbClr val="F472B6"/>
                 </a:solidFill>
@@ -8897,7 +8949,7 @@
           </a:p>
           <a:p>
             <a:pPr algn="l">
-              <a:defRPr sz="1000">
+              <a:defRPr sz="919">
                 <a:solidFill>
                   <a:srgbClr val="38BDF8"/>
                 </a:solidFill>
@@ -8910,33 +8962,20 @@
           </a:p>
           <a:p>
             <a:pPr algn="l">
-              <a:defRPr sz="1000">
-                <a:solidFill>
-                  <a:srgbClr val="38BDF8"/>
-                </a:solidFill>
-                <a:latin typeface="Consolas"/>
-              </a:defRPr>
-            </a:pPr>
-            <a:r>
-              <a:t>        'email' =&gt; 'required|email',</a:t>
-            </a:r>
-          </a:p>
-          <a:p>
-            <a:pPr algn="l">
-              <a:defRPr sz="1000">
-                <a:solidFill>
-                  <a:srgbClr val="38BDF8"/>
-                </a:solidFill>
-                <a:latin typeface="Consolas"/>
-              </a:defRPr>
-            </a:pPr>
-            <a:r>
-              <a:t>        'password' =&gt; 'required|string'</a:t>
-            </a:r>
-          </a:p>
-          <a:p>
-            <a:pPr algn="l">
-              <a:defRPr sz="1000">
+              <a:defRPr sz="919">
+                <a:solidFill>
+                  <a:srgbClr val="38BDF8"/>
+                </a:solidFill>
+                <a:latin typeface="Consolas"/>
+              </a:defRPr>
+            </a:pPr>
+            <a:r>
+              <a:t>        'email' =&gt; 'required|email', 'password' =&gt; 'required|string'</a:t>
+            </a:r>
+          </a:p>
+          <a:p>
+            <a:pPr algn="l">
+              <a:defRPr sz="919">
                 <a:solidFill>
                   <a:srgbClr val="38BDF8"/>
                 </a:solidFill>
@@ -8949,7 +8988,7 @@
           </a:p>
           <a:p>
             <a:pPr algn="l">
-              <a:defRPr sz="1000">
+              <a:defRPr sz="919">
                 <a:solidFill>
                   <a:srgbClr val="38BDF8"/>
                 </a:solidFill>
@@ -8962,7 +9001,7 @@
           </a:p>
           <a:p>
             <a:pPr algn="l">
-              <a:defRPr sz="1000">
+              <a:defRPr sz="919">
                 <a:solidFill>
                   <a:srgbClr val="F472B6"/>
                 </a:solidFill>
@@ -8975,7 +9014,7 @@
           </a:p>
           <a:p>
             <a:pPr algn="l">
-              <a:defRPr sz="1000">
+              <a:defRPr sz="919">
                 <a:solidFill>
                   <a:srgbClr val="F472B6"/>
                 </a:solidFill>
@@ -8988,7 +9027,7 @@
           </a:p>
           <a:p>
             <a:pPr algn="l">
-              <a:defRPr sz="1000">
+              <a:defRPr sz="919">
                 <a:solidFill>
                   <a:srgbClr val="38BDF8"/>
                 </a:solidFill>
@@ -9001,7 +9040,20 @@
           </a:p>
           <a:p>
             <a:pPr algn="l">
-              <a:defRPr sz="1000">
+              <a:defRPr sz="919">
+                <a:solidFill>
+                  <a:srgbClr val="94A3B8"/>
+                </a:solidFill>
+                <a:latin typeface="Consolas"/>
+              </a:defRPr>
+            </a:pPr>
+            <a:r>
+              <a:t>    // إصدار توكن مشفر خاص بجلسة تطبيق الهاتف</a:t>
+            </a:r>
+          </a:p>
+          <a:p>
+            <a:pPr algn="l">
+              <a:defRPr sz="919">
                 <a:solidFill>
                   <a:srgbClr val="38BDF8"/>
                 </a:solidFill>
@@ -9014,7 +9066,7 @@
           </a:p>
           <a:p>
             <a:pPr algn="l">
-              <a:defRPr sz="1000">
+              <a:defRPr sz="919">
                 <a:solidFill>
                   <a:srgbClr val="F472B6"/>
                 </a:solidFill>
@@ -9027,7 +9079,7 @@
           </a:p>
           <a:p>
             <a:pPr algn="l">
-              <a:defRPr sz="1000">
+              <a:defRPr sz="919">
                 <a:solidFill>
                   <a:srgbClr val="38BDF8"/>
                 </a:solidFill>
@@ -9343,8 +9395,8 @@
         </p:nvSpPr>
         <p:spPr>
           <a:xfrm>
-            <a:off x="914400" y="1801368"/>
-            <a:ext cx="4846320" cy="4251959"/>
+            <a:off x="914400" y="1783080"/>
+            <a:ext cx="4846320" cy="4279392"/>
           </a:xfrm>
           <a:prstGeom prst="rect">
             <a:avLst/>
@@ -9358,7 +9410,7 @@
           <a:lstStyle/>
           <a:p>
             <a:pPr algn="l">
-              <a:defRPr sz="1000">
+              <a:defRPr sz="919">
                 <a:solidFill>
                   <a:srgbClr val="94A3B8"/>
                 </a:solidFill>
@@ -9371,7 +9423,20 @@
           </a:p>
           <a:p>
             <a:pPr algn="l">
-              <a:defRPr sz="1000">
+              <a:defRPr sz="919">
+                <a:solidFill>
+                  <a:srgbClr val="94A3B8"/>
+                </a:solidFill>
+                <a:latin typeface="Consolas"/>
+              </a:defRPr>
+            </a:pPr>
+            <a:r>
+              <a:t>// إرسال طلب حجز دواء مع تحديد مهلة الصلاحية الزمنية</a:t>
+            </a:r>
+          </a:p>
+          <a:p>
+            <a:pPr algn="l">
+              <a:defRPr sz="919">
                 <a:solidFill>
                   <a:srgbClr val="38BDF8"/>
                 </a:solidFill>
@@ -9384,7 +9449,7 @@
           </a:p>
           <a:p>
             <a:pPr algn="l">
-              <a:defRPr sz="1000">
+              <a:defRPr sz="919">
                 <a:solidFill>
                   <a:srgbClr val="38BDF8"/>
                 </a:solidFill>
@@ -9397,7 +9462,7 @@
           </a:p>
           <a:p>
             <a:pPr algn="l">
-              <a:defRPr sz="1000">
+              <a:defRPr sz="919">
                 <a:solidFill>
                   <a:srgbClr val="38BDF8"/>
                 </a:solidFill>
@@ -9410,20 +9475,20 @@
           </a:p>
           <a:p>
             <a:pPr algn="l">
-              <a:defRPr sz="1000">
-                <a:solidFill>
-                  <a:srgbClr val="38BDF8"/>
-                </a:solidFill>
-                <a:latin typeface="Consolas"/>
-              </a:defRPr>
-            </a:pPr>
-            <a:r>
-              <a:t>  int ttlMinutes = 30,</a:t>
-            </a:r>
-          </a:p>
-          <a:p>
-            <a:pPr algn="l">
-              <a:defRPr sz="1000">
+              <a:defRPr sz="919">
+                <a:solidFill>
+                  <a:srgbClr val="38BDF8"/>
+                </a:solidFill>
+                <a:latin typeface="Consolas"/>
+              </a:defRPr>
+            </a:pPr>
+            <a:r>
+              <a:t>  int ttlMinutes = 30, // مهلة الحجز الافتراضية 30 دقيقة</a:t>
+            </a:r>
+          </a:p>
+          <a:p>
+            <a:pPr algn="l">
+              <a:defRPr sz="919">
                 <a:solidFill>
                   <a:srgbClr val="F472B6"/>
                 </a:solidFill>
@@ -9436,7 +9501,7 @@
           </a:p>
           <a:p>
             <a:pPr algn="l">
-              <a:defRPr sz="1000">
+              <a:defRPr sz="919">
                 <a:solidFill>
                   <a:srgbClr val="38BDF8"/>
                 </a:solidFill>
@@ -9449,7 +9514,7 @@
           </a:p>
           <a:p>
             <a:pPr algn="l">
-              <a:defRPr sz="1000">
+              <a:defRPr sz="919">
                 <a:solidFill>
                   <a:srgbClr val="F472B6"/>
                 </a:solidFill>
@@ -9462,7 +9527,7 @@
           </a:p>
           <a:p>
             <a:pPr algn="l">
-              <a:defRPr sz="1000">
+              <a:defRPr sz="919">
                 <a:solidFill>
                   <a:srgbClr val="38BDF8"/>
                 </a:solidFill>
@@ -9475,7 +9540,7 @@
           </a:p>
           <a:p>
             <a:pPr algn="l">
-              <a:defRPr sz="1000">
+              <a:defRPr sz="919">
                 <a:solidFill>
                   <a:srgbClr val="38BDF8"/>
                 </a:solidFill>
@@ -9488,7 +9553,7 @@
           </a:p>
           <a:p>
             <a:pPr algn="l">
-              <a:defRPr sz="1000">
+              <a:defRPr sz="919">
                 <a:solidFill>
                   <a:srgbClr val="38BDF8"/>
                 </a:solidFill>
@@ -9501,46 +9566,46 @@
           </a:p>
           <a:p>
             <a:pPr algn="l">
-              <a:defRPr sz="1000">
-                <a:solidFill>
-                  <a:srgbClr val="38BDF8"/>
-                </a:solidFill>
-                <a:latin typeface="Consolas"/>
-              </a:defRPr>
-            </a:pPr>
-            <a:r>
-              <a:t>      'pharmacy_medicine_id': stockId,</a:t>
-            </a:r>
-          </a:p>
-          <a:p>
-            <a:pPr algn="l">
-              <a:defRPr sz="1000">
-                <a:solidFill>
-                  <a:srgbClr val="38BDF8"/>
-                </a:solidFill>
-                <a:latin typeface="Consolas"/>
-              </a:defRPr>
-            </a:pPr>
-            <a:r>
-              <a:t>      'quantity': quantity,</a:t>
-            </a:r>
-          </a:p>
-          <a:p>
-            <a:pPr algn="l">
-              <a:defRPr sz="1000">
-                <a:solidFill>
-                  <a:srgbClr val="38BDF8"/>
-                </a:solidFill>
-                <a:latin typeface="Consolas"/>
-              </a:defRPr>
-            </a:pPr>
-            <a:r>
-              <a:t>      'ttl_minutes': ttlMinutes,</a:t>
-            </a:r>
-          </a:p>
-          <a:p>
-            <a:pPr algn="l">
-              <a:defRPr sz="1000">
+              <a:defRPr sz="919">
+                <a:solidFill>
+                  <a:srgbClr val="38BDF8"/>
+                </a:solidFill>
+                <a:latin typeface="Consolas"/>
+              </a:defRPr>
+            </a:pPr>
+            <a:r>
+              <a:t>      'pharmacy_medicine_id': stockId, // معرف الدواء بالصيدلية</a:t>
+            </a:r>
+          </a:p>
+          <a:p>
+            <a:pPr algn="l">
+              <a:defRPr sz="919">
+                <a:solidFill>
+                  <a:srgbClr val="38BDF8"/>
+                </a:solidFill>
+                <a:latin typeface="Consolas"/>
+              </a:defRPr>
+            </a:pPr>
+            <a:r>
+              <a:t>      'quantity': quantity,             // الكمية المطلوبة</a:t>
+            </a:r>
+          </a:p>
+          <a:p>
+            <a:pPr algn="l">
+              <a:defRPr sz="919">
+                <a:solidFill>
+                  <a:srgbClr val="38BDF8"/>
+                </a:solidFill>
+                <a:latin typeface="Consolas"/>
+              </a:defRPr>
+            </a:pPr>
+            <a:r>
+              <a:t>      'ttl_minutes': ttlMinutes,        // مهلة حجز الدواء</a:t>
+            </a:r>
+          </a:p>
+          <a:p>
+            <a:pPr algn="l">
+              <a:defRPr sz="919">
                 <a:solidFill>
                   <a:srgbClr val="38BDF8"/>
                 </a:solidFill>
@@ -9553,7 +9618,7 @@
           </a:p>
           <a:p>
             <a:pPr algn="l">
-              <a:defRPr sz="1000">
+              <a:defRPr sz="919">
                 <a:solidFill>
                   <a:srgbClr val="38BDF8"/>
                 </a:solidFill>
@@ -9566,17 +9631,17 @@
           </a:p>
           <a:p>
             <a:pPr algn="l">
-              <a:defRPr sz="1000">
-                <a:solidFill>
-                  <a:srgbClr val="38BDF8"/>
-                </a:solidFill>
-                <a:latin typeface="Consolas"/>
-              </a:defRPr>
-            </a:pPr>
-          </a:p>
-          <a:p>
-            <a:pPr algn="l">
-              <a:defRPr sz="1000">
+              <a:defRPr sz="919">
+                <a:solidFill>
+                  <a:srgbClr val="38BDF8"/>
+                </a:solidFill>
+                <a:latin typeface="Consolas"/>
+              </a:defRPr>
+            </a:pPr>
+          </a:p>
+          <a:p>
+            <a:pPr algn="l">
+              <a:defRPr sz="919">
                 <a:solidFill>
                   <a:srgbClr val="F472B6"/>
                 </a:solidFill>
@@ -9589,7 +9654,7 @@
           </a:p>
           <a:p>
             <a:pPr algn="l">
-              <a:defRPr sz="1000">
+              <a:defRPr sz="919">
                 <a:solidFill>
                   <a:srgbClr val="38BDF8"/>
                 </a:solidFill>
@@ -9602,7 +9667,7 @@
           </a:p>
           <a:p>
             <a:pPr algn="l">
-              <a:defRPr sz="1000">
+              <a:defRPr sz="919">
                 <a:solidFill>
                   <a:srgbClr val="38BDF8"/>
                 </a:solidFill>
@@ -9615,33 +9680,33 @@
           </a:p>
           <a:p>
             <a:pPr algn="l">
-              <a:defRPr sz="1000">
-                <a:solidFill>
-                  <a:srgbClr val="38BDF8"/>
-                </a:solidFill>
-                <a:latin typeface="Consolas"/>
-              </a:defRPr>
-            </a:pPr>
-            <a:r>
-              <a:t>    _cachedReservations.insert(0, created);</a:t>
-            </a:r>
-          </a:p>
-          <a:p>
-            <a:pPr algn="l">
-              <a:defRPr sz="1000">
-                <a:solidFill>
-                  <a:srgbClr val="38BDF8"/>
-                </a:solidFill>
-                <a:latin typeface="Consolas"/>
-              </a:defRPr>
-            </a:pPr>
-            <a:r>
-              <a:t>    notifyListeners();</a:t>
-            </a:r>
-          </a:p>
-          <a:p>
-            <a:pPr algn="l">
-              <a:defRPr sz="1000">
+              <a:defRPr sz="919">
+                <a:solidFill>
+                  <a:srgbClr val="38BDF8"/>
+                </a:solidFill>
+                <a:latin typeface="Consolas"/>
+              </a:defRPr>
+            </a:pPr>
+            <a:r>
+              <a:t>    _cachedReservations.insert(0, created); // تخزين التذكرة محلياً</a:t>
+            </a:r>
+          </a:p>
+          <a:p>
+            <a:pPr algn="l">
+              <a:defRPr sz="919">
+                <a:solidFill>
+                  <a:srgbClr val="38BDF8"/>
+                </a:solidFill>
+                <a:latin typeface="Consolas"/>
+              </a:defRPr>
+            </a:pPr>
+            <a:r>
+              <a:t>    notifyListeners(); // بدء مؤقت العد التنازلي الحي</a:t>
+            </a:r>
+          </a:p>
+          <a:p>
+            <a:pPr algn="l">
+              <a:defRPr sz="919">
                 <a:solidFill>
                   <a:srgbClr val="F472B6"/>
                 </a:solidFill>
@@ -9654,7 +9719,7 @@
           </a:p>
           <a:p>
             <a:pPr algn="l">
-              <a:defRPr sz="1000">
+              <a:defRPr sz="919">
                 <a:solidFill>
                   <a:srgbClr val="38BDF8"/>
                 </a:solidFill>
@@ -9667,7 +9732,7 @@
           </a:p>
           <a:p>
             <a:pPr algn="l">
-              <a:defRPr sz="1000">
+              <a:defRPr sz="919">
                 <a:solidFill>
                   <a:srgbClr val="38BDF8"/>
                 </a:solidFill>
@@ -9680,7 +9745,7 @@
           </a:p>
           <a:p>
             <a:pPr algn="l">
-              <a:defRPr sz="1000">
+              <a:defRPr sz="919">
                 <a:solidFill>
                   <a:srgbClr val="38BDF8"/>
                 </a:solidFill>
@@ -9782,8 +9847,8 @@
         </p:nvSpPr>
         <p:spPr>
           <a:xfrm>
-            <a:off x="6400800" y="1801368"/>
-            <a:ext cx="4846320" cy="4251959"/>
+            <a:off x="6400800" y="1783080"/>
+            <a:ext cx="4846320" cy="4279392"/>
           </a:xfrm>
           <a:prstGeom prst="rect">
             <a:avLst/>
@@ -9797,7 +9862,7 @@
           <a:lstStyle/>
           <a:p>
             <a:pPr algn="l">
-              <a:defRPr sz="1000">
+              <a:defRPr sz="919">
                 <a:solidFill>
                   <a:srgbClr val="94A3B8"/>
                 </a:solidFill>
@@ -9810,7 +9875,7 @@
           </a:p>
           <a:p>
             <a:pPr algn="l">
-              <a:defRPr sz="1000">
+              <a:defRPr sz="919">
                 <a:solidFill>
                   <a:srgbClr val="F472B6"/>
                 </a:solidFill>
@@ -9823,7 +9888,20 @@
           </a:p>
           <a:p>
             <a:pPr algn="l">
-              <a:defRPr sz="1000">
+              <a:defRPr sz="919">
+                <a:solidFill>
+                  <a:srgbClr val="94A3B8"/>
+                </a:solidFill>
+                <a:latin typeface="Consolas"/>
+              </a:defRPr>
+            </a:pPr>
+            <a:r>
+              <a:t>    // تنفيذ الحجز داخل معاملة ذرية متكاملة (ACID Transaction)</a:t>
+            </a:r>
+          </a:p>
+          <a:p>
+            <a:pPr algn="l">
+              <a:defRPr sz="919">
                 <a:solidFill>
                   <a:srgbClr val="F472B6"/>
                 </a:solidFill>
@@ -9836,7 +9914,7 @@
           </a:p>
           <a:p>
             <a:pPr algn="l">
-              <a:defRPr sz="1000">
+              <a:defRPr sz="919">
                 <a:solidFill>
                   <a:srgbClr val="94A3B8"/>
                 </a:solidFill>
@@ -9844,12 +9922,12 @@
               </a:defRPr>
             </a:pPr>
             <a:r>
-              <a:t>        // 1. قفل الصف تشاؤمياً لمنع المعاملات المتزامنة</a:t>
-            </a:r>
-          </a:p>
-          <a:p>
-            <a:pPr algn="l">
-              <a:defRPr sz="1000">
+              <a:t>        // 1. قفل الصف تشاؤمياً لمنع تنافس مريضين على نفس العلبة</a:t>
+            </a:r>
+          </a:p>
+          <a:p>
+            <a:pPr algn="l">
+              <a:defRPr sz="919">
                 <a:solidFill>
                   <a:srgbClr val="38BDF8"/>
                 </a:solidFill>
@@ -9862,20 +9940,20 @@
           </a:p>
           <a:p>
             <a:pPr algn="l">
-              <a:defRPr sz="1000">
-                <a:solidFill>
-                  <a:srgbClr val="38BDF8"/>
-                </a:solidFill>
-                <a:latin typeface="Consolas"/>
-              </a:defRPr>
-            </a:pPr>
-            <a:r>
-              <a:t>            -&gt;lockForUpdate()</a:t>
-            </a:r>
-          </a:p>
-          <a:p>
-            <a:pPr algn="l">
-              <a:defRPr sz="1000">
+              <a:defRPr sz="919">
+                <a:solidFill>
+                  <a:srgbClr val="38BDF8"/>
+                </a:solidFill>
+                <a:latin typeface="Consolas"/>
+              </a:defRPr>
+            </a:pPr>
+            <a:r>
+              <a:t>            -&gt;lockForUpdate() // قفل حصري في InnoDB يمنع Race Condition</a:t>
+            </a:r>
+          </a:p>
+          <a:p>
+            <a:pPr algn="l">
+              <a:defRPr sz="919">
                 <a:solidFill>
                   <a:srgbClr val="38BDF8"/>
                 </a:solidFill>
@@ -9888,17 +9966,17 @@
           </a:p>
           <a:p>
             <a:pPr algn="l">
-              <a:defRPr sz="1000">
-                <a:solidFill>
-                  <a:srgbClr val="38BDF8"/>
-                </a:solidFill>
-                <a:latin typeface="Consolas"/>
-              </a:defRPr>
-            </a:pPr>
-          </a:p>
-          <a:p>
-            <a:pPr algn="l">
-              <a:defRPr sz="1000">
+              <a:defRPr sz="919">
+                <a:solidFill>
+                  <a:srgbClr val="38BDF8"/>
+                </a:solidFill>
+                <a:latin typeface="Consolas"/>
+              </a:defRPr>
+            </a:pPr>
+          </a:p>
+          <a:p>
+            <a:pPr algn="l">
+              <a:defRPr sz="919">
                 <a:solidFill>
                   <a:srgbClr val="94A3B8"/>
                 </a:solidFill>
@@ -9906,12 +9984,12 @@
               </a:defRPr>
             </a:pPr>
             <a:r>
-              <a:t>        // 2. التحقق الذري من الرصيد الفعلي</a:t>
-            </a:r>
-          </a:p>
-          <a:p>
-            <a:pPr algn="l">
-              <a:defRPr sz="1000">
+              <a:t>        // 2. التحقق الذري من توفر الرصيد الفعلي</a:t>
+            </a:r>
+          </a:p>
+          <a:p>
+            <a:pPr algn="l">
+              <a:defRPr sz="919">
                 <a:solidFill>
                   <a:srgbClr val="F472B6"/>
                 </a:solidFill>
@@ -9924,7 +10002,7 @@
           </a:p>
           <a:p>
             <a:pPr algn="l">
-              <a:defRPr sz="1000">
+              <a:defRPr sz="919">
                 <a:solidFill>
                   <a:srgbClr val="38BDF8"/>
                 </a:solidFill>
@@ -9937,7 +10015,7 @@
           </a:p>
           <a:p>
             <a:pPr algn="l">
-              <a:defRPr sz="1000">
+              <a:defRPr sz="919">
                 <a:solidFill>
                   <a:srgbClr val="38BDF8"/>
                 </a:solidFill>
@@ -9950,17 +10028,17 @@
           </a:p>
           <a:p>
             <a:pPr algn="l">
-              <a:defRPr sz="1000">
-                <a:solidFill>
-                  <a:srgbClr val="38BDF8"/>
-                </a:solidFill>
-                <a:latin typeface="Consolas"/>
-              </a:defRPr>
-            </a:pPr>
-          </a:p>
-          <a:p>
-            <a:pPr algn="l">
-              <a:defRPr sz="1000">
+              <a:defRPr sz="919">
+                <a:solidFill>
+                  <a:srgbClr val="38BDF8"/>
+                </a:solidFill>
+                <a:latin typeface="Consolas"/>
+              </a:defRPr>
+            </a:pPr>
+          </a:p>
+          <a:p>
+            <a:pPr algn="l">
+              <a:defRPr sz="919">
                 <a:solidFill>
                   <a:srgbClr val="94A3B8"/>
                 </a:solidFill>
@@ -9968,12 +10046,12 @@
               </a:defRPr>
             </a:pPr>
             <a:r>
-              <a:t>        // 3. الخصم الآمن وتحديث الحالة</a:t>
-            </a:r>
-          </a:p>
-          <a:p>
-            <a:pPr algn="l">
-              <a:defRPr sz="1000">
+              <a:t>        // 3. الخصم الآمن وتحديث حالة الصنف تلقائياً</a:t>
+            </a:r>
+          </a:p>
+          <a:p>
+            <a:pPr algn="l">
+              <a:defRPr sz="919">
                 <a:solidFill>
                   <a:srgbClr val="38BDF8"/>
                 </a:solidFill>
@@ -9986,7 +10064,7 @@
           </a:p>
           <a:p>
             <a:pPr algn="l">
-              <a:defRPr sz="1000">
+              <a:defRPr sz="919">
                 <a:solidFill>
                   <a:srgbClr val="F472B6"/>
                 </a:solidFill>
@@ -9999,7 +10077,7 @@
           </a:p>
           <a:p>
             <a:pPr algn="l">
-              <a:defRPr sz="1000">
+              <a:defRPr sz="919">
                 <a:solidFill>
                   <a:srgbClr val="38BDF8"/>
                 </a:solidFill>
@@ -10012,7 +10090,7 @@
           </a:p>
           <a:p>
             <a:pPr algn="l">
-              <a:defRPr sz="1000">
+              <a:defRPr sz="919">
                 <a:solidFill>
                   <a:srgbClr val="38BDF8"/>
                 </a:solidFill>
@@ -10025,17 +10103,17 @@
           </a:p>
           <a:p>
             <a:pPr algn="l">
-              <a:defRPr sz="1000">
-                <a:solidFill>
-                  <a:srgbClr val="38BDF8"/>
-                </a:solidFill>
-                <a:latin typeface="Consolas"/>
-              </a:defRPr>
-            </a:pPr>
-          </a:p>
-          <a:p>
-            <a:pPr algn="l">
-              <a:defRPr sz="1000">
+              <a:defRPr sz="919">
+                <a:solidFill>
+                  <a:srgbClr val="38BDF8"/>
+                </a:solidFill>
+                <a:latin typeface="Consolas"/>
+              </a:defRPr>
+            </a:pPr>
+          </a:p>
+          <a:p>
+            <a:pPr algn="l">
+              <a:defRPr sz="919">
                 <a:solidFill>
                   <a:srgbClr val="94A3B8"/>
                 </a:solidFill>
@@ -10043,12 +10121,12 @@
               </a:defRPr>
             </a:pPr>
             <a:r>
-              <a:t>        // 4. إنشاء الحجز وتحديد انتهاء الصلاحية 30 دقيقة</a:t>
-            </a:r>
-          </a:p>
-          <a:p>
-            <a:pPr algn="l">
-              <a:defRPr sz="1000">
+              <a:t>        // 4. إنشاء سجل الحجز برمز فريد ومؤقت صلاحية 30 دقيقة</a:t>
+            </a:r>
+          </a:p>
+          <a:p>
+            <a:pPr algn="l">
+              <a:defRPr sz="919">
                 <a:solidFill>
                   <a:srgbClr val="F472B6"/>
                 </a:solidFill>
@@ -10061,7 +10139,7 @@
           </a:p>
           <a:p>
             <a:pPr algn="l">
-              <a:defRPr sz="1000">
+              <a:defRPr sz="919">
                 <a:solidFill>
                   <a:srgbClr val="38BDF8"/>
                 </a:solidFill>
@@ -10074,7 +10152,7 @@
           </a:p>
           <a:p>
             <a:pPr algn="l">
-              <a:defRPr sz="1000">
+              <a:defRPr sz="919">
                 <a:solidFill>
                   <a:srgbClr val="38BDF8"/>
                 </a:solidFill>
@@ -10087,7 +10165,7 @@
           </a:p>
           <a:p>
             <a:pPr algn="l">
-              <a:defRPr sz="1000">
+              <a:defRPr sz="919">
                 <a:solidFill>
                   <a:srgbClr val="38BDF8"/>
                 </a:solidFill>
@@ -10100,7 +10178,7 @@
           </a:p>
           <a:p>
             <a:pPr algn="l">
-              <a:defRPr sz="1000">
+              <a:defRPr sz="919">
                 <a:solidFill>
                   <a:srgbClr val="38BDF8"/>
                 </a:solidFill>
@@ -10113,7 +10191,7 @@
           </a:p>
           <a:p>
             <a:pPr algn="l">
-              <a:defRPr sz="1000">
+              <a:defRPr sz="919">
                 <a:solidFill>
                   <a:srgbClr val="38BDF8"/>
                 </a:solidFill>
@@ -10126,7 +10204,7 @@
           </a:p>
           <a:p>
             <a:pPr algn="l">
-              <a:defRPr sz="1000">
+              <a:defRPr sz="919">
                 <a:solidFill>
                   <a:srgbClr val="38BDF8"/>
                 </a:solidFill>
@@ -10442,8 +10520,8 @@
         </p:nvSpPr>
         <p:spPr>
           <a:xfrm>
-            <a:off x="914400" y="1801368"/>
-            <a:ext cx="4846320" cy="4251959"/>
+            <a:off x="914400" y="1783080"/>
+            <a:ext cx="4846320" cy="4279392"/>
           </a:xfrm>
           <a:prstGeom prst="rect">
             <a:avLst/>
@@ -10457,7 +10535,7 @@
           <a:lstStyle/>
           <a:p>
             <a:pPr algn="l">
-              <a:defRPr sz="1000">
+              <a:defRPr sz="919">
                 <a:solidFill>
                   <a:srgbClr val="94A3B8"/>
                 </a:solidFill>
@@ -10470,7 +10548,20 @@
           </a:p>
           <a:p>
             <a:pPr algn="l">
-              <a:defRPr sz="1000">
+              <a:defRPr sz="919">
+                <a:solidFill>
+                  <a:srgbClr val="94A3B8"/>
+                </a:solidFill>
+                <a:latin typeface="Consolas"/>
+              </a:defRPr>
+            </a:pPr>
+            <a:r>
+              <a:t>// تمرير إحداثيات GPS الحالية ونصف قطر البحث في الـ Query String</a:t>
+            </a:r>
+          </a:p>
+          <a:p>
+            <a:pPr algn="l">
+              <a:defRPr sz="919">
                 <a:solidFill>
                   <a:srgbClr val="38BDF8"/>
                 </a:solidFill>
@@ -10483,7 +10574,7 @@
           </a:p>
           <a:p>
             <a:pPr algn="l">
-              <a:defRPr sz="1000">
+              <a:defRPr sz="919">
                 <a:solidFill>
                   <a:srgbClr val="38BDF8"/>
                 </a:solidFill>
@@ -10496,7 +10587,7 @@
           </a:p>
           <a:p>
             <a:pPr algn="l">
-              <a:defRPr sz="1000">
+              <a:defRPr sz="919">
                 <a:solidFill>
                   <a:srgbClr val="F472B6"/>
                 </a:solidFill>
@@ -10509,7 +10600,7 @@
           </a:p>
           <a:p>
             <a:pPr algn="l">
-              <a:defRPr sz="1000">
+              <a:defRPr sz="919">
                 <a:solidFill>
                   <a:srgbClr val="38BDF8"/>
                 </a:solidFill>
@@ -10522,7 +10613,7 @@
           </a:p>
           <a:p>
             <a:pPr algn="l">
-              <a:defRPr sz="1000">
+              <a:defRPr sz="919">
                 <a:solidFill>
                   <a:srgbClr val="F472B6"/>
                 </a:solidFill>
@@ -10530,12 +10621,12 @@
               </a:defRPr>
             </a:pPr>
             <a:r>
-              <a:t>    if (query != null) 'q': query,</a:t>
-            </a:r>
-          </a:p>
-          <a:p>
-            <a:pPr algn="l">
-              <a:defRPr sz="1000">
+              <a:t>    if (query != null) 'q': query,                     // اسم الدواء</a:t>
+            </a:r>
+          </a:p>
+          <a:p>
+            <a:pPr algn="l">
+              <a:defRPr sz="919">
                 <a:solidFill>
                   <a:srgbClr val="F472B6"/>
                 </a:solidFill>
@@ -10543,12 +10634,12 @@
               </a:defRPr>
             </a:pPr>
             <a:r>
-              <a:t>    if (latitude != null) 'lat': latitude.toString(),</a:t>
-            </a:r>
-          </a:p>
-          <a:p>
-            <a:pPr algn="l">
-              <a:defRPr sz="1000">
+              <a:t>    if (latitude != null) 'lat': latitude.toString(),  // خط العرض</a:t>
+            </a:r>
+          </a:p>
+          <a:p>
+            <a:pPr algn="l">
+              <a:defRPr sz="919">
                 <a:solidFill>
                   <a:srgbClr val="F472B6"/>
                 </a:solidFill>
@@ -10556,25 +10647,25 @@
               </a:defRPr>
             </a:pPr>
             <a:r>
-              <a:t>    if (longitude != null) 'lng': longitude.toString(),</a:t>
-            </a:r>
-          </a:p>
-          <a:p>
-            <a:pPr algn="l">
-              <a:defRPr sz="1000">
-                <a:solidFill>
-                  <a:srgbClr val="38BDF8"/>
-                </a:solidFill>
-                <a:latin typeface="Consolas"/>
-              </a:defRPr>
-            </a:pPr>
-            <a:r>
-              <a:t>    'radius': radiusKm.toString(),</a:t>
-            </a:r>
-          </a:p>
-          <a:p>
-            <a:pPr algn="l">
-              <a:defRPr sz="1000">
+              <a:t>    if (longitude != null) 'lng': longitude.toString(),// خط الطول</a:t>
+            </a:r>
+          </a:p>
+          <a:p>
+            <a:pPr algn="l">
+              <a:defRPr sz="919">
+                <a:solidFill>
+                  <a:srgbClr val="38BDF8"/>
+                </a:solidFill>
+                <a:latin typeface="Consolas"/>
+              </a:defRPr>
+            </a:pPr>
+            <a:r>
+              <a:t>    'radius': radiusKm.toString(),                     // نصف القطر (كم)</a:t>
+            </a:r>
+          </a:p>
+          <a:p>
+            <a:pPr algn="l">
+              <a:defRPr sz="919">
                 <a:solidFill>
                   <a:srgbClr val="38BDF8"/>
                 </a:solidFill>
@@ -10587,7 +10678,7 @@
           </a:p>
           <a:p>
             <a:pPr algn="l">
-              <a:defRPr sz="1000">
+              <a:defRPr sz="919">
                 <a:solidFill>
                   <a:srgbClr val="38BDF8"/>
                 </a:solidFill>
@@ -10600,7 +10691,7 @@
           </a:p>
           <a:p>
             <a:pPr algn="l">
-              <a:defRPr sz="1000">
+              <a:defRPr sz="919">
                 <a:solidFill>
                   <a:srgbClr val="38BDF8"/>
                 </a:solidFill>
@@ -10613,7 +10704,7 @@
           </a:p>
           <a:p>
             <a:pPr algn="l">
-              <a:defRPr sz="1000">
+              <a:defRPr sz="919">
                 <a:solidFill>
                   <a:srgbClr val="F472B6"/>
                 </a:solidFill>
@@ -10626,7 +10717,7 @@
           </a:p>
           <a:p>
             <a:pPr algn="l">
-              <a:defRPr sz="1000">
+              <a:defRPr sz="919">
                 <a:solidFill>
                   <a:srgbClr val="38BDF8"/>
                 </a:solidFill>
@@ -10639,7 +10730,20 @@
           </a:p>
           <a:p>
             <a:pPr algn="l">
-              <a:defRPr sz="1000">
+              <a:defRPr sz="919">
+                <a:solidFill>
+                  <a:srgbClr val="94A3B8"/>
+                </a:solidFill>
+                <a:latin typeface="Consolas"/>
+              </a:defRPr>
+            </a:pPr>
+            <a:r>
+              <a:t>  // تحويل استجابة الـ JSON لقائمة صيدليات مرتبة بالأمتار</a:t>
+            </a:r>
+          </a:p>
+          <a:p>
+            <a:pPr algn="l">
+              <a:defRPr sz="919">
                 <a:solidFill>
                   <a:srgbClr val="F472B6"/>
                 </a:solidFill>
@@ -10652,7 +10756,7 @@
           </a:p>
           <a:p>
             <a:pPr algn="l">
-              <a:defRPr sz="1000">
+              <a:defRPr sz="919">
                 <a:solidFill>
                   <a:srgbClr val="38BDF8"/>
                 </a:solidFill>
@@ -10665,7 +10769,7 @@
           </a:p>
           <a:p>
             <a:pPr algn="l">
-              <a:defRPr sz="1000">
+              <a:defRPr sz="919">
                 <a:solidFill>
                   <a:srgbClr val="38BDF8"/>
                 </a:solidFill>
@@ -10678,7 +10782,7 @@
           </a:p>
           <a:p>
             <a:pPr algn="l">
-              <a:defRPr sz="1000">
+              <a:defRPr sz="919">
                 <a:solidFill>
                   <a:srgbClr val="38BDF8"/>
                 </a:solidFill>
@@ -10780,8 +10884,8 @@
         </p:nvSpPr>
         <p:spPr>
           <a:xfrm>
-            <a:off x="6400800" y="1801368"/>
-            <a:ext cx="4846320" cy="4251959"/>
+            <a:off x="6400800" y="1783080"/>
+            <a:ext cx="4846320" cy="4279392"/>
           </a:xfrm>
           <a:prstGeom prst="rect">
             <a:avLst/>
@@ -10795,7 +10899,7 @@
           <a:lstStyle/>
           <a:p>
             <a:pPr algn="l">
-              <a:defRPr sz="1000">
+              <a:defRPr sz="919">
                 <a:solidFill>
                   <a:srgbClr val="94A3B8"/>
                 </a:solidFill>
@@ -10808,7 +10912,20 @@
           </a:p>
           <a:p>
             <a:pPr algn="l">
-              <a:defRPr sz="1000">
+              <a:defRPr sz="919">
+                <a:solidFill>
+                  <a:srgbClr val="94A3B8"/>
+                </a:solidFill>
+                <a:latin typeface="Consolas"/>
+              </a:defRPr>
+            </a:pPr>
+            <a:r>
+              <a:t>// تطبيق خوارزمية هافرسين الرياضية لحساب المسافة الكروية الحقيقية</a:t>
+            </a:r>
+          </a:p>
+          <a:p>
+            <a:pPr algn="l">
+              <a:defRPr sz="919">
                 <a:solidFill>
                   <a:srgbClr val="F472B6"/>
                 </a:solidFill>
@@ -10821,46 +10938,59 @@
           </a:p>
           <a:p>
             <a:pPr algn="l">
-              <a:defRPr sz="1000">
-                <a:solidFill>
-                  <a:srgbClr val="38BDF8"/>
-                </a:solidFill>
-                <a:latin typeface="Consolas"/>
-              </a:defRPr>
-            </a:pPr>
-            <a:r>
-              <a:t>    $earthRadiusKm = 6371.0; // نصف قطر الأرض الكروي</a:t>
-            </a:r>
-          </a:p>
-          <a:p>
-            <a:pPr algn="l">
-              <a:defRPr sz="1000">
-                <a:solidFill>
-                  <a:srgbClr val="38BDF8"/>
-                </a:solidFill>
-                <a:latin typeface="Consolas"/>
-              </a:defRPr>
-            </a:pPr>
-            <a:r>
-              <a:t>    $dLat = deg2rad($lat2 - $lat1);</a:t>
-            </a:r>
-          </a:p>
-          <a:p>
-            <a:pPr algn="l">
-              <a:defRPr sz="1000">
-                <a:solidFill>
-                  <a:srgbClr val="38BDF8"/>
-                </a:solidFill>
-                <a:latin typeface="Consolas"/>
-              </a:defRPr>
-            </a:pPr>
-            <a:r>
-              <a:t>    $dLon = deg2rad($lon2 - $lon1);</a:t>
-            </a:r>
-          </a:p>
-          <a:p>
-            <a:pPr algn="l">
-              <a:defRPr sz="1000">
+              <a:defRPr sz="919">
+                <a:solidFill>
+                  <a:srgbClr val="38BDF8"/>
+                </a:solidFill>
+                <a:latin typeface="Consolas"/>
+              </a:defRPr>
+            </a:pPr>
+            <a:r>
+              <a:t>    $earthRadiusKm = 6371.0; // نصف قطر كوكب الأرض بالكيلومتر</a:t>
+            </a:r>
+          </a:p>
+          <a:p>
+            <a:pPr algn="l">
+              <a:defRPr sz="919">
+                <a:solidFill>
+                  <a:srgbClr val="38BDF8"/>
+                </a:solidFill>
+                <a:latin typeface="Consolas"/>
+              </a:defRPr>
+            </a:pPr>
+            <a:r>
+              <a:t>    $dLat = deg2rad($lat2 - $lat1); // تحويل فرق درجات العرض إلى راديان</a:t>
+            </a:r>
+          </a:p>
+          <a:p>
+            <a:pPr algn="l">
+              <a:defRPr sz="919">
+                <a:solidFill>
+                  <a:srgbClr val="38BDF8"/>
+                </a:solidFill>
+                <a:latin typeface="Consolas"/>
+              </a:defRPr>
+            </a:pPr>
+            <a:r>
+              <a:t>    $dLon = deg2rad($lon2 - $lon1); // تحويل فرق درجات الطول إلى راديان</a:t>
+            </a:r>
+          </a:p>
+          <a:p>
+            <a:pPr algn="l">
+              <a:defRPr sz="919">
+                <a:solidFill>
+                  <a:srgbClr val="94A3B8"/>
+                </a:solidFill>
+                <a:latin typeface="Consolas"/>
+              </a:defRPr>
+            </a:pPr>
+            <a:r>
+              <a:t>    // معادلة هافرسين المثلثية الكروية</a:t>
+            </a:r>
+          </a:p>
+          <a:p>
+            <a:pPr algn="l">
+              <a:defRPr sz="919">
                 <a:solidFill>
                   <a:srgbClr val="38BDF8"/>
                 </a:solidFill>
@@ -10873,7 +11003,7 @@
           </a:p>
           <a:p>
             <a:pPr algn="l">
-              <a:defRPr sz="1000">
+              <a:defRPr sz="919">
                 <a:solidFill>
                   <a:srgbClr val="38BDF8"/>
                 </a:solidFill>
@@ -10886,7 +11016,7 @@
           </a:p>
           <a:p>
             <a:pPr algn="l">
-              <a:defRPr sz="1000">
+              <a:defRPr sz="919">
                 <a:solidFill>
                   <a:srgbClr val="38BDF8"/>
                 </a:solidFill>
@@ -10899,7 +11029,7 @@
           </a:p>
           <a:p>
             <a:pPr algn="l">
-              <a:defRPr sz="1000">
+              <a:defRPr sz="919">
                 <a:solidFill>
                   <a:srgbClr val="38BDF8"/>
                 </a:solidFill>
@@ -10912,7 +11042,7 @@
           </a:p>
           <a:p>
             <a:pPr algn="l">
-              <a:defRPr sz="1000">
+              <a:defRPr sz="919">
                 <a:solidFill>
                   <a:srgbClr val="F472B6"/>
                 </a:solidFill>
@@ -10920,12 +11050,12 @@
               </a:defRPr>
             </a:pPr>
             <a:r>
-              <a:t>    return $earthRadiusKm * $c; // المسافة بالكيلومتر</a:t>
-            </a:r>
-          </a:p>
-          <a:p>
-            <a:pPr algn="l">
-              <a:defRPr sz="1000">
+              <a:t>    return $earthRadiusKm * $c; // الناتج: المسافة الواقعية المستقيمة</a:t>
+            </a:r>
+          </a:p>
+          <a:p>
+            <a:pPr algn="l">
+              <a:defRPr sz="919">
                 <a:solidFill>
                   <a:srgbClr val="38BDF8"/>
                 </a:solidFill>
@@ -10938,17 +11068,17 @@
           </a:p>
           <a:p>
             <a:pPr algn="l">
-              <a:defRPr sz="1000">
-                <a:solidFill>
-                  <a:srgbClr val="38BDF8"/>
-                </a:solidFill>
-                <a:latin typeface="Consolas"/>
-              </a:defRPr>
-            </a:pPr>
-          </a:p>
-          <a:p>
-            <a:pPr algn="l">
-              <a:defRPr sz="1000">
+              <a:defRPr sz="919">
+                <a:solidFill>
+                  <a:srgbClr val="38BDF8"/>
+                </a:solidFill>
+                <a:latin typeface="Consolas"/>
+              </a:defRPr>
+            </a:pPr>
+          </a:p>
+          <a:p>
+            <a:pPr algn="l">
+              <a:defRPr sz="919">
                 <a:solidFill>
                   <a:srgbClr val="94A3B8"/>
                 </a:solidFill>
@@ -10956,12 +11086,12 @@
               </a:defRPr>
             </a:pPr>
             <a:r>
-              <a:t>// تصفية الصيدليات وترتيبها من الأقرب إلى الأبعد</a:t>
-            </a:r>
-          </a:p>
-          <a:p>
-            <a:pPr algn="l">
-              <a:defRPr sz="1000">
+              <a:t>// تصفية الصيدليات ضمن النطاق وفرز النتائج من الأقرب إلى الأبعد للمريض</a:t>
+            </a:r>
+          </a:p>
+          <a:p>
+            <a:pPr algn="l">
+              <a:defRPr sz="919">
                 <a:solidFill>
                   <a:srgbClr val="F472B6"/>
                 </a:solidFill>
@@ -10974,7 +11104,7 @@
           </a:p>
           <a:p>
             <a:pPr algn="l">
-              <a:defRPr sz="1000">
+              <a:defRPr sz="919">
                 <a:solidFill>
                   <a:srgbClr val="F472B6"/>
                 </a:solidFill>
@@ -10982,20 +11112,20 @@
               </a:defRPr>
             </a:pPr>
             <a:r>
-              <a:t>    return $item-&gt;distance_km &lt;= $radiusKm;</a:t>
-            </a:r>
-          </a:p>
-          <a:p>
-            <a:pPr algn="l">
-              <a:defRPr sz="1000">
-                <a:solidFill>
-                  <a:srgbClr val="38BDF8"/>
-                </a:solidFill>
-                <a:latin typeface="Consolas"/>
-              </a:defRPr>
-            </a:pPr>
-            <a:r>
-              <a:t>})-&gt;sortBy('distance_km')-&gt;values();</a:t>
+              <a:t>    return $item-&gt;distance_km &lt;= $radiusKm; // استبعاد الصيدليات البعيدة</a:t>
+            </a:r>
+          </a:p>
+          <a:p>
+            <a:pPr algn="l">
+              <a:defRPr sz="919">
+                <a:solidFill>
+                  <a:srgbClr val="38BDF8"/>
+                </a:solidFill>
+                <a:latin typeface="Consolas"/>
+              </a:defRPr>
+            </a:pPr>
+            <a:r>
+              <a:t>})-&gt;sortBy('distance_km')-&gt;values();         // فرز تصاعدي حسب المسافة</a:t>
             </a:r>
           </a:p>
         </p:txBody>
@@ -11303,8 +11433,8 @@
         </p:nvSpPr>
         <p:spPr>
           <a:xfrm>
-            <a:off x="914400" y="1801368"/>
-            <a:ext cx="4846320" cy="4251959"/>
+            <a:off x="914400" y="1783080"/>
+            <a:ext cx="4846320" cy="4279392"/>
           </a:xfrm>
           <a:prstGeom prst="rect">
             <a:avLst/>
@@ -11318,7 +11448,7 @@
           <a:lstStyle/>
           <a:p>
             <a:pPr algn="l">
-              <a:defRPr sz="1000">
+              <a:defRPr sz="919">
                 <a:solidFill>
                   <a:srgbClr val="94A3B8"/>
                 </a:solidFill>
@@ -11331,7 +11461,20 @@
           </a:p>
           <a:p>
             <a:pPr algn="l">
-              <a:defRPr sz="1000">
+              <a:defRPr sz="919">
+                <a:solidFill>
+                  <a:srgbClr val="94A3B8"/>
+                </a:solidFill>
+                <a:latin typeface="Consolas"/>
+              </a:defRPr>
+            </a:pPr>
+            <a:r>
+              <a:t>// استطلاع دوري لحالة الحجز بالخلفية لاقتناص تأكيد الصيدلي فوراً</a:t>
+            </a:r>
+          </a:p>
+          <a:p>
+            <a:pPr algn="l">
+              <a:defRPr sz="919">
                 <a:solidFill>
                   <a:srgbClr val="38BDF8"/>
                 </a:solidFill>
@@ -11344,7 +11487,7 @@
           </a:p>
           <a:p>
             <a:pPr algn="l">
-              <a:defRPr sz="1000">
+              <a:defRPr sz="919">
                 <a:solidFill>
                   <a:srgbClr val="F472B6"/>
                 </a:solidFill>
@@ -11357,7 +11500,20 @@
           </a:p>
           <a:p>
             <a:pPr algn="l">
-              <a:defRPr sz="1000">
+              <a:defRPr sz="919">
+                <a:solidFill>
+                  <a:srgbClr val="94A3B8"/>
+                </a:solidFill>
+                <a:latin typeface="Consolas"/>
+              </a:defRPr>
+            </a:pPr>
+            <a:r>
+              <a:t>    // استعلام الخادم عن الحالة الحالية للتذكرة بواسطة كود الحجز</a:t>
+            </a:r>
+          </a:p>
+          <a:p>
+            <a:pPr algn="l">
+              <a:defRPr sz="919">
                 <a:solidFill>
                   <a:srgbClr val="F472B6"/>
                 </a:solidFill>
@@ -11370,7 +11526,7 @@
           </a:p>
           <a:p>
             <a:pPr algn="l">
-              <a:defRPr sz="1000">
+              <a:defRPr sz="919">
                 <a:solidFill>
                   <a:srgbClr val="38BDF8"/>
                 </a:solidFill>
@@ -11383,17 +11539,17 @@
           </a:p>
           <a:p>
             <a:pPr algn="l">
-              <a:defRPr sz="1000">
-                <a:solidFill>
-                  <a:srgbClr val="38BDF8"/>
-                </a:solidFill>
-                <a:latin typeface="Consolas"/>
-              </a:defRPr>
-            </a:pPr>
-          </a:p>
-          <a:p>
-            <a:pPr algn="l">
-              <a:defRPr sz="1000">
+              <a:defRPr sz="919">
+                <a:solidFill>
+                  <a:srgbClr val="38BDF8"/>
+                </a:solidFill>
+                <a:latin typeface="Consolas"/>
+              </a:defRPr>
+            </a:pPr>
+          </a:p>
+          <a:p>
+            <a:pPr algn="l">
+              <a:defRPr sz="919">
                 <a:solidFill>
                   <a:srgbClr val="F472B6"/>
                 </a:solidFill>
@@ -11406,7 +11562,20 @@
           </a:p>
           <a:p>
             <a:pPr algn="l">
-              <a:defRPr sz="1000">
+              <a:defRPr sz="919">
+                <a:solidFill>
+                  <a:srgbClr val="94A3B8"/>
+                </a:solidFill>
+                <a:latin typeface="Consolas"/>
+              </a:defRPr>
+            </a:pPr>
+            <a:r>
+              <a:t>      // التحقق مما إذا تم تأكيد تسليم الدواء بالويب</a:t>
+            </a:r>
+          </a:p>
+          <a:p>
+            <a:pPr algn="l">
+              <a:defRPr sz="919">
                 <a:solidFill>
                   <a:srgbClr val="38BDF8"/>
                 </a:solidFill>
@@ -11419,7 +11588,7 @@
           </a:p>
           <a:p>
             <a:pPr algn="l">
-              <a:defRPr sz="1000">
+              <a:defRPr sz="919">
                 <a:solidFill>
                   <a:srgbClr val="38BDF8"/>
                 </a:solidFill>
@@ -11432,7 +11601,7 @@
           </a:p>
           <a:p>
             <a:pPr algn="l">
-              <a:defRPr sz="1000">
+              <a:defRPr sz="919">
                 <a:solidFill>
                   <a:srgbClr val="38BDF8"/>
                 </a:solidFill>
@@ -11445,20 +11614,20 @@
           </a:p>
           <a:p>
             <a:pPr algn="l">
-              <a:defRPr sz="1000">
-                <a:solidFill>
-                  <a:srgbClr val="38BDF8"/>
-                </a:solidFill>
-                <a:latin typeface="Consolas"/>
-              </a:defRPr>
-            </a:pPr>
-            <a:r>
-              <a:t>        _reservation = fresh;</a:t>
-            </a:r>
-          </a:p>
-          <a:p>
-            <a:pPr algn="l">
-              <a:defRPr sz="1000">
+              <a:defRPr sz="919">
+                <a:solidFill>
+                  <a:srgbClr val="38BDF8"/>
+                </a:solidFill>
+                <a:latin typeface="Consolas"/>
+              </a:defRPr>
+            </a:pPr>
+            <a:r>
+              <a:t>        _reservation = fresh; // تحديث التذكرة في واجهة المريض</a:t>
+            </a:r>
+          </a:p>
+          <a:p>
+            <a:pPr algn="l">
+              <a:defRPr sz="919">
                 <a:solidFill>
                   <a:srgbClr val="38BDF8"/>
                 </a:solidFill>
@@ -11471,7 +11640,7 @@
           </a:p>
           <a:p>
             <a:pPr algn="l">
-              <a:defRPr sz="1000">
+              <a:defRPr sz="919">
                 <a:solidFill>
                   <a:srgbClr val="38BDF8"/>
                 </a:solidFill>
@@ -11484,7 +11653,7 @@
           </a:p>
           <a:p>
             <a:pPr algn="l">
-              <a:defRPr sz="1000">
+              <a:defRPr sz="919">
                 <a:solidFill>
                   <a:srgbClr val="F472B6"/>
                 </a:solidFill>
@@ -11497,46 +11666,46 @@
           </a:p>
           <a:p>
             <a:pPr algn="l">
-              <a:defRPr sz="1000">
-                <a:solidFill>
-                  <a:srgbClr val="38BDF8"/>
-                </a:solidFill>
-                <a:latin typeface="Consolas"/>
-              </a:defRPr>
-            </a:pPr>
-            <a:r>
-              <a:t>        t.cancel(); // إيقاف المؤقت</a:t>
-            </a:r>
-          </a:p>
-          <a:p>
-            <a:pPr algn="l">
-              <a:defRPr sz="1000">
-                <a:solidFill>
-                  <a:srgbClr val="38BDF8"/>
-                </a:solidFill>
-                <a:latin typeface="Consolas"/>
-              </a:defRPr>
-            </a:pPr>
-            <a:r>
-              <a:t>        HapticFeedback.heavyImpact();</a:t>
-            </a:r>
-          </a:p>
-          <a:p>
-            <a:pPr algn="l">
-              <a:defRPr sz="1000">
-                <a:solidFill>
-                  <a:srgbClr val="38BDF8"/>
-                </a:solidFill>
-                <a:latin typeface="Consolas"/>
-              </a:defRPr>
-            </a:pPr>
-            <a:r>
-              <a:t>        _showSuccessBadge(); // شارة الاستلام الخضراء</a:t>
-            </a:r>
-          </a:p>
-          <a:p>
-            <a:pPr algn="l">
-              <a:defRPr sz="1000">
+              <a:defRPr sz="919">
+                <a:solidFill>
+                  <a:srgbClr val="38BDF8"/>
+                </a:solidFill>
+                <a:latin typeface="Consolas"/>
+              </a:defRPr>
+            </a:pPr>
+            <a:r>
+              <a:t>        t.cancel(); // إيقاف الاستطلاع لتوفير الموارد</a:t>
+            </a:r>
+          </a:p>
+          <a:p>
+            <a:pPr algn="l">
+              <a:defRPr sz="919">
+                <a:solidFill>
+                  <a:srgbClr val="38BDF8"/>
+                </a:solidFill>
+                <a:latin typeface="Consolas"/>
+              </a:defRPr>
+            </a:pPr>
+            <a:r>
+              <a:t>        HapticFeedback.heavyImpact(); // اهتزاز تفاعلي</a:t>
+            </a:r>
+          </a:p>
+          <a:p>
+            <a:pPr algn="l">
+              <a:defRPr sz="919">
+                <a:solidFill>
+                  <a:srgbClr val="38BDF8"/>
+                </a:solidFill>
+                <a:latin typeface="Consolas"/>
+              </a:defRPr>
+            </a:pPr>
+            <a:r>
+              <a:t>        _showSuccessBadge(); // إظهار شارة الاستلام الخضراء</a:t>
+            </a:r>
+          </a:p>
+          <a:p>
+            <a:pPr algn="l">
+              <a:defRPr sz="919">
                 <a:solidFill>
                   <a:srgbClr val="38BDF8"/>
                 </a:solidFill>
@@ -11549,7 +11718,7 @@
           </a:p>
           <a:p>
             <a:pPr algn="l">
-              <a:defRPr sz="1000">
+              <a:defRPr sz="919">
                 <a:solidFill>
                   <a:srgbClr val="38BDF8"/>
                 </a:solidFill>
@@ -11562,7 +11731,7 @@
           </a:p>
           <a:p>
             <a:pPr algn="l">
-              <a:defRPr sz="1000">
+              <a:defRPr sz="919">
                 <a:solidFill>
                   <a:srgbClr val="38BDF8"/>
                 </a:solidFill>
@@ -11575,7 +11744,7 @@
           </a:p>
           <a:p>
             <a:pPr algn="l">
-              <a:defRPr sz="1000">
+              <a:defRPr sz="919">
                 <a:solidFill>
                   <a:srgbClr val="38BDF8"/>
                 </a:solidFill>
@@ -11677,8 +11846,8 @@
         </p:nvSpPr>
         <p:spPr>
           <a:xfrm>
-            <a:off x="6400800" y="1801368"/>
-            <a:ext cx="4846320" cy="4251959"/>
+            <a:off x="6400800" y="1783080"/>
+            <a:ext cx="4846320" cy="4279392"/>
           </a:xfrm>
           <a:prstGeom prst="rect">
             <a:avLst/>
@@ -11692,7 +11861,7 @@
           <a:lstStyle/>
           <a:p>
             <a:pPr algn="l">
-              <a:defRPr sz="1000">
+              <a:defRPr sz="919">
                 <a:solidFill>
                   <a:srgbClr val="94A3B8"/>
                 </a:solidFill>
@@ -11705,7 +11874,20 @@
           </a:p>
           <a:p>
             <a:pPr algn="l">
-              <a:defRPr sz="1000">
+              <a:defRPr sz="919">
+                <a:solidFill>
+                  <a:srgbClr val="94A3B8"/>
+                </a:solidFill>
+                <a:latin typeface="Consolas"/>
+              </a:defRPr>
+            </a:pPr>
+            <a:r>
+              <a:t>// فحص دوري كل 5 ثوانٍ لتحديث جدول الحجوزات دون إعادة تحميل الصفحة</a:t>
+            </a:r>
+          </a:p>
+          <a:p>
+            <a:pPr algn="l">
+              <a:defRPr sz="919">
                 <a:solidFill>
                   <a:srgbClr val="F472B6"/>
                 </a:solidFill>
@@ -11718,7 +11900,7 @@
           </a:p>
           <a:p>
             <a:pPr algn="l">
-              <a:defRPr sz="1000">
+              <a:defRPr sz="919">
                 <a:solidFill>
                   <a:srgbClr val="F472B6"/>
                 </a:solidFill>
@@ -11731,7 +11913,20 @@
           </a:p>
           <a:p>
             <a:pPr algn="l">
-              <a:defRPr sz="1000">
+              <a:defRPr sz="919">
+                <a:solidFill>
+                  <a:srgbClr val="94A3B8"/>
+                </a:solidFill>
+                <a:latin typeface="Consolas"/>
+              </a:defRPr>
+            </a:pPr>
+            <a:r>
+              <a:t>        // 1. جلب شريحة الـ HTML المحدثة للحجوزات الواردة من السيرفر</a:t>
+            </a:r>
+          </a:p>
+          <a:p>
+            <a:pPr algn="l">
+              <a:defRPr sz="919">
                 <a:solidFill>
                   <a:srgbClr val="F472B6"/>
                 </a:solidFill>
@@ -11744,7 +11939,7 @@
           </a:p>
           <a:p>
             <a:pPr algn="l">
-              <a:defRPr sz="1000">
+              <a:defRPr sz="919">
                 <a:solidFill>
                   <a:srgbClr val="F472B6"/>
                 </a:solidFill>
@@ -11757,7 +11952,7 @@
           </a:p>
           <a:p>
             <a:pPr algn="l">
-              <a:defRPr sz="1000">
+              <a:defRPr sz="919">
                 <a:solidFill>
                   <a:srgbClr val="F472B6"/>
                 </a:solidFill>
@@ -11770,7 +11965,7 @@
           </a:p>
           <a:p>
             <a:pPr algn="l">
-              <a:defRPr sz="1000">
+              <a:defRPr sz="919">
                 <a:solidFill>
                   <a:srgbClr val="38BDF8"/>
                 </a:solidFill>
@@ -11783,7 +11978,7 @@
           </a:p>
           <a:p>
             <a:pPr algn="l">
-              <a:defRPr sz="1000">
+              <a:defRPr sz="919">
                 <a:solidFill>
                   <a:srgbClr val="38BDF8"/>
                 </a:solidFill>
@@ -11796,7 +11991,7 @@
           </a:p>
           <a:p>
             <a:pPr algn="l">
-              <a:defRPr sz="1000">
+              <a:defRPr sz="919">
                 <a:solidFill>
                   <a:srgbClr val="38BDF8"/>
                 </a:solidFill>
@@ -11809,7 +12004,7 @@
           </a:p>
           <a:p>
             <a:pPr algn="l">
-              <a:defRPr sz="1000">
+              <a:defRPr sz="919">
                 <a:solidFill>
                   <a:srgbClr val="38BDF8"/>
                 </a:solidFill>
@@ -11822,7 +12017,20 @@
           </a:p>
           <a:p>
             <a:pPr algn="l">
-              <a:defRPr sz="1000">
+              <a:defRPr sz="919">
+                <a:solidFill>
+                  <a:srgbClr val="94A3B8"/>
+                </a:solidFill>
+                <a:latin typeface="Consolas"/>
+              </a:defRPr>
+            </a:pPr>
+            <a:r>
+              <a:t>            // 2. تحديث DOM فقط في حال وجود حجز جديد أو تغيير حالة</a:t>
+            </a:r>
+          </a:p>
+          <a:p>
+            <a:pPr algn="l">
+              <a:defRPr sz="919">
                 <a:solidFill>
                   <a:srgbClr val="F472B6"/>
                 </a:solidFill>
@@ -11835,7 +12043,7 @@
           </a:p>
           <a:p>
             <a:pPr algn="l">
-              <a:defRPr sz="1000">
+              <a:defRPr sz="919">
                 <a:solidFill>
                   <a:srgbClr val="38BDF8"/>
                 </a:solidFill>
@@ -11848,7 +12056,7 @@
           </a:p>
           <a:p>
             <a:pPr algn="l">
-              <a:defRPr sz="1000">
+              <a:defRPr sz="919">
                 <a:solidFill>
                   <a:srgbClr val="38BDF8"/>
                 </a:solidFill>
@@ -11861,7 +12069,7 @@
           </a:p>
           <a:p>
             <a:pPr algn="l">
-              <a:defRPr sz="1000">
+              <a:defRPr sz="919">
                 <a:solidFill>
                   <a:srgbClr val="38BDF8"/>
                 </a:solidFill>
@@ -11874,7 +12082,7 @@
           </a:p>
           <a:p>
             <a:pPr algn="l">
-              <a:defRPr sz="1000">
+              <a:defRPr sz="919">
                 <a:solidFill>
                   <a:srgbClr val="F472B6"/>
                 </a:solidFill>
@@ -11887,20 +12095,20 @@
           </a:p>
           <a:p>
             <a:pPr algn="l">
-              <a:defRPr sz="1000">
-                <a:solidFill>
-                  <a:srgbClr val="38BDF8"/>
-                </a:solidFill>
-                <a:latin typeface="Consolas"/>
-              </a:defRPr>
-            </a:pPr>
-            <a:r>
-              <a:t>        console.warn('Auto-sync check failed:', err);</a:t>
-            </a:r>
-          </a:p>
-          <a:p>
-            <a:pPr algn="l">
-              <a:defRPr sz="1000">
+              <a:defRPr sz="919">
+                <a:solidFill>
+                  <a:srgbClr val="38BDF8"/>
+                </a:solidFill>
+                <a:latin typeface="Consolas"/>
+              </a:defRPr>
+            </a:pPr>
+            <a:r>
+              <a:t>        console.warn('Auto-sync check failed:', err); // معالجة صامتة</a:t>
+            </a:r>
+          </a:p>
+          <a:p>
+            <a:pPr algn="l">
+              <a:defRPr sz="919">
                 <a:solidFill>
                   <a:srgbClr val="38BDF8"/>
                 </a:solidFill>
@@ -11913,7 +12121,7 @@
           </a:p>
           <a:p>
             <a:pPr algn="l">
-              <a:defRPr sz="1000">
+              <a:defRPr sz="919">
                 <a:solidFill>
                   <a:srgbClr val="38BDF8"/>
                 </a:solidFill>
@@ -11926,15 +12134,15 @@
           </a:p>
           <a:p>
             <a:pPr algn="l">
-              <a:defRPr sz="1000">
-                <a:solidFill>
-                  <a:srgbClr val="38BDF8"/>
-                </a:solidFill>
-                <a:latin typeface="Consolas"/>
-              </a:defRPr>
-            </a:pPr>
-            <a:r>
-              <a:t>setInterval(fetchLatestReservations, 5000); // كل 5 ثوانٍ</a:t>
+              <a:defRPr sz="919">
+                <a:solidFill>
+                  <a:srgbClr val="38BDF8"/>
+                </a:solidFill>
+                <a:latin typeface="Consolas"/>
+              </a:defRPr>
+            </a:pPr>
+            <a:r>
+              <a:t>setInterval(fetchLatestReservations, 5000); // تكرار الفحص دورياً</a:t>
             </a:r>
           </a:p>
         </p:txBody>
@@ -12242,8 +12450,8 @@
         </p:nvSpPr>
         <p:spPr>
           <a:xfrm>
-            <a:off x="914400" y="1801368"/>
-            <a:ext cx="4846320" cy="4251959"/>
+            <a:off x="914400" y="1783080"/>
+            <a:ext cx="4846320" cy="4279392"/>
           </a:xfrm>
           <a:prstGeom prst="rect">
             <a:avLst/>
@@ -12257,7 +12465,7 @@
           <a:lstStyle/>
           <a:p>
             <a:pPr algn="l">
-              <a:defRPr sz="1000">
+              <a:defRPr sz="919">
                 <a:solidFill>
                   <a:srgbClr val="94A3B8"/>
                 </a:solidFill>
@@ -12270,7 +12478,7 @@
           </a:p>
           <a:p>
             <a:pPr algn="l">
-              <a:defRPr sz="1000">
+              <a:defRPr sz="919">
                 <a:solidFill>
                   <a:srgbClr val="94A3B8"/>
                 </a:solidFill>
@@ -12283,7 +12491,20 @@
           </a:p>
           <a:p>
             <a:pPr algn="l">
-              <a:defRPr sz="1000">
+              <a:defRPr sz="919">
+                <a:solidFill>
+                  <a:srgbClr val="94A3B8"/>
+                </a:solidFill>
+                <a:latin typeface="Consolas"/>
+              </a:defRPr>
+            </a:pPr>
+            <a:r>
+              <a:t>// حمولة مزامنة المخزون والأسعار الواردة من برنامج محاسبة الصيدلية</a:t>
+            </a:r>
+          </a:p>
+          <a:p>
+            <a:pPr algn="l">
+              <a:defRPr sz="919">
                 <a:solidFill>
                   <a:srgbClr val="38BDF8"/>
                 </a:solidFill>
@@ -12296,7 +12517,7 @@
           </a:p>
           <a:p>
             <a:pPr algn="l">
-              <a:defRPr sz="1000">
+              <a:defRPr sz="919">
                 <a:solidFill>
                   <a:srgbClr val="38BDF8"/>
                 </a:solidFill>
@@ -12309,7 +12530,7 @@
           </a:p>
           <a:p>
             <a:pPr algn="l">
-              <a:defRPr sz="1000">
+              <a:defRPr sz="919">
                 <a:solidFill>
                   <a:srgbClr val="38BDF8"/>
                 </a:solidFill>
@@ -12322,46 +12543,46 @@
           </a:p>
           <a:p>
             <a:pPr algn="l">
-              <a:defRPr sz="1000">
-                <a:solidFill>
-                  <a:srgbClr val="38BDF8"/>
-                </a:solidFill>
-                <a:latin typeface="Consolas"/>
-              </a:defRPr>
-            </a:pPr>
-            <a:r>
-              <a:t>      "barcode": "6291100123456",</a:t>
-            </a:r>
-          </a:p>
-          <a:p>
-            <a:pPr algn="l">
-              <a:defRPr sz="1000">
-                <a:solidFill>
-                  <a:srgbClr val="38BDF8"/>
-                </a:solidFill>
-                <a:latin typeface="Consolas"/>
-              </a:defRPr>
-            </a:pPr>
-            <a:r>
-              <a:t>      "quantity": 25,</a:t>
-            </a:r>
-          </a:p>
-          <a:p>
-            <a:pPr algn="l">
-              <a:defRPr sz="1000">
-                <a:solidFill>
-                  <a:srgbClr val="38BDF8"/>
-                </a:solidFill>
-                <a:latin typeface="Consolas"/>
-              </a:defRPr>
-            </a:pPr>
-            <a:r>
-              <a:t>      "price": 1200.00</a:t>
-            </a:r>
-          </a:p>
-          <a:p>
-            <a:pPr algn="l">
-              <a:defRPr sz="1000">
+              <a:defRPr sz="919">
+                <a:solidFill>
+                  <a:srgbClr val="38BDF8"/>
+                </a:solidFill>
+                <a:latin typeface="Consolas"/>
+              </a:defRPr>
+            </a:pPr>
+            <a:r>
+              <a:t>      "barcode": "6291100123456", // باركود الصنف الدوائي</a:t>
+            </a:r>
+          </a:p>
+          <a:p>
+            <a:pPr algn="l">
+              <a:defRPr sz="919">
+                <a:solidFill>
+                  <a:srgbClr val="38BDF8"/>
+                </a:solidFill>
+                <a:latin typeface="Consolas"/>
+              </a:defRPr>
+            </a:pPr>
+            <a:r>
+              <a:t>      "quantity": 25,              // الكمية الجديدة بالمخزون</a:t>
+            </a:r>
+          </a:p>
+          <a:p>
+            <a:pPr algn="l">
+              <a:defRPr sz="919">
+                <a:solidFill>
+                  <a:srgbClr val="38BDF8"/>
+                </a:solidFill>
+                <a:latin typeface="Consolas"/>
+              </a:defRPr>
+            </a:pPr>
+            <a:r>
+              <a:t>      "price": 1200.00             // السعر الفعلي بالريال</a:t>
+            </a:r>
+          </a:p>
+          <a:p>
+            <a:pPr algn="l">
+              <a:defRPr sz="919">
                 <a:solidFill>
                   <a:srgbClr val="38BDF8"/>
                 </a:solidFill>
@@ -12374,7 +12595,7 @@
           </a:p>
           <a:p>
             <a:pPr algn="l">
-              <a:defRPr sz="1000">
+              <a:defRPr sz="919">
                 <a:solidFill>
                   <a:srgbClr val="38BDF8"/>
                 </a:solidFill>
@@ -12387,7 +12608,7 @@
           </a:p>
           <a:p>
             <a:pPr algn="l">
-              <a:defRPr sz="1000">
+              <a:defRPr sz="919">
                 <a:solidFill>
                   <a:srgbClr val="38BDF8"/>
                 </a:solidFill>
@@ -12400,7 +12621,7 @@
           </a:p>
           <a:p>
             <a:pPr algn="l">
-              <a:defRPr sz="1000">
+              <a:defRPr sz="919">
                 <a:solidFill>
                   <a:srgbClr val="38BDF8"/>
                 </a:solidFill>
@@ -12413,7 +12634,7 @@
           </a:p>
           <a:p>
             <a:pPr algn="l">
-              <a:defRPr sz="1000">
+              <a:defRPr sz="919">
                 <a:solidFill>
                   <a:srgbClr val="38BDF8"/>
                 </a:solidFill>
@@ -12426,7 +12647,7 @@
           </a:p>
           <a:p>
             <a:pPr algn="l">
-              <a:defRPr sz="1000">
+              <a:defRPr sz="919">
                 <a:solidFill>
                   <a:srgbClr val="38BDF8"/>
                 </a:solidFill>
@@ -12439,7 +12660,7 @@
           </a:p>
           <a:p>
             <a:pPr algn="l">
-              <a:defRPr sz="1000">
+              <a:defRPr sz="919">
                 <a:solidFill>
                   <a:srgbClr val="38BDF8"/>
                 </a:solidFill>
@@ -12452,7 +12673,7 @@
           </a:p>
           <a:p>
             <a:pPr algn="l">
-              <a:defRPr sz="1000">
+              <a:defRPr sz="919">
                 <a:solidFill>
                   <a:srgbClr val="38BDF8"/>
                 </a:solidFill>
@@ -12465,17 +12686,17 @@
           </a:p>
           <a:p>
             <a:pPr algn="l">
-              <a:defRPr sz="1000">
-                <a:solidFill>
-                  <a:srgbClr val="38BDF8"/>
-                </a:solidFill>
-                <a:latin typeface="Consolas"/>
-              </a:defRPr>
-            </a:pPr>
-          </a:p>
-          <a:p>
-            <a:pPr algn="l">
-              <a:defRPr sz="1000">
+              <a:defRPr sz="919">
+                <a:solidFill>
+                  <a:srgbClr val="38BDF8"/>
+                </a:solidFill>
+                <a:latin typeface="Consolas"/>
+              </a:defRPr>
+            </a:pPr>
+          </a:p>
+          <a:p>
+            <a:pPr algn="l">
+              <a:defRPr sz="919">
                 <a:solidFill>
                   <a:srgbClr val="94A3B8"/>
                 </a:solidFill>
@@ -12483,12 +12704,12 @@
               </a:defRPr>
             </a:pPr>
             <a:r>
-              <a:t>// الاستجابة الفورية:</a:t>
-            </a:r>
-          </a:p>
-          <a:p>
-            <a:pPr algn="l">
-              <a:defRPr sz="1000">
+              <a:t>// استجابة الخادم الفورية بنجاح المزامنة وتحديث الرصيد السحابي:</a:t>
+            </a:r>
+          </a:p>
+          <a:p>
+            <a:pPr algn="l">
+              <a:defRPr sz="919">
                 <a:solidFill>
                   <a:srgbClr val="38BDF8"/>
                 </a:solidFill>
@@ -12501,7 +12722,7 @@
           </a:p>
           <a:p>
             <a:pPr algn="l">
-              <a:defRPr sz="1000">
+              <a:defRPr sz="919">
                 <a:solidFill>
                   <a:srgbClr val="38BDF8"/>
                 </a:solidFill>
@@ -12514,7 +12735,7 @@
           </a:p>
           <a:p>
             <a:pPr algn="l">
-              <a:defRPr sz="1000">
+              <a:defRPr sz="919">
                 <a:solidFill>
                   <a:srgbClr val="38BDF8"/>
                 </a:solidFill>
@@ -12527,7 +12748,7 @@
           </a:p>
           <a:p>
             <a:pPr algn="l">
-              <a:defRPr sz="1000">
+              <a:defRPr sz="919">
                 <a:solidFill>
                   <a:srgbClr val="38BDF8"/>
                 </a:solidFill>
@@ -12540,7 +12761,7 @@
           </a:p>
           <a:p>
             <a:pPr algn="l">
-              <a:defRPr sz="1000">
+              <a:defRPr sz="919">
                 <a:solidFill>
                   <a:srgbClr val="38BDF8"/>
                 </a:solidFill>
@@ -12642,8 +12863,8 @@
         </p:nvSpPr>
         <p:spPr>
           <a:xfrm>
-            <a:off x="6400800" y="1801368"/>
-            <a:ext cx="4846320" cy="4251959"/>
+            <a:off x="6400800" y="1783080"/>
+            <a:ext cx="4846320" cy="4279392"/>
           </a:xfrm>
           <a:prstGeom prst="rect">
             <a:avLst/>
@@ -12657,7 +12878,7 @@
           <a:lstStyle/>
           <a:p>
             <a:pPr algn="l">
-              <a:defRPr sz="1000">
+              <a:defRPr sz="919">
                 <a:solidFill>
                   <a:srgbClr val="94A3B8"/>
                 </a:solidFill>
@@ -12670,7 +12891,20 @@
           </a:p>
           <a:p>
             <a:pPr algn="l">
-              <a:defRPr sz="1000">
+              <a:defRPr sz="919">
+                <a:solidFill>
+                  <a:srgbClr val="94A3B8"/>
+                </a:solidFill>
+                <a:latin typeface="Consolas"/>
+              </a:defRPr>
+            </a:pPr>
+            <a:r>
+              <a:t>// دالة معالجة المزامنة الدورية للمخزون من أنظمة الـ ERP ونقاط البيع</a:t>
+            </a:r>
+          </a:p>
+          <a:p>
+            <a:pPr algn="l">
+              <a:defRPr sz="919">
                 <a:solidFill>
                   <a:srgbClr val="F472B6"/>
                 </a:solidFill>
@@ -12683,20 +12917,20 @@
           </a:p>
           <a:p>
             <a:pPr algn="l">
-              <a:defRPr sz="1000">
-                <a:solidFill>
-                  <a:srgbClr val="38BDF8"/>
-                </a:solidFill>
-                <a:latin typeface="Consolas"/>
-              </a:defRPr>
-            </a:pPr>
-            <a:r>
-              <a:t>    $pharmacy = $this-&gt;resolvePharmacy($request);</a:t>
-            </a:r>
-          </a:p>
-          <a:p>
-            <a:pPr algn="l">
-              <a:defRPr sz="1000">
+              <a:defRPr sz="919">
+                <a:solidFill>
+                  <a:srgbClr val="38BDF8"/>
+                </a:solidFill>
+                <a:latin typeface="Consolas"/>
+              </a:defRPr>
+            </a:pPr>
+            <a:r>
+              <a:t>    $pharmacy = $this-&gt;resolvePharmacy($request); // استخراج هوية الصيدلية</a:t>
+            </a:r>
+          </a:p>
+          <a:p>
+            <a:pPr algn="l">
+              <a:defRPr sz="919">
                 <a:solidFill>
                   <a:srgbClr val="38BDF8"/>
                 </a:solidFill>
@@ -12709,7 +12943,7 @@
           </a:p>
           <a:p>
             <a:pPr algn="l">
-              <a:defRPr sz="1000">
+              <a:defRPr sz="919">
                 <a:solidFill>
                   <a:srgbClr val="38BDF8"/>
                 </a:solidFill>
@@ -12722,7 +12956,7 @@
           </a:p>
           <a:p>
             <a:pPr algn="l">
-              <a:defRPr sz="1000">
+              <a:defRPr sz="919">
                 <a:solidFill>
                   <a:srgbClr val="38BDF8"/>
                 </a:solidFill>
@@ -12735,7 +12969,7 @@
           </a:p>
           <a:p>
             <a:pPr algn="l">
-              <a:defRPr sz="1000">
+              <a:defRPr sz="919">
                 <a:solidFill>
                   <a:srgbClr val="38BDF8"/>
                 </a:solidFill>
@@ -12748,7 +12982,7 @@
           </a:p>
           <a:p>
             <a:pPr algn="l">
-              <a:defRPr sz="1000">
+              <a:defRPr sz="919">
                 <a:solidFill>
                   <a:srgbClr val="38BDF8"/>
                 </a:solidFill>
@@ -12761,7 +12995,7 @@
           </a:p>
           <a:p>
             <a:pPr algn="l">
-              <a:defRPr sz="1000">
+              <a:defRPr sz="919">
                 <a:solidFill>
                   <a:srgbClr val="38BDF8"/>
                 </a:solidFill>
@@ -12774,17 +13008,30 @@
           </a:p>
           <a:p>
             <a:pPr algn="l">
-              <a:defRPr sz="1000">
-                <a:solidFill>
-                  <a:srgbClr val="38BDF8"/>
-                </a:solidFill>
-                <a:latin typeface="Consolas"/>
-              </a:defRPr>
-            </a:pPr>
-          </a:p>
-          <a:p>
-            <a:pPr algn="l">
-              <a:defRPr sz="1000">
+              <a:defRPr sz="919">
+                <a:solidFill>
+                  <a:srgbClr val="38BDF8"/>
+                </a:solidFill>
+                <a:latin typeface="Consolas"/>
+              </a:defRPr>
+            </a:pPr>
+          </a:p>
+          <a:p>
+            <a:pPr algn="l">
+              <a:defRPr sz="919">
+                <a:solidFill>
+                  <a:srgbClr val="94A3B8"/>
+                </a:solidFill>
+                <a:latin typeface="Consolas"/>
+              </a:defRPr>
+            </a:pPr>
+            <a:r>
+              <a:t>    // معالجة كل صنف وتحديث كميته وسعره بالسجلات السحابية</a:t>
+            </a:r>
+          </a:p>
+          <a:p>
+            <a:pPr algn="l">
+              <a:defRPr sz="919">
                 <a:solidFill>
                   <a:srgbClr val="38BDF8"/>
                 </a:solidFill>
@@ -12797,7 +13044,7 @@
           </a:p>
           <a:p>
             <a:pPr algn="l">
-              <a:defRPr sz="1000">
+              <a:defRPr sz="919">
                 <a:solidFill>
                   <a:srgbClr val="38BDF8"/>
                 </a:solidFill>
@@ -12810,7 +13057,7 @@
           </a:p>
           <a:p>
             <a:pPr algn="l">
-              <a:defRPr sz="1000">
+              <a:defRPr sz="919">
                 <a:solidFill>
                   <a:srgbClr val="F472B6"/>
                 </a:solidFill>
@@ -12823,7 +13070,7 @@
           </a:p>
           <a:p>
             <a:pPr algn="l">
-              <a:defRPr sz="1000">
+              <a:defRPr sz="919">
                 <a:solidFill>
                   <a:srgbClr val="38BDF8"/>
                 </a:solidFill>
@@ -12836,7 +13083,7 @@
           </a:p>
           <a:p>
             <a:pPr algn="l">
-              <a:defRPr sz="1000">
+              <a:defRPr sz="919">
                 <a:solidFill>
                   <a:srgbClr val="38BDF8"/>
                 </a:solidFill>
@@ -12849,7 +13096,7 @@
           </a:p>
           <a:p>
             <a:pPr algn="l">
-              <a:defRPr sz="1000">
+              <a:defRPr sz="919">
                 <a:solidFill>
                   <a:srgbClr val="38BDF8"/>
                 </a:solidFill>
@@ -12862,7 +13109,7 @@
           </a:p>
           <a:p>
             <a:pPr algn="l">
-              <a:defRPr sz="1000">
+              <a:defRPr sz="919">
                 <a:solidFill>
                   <a:srgbClr val="38BDF8"/>
                 </a:solidFill>
@@ -12875,7 +13122,7 @@
           </a:p>
           <a:p>
             <a:pPr algn="l">
-              <a:defRPr sz="1000">
+              <a:defRPr sz="919">
                 <a:solidFill>
                   <a:srgbClr val="38BDF8"/>
                 </a:solidFill>
@@ -12888,7 +13135,7 @@
           </a:p>
           <a:p>
             <a:pPr algn="l">
-              <a:defRPr sz="1000">
+              <a:defRPr sz="919">
                 <a:solidFill>
                   <a:srgbClr val="38BDF8"/>
                 </a:solidFill>
@@ -12901,7 +13148,7 @@
           </a:p>
           <a:p>
             <a:pPr algn="l">
-              <a:defRPr sz="1000">
+              <a:defRPr sz="919">
                 <a:solidFill>
                   <a:srgbClr val="F472B6"/>
                 </a:solidFill>
@@ -12914,7 +13161,7 @@
           </a:p>
           <a:p>
             <a:pPr algn="l">
-              <a:defRPr sz="1000">
+              <a:defRPr sz="919">
                 <a:solidFill>
                   <a:srgbClr val="38BDF8"/>
                 </a:solidFill>
